--- a/20261002_サンクスLINEのご提案_事例入り.pptx
+++ b/20261002_サンクスLINEのご提案_事例入り.pptx
@@ -3088,9 +3088,7 @@
             <a:srgbClr val="FFFFFF"/>
           </a:solidFill>
           <a:ln w="19050">
-            <a:solidFill>
-              <a:srgbClr val="1F285A"/>
-            </a:solidFill>
+            <a:noFill/>
           </a:ln>
           <a:effectLst/>
         </p:spPr>
@@ -3101,7 +3099,7 @@
           <a:fillRef idx="3">
             <a:schemeClr val="accent1"/>
           </a:fillRef>
-          <a:effectRef idx="2">
+          <a:effectRef idx="0">
             <a:schemeClr val="accent1"/>
           </a:effectRef>
           <a:fontRef idx="minor">
@@ -3352,9 +3350,7 @@
             <a:srgbClr val="FFFFFF"/>
           </a:solidFill>
           <a:ln w="19050">
-            <a:solidFill>
-              <a:srgbClr val="1F285A"/>
-            </a:solidFill>
+            <a:noFill/>
           </a:ln>
           <a:effectLst/>
         </p:spPr>
@@ -3365,7 +3361,7 @@
           <a:fillRef idx="3">
             <a:schemeClr val="accent1"/>
           </a:fillRef>
-          <a:effectRef idx="2">
+          <a:effectRef idx="0">
             <a:schemeClr val="accent1"/>
           </a:effectRef>
           <a:fontRef idx="minor">
@@ -3616,9 +3612,7 @@
             <a:srgbClr val="FFFFFF"/>
           </a:solidFill>
           <a:ln w="19050">
-            <a:solidFill>
-              <a:srgbClr val="1F285A"/>
-            </a:solidFill>
+            <a:noFill/>
           </a:ln>
           <a:effectLst/>
         </p:spPr>
@@ -3629,7 +3623,7 @@
           <a:fillRef idx="3">
             <a:schemeClr val="accent1"/>
           </a:fillRef>
-          <a:effectRef idx="2">
+          <a:effectRef idx="0">
             <a:schemeClr val="accent1"/>
           </a:effectRef>
           <a:fontRef idx="minor">
@@ -4592,9 +4586,7 @@
             <a:srgbClr val="FFFFFF"/>
           </a:solidFill>
           <a:ln w="19050">
-            <a:solidFill>
-              <a:srgbClr val="1F285A"/>
-            </a:solidFill>
+            <a:noFill/>
           </a:ln>
           <a:effectLst/>
         </p:spPr>
@@ -4605,7 +4597,7 @@
           <a:fillRef idx="3">
             <a:schemeClr val="accent1"/>
           </a:fillRef>
-          <a:effectRef idx="2">
+          <a:effectRef idx="0">
             <a:schemeClr val="accent1"/>
           </a:effectRef>
           <a:fontRef idx="minor">
@@ -4843,9 +4835,7 @@
             <a:srgbClr val="FFFFFF"/>
           </a:solidFill>
           <a:ln w="19050">
-            <a:solidFill>
-              <a:srgbClr val="1F285A"/>
-            </a:solidFill>
+            <a:noFill/>
           </a:ln>
           <a:effectLst/>
         </p:spPr>
@@ -4856,7 +4846,7 @@
           <a:fillRef idx="3">
             <a:schemeClr val="accent1"/>
           </a:fillRef>
-          <a:effectRef idx="2">
+          <a:effectRef idx="0">
             <a:schemeClr val="accent1"/>
           </a:effectRef>
           <a:fontRef idx="minor">
@@ -5107,9 +5097,7 @@
             <a:srgbClr val="FFFFFF"/>
           </a:solidFill>
           <a:ln w="19050">
-            <a:solidFill>
-              <a:srgbClr val="1F285A"/>
-            </a:solidFill>
+            <a:noFill/>
           </a:ln>
           <a:effectLst/>
         </p:spPr>
@@ -5120,7 +5108,7 @@
           <a:fillRef idx="3">
             <a:schemeClr val="accent1"/>
           </a:fillRef>
-          <a:effectRef idx="2">
+          <a:effectRef idx="0">
             <a:schemeClr val="accent1"/>
           </a:effectRef>
           <a:fontRef idx="minor">
@@ -6088,9 +6076,7 @@
             <a:srgbClr val="FFFFFF"/>
           </a:solidFill>
           <a:ln w="19050">
-            <a:solidFill>
-              <a:srgbClr val="1F285A"/>
-            </a:solidFill>
+            <a:noFill/>
           </a:ln>
           <a:effectLst/>
         </p:spPr>
@@ -6101,7 +6087,7 @@
           <a:fillRef idx="3">
             <a:schemeClr val="accent1"/>
           </a:fillRef>
-          <a:effectRef idx="2">
+          <a:effectRef idx="0">
             <a:schemeClr val="accent1"/>
           </a:effectRef>
           <a:fontRef idx="minor">
@@ -6352,9 +6338,7 @@
             <a:srgbClr val="FFFFFF"/>
           </a:solidFill>
           <a:ln w="19050">
-            <a:solidFill>
-              <a:srgbClr val="1F285A"/>
-            </a:solidFill>
+            <a:noFill/>
           </a:ln>
           <a:effectLst/>
         </p:spPr>
@@ -6365,7 +6349,7 @@
           <a:fillRef idx="3">
             <a:schemeClr val="accent1"/>
           </a:fillRef>
-          <a:effectRef idx="2">
+          <a:effectRef idx="0">
             <a:schemeClr val="accent1"/>
           </a:effectRef>
           <a:fontRef idx="minor">
@@ -7351,9 +7335,7 @@
             <a:srgbClr val="FFFFFF"/>
           </a:solidFill>
           <a:ln w="19050">
-            <a:solidFill>
-              <a:srgbClr val="1F285A"/>
-            </a:solidFill>
+            <a:noFill/>
           </a:ln>
           <a:effectLst/>
         </p:spPr>
@@ -7364,7 +7346,7 @@
           <a:fillRef idx="3">
             <a:schemeClr val="accent1"/>
           </a:fillRef>
-          <a:effectRef idx="2">
+          <a:effectRef idx="0">
             <a:schemeClr val="accent1"/>
           </a:effectRef>
           <a:fontRef idx="minor">
@@ -7615,9 +7597,7 @@
             <a:srgbClr val="FFFFFF"/>
           </a:solidFill>
           <a:ln w="19050">
-            <a:solidFill>
-              <a:srgbClr val="1F285A"/>
-            </a:solidFill>
+            <a:noFill/>
           </a:ln>
           <a:effectLst/>
         </p:spPr>
@@ -7628,7 +7608,7 @@
           <a:fillRef idx="3">
             <a:schemeClr val="accent1"/>
           </a:fillRef>
-          <a:effectRef idx="2">
+          <a:effectRef idx="0">
             <a:schemeClr val="accent1"/>
           </a:effectRef>
           <a:fontRef idx="minor">

--- a/20261002_サンクスLINEのご提案_事例入り.pptx
+++ b/20261002_サンクスLINEのご提案_事例入り.pptx
@@ -3077,16 +3077,14 @@
         <p:spPr>
           <a:xfrm>
             <a:off x="1080000" y="2592000"/>
-            <a:ext cx="2484000" cy="2808000"/>
+            <a:ext cx="2484000" cy="1296000"/>
           </a:xfrm>
           <a:prstGeom prst="roundRect">
             <a:avLst>
               <a:gd name="adj" fmla="val 6000"/>
             </a:avLst>
           </a:prstGeom>
-          <a:solidFill>
-            <a:srgbClr val="FFFFFF"/>
-          </a:solidFill>
+          <a:noFill/>
           <a:ln w="19050">
             <a:noFill/>
           </a:ln>
@@ -3107,7 +3105,7 @@
           </a:fontRef>
         </p:style>
         <p:txBody>
-          <a:bodyPr wrap="square" lIns="144000" tIns="468000" rIns="144000" bIns="54000" rtlCol="0" anchor="t"/>
+          <a:bodyPr wrap="square" lIns="180000" tIns="72000" rIns="180000" bIns="36000" rtlCol="0" anchor="t"/>
           <a:lstStyle/>
           <a:p>
             <a:pPr algn="l">
@@ -3119,7 +3117,7 @@
               </a:spcAft>
             </a:pPr>
             <a:r>
-              <a:rPr sz="1300" b="1" dirty="0" err="1">
+              <a:rPr sz="1500" b="1" dirty="0" err="1">
                 <a:solidFill>
                   <a:srgbClr val="333333"/>
                 </a:solidFill>
@@ -3127,7 +3125,7 @@
                 <a:ea typeface="メイリオ"/>
                 <a:cs typeface="メイリオ"/>
               </a:rPr>
-              <a:t>保険見直し本舗</a:t>
+              <a:t>保険相談</a:t>
             </a:r>
             <a:endParaRPr sz="1250" b="1" dirty="0">
               <a:solidFill>
@@ -3144,106 +3142,19 @@
                 <a:spcPct val="130000"/>
               </a:lnSpc>
               <a:spcAft>
-                <a:spcPts val="800"/>
-              </a:spcAft>
-            </a:pPr>
-            <a:r>
-              <a:rPr sz="1200" b="0" dirty="0" err="1">
-                <a:solidFill>
-                  <a:srgbClr val="333333"/>
-                </a:solidFill>
-                <a:latin typeface="メイリオ"/>
-                <a:ea typeface="メイリオ"/>
-                <a:cs typeface="メイリオ"/>
-              </a:rPr>
-              <a:t>予約したのに、面談に来ない方がいる</a:t>
-            </a:r>
-            <a:endParaRPr sz="1250" b="1" dirty="0">
-              <a:solidFill>
-                <a:srgbClr val="1F285A"/>
-              </a:solidFill>
-              <a:latin typeface="メイリオ"/>
-              <a:ea typeface="メイリオ"/>
-              <a:cs typeface="メイリオ"/>
-            </a:endParaRPr>
-          </a:p>
-          <a:p>
-            <a:pPr algn="l">
-              <a:lnSpc>
-                <a:spcPct val="130000"/>
-              </a:lnSpc>
-              <a:spcAft>
-                <a:spcPts val="1000"/>
-              </a:spcAft>
-            </a:pPr>
-            <a:r>
-              <a:rPr sz="1200" b="0" dirty="0" err="1">
-                <a:solidFill>
-                  <a:srgbClr val="333333"/>
-                </a:solidFill>
-                <a:latin typeface="メイリオ"/>
-                <a:ea typeface="メイリオ"/>
-                <a:cs typeface="メイリオ"/>
-              </a:rPr>
-              <a:t>来店に至らない割合</a:t>
-            </a:r>
-            <a:endParaRPr sz="1250" b="1" dirty="0">
-              <a:solidFill>
-                <a:srgbClr val="1F285A"/>
-              </a:solidFill>
-              <a:latin typeface="メイリオ"/>
-              <a:ea typeface="メイリオ"/>
-              <a:cs typeface="メイリオ"/>
-            </a:endParaRPr>
-          </a:p>
-          <a:p>
-            <a:pPr algn="l">
-              <a:lnSpc>
-                <a:spcPct val="130000"/>
-              </a:lnSpc>
-              <a:spcAft>
-                <a:spcPts val="200"/>
-              </a:spcAft>
-            </a:pPr>
-            <a:r>
-              <a:rPr sz="2600" b="1" dirty="0" err="1">
-                <a:solidFill>
-                  <a:srgbClr val="1F285A"/>
-                </a:solidFill>
-                <a:latin typeface="メイリオ"/>
-                <a:ea typeface="メイリオ"/>
-                <a:cs typeface="メイリオ"/>
-              </a:rPr>
-              <a:t>2〜3割</a:t>
-            </a:r>
-            <a:endParaRPr sz="1250" b="1" dirty="0">
-              <a:solidFill>
-                <a:srgbClr val="1F285A"/>
-              </a:solidFill>
-              <a:latin typeface="メイリオ"/>
-              <a:ea typeface="メイリオ"/>
-              <a:cs typeface="メイリオ"/>
-            </a:endParaRPr>
-          </a:p>
-          <a:p>
-            <a:pPr algn="l">
-              <a:lnSpc>
-                <a:spcPct val="130000"/>
-              </a:lnSpc>
-              <a:spcAft>
                 <a:spcPts val="0"/>
               </a:spcAft>
             </a:pPr>
             <a:r>
-              <a:rPr sz="1100" b="0" dirty="0" err="1">
-                <a:solidFill>
-                  <a:srgbClr val="7F7F7F"/>
+              <a:rPr sz="1300" b="0" dirty="0" err="1">
+                <a:solidFill>
+                  <a:srgbClr val="333333"/>
                 </a:solidFill>
                 <a:latin typeface="メイリオ"/>
                 <a:ea typeface="メイリオ"/>
                 <a:cs typeface="メイリオ"/>
               </a:rPr>
-              <a:t>面談を予約したユーザーのうち</a:t>
+              <a:t>予約したのに、面談に来ない方がいる</a:t>
             </a:r>
             <a:endParaRPr sz="1250" b="1" dirty="0">
               <a:solidFill>
@@ -3264,21 +3175,17 @@
         </p:nvSpPr>
         <p:spPr>
           <a:xfrm>
-            <a:off x="1224000" y="2700000"/>
-            <a:ext cx="1512000" cy="251999"/>
+            <a:off x="1080000" y="3924000"/>
+            <a:ext cx="2484000" cy="1475999"/>
           </a:xfrm>
           <a:prstGeom prst="roundRect">
             <a:avLst>
               <a:gd name="adj" fmla="val 6000"/>
             </a:avLst>
           </a:prstGeom>
-          <a:solidFill>
-            <a:srgbClr val="FFFFFF"/>
-          </a:solidFill>
+          <a:noFill/>
           <a:ln w="19050">
-            <a:solidFill>
-              <a:srgbClr val="1F285A"/>
-            </a:solidFill>
+            <a:noFill/>
           </a:ln>
           <a:effectLst/>
         </p:spPr>
@@ -3289,7 +3196,7 @@
           <a:fillRef idx="3">
             <a:schemeClr val="accent1"/>
           </a:fillRef>
-          <a:effectRef idx="2">
+          <a:effectRef idx="0">
             <a:schemeClr val="accent1"/>
           </a:effectRef>
           <a:fontRef idx="minor">
@@ -3297,27 +3204,85 @@
           </a:fontRef>
         </p:style>
         <p:txBody>
-          <a:bodyPr wrap="square" lIns="125999" tIns="90000" rIns="108000" bIns="54000" rtlCol="0" anchor="ctr"/>
+          <a:bodyPr wrap="square" lIns="180000" tIns="72000" rIns="180000" bIns="36000" rtlCol="0" anchor="t"/>
           <a:lstStyle/>
           <a:p>
-            <a:pPr algn="ctr">
+            <a:pPr algn="l">
               <a:lnSpc>
                 <a:spcPct val="130000"/>
               </a:lnSpc>
               <a:spcAft>
-                <a:spcPts val="500"/>
+                <a:spcPts val="400"/>
               </a:spcAft>
             </a:pPr>
             <a:r>
-              <a:rPr sz="1100" b="1" dirty="0" err="1">
-                <a:solidFill>
-                  <a:srgbClr val="1F285A"/>
+              <a:rPr sz="1300" b="0" dirty="0" err="1">
+                <a:solidFill>
+                  <a:srgbClr val="333333"/>
                 </a:solidFill>
                 <a:latin typeface="メイリオ"/>
                 <a:ea typeface="メイリオ"/>
                 <a:cs typeface="メイリオ"/>
               </a:rPr>
-              <a:t>LINEヤフー公式</a:t>
+              <a:t>来店に至らない割合</a:t>
+            </a:r>
+            <a:endParaRPr sz="1250" b="1" dirty="0">
+              <a:solidFill>
+                <a:srgbClr val="1F285A"/>
+              </a:solidFill>
+              <a:latin typeface="メイリオ"/>
+              <a:ea typeface="メイリオ"/>
+              <a:cs typeface="メイリオ"/>
+            </a:endParaRPr>
+          </a:p>
+          <a:p>
+            <a:pPr algn="l">
+              <a:lnSpc>
+                <a:spcPct val="130000"/>
+              </a:lnSpc>
+              <a:spcAft>
+                <a:spcPts val="200"/>
+              </a:spcAft>
+            </a:pPr>
+            <a:r>
+              <a:rPr sz="2600" b="1" dirty="0" err="1">
+                <a:solidFill>
+                  <a:srgbClr val="1F285A"/>
+                </a:solidFill>
+                <a:latin typeface="メイリオ"/>
+                <a:ea typeface="メイリオ"/>
+                <a:cs typeface="メイリオ"/>
+              </a:rPr>
+              <a:t>2〜3割</a:t>
+            </a:r>
+            <a:endParaRPr sz="1250" b="1" dirty="0">
+              <a:solidFill>
+                <a:srgbClr val="1F285A"/>
+              </a:solidFill>
+              <a:latin typeface="メイリオ"/>
+              <a:ea typeface="メイリオ"/>
+              <a:cs typeface="メイリオ"/>
+            </a:endParaRPr>
+          </a:p>
+          <a:p>
+            <a:pPr algn="l">
+              <a:lnSpc>
+                <a:spcPct val="130000"/>
+              </a:lnSpc>
+              <a:spcAft>
+                <a:spcPts val="0"/>
+              </a:spcAft>
+            </a:pPr>
+            <a:r>
+              <a:rPr sz="1100" b="0" dirty="0" err="1">
+                <a:solidFill>
+                  <a:srgbClr val="7F7F7F"/>
+                </a:solidFill>
+                <a:latin typeface="メイリオ"/>
+                <a:ea typeface="メイリオ"/>
+                <a:cs typeface="メイリオ"/>
+              </a:rPr>
+              <a:t>面談を予約したユーザーのうち</a:t>
             </a:r>
             <a:endParaRPr sz="1250" b="1" dirty="0">
               <a:solidFill>
@@ -3339,16 +3304,14 @@
         <p:spPr>
           <a:xfrm>
             <a:off x="3708000" y="2592000"/>
-            <a:ext cx="2484000" cy="2808000"/>
+            <a:ext cx="2484000" cy="1296000"/>
           </a:xfrm>
           <a:prstGeom prst="roundRect">
             <a:avLst>
               <a:gd name="adj" fmla="val 6000"/>
             </a:avLst>
           </a:prstGeom>
-          <a:solidFill>
-            <a:srgbClr val="FFFFFF"/>
-          </a:solidFill>
+          <a:noFill/>
           <a:ln w="19050">
             <a:noFill/>
           </a:ln>
@@ -3369,7 +3332,7 @@
           </a:fontRef>
         </p:style>
         <p:txBody>
-          <a:bodyPr wrap="square" lIns="144000" tIns="468000" rIns="144000" bIns="54000" rtlCol="0" anchor="t"/>
+          <a:bodyPr wrap="square" lIns="180000" tIns="72000" rIns="180000" bIns="36000" rtlCol="0" anchor="t"/>
           <a:lstStyle/>
           <a:p>
             <a:pPr algn="l">
@@ -3381,7 +3344,7 @@
               </a:spcAft>
             </a:pPr>
             <a:r>
-              <a:rPr sz="1300" b="1" dirty="0" err="1">
+              <a:rPr sz="1500" b="1" dirty="0" err="1">
                 <a:solidFill>
                   <a:srgbClr val="333333"/>
                 </a:solidFill>
@@ -3389,7 +3352,7 @@
                 <a:ea typeface="メイリオ"/>
                 <a:cs typeface="メイリオ"/>
               </a:rPr>
-              <a:t>琴平バス</a:t>
+              <a:t>バス会社</a:t>
             </a:r>
             <a:endParaRPr sz="1250" b="1" dirty="0">
               <a:solidFill>
@@ -3406,106 +3369,19 @@
                 <a:spcPct val="130000"/>
               </a:lnSpc>
               <a:spcAft>
-                <a:spcPts val="800"/>
-              </a:spcAft>
-            </a:pPr>
-            <a:r>
-              <a:rPr sz="1200" b="0" dirty="0" err="1">
-                <a:solidFill>
-                  <a:srgbClr val="333333"/>
-                </a:solidFill>
-                <a:latin typeface="メイリオ"/>
-                <a:ea typeface="メイリオ"/>
-                <a:cs typeface="メイリオ"/>
-              </a:rPr>
-              <a:t>申込み直後のLINEは、よく読まれる</a:t>
-            </a:r>
-            <a:endParaRPr sz="1250" b="1" dirty="0">
-              <a:solidFill>
-                <a:srgbClr val="1F285A"/>
-              </a:solidFill>
-              <a:latin typeface="メイリオ"/>
-              <a:ea typeface="メイリオ"/>
-              <a:cs typeface="メイリオ"/>
-            </a:endParaRPr>
-          </a:p>
-          <a:p>
-            <a:pPr algn="l">
-              <a:lnSpc>
-                <a:spcPct val="130000"/>
-              </a:lnSpc>
-              <a:spcAft>
-                <a:spcPts val="1000"/>
-              </a:spcAft>
-            </a:pPr>
-            <a:r>
-              <a:rPr sz="1200" b="0" dirty="0" err="1">
-                <a:solidFill>
-                  <a:srgbClr val="333333"/>
-                </a:solidFill>
-                <a:latin typeface="メイリオ"/>
-                <a:ea typeface="メイリオ"/>
-                <a:cs typeface="メイリオ"/>
-              </a:rPr>
-              <a:t>メッセージの開封率</a:t>
-            </a:r>
-            <a:endParaRPr sz="1250" b="1" dirty="0">
-              <a:solidFill>
-                <a:srgbClr val="1F285A"/>
-              </a:solidFill>
-              <a:latin typeface="メイリオ"/>
-              <a:ea typeface="メイリオ"/>
-              <a:cs typeface="メイリオ"/>
-            </a:endParaRPr>
-          </a:p>
-          <a:p>
-            <a:pPr algn="l">
-              <a:lnSpc>
-                <a:spcPct val="130000"/>
-              </a:lnSpc>
-              <a:spcAft>
-                <a:spcPts val="200"/>
-              </a:spcAft>
-            </a:pPr>
-            <a:r>
-              <a:rPr sz="2600" b="1" dirty="0" err="1">
-                <a:solidFill>
-                  <a:srgbClr val="1F285A"/>
-                </a:solidFill>
-                <a:latin typeface="メイリオ"/>
-                <a:ea typeface="メイリオ"/>
-                <a:cs typeface="メイリオ"/>
-              </a:rPr>
-              <a:t>約70%</a:t>
-            </a:r>
-            <a:endParaRPr sz="1250" b="1" dirty="0">
-              <a:solidFill>
-                <a:srgbClr val="1F285A"/>
-              </a:solidFill>
-              <a:latin typeface="メイリオ"/>
-              <a:ea typeface="メイリオ"/>
-              <a:cs typeface="メイリオ"/>
-            </a:endParaRPr>
-          </a:p>
-          <a:p>
-            <a:pPr algn="l">
-              <a:lnSpc>
-                <a:spcPct val="130000"/>
-              </a:lnSpc>
-              <a:spcAft>
                 <a:spcPts val="0"/>
               </a:spcAft>
             </a:pPr>
             <a:r>
-              <a:rPr sz="1100" b="0" dirty="0" err="1">
-                <a:solidFill>
-                  <a:srgbClr val="7F7F7F"/>
+              <a:rPr sz="1300" b="0" dirty="0" err="1">
+                <a:solidFill>
+                  <a:srgbClr val="333333"/>
                 </a:solidFill>
                 <a:latin typeface="メイリオ"/>
                 <a:ea typeface="メイリオ"/>
                 <a:cs typeface="メイリオ"/>
               </a:rPr>
-              <a:t>LINE通知メッセージの配信後</a:t>
+              <a:t>申込み直後のLINEは、よく読まれる</a:t>
             </a:r>
             <a:endParaRPr sz="1250" b="1" dirty="0">
               <a:solidFill>
@@ -3526,21 +3402,17 @@
         </p:nvSpPr>
         <p:spPr>
           <a:xfrm>
-            <a:off x="3852000" y="2700000"/>
-            <a:ext cx="1512000" cy="251999"/>
+            <a:off x="3708000" y="3924000"/>
+            <a:ext cx="2484000" cy="1475999"/>
           </a:xfrm>
           <a:prstGeom prst="roundRect">
             <a:avLst>
               <a:gd name="adj" fmla="val 6000"/>
             </a:avLst>
           </a:prstGeom>
-          <a:solidFill>
-            <a:srgbClr val="FFFFFF"/>
-          </a:solidFill>
+          <a:noFill/>
           <a:ln w="19050">
-            <a:solidFill>
-              <a:srgbClr val="1F285A"/>
-            </a:solidFill>
+            <a:noFill/>
           </a:ln>
           <a:effectLst/>
         </p:spPr>
@@ -3551,7 +3423,7 @@
           <a:fillRef idx="3">
             <a:schemeClr val="accent1"/>
           </a:fillRef>
-          <a:effectRef idx="2">
+          <a:effectRef idx="0">
             <a:schemeClr val="accent1"/>
           </a:effectRef>
           <a:fontRef idx="minor">
@@ -3559,27 +3431,85 @@
           </a:fontRef>
         </p:style>
         <p:txBody>
-          <a:bodyPr wrap="square" lIns="125999" tIns="90000" rIns="108000" bIns="54000" rtlCol="0" anchor="ctr"/>
+          <a:bodyPr wrap="square" lIns="180000" tIns="72000" rIns="180000" bIns="36000" rtlCol="0" anchor="t"/>
           <a:lstStyle/>
           <a:p>
-            <a:pPr algn="ctr">
+            <a:pPr algn="l">
               <a:lnSpc>
                 <a:spcPct val="130000"/>
               </a:lnSpc>
               <a:spcAft>
-                <a:spcPts val="500"/>
+                <a:spcPts val="400"/>
               </a:spcAft>
             </a:pPr>
             <a:r>
-              <a:rPr sz="1100" b="1" dirty="0" err="1">
-                <a:solidFill>
-                  <a:srgbClr val="1F285A"/>
+              <a:rPr sz="1300" b="0" dirty="0" err="1">
+                <a:solidFill>
+                  <a:srgbClr val="333333"/>
                 </a:solidFill>
                 <a:latin typeface="メイリオ"/>
                 <a:ea typeface="メイリオ"/>
                 <a:cs typeface="メイリオ"/>
               </a:rPr>
-              <a:t>LINEヤフー公式</a:t>
+              <a:t>メッセージの開封率</a:t>
+            </a:r>
+            <a:endParaRPr sz="1250" b="1" dirty="0">
+              <a:solidFill>
+                <a:srgbClr val="1F285A"/>
+              </a:solidFill>
+              <a:latin typeface="メイリオ"/>
+              <a:ea typeface="メイリオ"/>
+              <a:cs typeface="メイリオ"/>
+            </a:endParaRPr>
+          </a:p>
+          <a:p>
+            <a:pPr algn="l">
+              <a:lnSpc>
+                <a:spcPct val="130000"/>
+              </a:lnSpc>
+              <a:spcAft>
+                <a:spcPts val="200"/>
+              </a:spcAft>
+            </a:pPr>
+            <a:r>
+              <a:rPr sz="2600" b="1" dirty="0" err="1">
+                <a:solidFill>
+                  <a:srgbClr val="1F285A"/>
+                </a:solidFill>
+                <a:latin typeface="メイリオ"/>
+                <a:ea typeface="メイリオ"/>
+                <a:cs typeface="メイリオ"/>
+              </a:rPr>
+              <a:t>約70%</a:t>
+            </a:r>
+            <a:endParaRPr sz="1250" b="1" dirty="0">
+              <a:solidFill>
+                <a:srgbClr val="1F285A"/>
+              </a:solidFill>
+              <a:latin typeface="メイリオ"/>
+              <a:ea typeface="メイリオ"/>
+              <a:cs typeface="メイリオ"/>
+            </a:endParaRPr>
+          </a:p>
+          <a:p>
+            <a:pPr algn="l">
+              <a:lnSpc>
+                <a:spcPct val="130000"/>
+              </a:lnSpc>
+              <a:spcAft>
+                <a:spcPts val="0"/>
+              </a:spcAft>
+            </a:pPr>
+            <a:r>
+              <a:rPr sz="1100" b="0" dirty="0" err="1">
+                <a:solidFill>
+                  <a:srgbClr val="7F7F7F"/>
+                </a:solidFill>
+                <a:latin typeface="メイリオ"/>
+                <a:ea typeface="メイリオ"/>
+                <a:cs typeface="メイリオ"/>
+              </a:rPr>
+              <a:t>LINE通知メッセージの配信後</a:t>
             </a:r>
             <a:endParaRPr sz="1250" b="1" dirty="0">
               <a:solidFill>
@@ -3601,16 +3531,14 @@
         <p:spPr>
           <a:xfrm>
             <a:off x="6336000" y="2592000"/>
-            <a:ext cx="2484000" cy="2808000"/>
+            <a:ext cx="2484000" cy="1296000"/>
           </a:xfrm>
           <a:prstGeom prst="roundRect">
             <a:avLst>
               <a:gd name="adj" fmla="val 6000"/>
             </a:avLst>
           </a:prstGeom>
-          <a:solidFill>
-            <a:srgbClr val="FFFFFF"/>
-          </a:solidFill>
+          <a:noFill/>
           <a:ln w="19050">
             <a:noFill/>
           </a:ln>
@@ -3631,7 +3559,7 @@
           </a:fontRef>
         </p:style>
         <p:txBody>
-          <a:bodyPr wrap="square" lIns="144000" tIns="468000" rIns="144000" bIns="54000" rtlCol="0" anchor="t"/>
+          <a:bodyPr wrap="square" lIns="180000" tIns="72000" rIns="180000" bIns="36000" rtlCol="0" anchor="t"/>
           <a:lstStyle/>
           <a:p>
             <a:pPr algn="l">
@@ -3643,7 +3571,7 @@
               </a:spcAft>
             </a:pPr>
             <a:r>
-              <a:rPr sz="1300" b="1" dirty="0" err="1">
+              <a:rPr sz="1500" b="1" dirty="0" err="1">
                 <a:solidFill>
                   <a:srgbClr val="333333"/>
                 </a:solidFill>
@@ -3651,7 +3579,7 @@
                 <a:ea typeface="メイリオ"/>
                 <a:cs typeface="メイリオ"/>
               </a:rPr>
-              <a:t>琴平バス</a:t>
+              <a:t>バス会社</a:t>
             </a:r>
             <a:endParaRPr sz="1250" b="1" dirty="0">
               <a:solidFill>
@@ -3668,106 +3596,19 @@
                 <a:spcPct val="130000"/>
               </a:lnSpc>
               <a:spcAft>
-                <a:spcPts val="800"/>
-              </a:spcAft>
-            </a:pPr>
-            <a:r>
-              <a:rPr sz="1200" b="0" dirty="0" err="1">
-                <a:solidFill>
-                  <a:srgbClr val="333333"/>
-                </a:solidFill>
-                <a:latin typeface="メイリオ"/>
-                <a:ea typeface="メイリオ"/>
-                <a:cs typeface="メイリオ"/>
-              </a:rPr>
-              <a:t>読まれるだけでなく、クリックもされる</a:t>
-            </a:r>
-            <a:endParaRPr sz="1250" b="1" dirty="0">
-              <a:solidFill>
-                <a:srgbClr val="1F285A"/>
-              </a:solidFill>
-              <a:latin typeface="メイリオ"/>
-              <a:ea typeface="メイリオ"/>
-              <a:cs typeface="メイリオ"/>
-            </a:endParaRPr>
-          </a:p>
-          <a:p>
-            <a:pPr algn="l">
-              <a:lnSpc>
-                <a:spcPct val="130000"/>
-              </a:lnSpc>
-              <a:spcAft>
-                <a:spcPts val="1000"/>
-              </a:spcAft>
-            </a:pPr>
-            <a:r>
-              <a:rPr sz="1200" b="0" dirty="0" err="1">
-                <a:solidFill>
-                  <a:srgbClr val="333333"/>
-                </a:solidFill>
-                <a:latin typeface="メイリオ"/>
-                <a:ea typeface="メイリオ"/>
-                <a:cs typeface="メイリオ"/>
-              </a:rPr>
-              <a:t>クリック率</a:t>
-            </a:r>
-            <a:endParaRPr sz="1250" b="1" dirty="0">
-              <a:solidFill>
-                <a:srgbClr val="1F285A"/>
-              </a:solidFill>
-              <a:latin typeface="メイリオ"/>
-              <a:ea typeface="メイリオ"/>
-              <a:cs typeface="メイリオ"/>
-            </a:endParaRPr>
-          </a:p>
-          <a:p>
-            <a:pPr algn="l">
-              <a:lnSpc>
-                <a:spcPct val="130000"/>
-              </a:lnSpc>
-              <a:spcAft>
-                <a:spcPts val="200"/>
-              </a:spcAft>
-            </a:pPr>
-            <a:r>
-              <a:rPr sz="2600" b="1" dirty="0" err="1">
-                <a:solidFill>
-                  <a:srgbClr val="1F285A"/>
-                </a:solidFill>
-                <a:latin typeface="メイリオ"/>
-                <a:ea typeface="メイリオ"/>
-                <a:cs typeface="メイリオ"/>
-              </a:rPr>
-              <a:t>約5倍</a:t>
-            </a:r>
-            <a:endParaRPr sz="1250" b="1" dirty="0">
-              <a:solidFill>
-                <a:srgbClr val="1F285A"/>
-              </a:solidFill>
-              <a:latin typeface="メイリオ"/>
-              <a:ea typeface="メイリオ"/>
-              <a:cs typeface="メイリオ"/>
-            </a:endParaRPr>
-          </a:p>
-          <a:p>
-            <a:pPr algn="l">
-              <a:lnSpc>
-                <a:spcPct val="130000"/>
-              </a:lnSpc>
-              <a:spcAft>
                 <a:spcPts val="0"/>
               </a:spcAft>
             </a:pPr>
             <a:r>
-              <a:rPr sz="1100" b="0" dirty="0" err="1">
-                <a:solidFill>
-                  <a:srgbClr val="7F7F7F"/>
+              <a:rPr sz="1300" b="0" dirty="0" err="1">
+                <a:solidFill>
+                  <a:srgbClr val="333333"/>
                 </a:solidFill>
                 <a:latin typeface="メイリオ"/>
                 <a:ea typeface="メイリオ"/>
                 <a:cs typeface="メイリオ"/>
               </a:rPr>
-              <a:t>メルマガのクリック率との比較</a:t>
+              <a:t>読まれるだけでなく、クリックもされる</a:t>
             </a:r>
             <a:endParaRPr sz="1250" b="1" dirty="0">
               <a:solidFill>
@@ -3788,21 +3629,17 @@
         </p:nvSpPr>
         <p:spPr>
           <a:xfrm>
-            <a:off x="6480000" y="2700000"/>
-            <a:ext cx="1512000" cy="251999"/>
+            <a:off x="6336000" y="3924000"/>
+            <a:ext cx="2484000" cy="1475999"/>
           </a:xfrm>
           <a:prstGeom prst="roundRect">
             <a:avLst>
               <a:gd name="adj" fmla="val 6000"/>
             </a:avLst>
           </a:prstGeom>
-          <a:solidFill>
-            <a:srgbClr val="FFFFFF"/>
-          </a:solidFill>
+          <a:noFill/>
           <a:ln w="19050">
-            <a:solidFill>
-              <a:srgbClr val="1F285A"/>
-            </a:solidFill>
+            <a:noFill/>
           </a:ln>
           <a:effectLst/>
         </p:spPr>
@@ -3813,7 +3650,7 @@
           <a:fillRef idx="3">
             <a:schemeClr val="accent1"/>
           </a:fillRef>
-          <a:effectRef idx="2">
+          <a:effectRef idx="0">
             <a:schemeClr val="accent1"/>
           </a:effectRef>
           <a:fontRef idx="minor">
@@ -3821,27 +3658,85 @@
           </a:fontRef>
         </p:style>
         <p:txBody>
-          <a:bodyPr wrap="square" lIns="125999" tIns="90000" rIns="108000" bIns="54000" rtlCol="0" anchor="ctr"/>
+          <a:bodyPr wrap="square" lIns="180000" tIns="72000" rIns="180000" bIns="36000" rtlCol="0" anchor="t"/>
           <a:lstStyle/>
           <a:p>
-            <a:pPr algn="ctr">
+            <a:pPr algn="l">
               <a:lnSpc>
                 <a:spcPct val="130000"/>
               </a:lnSpc>
               <a:spcAft>
-                <a:spcPts val="500"/>
+                <a:spcPts val="400"/>
               </a:spcAft>
             </a:pPr>
             <a:r>
-              <a:rPr sz="1100" b="1" dirty="0" err="1">
-                <a:solidFill>
-                  <a:srgbClr val="1F285A"/>
+              <a:rPr sz="1300" b="0" dirty="0" err="1">
+                <a:solidFill>
+                  <a:srgbClr val="333333"/>
                 </a:solidFill>
                 <a:latin typeface="メイリオ"/>
                 <a:ea typeface="メイリオ"/>
                 <a:cs typeface="メイリオ"/>
               </a:rPr>
-              <a:t>LINEヤフー公式</a:t>
+              <a:t>クリック率</a:t>
+            </a:r>
+            <a:endParaRPr sz="1250" b="1" dirty="0">
+              <a:solidFill>
+                <a:srgbClr val="1F285A"/>
+              </a:solidFill>
+              <a:latin typeface="メイリオ"/>
+              <a:ea typeface="メイリオ"/>
+              <a:cs typeface="メイリオ"/>
+            </a:endParaRPr>
+          </a:p>
+          <a:p>
+            <a:pPr algn="l">
+              <a:lnSpc>
+                <a:spcPct val="130000"/>
+              </a:lnSpc>
+              <a:spcAft>
+                <a:spcPts val="200"/>
+              </a:spcAft>
+            </a:pPr>
+            <a:r>
+              <a:rPr sz="2600" b="1" dirty="0" err="1">
+                <a:solidFill>
+                  <a:srgbClr val="1F285A"/>
+                </a:solidFill>
+                <a:latin typeface="メイリオ"/>
+                <a:ea typeface="メイリオ"/>
+                <a:cs typeface="メイリオ"/>
+              </a:rPr>
+              <a:t>約5倍</a:t>
+            </a:r>
+            <a:endParaRPr sz="1250" b="1" dirty="0">
+              <a:solidFill>
+                <a:srgbClr val="1F285A"/>
+              </a:solidFill>
+              <a:latin typeface="メイリオ"/>
+              <a:ea typeface="メイリオ"/>
+              <a:cs typeface="メイリオ"/>
+            </a:endParaRPr>
+          </a:p>
+          <a:p>
+            <a:pPr algn="l">
+              <a:lnSpc>
+                <a:spcPct val="130000"/>
+              </a:lnSpc>
+              <a:spcAft>
+                <a:spcPts val="0"/>
+              </a:spcAft>
+            </a:pPr>
+            <a:r>
+              <a:rPr sz="1100" b="0" dirty="0" err="1">
+                <a:solidFill>
+                  <a:srgbClr val="7F7F7F"/>
+                </a:solidFill>
+                <a:latin typeface="メイリオ"/>
+                <a:ea typeface="メイリオ"/>
+                <a:cs typeface="メイリオ"/>
+              </a:rPr>
+              <a:t>メルマガのクリック率との比較</a:t>
             </a:r>
             <a:endParaRPr sz="1250" b="1" dirty="0">
               <a:solidFill>
@@ -3911,47 +3806,6 @@
                 <a:cs typeface="メイリオ"/>
               </a:rPr>
               <a:t>関心が一番高い申込み直後に、LINEでつながるのが最適</a:t>
-            </a:r>
-          </a:p>
-        </p:txBody>
-      </p:sp>
-      <p:sp>
-        <p:nvSpPr>
-          <p:cNvPr id="14" name="TextBox 19"/>
-          <p:cNvSpPr txBox="1"/>
-          <p:nvPr/>
-        </p:nvSpPr>
-        <p:spPr>
-          <a:xfrm>
-            <a:off x="1080000" y="6156000"/>
-            <a:ext cx="7740000" cy="251999"/>
-          </a:xfrm>
-          <a:prstGeom prst="rect">
-            <a:avLst/>
-          </a:prstGeom>
-          <a:noFill/>
-        </p:spPr>
-        <p:txBody>
-          <a:bodyPr wrap="square" lIns="0" tIns="21600" rIns="0" bIns="21600" anchor="t">
-            <a:spAutoFit/>
-          </a:bodyPr>
-          <a:lstStyle/>
-          <a:p>
-            <a:pPr algn="l">
-              <a:lnSpc>
-                <a:spcPct val="115000"/>
-              </a:lnSpc>
-            </a:pPr>
-            <a:r>
-              <a:rPr sz="1000" b="0">
-                <a:solidFill>
-                  <a:srgbClr val="7F7F7F"/>
-                </a:solidFill>
-                <a:latin typeface="メイリオ"/>
-                <a:ea typeface="メイリオ"/>
-                <a:cs typeface="メイリオ"/>
-              </a:rPr>
-              <a:t>出典：LINEヤフー for Business 導入事例（保険見直し本舗・琴平バス）</a:t>
             </a:r>
           </a:p>
         </p:txBody>
@@ -4575,16 +4429,14 @@
         <p:spPr>
           <a:xfrm>
             <a:off x="1080000" y="2448000"/>
-            <a:ext cx="2484000" cy="3131999"/>
+            <a:ext cx="2484000" cy="1296000"/>
           </a:xfrm>
           <a:prstGeom prst="roundRect">
             <a:avLst>
               <a:gd name="adj" fmla="val 6000"/>
             </a:avLst>
           </a:prstGeom>
-          <a:solidFill>
-            <a:srgbClr val="FFFFFF"/>
-          </a:solidFill>
+          <a:noFill/>
           <a:ln w="19050">
             <a:noFill/>
           </a:ln>
@@ -4605,7 +4457,7 @@
           </a:fontRef>
         </p:style>
         <p:txBody>
-          <a:bodyPr wrap="square" lIns="144000" tIns="468000" rIns="144000" bIns="54000" rtlCol="0" anchor="t"/>
+          <a:bodyPr wrap="square" lIns="180000" tIns="72000" rIns="180000" bIns="36000" rtlCol="0" anchor="t"/>
           <a:lstStyle/>
           <a:p>
             <a:pPr algn="l">
@@ -4617,7 +4469,7 @@
               </a:spcAft>
             </a:pPr>
             <a:r>
-              <a:rPr sz="1300" b="1" dirty="0" err="1">
+              <a:rPr sz="1500" b="1" dirty="0" err="1">
                 <a:solidFill>
                   <a:srgbClr val="333333"/>
                 </a:solidFill>
@@ -4642,11 +4494,11 @@
                 <a:spcPct val="130000"/>
               </a:lnSpc>
               <a:spcAft>
-                <a:spcPts val="800"/>
+                <a:spcPts val="0"/>
               </a:spcAft>
             </a:pPr>
             <a:r>
-              <a:rPr sz="1200" b="0" dirty="0" err="1">
+              <a:rPr sz="1300" b="0" dirty="0" err="1">
                 <a:solidFill>
                   <a:srgbClr val="333333"/>
                 </a:solidFill>
@@ -4665,17 +4517,58 @@
               <a:cs typeface="メイリオ"/>
             </a:endParaRPr>
           </a:p>
+        </p:txBody>
+      </p:sp>
+      <p:sp>
+        <p:nvSpPr>
+          <p:cNvPr id="14" name="Rounded Rectangle 12"/>
+          <p:cNvSpPr/>
+          <p:nvPr/>
+        </p:nvSpPr>
+        <p:spPr>
+          <a:xfrm>
+            <a:off x="1080000" y="3780000"/>
+            <a:ext cx="2484000" cy="1800000"/>
+          </a:xfrm>
+          <a:prstGeom prst="roundRect">
+            <a:avLst>
+              <a:gd name="adj" fmla="val 6000"/>
+            </a:avLst>
+          </a:prstGeom>
+          <a:noFill/>
+          <a:ln w="19050">
+            <a:noFill/>
+          </a:ln>
+          <a:effectLst/>
+        </p:spPr>
+        <p:style>
+          <a:lnRef idx="1">
+            <a:schemeClr val="accent1"/>
+          </a:lnRef>
+          <a:fillRef idx="3">
+            <a:schemeClr val="accent1"/>
+          </a:fillRef>
+          <a:effectRef idx="0">
+            <a:schemeClr val="accent1"/>
+          </a:effectRef>
+          <a:fontRef idx="minor">
+            <a:schemeClr val="lt1"/>
+          </a:fontRef>
+        </p:style>
+        <p:txBody>
+          <a:bodyPr wrap="square" lIns="180000" tIns="72000" rIns="180000" bIns="36000" rtlCol="0" anchor="t"/>
+          <a:lstStyle/>
           <a:p>
             <a:pPr algn="l">
               <a:lnSpc>
                 <a:spcPct val="130000"/>
               </a:lnSpc>
               <a:spcAft>
-                <a:spcPts val="1000"/>
+                <a:spcPts val="400"/>
               </a:spcAft>
             </a:pPr>
             <a:r>
-              <a:rPr sz="1200" b="0" dirty="0" err="1">
+              <a:rPr sz="1300" b="0" dirty="0" err="1">
                 <a:solidFill>
                   <a:srgbClr val="333333"/>
                 </a:solidFill>
@@ -4741,7 +4634,7 @@
                 <a:ea typeface="メイリオ"/>
                 <a:cs typeface="メイリオ"/>
               </a:rPr>
-              <a:t>弊社運用の実績</a:t>
+              <a:t/>
             </a:r>
             <a:endParaRPr sz="1250" b="1" dirty="0">
               <a:solidFill>
@@ -4751,67 +4644,6 @@
               <a:ea typeface="メイリオ"/>
               <a:cs typeface="メイリオ"/>
             </a:endParaRPr>
-          </a:p>
-        </p:txBody>
-      </p:sp>
-      <p:sp>
-        <p:nvSpPr>
-          <p:cNvPr id="14" name="Rounded Rectangle 4"/>
-          <p:cNvSpPr/>
-          <p:nvPr/>
-        </p:nvSpPr>
-        <p:spPr>
-          <a:xfrm>
-            <a:off x="1224000" y="2556000"/>
-            <a:ext cx="1007999" cy="251999"/>
-          </a:xfrm>
-          <a:prstGeom prst="roundRect">
-            <a:avLst>
-              <a:gd name="adj" fmla="val 10000"/>
-            </a:avLst>
-          </a:prstGeom>
-          <a:solidFill>
-            <a:srgbClr val="1F285A"/>
-          </a:solidFill>
-          <a:ln>
-            <a:noFill/>
-          </a:ln>
-          <a:effectLst/>
-        </p:spPr>
-        <p:style>
-          <a:lnRef idx="1">
-            <a:schemeClr val="accent1"/>
-          </a:lnRef>
-          <a:fillRef idx="3">
-            <a:schemeClr val="accent1"/>
-          </a:fillRef>
-          <a:effectRef idx="2">
-            <a:schemeClr val="accent1"/>
-          </a:effectRef>
-          <a:fontRef idx="minor">
-            <a:schemeClr val="lt1"/>
-          </a:fontRef>
-        </p:style>
-        <p:txBody>
-          <a:bodyPr wrap="square" lIns="54000" tIns="18000" rIns="54000" bIns="18000" rtlCol="0" anchor="ctr"/>
-          <a:lstStyle/>
-          <a:p>
-            <a:pPr algn="ctr">
-              <a:lnSpc>
-                <a:spcPct val="120000"/>
-              </a:lnSpc>
-            </a:pPr>
-            <a:r>
-              <a:rPr sz="1100" b="1">
-                <a:solidFill>
-                  <a:srgbClr val="FFFFFF"/>
-                </a:solidFill>
-                <a:latin typeface="メイリオ"/>
-                <a:ea typeface="メイリオ"/>
-                <a:cs typeface="メイリオ"/>
-              </a:rPr>
-              <a:t>弊社実績</a:t>
-            </a:r>
           </a:p>
         </p:txBody>
       </p:sp>
@@ -4824,16 +4656,14 @@
         <p:spPr>
           <a:xfrm>
             <a:off x="3708000" y="2448000"/>
-            <a:ext cx="2484000" cy="3131999"/>
+            <a:ext cx="2484000" cy="1296000"/>
           </a:xfrm>
           <a:prstGeom prst="roundRect">
             <a:avLst>
               <a:gd name="adj" fmla="val 6000"/>
             </a:avLst>
           </a:prstGeom>
-          <a:solidFill>
-            <a:srgbClr val="FFFFFF"/>
-          </a:solidFill>
+          <a:noFill/>
           <a:ln w="19050">
             <a:noFill/>
           </a:ln>
@@ -4854,7 +4684,7 @@
           </a:fontRef>
         </p:style>
         <p:txBody>
-          <a:bodyPr wrap="square" lIns="144000" tIns="468000" rIns="144000" bIns="54000" rtlCol="0" anchor="t"/>
+          <a:bodyPr wrap="square" lIns="180000" tIns="72000" rIns="180000" bIns="36000" rtlCol="0" anchor="t"/>
           <a:lstStyle/>
           <a:p>
             <a:pPr algn="l">
@@ -4866,7 +4696,7 @@
               </a:spcAft>
             </a:pPr>
             <a:r>
-              <a:rPr sz="1300" b="1" dirty="0" err="1">
+              <a:rPr sz="1500" b="1" dirty="0" err="1">
                 <a:solidFill>
                   <a:srgbClr val="333333"/>
                 </a:solidFill>
@@ -4874,7 +4704,7 @@
                 <a:ea typeface="メイリオ"/>
                 <a:cs typeface="メイリオ"/>
               </a:rPr>
-              <a:t>保険見直し本舗</a:t>
+              <a:t>保険相談</a:t>
             </a:r>
             <a:endParaRPr sz="1250" b="1" dirty="0">
               <a:solidFill>
@@ -4891,106 +4721,19 @@
                 <a:spcPct val="130000"/>
               </a:lnSpc>
               <a:spcAft>
-                <a:spcPts val="800"/>
-              </a:spcAft>
-            </a:pPr>
-            <a:r>
-              <a:rPr sz="1200" b="0" dirty="0" err="1">
-                <a:solidFill>
-                  <a:srgbClr val="333333"/>
-                </a:solidFill>
-                <a:latin typeface="メイリオ"/>
-                <a:ea typeface="メイリオ"/>
-                <a:cs typeface="メイリオ"/>
-              </a:rPr>
-              <a:t>予約日時のリマインドを、LINE通知メッセージで配信</a:t>
-            </a:r>
-            <a:endParaRPr sz="1250" b="1" dirty="0">
-              <a:solidFill>
-                <a:srgbClr val="1F285A"/>
-              </a:solidFill>
-              <a:latin typeface="メイリオ"/>
-              <a:ea typeface="メイリオ"/>
-              <a:cs typeface="メイリオ"/>
-            </a:endParaRPr>
-          </a:p>
-          <a:p>
-            <a:pPr algn="l">
-              <a:lnSpc>
-                <a:spcPct val="130000"/>
-              </a:lnSpc>
-              <a:spcAft>
-                <a:spcPts val="1000"/>
-              </a:spcAft>
-            </a:pPr>
-            <a:r>
-              <a:rPr sz="1200" b="0" dirty="0" err="1">
-                <a:solidFill>
-                  <a:srgbClr val="333333"/>
-                </a:solidFill>
-                <a:latin typeface="メイリオ"/>
-                <a:ea typeface="メイリオ"/>
-                <a:cs typeface="メイリオ"/>
-              </a:rPr>
-              <a:t>予約からの面談実施率</a:t>
-            </a:r>
-            <a:endParaRPr sz="1250" b="1" dirty="0">
-              <a:solidFill>
-                <a:srgbClr val="1F285A"/>
-              </a:solidFill>
-              <a:latin typeface="メイリオ"/>
-              <a:ea typeface="メイリオ"/>
-              <a:cs typeface="メイリオ"/>
-            </a:endParaRPr>
-          </a:p>
-          <a:p>
-            <a:pPr algn="l">
-              <a:lnSpc>
-                <a:spcPct val="130000"/>
-              </a:lnSpc>
-              <a:spcAft>
-                <a:spcPts val="200"/>
-              </a:spcAft>
-            </a:pPr>
-            <a:r>
-              <a:rPr sz="2000" b="1" dirty="0" err="1">
-                <a:solidFill>
-                  <a:srgbClr val="1F285A"/>
-                </a:solidFill>
-                <a:latin typeface="メイリオ"/>
-                <a:ea typeface="メイリオ"/>
-                <a:cs typeface="メイリオ"/>
-              </a:rPr>
-              <a:t>5ポイント増</a:t>
-            </a:r>
-            <a:endParaRPr sz="1250" b="1" dirty="0">
-              <a:solidFill>
-                <a:srgbClr val="1F285A"/>
-              </a:solidFill>
-              <a:latin typeface="メイリオ"/>
-              <a:ea typeface="メイリオ"/>
-              <a:cs typeface="メイリオ"/>
-            </a:endParaRPr>
-          </a:p>
-          <a:p>
-            <a:pPr algn="l">
-              <a:lnSpc>
-                <a:spcPct val="130000"/>
-              </a:lnSpc>
-              <a:spcAft>
                 <a:spcPts val="0"/>
               </a:spcAft>
             </a:pPr>
             <a:r>
-              <a:rPr sz="1100" b="0" dirty="0" err="1">
-                <a:solidFill>
-                  <a:srgbClr val="7F7F7F"/>
+              <a:rPr sz="1300" b="0" dirty="0" err="1">
+                <a:solidFill>
+                  <a:srgbClr val="333333"/>
                 </a:solidFill>
                 <a:latin typeface="メイリオ"/>
                 <a:ea typeface="メイリオ"/>
                 <a:cs typeface="メイリオ"/>
               </a:rPr>
-              <a:t>予約100件あたり、面談が5件増</a:t>
+              <a:t>予約日時のリマインドを、LINE通知メッセージで配信</a:t>
             </a:r>
             <a:endParaRPr sz="1250" b="1" dirty="0">
               <a:solidFill>
@@ -5011,21 +4754,17 @@
         </p:nvSpPr>
         <p:spPr>
           <a:xfrm>
-            <a:off x="3852000" y="2556000"/>
-            <a:ext cx="1512000" cy="251999"/>
+            <a:off x="3708000" y="3780000"/>
+            <a:ext cx="2484000" cy="1800000"/>
           </a:xfrm>
           <a:prstGeom prst="roundRect">
             <a:avLst>
               <a:gd name="adj" fmla="val 6000"/>
             </a:avLst>
           </a:prstGeom>
-          <a:solidFill>
-            <a:srgbClr val="FFFFFF"/>
-          </a:solidFill>
+          <a:noFill/>
           <a:ln w="19050">
-            <a:solidFill>
-              <a:srgbClr val="1F285A"/>
-            </a:solidFill>
+            <a:noFill/>
           </a:ln>
           <a:effectLst/>
         </p:spPr>
@@ -5036,7 +4775,7 @@
           <a:fillRef idx="3">
             <a:schemeClr val="accent1"/>
           </a:fillRef>
-          <a:effectRef idx="2">
+          <a:effectRef idx="0">
             <a:schemeClr val="accent1"/>
           </a:effectRef>
           <a:fontRef idx="minor">
@@ -5044,27 +4783,85 @@
           </a:fontRef>
         </p:style>
         <p:txBody>
-          <a:bodyPr wrap="square" lIns="125999" tIns="90000" rIns="108000" bIns="54000" rtlCol="0" anchor="ctr"/>
+          <a:bodyPr wrap="square" lIns="180000" tIns="72000" rIns="180000" bIns="36000" rtlCol="0" anchor="t"/>
           <a:lstStyle/>
           <a:p>
-            <a:pPr algn="ctr">
+            <a:pPr algn="l">
               <a:lnSpc>
                 <a:spcPct val="130000"/>
               </a:lnSpc>
               <a:spcAft>
-                <a:spcPts val="500"/>
+                <a:spcPts val="400"/>
               </a:spcAft>
             </a:pPr>
             <a:r>
-              <a:rPr sz="1100" b="1" dirty="0" err="1">
-                <a:solidFill>
-                  <a:srgbClr val="1F285A"/>
+              <a:rPr sz="1300" b="0" dirty="0" err="1">
+                <a:solidFill>
+                  <a:srgbClr val="333333"/>
                 </a:solidFill>
                 <a:latin typeface="メイリオ"/>
                 <a:ea typeface="メイリオ"/>
                 <a:cs typeface="メイリオ"/>
               </a:rPr>
-              <a:t>LINEヤフー公式</a:t>
+              <a:t>予約からの面談実施率</a:t>
+            </a:r>
+            <a:endParaRPr sz="1250" b="1" dirty="0">
+              <a:solidFill>
+                <a:srgbClr val="1F285A"/>
+              </a:solidFill>
+              <a:latin typeface="メイリオ"/>
+              <a:ea typeface="メイリオ"/>
+              <a:cs typeface="メイリオ"/>
+            </a:endParaRPr>
+          </a:p>
+          <a:p>
+            <a:pPr algn="l">
+              <a:lnSpc>
+                <a:spcPct val="130000"/>
+              </a:lnSpc>
+              <a:spcAft>
+                <a:spcPts val="200"/>
+              </a:spcAft>
+            </a:pPr>
+            <a:r>
+              <a:rPr sz="2000" b="1" dirty="0" err="1">
+                <a:solidFill>
+                  <a:srgbClr val="1F285A"/>
+                </a:solidFill>
+                <a:latin typeface="メイリオ"/>
+                <a:ea typeface="メイリオ"/>
+                <a:cs typeface="メイリオ"/>
+              </a:rPr>
+              <a:t>5ポイント増</a:t>
+            </a:r>
+            <a:endParaRPr sz="1250" b="1" dirty="0">
+              <a:solidFill>
+                <a:srgbClr val="1F285A"/>
+              </a:solidFill>
+              <a:latin typeface="メイリオ"/>
+              <a:ea typeface="メイリオ"/>
+              <a:cs typeface="メイリオ"/>
+            </a:endParaRPr>
+          </a:p>
+          <a:p>
+            <a:pPr algn="l">
+              <a:lnSpc>
+                <a:spcPct val="130000"/>
+              </a:lnSpc>
+              <a:spcAft>
+                <a:spcPts val="0"/>
+              </a:spcAft>
+            </a:pPr>
+            <a:r>
+              <a:rPr sz="1100" b="0" dirty="0" err="1">
+                <a:solidFill>
+                  <a:srgbClr val="7F7F7F"/>
+                </a:solidFill>
+                <a:latin typeface="メイリオ"/>
+                <a:ea typeface="メイリオ"/>
+                <a:cs typeface="メイリオ"/>
+              </a:rPr>
+              <a:t>予約100件あたり、面談が5件増</a:t>
             </a:r>
             <a:endParaRPr sz="1250" b="1" dirty="0">
               <a:solidFill>
@@ -5086,16 +4883,14 @@
         <p:spPr>
           <a:xfrm>
             <a:off x="6336000" y="2448000"/>
-            <a:ext cx="2484000" cy="3131999"/>
+            <a:ext cx="2484000" cy="1296000"/>
           </a:xfrm>
           <a:prstGeom prst="roundRect">
             <a:avLst>
               <a:gd name="adj" fmla="val 6000"/>
             </a:avLst>
           </a:prstGeom>
-          <a:solidFill>
-            <a:srgbClr val="FFFFFF"/>
-          </a:solidFill>
+          <a:noFill/>
           <a:ln w="19050">
             <a:noFill/>
           </a:ln>
@@ -5116,7 +4911,7 @@
           </a:fontRef>
         </p:style>
         <p:txBody>
-          <a:bodyPr wrap="square" lIns="144000" tIns="468000" rIns="144000" bIns="54000" rtlCol="0" anchor="t"/>
+          <a:bodyPr wrap="square" lIns="180000" tIns="72000" rIns="180000" bIns="36000" rtlCol="0" anchor="t"/>
           <a:lstStyle/>
           <a:p>
             <a:pPr algn="l">
@@ -5128,7 +4923,7 @@
               </a:spcAft>
             </a:pPr>
             <a:r>
-              <a:rPr sz="1300" b="1" dirty="0" err="1">
+              <a:rPr sz="1500" b="1" dirty="0" err="1">
                 <a:solidFill>
                   <a:srgbClr val="333333"/>
                 </a:solidFill>
@@ -5136,7 +4931,7 @@
                 <a:ea typeface="メイリオ"/>
                 <a:cs typeface="メイリオ"/>
               </a:rPr>
-              <a:t>ジャパンプロデュース</a:t>
+              <a:t>美容室</a:t>
             </a:r>
             <a:endParaRPr sz="1250" b="1" dirty="0">
               <a:solidFill>
@@ -5153,106 +4948,19 @@
                 <a:spcPct val="130000"/>
               </a:lnSpc>
               <a:spcAft>
-                <a:spcPts val="800"/>
-              </a:spcAft>
-            </a:pPr>
-            <a:r>
-              <a:rPr sz="1200" b="0" dirty="0" err="1">
-                <a:solidFill>
-                  <a:srgbClr val="333333"/>
-                </a:solidFill>
-                <a:latin typeface="メイリオ"/>
-                <a:ea typeface="メイリオ"/>
-                <a:cs typeface="メイリオ"/>
-              </a:rPr>
-              <a:t>美容室。次回予約のリマインドをLINEで自動通知</a:t>
-            </a:r>
-            <a:endParaRPr sz="1250" b="1" dirty="0">
-              <a:solidFill>
-                <a:srgbClr val="1F285A"/>
-              </a:solidFill>
-              <a:latin typeface="メイリオ"/>
-              <a:ea typeface="メイリオ"/>
-              <a:cs typeface="メイリオ"/>
-            </a:endParaRPr>
-          </a:p>
-          <a:p>
-            <a:pPr algn="l">
-              <a:lnSpc>
-                <a:spcPct val="130000"/>
-              </a:lnSpc>
-              <a:spcAft>
-                <a:spcPts val="1000"/>
-              </a:spcAft>
-            </a:pPr>
-            <a:r>
-              <a:rPr sz="1200" b="0" dirty="0" err="1">
-                <a:solidFill>
-                  <a:srgbClr val="333333"/>
-                </a:solidFill>
-                <a:latin typeface="メイリオ"/>
-                <a:ea typeface="メイリオ"/>
-                <a:cs typeface="メイリオ"/>
-              </a:rPr>
-              <a:t>次回予約客数</a:t>
-            </a:r>
-            <a:endParaRPr sz="1250" b="1" dirty="0">
-              <a:solidFill>
-                <a:srgbClr val="1F285A"/>
-              </a:solidFill>
-              <a:latin typeface="メイリオ"/>
-              <a:ea typeface="メイリオ"/>
-              <a:cs typeface="メイリオ"/>
-            </a:endParaRPr>
-          </a:p>
-          <a:p>
-            <a:pPr algn="l">
-              <a:lnSpc>
-                <a:spcPct val="130000"/>
-              </a:lnSpc>
-              <a:spcAft>
-                <a:spcPts val="200"/>
-              </a:spcAft>
-            </a:pPr>
-            <a:r>
-              <a:rPr sz="2000" b="1" dirty="0" err="1">
-                <a:solidFill>
-                  <a:srgbClr val="1F285A"/>
-                </a:solidFill>
-                <a:latin typeface="メイリオ"/>
-                <a:ea typeface="メイリオ"/>
-                <a:cs typeface="メイリオ"/>
-              </a:rPr>
-              <a:t>約200→240名</a:t>
-            </a:r>
-            <a:endParaRPr sz="1250" b="1" dirty="0">
-              <a:solidFill>
-                <a:srgbClr val="1F285A"/>
-              </a:solidFill>
-              <a:latin typeface="メイリオ"/>
-              <a:ea typeface="メイリオ"/>
-              <a:cs typeface="メイリオ"/>
-            </a:endParaRPr>
-          </a:p>
-          <a:p>
-            <a:pPr algn="l">
-              <a:lnSpc>
-                <a:spcPct val="130000"/>
-              </a:lnSpc>
-              <a:spcAft>
                 <a:spcPts val="0"/>
               </a:spcAft>
             </a:pPr>
             <a:r>
-              <a:rPr sz="1100" b="0" dirty="0" err="1">
-                <a:solidFill>
-                  <a:srgbClr val="7F7F7F"/>
+              <a:rPr sz="1300" b="0" dirty="0" err="1">
+                <a:solidFill>
+                  <a:srgbClr val="333333"/>
                 </a:solidFill>
                 <a:latin typeface="メイリオ"/>
                 <a:ea typeface="メイリオ"/>
                 <a:cs typeface="メイリオ"/>
               </a:rPr>
-              <a:t>リピート率も88→91%（導入前後の半年比較。LINEミニアプリを併用）</a:t>
+              <a:t>次回予約のリマインドをLINEで自動通知</a:t>
             </a:r>
             <a:endParaRPr sz="1250" b="1" dirty="0">
               <a:solidFill>
@@ -5273,21 +4981,17 @@
         </p:nvSpPr>
         <p:spPr>
           <a:xfrm>
-            <a:off x="6480000" y="2556000"/>
-            <a:ext cx="1512000" cy="251999"/>
+            <a:off x="6336000" y="3780000"/>
+            <a:ext cx="2484000" cy="1800000"/>
           </a:xfrm>
           <a:prstGeom prst="roundRect">
             <a:avLst>
               <a:gd name="adj" fmla="val 6000"/>
             </a:avLst>
           </a:prstGeom>
-          <a:solidFill>
-            <a:srgbClr val="FFFFFF"/>
-          </a:solidFill>
+          <a:noFill/>
           <a:ln w="19050">
-            <a:solidFill>
-              <a:srgbClr val="1F285A"/>
-            </a:solidFill>
+            <a:noFill/>
           </a:ln>
           <a:effectLst/>
         </p:spPr>
@@ -5298,7 +5002,7 @@
           <a:fillRef idx="3">
             <a:schemeClr val="accent1"/>
           </a:fillRef>
-          <a:effectRef idx="2">
+          <a:effectRef idx="0">
             <a:schemeClr val="accent1"/>
           </a:effectRef>
           <a:fontRef idx="minor">
@@ -5306,27 +5010,85 @@
           </a:fontRef>
         </p:style>
         <p:txBody>
-          <a:bodyPr wrap="square" lIns="125999" tIns="90000" rIns="108000" bIns="54000" rtlCol="0" anchor="ctr"/>
+          <a:bodyPr wrap="square" lIns="180000" tIns="72000" rIns="180000" bIns="36000" rtlCol="0" anchor="t"/>
           <a:lstStyle/>
           <a:p>
-            <a:pPr algn="ctr">
+            <a:pPr algn="l">
               <a:lnSpc>
                 <a:spcPct val="130000"/>
               </a:lnSpc>
               <a:spcAft>
-                <a:spcPts val="500"/>
+                <a:spcPts val="400"/>
               </a:spcAft>
             </a:pPr>
             <a:r>
-              <a:rPr sz="1100" b="1" dirty="0" err="1">
-                <a:solidFill>
-                  <a:srgbClr val="1F285A"/>
+              <a:rPr sz="1300" b="0" dirty="0" err="1">
+                <a:solidFill>
+                  <a:srgbClr val="333333"/>
                 </a:solidFill>
                 <a:latin typeface="メイリオ"/>
                 <a:ea typeface="メイリオ"/>
                 <a:cs typeface="メイリオ"/>
               </a:rPr>
-              <a:t>LINEヤフー公式</a:t>
+              <a:t>次回予約客数</a:t>
+            </a:r>
+            <a:endParaRPr sz="1250" b="1" dirty="0">
+              <a:solidFill>
+                <a:srgbClr val="1F285A"/>
+              </a:solidFill>
+              <a:latin typeface="メイリオ"/>
+              <a:ea typeface="メイリオ"/>
+              <a:cs typeface="メイリオ"/>
+            </a:endParaRPr>
+          </a:p>
+          <a:p>
+            <a:pPr algn="l">
+              <a:lnSpc>
+                <a:spcPct val="130000"/>
+              </a:lnSpc>
+              <a:spcAft>
+                <a:spcPts val="200"/>
+              </a:spcAft>
+            </a:pPr>
+            <a:r>
+              <a:rPr sz="2000" b="1" dirty="0" err="1">
+                <a:solidFill>
+                  <a:srgbClr val="1F285A"/>
+                </a:solidFill>
+                <a:latin typeface="メイリオ"/>
+                <a:ea typeface="メイリオ"/>
+                <a:cs typeface="メイリオ"/>
+              </a:rPr>
+              <a:t>約200→240名</a:t>
+            </a:r>
+            <a:endParaRPr sz="1250" b="1" dirty="0">
+              <a:solidFill>
+                <a:srgbClr val="1F285A"/>
+              </a:solidFill>
+              <a:latin typeface="メイリオ"/>
+              <a:ea typeface="メイリオ"/>
+              <a:cs typeface="メイリオ"/>
+            </a:endParaRPr>
+          </a:p>
+          <a:p>
+            <a:pPr algn="l">
+              <a:lnSpc>
+                <a:spcPct val="130000"/>
+              </a:lnSpc>
+              <a:spcAft>
+                <a:spcPts val="0"/>
+              </a:spcAft>
+            </a:pPr>
+            <a:r>
+              <a:rPr sz="1100" b="0" dirty="0" err="1">
+                <a:solidFill>
+                  <a:srgbClr val="7F7F7F"/>
+                </a:solidFill>
+                <a:latin typeface="メイリオ"/>
+                <a:ea typeface="メイリオ"/>
+                <a:cs typeface="メイリオ"/>
+              </a:rPr>
+              <a:t>リピート率も88→91%（導入前後の半年比較。LINEミニアプリを併用）</a:t>
             </a:r>
             <a:endParaRPr sz="1250" b="1" dirty="0">
               <a:solidFill>
@@ -5396,47 +5158,6 @@
                 <a:cs typeface="メイリオ"/>
               </a:rPr>
               <a:t>無断キャンセルを防ぎ、来店につなげる</a:t>
-            </a:r>
-          </a:p>
-        </p:txBody>
-      </p:sp>
-      <p:sp>
-        <p:nvSpPr>
-          <p:cNvPr id="20" name="TextBox 19"/>
-          <p:cNvSpPr txBox="1"/>
-          <p:nvPr/>
-        </p:nvSpPr>
-        <p:spPr>
-          <a:xfrm>
-            <a:off x="1080000" y="6156000"/>
-            <a:ext cx="7740000" cy="251999"/>
-          </a:xfrm>
-          <a:prstGeom prst="rect">
-            <a:avLst/>
-          </a:prstGeom>
-          <a:noFill/>
-        </p:spPr>
-        <p:txBody>
-          <a:bodyPr wrap="square" lIns="0" tIns="21600" rIns="0" bIns="21600" anchor="t">
-            <a:spAutoFit/>
-          </a:bodyPr>
-          <a:lstStyle/>
-          <a:p>
-            <a:pPr algn="l">
-              <a:lnSpc>
-                <a:spcPct val="115000"/>
-              </a:lnSpc>
-            </a:pPr>
-            <a:r>
-              <a:rPr sz="1000" b="0">
-                <a:solidFill>
-                  <a:srgbClr val="7F7F7F"/>
-                </a:solidFill>
-                <a:latin typeface="メイリオ"/>
-                <a:ea typeface="メイリオ"/>
-                <a:cs typeface="メイリオ"/>
-              </a:rPr>
-              <a:t>出典：弊社運用実績／LINEヤフー for Business 導入事例（保険見直し本舗・ジャパンプロデュース）</a:t>
             </a:r>
           </a:p>
         </p:txBody>
@@ -6065,16 +5786,14 @@
         <p:spPr>
           <a:xfrm>
             <a:off x="1080000" y="2628000"/>
-            <a:ext cx="3798000" cy="2880000"/>
+            <a:ext cx="3798000" cy="1296000"/>
           </a:xfrm>
           <a:prstGeom prst="roundRect">
             <a:avLst>
               <a:gd name="adj" fmla="val 6000"/>
             </a:avLst>
           </a:prstGeom>
-          <a:solidFill>
-            <a:srgbClr val="FFFFFF"/>
-          </a:solidFill>
+          <a:noFill/>
           <a:ln w="19050">
             <a:noFill/>
           </a:ln>
@@ -6095,7 +5814,7 @@
           </a:fontRef>
         </p:style>
         <p:txBody>
-          <a:bodyPr wrap="square" lIns="144000" tIns="468000" rIns="144000" bIns="54000" rtlCol="0" anchor="t"/>
+          <a:bodyPr wrap="square" lIns="180000" tIns="72000" rIns="180000" bIns="36000" rtlCol="0" anchor="t"/>
           <a:lstStyle/>
           <a:p>
             <a:pPr algn="l">
@@ -6107,7 +5826,7 @@
               </a:spcAft>
             </a:pPr>
             <a:r>
-              <a:rPr sz="1300" b="1" dirty="0" err="1">
+              <a:rPr sz="1500" b="1" dirty="0" err="1">
                 <a:solidFill>
                   <a:srgbClr val="333333"/>
                 </a:solidFill>
@@ -6132,106 +5851,19 @@
                 <a:spcPct val="130000"/>
               </a:lnSpc>
               <a:spcAft>
-                <a:spcPts val="800"/>
-              </a:spcAft>
-            </a:pPr>
-            <a:r>
-              <a:rPr sz="1200" b="0" dirty="0" err="1">
-                <a:solidFill>
-                  <a:srgbClr val="333333"/>
-                </a:solidFill>
-                <a:latin typeface="メイリオ"/>
-                <a:ea typeface="メイリオ"/>
-                <a:cs typeface="メイリオ"/>
-              </a:rPr>
-              <a:t>友だち追加後のステップ配信で、予約を案内</a:t>
-            </a:r>
-            <a:endParaRPr sz="1250" b="1" dirty="0">
-              <a:solidFill>
-                <a:srgbClr val="1F285A"/>
-              </a:solidFill>
-              <a:latin typeface="メイリオ"/>
-              <a:ea typeface="メイリオ"/>
-              <a:cs typeface="メイリオ"/>
-            </a:endParaRPr>
-          </a:p>
-          <a:p>
-            <a:pPr algn="l">
-              <a:lnSpc>
-                <a:spcPct val="130000"/>
-              </a:lnSpc>
-              <a:spcAft>
-                <a:spcPts val="1000"/>
-              </a:spcAft>
-            </a:pPr>
-            <a:r>
-              <a:rPr sz="1200" b="0" dirty="0" err="1">
-                <a:solidFill>
-                  <a:srgbClr val="333333"/>
-                </a:solidFill>
-                <a:latin typeface="メイリオ"/>
-                <a:ea typeface="メイリオ"/>
-                <a:cs typeface="メイリオ"/>
-              </a:rPr>
-              <a:t>LINE経由の予約数</a:t>
-            </a:r>
-            <a:endParaRPr sz="1250" b="1" dirty="0">
-              <a:solidFill>
-                <a:srgbClr val="1F285A"/>
-              </a:solidFill>
-              <a:latin typeface="メイリオ"/>
-              <a:ea typeface="メイリオ"/>
-              <a:cs typeface="メイリオ"/>
-            </a:endParaRPr>
-          </a:p>
-          <a:p>
-            <a:pPr algn="l">
-              <a:lnSpc>
-                <a:spcPct val="130000"/>
-              </a:lnSpc>
-              <a:spcAft>
-                <a:spcPts val="200"/>
-              </a:spcAft>
-            </a:pPr>
-            <a:r>
-              <a:rPr sz="2800" b="1" dirty="0" err="1">
-                <a:solidFill>
-                  <a:srgbClr val="1F285A"/>
-                </a:solidFill>
-                <a:latin typeface="メイリオ"/>
-                <a:ea typeface="メイリオ"/>
-                <a:cs typeface="メイリオ"/>
-              </a:rPr>
-              <a:t>約1.2倍</a:t>
-            </a:r>
-            <a:endParaRPr sz="1250" b="1" dirty="0">
-              <a:solidFill>
-                <a:srgbClr val="1F285A"/>
-              </a:solidFill>
-              <a:latin typeface="メイリオ"/>
-              <a:ea typeface="メイリオ"/>
-              <a:cs typeface="メイリオ"/>
-            </a:endParaRPr>
-          </a:p>
-          <a:p>
-            <a:pPr algn="l">
-              <a:lnSpc>
-                <a:spcPct val="130000"/>
-              </a:lnSpc>
-              <a:spcAft>
                 <a:spcPts val="0"/>
               </a:spcAft>
             </a:pPr>
             <a:r>
-              <a:rPr sz="1100" b="0" dirty="0" err="1">
-                <a:solidFill>
-                  <a:srgbClr val="7F7F7F"/>
+              <a:rPr sz="1300" b="0" dirty="0" err="1">
+                <a:solidFill>
+                  <a:srgbClr val="333333"/>
                 </a:solidFill>
                 <a:latin typeface="メイリオ"/>
                 <a:ea typeface="メイリオ"/>
                 <a:cs typeface="メイリオ"/>
               </a:rPr>
-              <a:t>ステップ配信の実施前との比較</a:t>
+              <a:t>友だち追加後のステップ配信で、予約を案内</a:t>
             </a:r>
             <a:endParaRPr sz="1250" b="1" dirty="0">
               <a:solidFill>
@@ -6252,21 +5884,17 @@
         </p:nvSpPr>
         <p:spPr>
           <a:xfrm>
-            <a:off x="1224000" y="2736000"/>
-            <a:ext cx="1512000" cy="251999"/>
+            <a:off x="1080000" y="3960000"/>
+            <a:ext cx="3798000" cy="1548000"/>
           </a:xfrm>
           <a:prstGeom prst="roundRect">
             <a:avLst>
               <a:gd name="adj" fmla="val 6000"/>
             </a:avLst>
           </a:prstGeom>
-          <a:solidFill>
-            <a:srgbClr val="FFFFFF"/>
-          </a:solidFill>
+          <a:noFill/>
           <a:ln w="19050">
-            <a:solidFill>
-              <a:srgbClr val="1F285A"/>
-            </a:solidFill>
+            <a:noFill/>
           </a:ln>
           <a:effectLst/>
         </p:spPr>
@@ -6277,7 +5905,7 @@
           <a:fillRef idx="3">
             <a:schemeClr val="accent1"/>
           </a:fillRef>
-          <a:effectRef idx="2">
+          <a:effectRef idx="0">
             <a:schemeClr val="accent1"/>
           </a:effectRef>
           <a:fontRef idx="minor">
@@ -6285,27 +5913,85 @@
           </a:fontRef>
         </p:style>
         <p:txBody>
-          <a:bodyPr wrap="square" lIns="125999" tIns="90000" rIns="108000" bIns="54000" rtlCol="0" anchor="ctr"/>
+          <a:bodyPr wrap="square" lIns="180000" tIns="72000" rIns="180000" bIns="36000" rtlCol="0" anchor="t"/>
           <a:lstStyle/>
           <a:p>
-            <a:pPr algn="ctr">
+            <a:pPr algn="l">
               <a:lnSpc>
                 <a:spcPct val="130000"/>
               </a:lnSpc>
               <a:spcAft>
-                <a:spcPts val="500"/>
+                <a:spcPts val="400"/>
               </a:spcAft>
             </a:pPr>
             <a:r>
-              <a:rPr sz="1100" b="1" dirty="0" err="1">
-                <a:solidFill>
-                  <a:srgbClr val="1F285A"/>
+              <a:rPr sz="1300" b="0" dirty="0" err="1">
+                <a:solidFill>
+                  <a:srgbClr val="333333"/>
                 </a:solidFill>
                 <a:latin typeface="メイリオ"/>
                 <a:ea typeface="メイリオ"/>
                 <a:cs typeface="メイリオ"/>
               </a:rPr>
-              <a:t>LINEヤフー公式</a:t>
+              <a:t>LINE経由の予約数</a:t>
+            </a:r>
+            <a:endParaRPr sz="1250" b="1" dirty="0">
+              <a:solidFill>
+                <a:srgbClr val="1F285A"/>
+              </a:solidFill>
+              <a:latin typeface="メイリオ"/>
+              <a:ea typeface="メイリオ"/>
+              <a:cs typeface="メイリオ"/>
+            </a:endParaRPr>
+          </a:p>
+          <a:p>
+            <a:pPr algn="l">
+              <a:lnSpc>
+                <a:spcPct val="130000"/>
+              </a:lnSpc>
+              <a:spcAft>
+                <a:spcPts val="200"/>
+              </a:spcAft>
+            </a:pPr>
+            <a:r>
+              <a:rPr sz="3200" b="1" dirty="0" err="1">
+                <a:solidFill>
+                  <a:srgbClr val="1F285A"/>
+                </a:solidFill>
+                <a:latin typeface="メイリオ"/>
+                <a:ea typeface="メイリオ"/>
+                <a:cs typeface="メイリオ"/>
+              </a:rPr>
+              <a:t>約1.2倍</a:t>
+            </a:r>
+            <a:endParaRPr sz="1250" b="1" dirty="0">
+              <a:solidFill>
+                <a:srgbClr val="1F285A"/>
+              </a:solidFill>
+              <a:latin typeface="メイリオ"/>
+              <a:ea typeface="メイリオ"/>
+              <a:cs typeface="メイリオ"/>
+            </a:endParaRPr>
+          </a:p>
+          <a:p>
+            <a:pPr algn="l">
+              <a:lnSpc>
+                <a:spcPct val="130000"/>
+              </a:lnSpc>
+              <a:spcAft>
+                <a:spcPts val="0"/>
+              </a:spcAft>
+            </a:pPr>
+            <a:r>
+              <a:rPr sz="1100" b="0" dirty="0" err="1">
+                <a:solidFill>
+                  <a:srgbClr val="7F7F7F"/>
+                </a:solidFill>
+                <a:latin typeface="メイリオ"/>
+                <a:ea typeface="メイリオ"/>
+                <a:cs typeface="メイリオ"/>
+              </a:rPr>
+              <a:t>ステップ配信の実施前との比較</a:t>
             </a:r>
             <a:endParaRPr sz="1250" b="1" dirty="0">
               <a:solidFill>
@@ -6327,16 +6013,14 @@
         <p:spPr>
           <a:xfrm>
             <a:off x="5022000" y="2628000"/>
-            <a:ext cx="3798000" cy="2880000"/>
+            <a:ext cx="3798000" cy="1296000"/>
           </a:xfrm>
           <a:prstGeom prst="roundRect">
             <a:avLst>
               <a:gd name="adj" fmla="val 6000"/>
             </a:avLst>
           </a:prstGeom>
-          <a:solidFill>
-            <a:srgbClr val="FFFFFF"/>
-          </a:solidFill>
+          <a:noFill/>
           <a:ln w="19050">
             <a:noFill/>
           </a:ln>
@@ -6357,7 +6041,7 @@
           </a:fontRef>
         </p:style>
         <p:txBody>
-          <a:bodyPr wrap="square" lIns="144000" tIns="468000" rIns="144000" bIns="54000" rtlCol="0" anchor="t"/>
+          <a:bodyPr wrap="square" lIns="180000" tIns="72000" rIns="180000" bIns="36000" rtlCol="0" anchor="t"/>
           <a:lstStyle/>
           <a:p>
             <a:pPr algn="l">
@@ -6369,7 +6053,7 @@
               </a:spcAft>
             </a:pPr>
             <a:r>
-              <a:rPr sz="1300" b="1" dirty="0" err="1">
+              <a:rPr sz="1500" b="1" dirty="0" err="1">
                 <a:solidFill>
                   <a:srgbClr val="333333"/>
                 </a:solidFill>
@@ -6377,7 +6061,7 @@
                 <a:ea typeface="メイリオ"/>
                 <a:cs typeface="メイリオ"/>
               </a:rPr>
-              <a:t>UZUZ（就職支援）</a:t>
+              <a:t>就職支援</a:t>
             </a:r>
             <a:endParaRPr sz="1250" b="1" dirty="0">
               <a:solidFill>
@@ -6394,106 +6078,19 @@
                 <a:spcPct val="130000"/>
               </a:lnSpc>
               <a:spcAft>
-                <a:spcPts val="800"/>
-              </a:spcAft>
-            </a:pPr>
-            <a:r>
-              <a:rPr sz="1200" b="0" dirty="0" err="1">
-                <a:solidFill>
-                  <a:srgbClr val="333333"/>
-                </a:solidFill>
-                <a:latin typeface="メイリオ"/>
-                <a:ea typeface="メイリオ"/>
-                <a:cs typeface="メイリオ"/>
-              </a:rPr>
-              <a:t>LINEのチャットボットで情報を提供し、面談予約へ</a:t>
-            </a:r>
-            <a:endParaRPr sz="1250" b="1" dirty="0">
-              <a:solidFill>
-                <a:srgbClr val="1F285A"/>
-              </a:solidFill>
-              <a:latin typeface="メイリオ"/>
-              <a:ea typeface="メイリオ"/>
-              <a:cs typeface="メイリオ"/>
-            </a:endParaRPr>
-          </a:p>
-          <a:p>
-            <a:pPr algn="l">
-              <a:lnSpc>
-                <a:spcPct val="130000"/>
-              </a:lnSpc>
-              <a:spcAft>
-                <a:spcPts val="1000"/>
-              </a:spcAft>
-            </a:pPr>
-            <a:r>
-              <a:rPr sz="1200" b="0" dirty="0" err="1">
-                <a:solidFill>
-                  <a:srgbClr val="333333"/>
-                </a:solidFill>
-                <a:latin typeface="メイリオ"/>
-                <a:ea typeface="メイリオ"/>
-                <a:cs typeface="メイリオ"/>
-              </a:rPr>
-              <a:t>LINE経由の問い合わせの面談予約率</a:t>
-            </a:r>
-            <a:endParaRPr sz="1250" b="1" dirty="0">
-              <a:solidFill>
-                <a:srgbClr val="1F285A"/>
-              </a:solidFill>
-              <a:latin typeface="メイリオ"/>
-              <a:ea typeface="メイリオ"/>
-              <a:cs typeface="メイリオ"/>
-            </a:endParaRPr>
-          </a:p>
-          <a:p>
-            <a:pPr algn="l">
-              <a:lnSpc>
-                <a:spcPct val="130000"/>
-              </a:lnSpc>
-              <a:spcAft>
-                <a:spcPts val="200"/>
-              </a:spcAft>
-            </a:pPr>
-            <a:r>
-              <a:rPr sz="2800" b="1" dirty="0" err="1">
-                <a:solidFill>
-                  <a:srgbClr val="1F285A"/>
-                </a:solidFill>
-                <a:latin typeface="メイリオ"/>
-                <a:ea typeface="メイリオ"/>
-                <a:cs typeface="メイリオ"/>
-              </a:rPr>
-              <a:t>55%</a:t>
-            </a:r>
-            <a:endParaRPr sz="1250" b="1" dirty="0">
-              <a:solidFill>
-                <a:srgbClr val="1F285A"/>
-              </a:solidFill>
-              <a:latin typeface="メイリオ"/>
-              <a:ea typeface="メイリオ"/>
-              <a:cs typeface="メイリオ"/>
-            </a:endParaRPr>
-          </a:p>
-          <a:p>
-            <a:pPr algn="l">
-              <a:lnSpc>
-                <a:spcPct val="130000"/>
-              </a:lnSpc>
-              <a:spcAft>
                 <a:spcPts val="0"/>
               </a:spcAft>
             </a:pPr>
             <a:r>
-              <a:rPr sz="1100" b="0" dirty="0" err="1">
-                <a:solidFill>
-                  <a:srgbClr val="7F7F7F"/>
+              <a:rPr sz="1300" b="0" dirty="0" err="1">
+                <a:solidFill>
+                  <a:srgbClr val="333333"/>
                 </a:solidFill>
                 <a:latin typeface="メイリオ"/>
                 <a:ea typeface="メイリオ"/>
                 <a:cs typeface="メイリオ"/>
               </a:rPr>
-              <a:t>他のチャネルと比べて高い</a:t>
+              <a:t>LINEのチャットボットで情報を提供し、面談予約へ</a:t>
             </a:r>
             <a:endParaRPr sz="1250" b="1" dirty="0">
               <a:solidFill>
@@ -6514,21 +6111,17 @@
         </p:nvSpPr>
         <p:spPr>
           <a:xfrm>
-            <a:off x="5166000" y="2736000"/>
-            <a:ext cx="1512000" cy="251999"/>
+            <a:off x="5022000" y="3960000"/>
+            <a:ext cx="3798000" cy="1548000"/>
           </a:xfrm>
           <a:prstGeom prst="roundRect">
             <a:avLst>
               <a:gd name="adj" fmla="val 6000"/>
             </a:avLst>
           </a:prstGeom>
-          <a:solidFill>
-            <a:srgbClr val="FFFFFF"/>
-          </a:solidFill>
+          <a:noFill/>
           <a:ln w="19050">
-            <a:solidFill>
-              <a:srgbClr val="1F285A"/>
-            </a:solidFill>
+            <a:noFill/>
           </a:ln>
           <a:effectLst/>
         </p:spPr>
@@ -6539,7 +6132,7 @@
           <a:fillRef idx="3">
             <a:schemeClr val="accent1"/>
           </a:fillRef>
-          <a:effectRef idx="2">
+          <a:effectRef idx="0">
             <a:schemeClr val="accent1"/>
           </a:effectRef>
           <a:fontRef idx="minor">
@@ -6547,27 +6140,85 @@
           </a:fontRef>
         </p:style>
         <p:txBody>
-          <a:bodyPr wrap="square" lIns="125999" tIns="90000" rIns="108000" bIns="54000" rtlCol="0" anchor="ctr"/>
+          <a:bodyPr wrap="square" lIns="180000" tIns="72000" rIns="180000" bIns="36000" rtlCol="0" anchor="t"/>
           <a:lstStyle/>
           <a:p>
-            <a:pPr algn="ctr">
+            <a:pPr algn="l">
               <a:lnSpc>
                 <a:spcPct val="130000"/>
               </a:lnSpc>
               <a:spcAft>
-                <a:spcPts val="500"/>
+                <a:spcPts val="400"/>
               </a:spcAft>
             </a:pPr>
             <a:r>
-              <a:rPr sz="1100" b="1" dirty="0" err="1">
-                <a:solidFill>
-                  <a:srgbClr val="1F285A"/>
+              <a:rPr sz="1300" b="0" dirty="0" err="1">
+                <a:solidFill>
+                  <a:srgbClr val="333333"/>
                 </a:solidFill>
                 <a:latin typeface="メイリオ"/>
                 <a:ea typeface="メイリオ"/>
                 <a:cs typeface="メイリオ"/>
               </a:rPr>
-              <a:t>LINEヤフー公式</a:t>
+              <a:t>LINE経由の問い合わせの面談予約率</a:t>
+            </a:r>
+            <a:endParaRPr sz="1250" b="1" dirty="0">
+              <a:solidFill>
+                <a:srgbClr val="1F285A"/>
+              </a:solidFill>
+              <a:latin typeface="メイリオ"/>
+              <a:ea typeface="メイリオ"/>
+              <a:cs typeface="メイリオ"/>
+            </a:endParaRPr>
+          </a:p>
+          <a:p>
+            <a:pPr algn="l">
+              <a:lnSpc>
+                <a:spcPct val="130000"/>
+              </a:lnSpc>
+              <a:spcAft>
+                <a:spcPts val="200"/>
+              </a:spcAft>
+            </a:pPr>
+            <a:r>
+              <a:rPr sz="3200" b="1" dirty="0" err="1">
+                <a:solidFill>
+                  <a:srgbClr val="1F285A"/>
+                </a:solidFill>
+                <a:latin typeface="メイリオ"/>
+                <a:ea typeface="メイリオ"/>
+                <a:cs typeface="メイリオ"/>
+              </a:rPr>
+              <a:t>55%</a:t>
+            </a:r>
+            <a:endParaRPr sz="1250" b="1" dirty="0">
+              <a:solidFill>
+                <a:srgbClr val="1F285A"/>
+              </a:solidFill>
+              <a:latin typeface="メイリオ"/>
+              <a:ea typeface="メイリオ"/>
+              <a:cs typeface="メイリオ"/>
+            </a:endParaRPr>
+          </a:p>
+          <a:p>
+            <a:pPr algn="l">
+              <a:lnSpc>
+                <a:spcPct val="130000"/>
+              </a:lnSpc>
+              <a:spcAft>
+                <a:spcPts val="0"/>
+              </a:spcAft>
+            </a:pPr>
+            <a:r>
+              <a:rPr sz="1100" b="0" dirty="0" err="1">
+                <a:solidFill>
+                  <a:srgbClr val="7F7F7F"/>
+                </a:solidFill>
+                <a:latin typeface="メイリオ"/>
+                <a:ea typeface="メイリオ"/>
+                <a:cs typeface="メイリオ"/>
+              </a:rPr>
+              <a:t>他のチャネルと比べて高い</a:t>
             </a:r>
             <a:endParaRPr sz="1250" b="1" dirty="0">
               <a:solidFill>
@@ -6637,47 +6288,6 @@
                 <a:cs typeface="メイリオ"/>
               </a:rPr>
               <a:t>資料請求のみで終わらせず、予約・商談につなげる</a:t>
-            </a:r>
-          </a:p>
-        </p:txBody>
-      </p:sp>
-      <p:sp>
-        <p:nvSpPr>
-          <p:cNvPr id="18" name="TextBox 19"/>
-          <p:cNvSpPr txBox="1"/>
-          <p:nvPr/>
-        </p:nvSpPr>
-        <p:spPr>
-          <a:xfrm>
-            <a:off x="1080000" y="6156000"/>
-            <a:ext cx="7740000" cy="251999"/>
-          </a:xfrm>
-          <a:prstGeom prst="rect">
-            <a:avLst/>
-          </a:prstGeom>
-          <a:noFill/>
-        </p:spPr>
-        <p:txBody>
-          <a:bodyPr wrap="square" lIns="0" tIns="21600" rIns="0" bIns="21600" anchor="t">
-            <a:spAutoFit/>
-          </a:bodyPr>
-          <a:lstStyle/>
-          <a:p>
-            <a:pPr algn="l">
-              <a:lnSpc>
-                <a:spcPct val="115000"/>
-              </a:lnSpc>
-            </a:pPr>
-            <a:r>
-              <a:rPr sz="1000" b="0">
-                <a:solidFill>
-                  <a:srgbClr val="7F7F7F"/>
-                </a:solidFill>
-                <a:latin typeface="メイリオ"/>
-                <a:ea typeface="メイリオ"/>
-                <a:cs typeface="メイリオ"/>
-              </a:rPr>
-              <a:t>出典：LINEヤフー for Business 導入事例（アクネクリニック・UZUZ）</a:t>
             </a:r>
           </a:p>
         </p:txBody>
@@ -7324,16 +6934,14 @@
         <p:spPr>
           <a:xfrm>
             <a:off x="1080000" y="2628000"/>
-            <a:ext cx="3798000" cy="2880000"/>
+            <a:ext cx="3798000" cy="1296000"/>
           </a:xfrm>
           <a:prstGeom prst="roundRect">
             <a:avLst>
               <a:gd name="adj" fmla="val 6000"/>
             </a:avLst>
           </a:prstGeom>
-          <a:solidFill>
-            <a:srgbClr val="FFFFFF"/>
-          </a:solidFill>
+          <a:noFill/>
           <a:ln w="19050">
             <a:noFill/>
           </a:ln>
@@ -7354,7 +6962,7 @@
           </a:fontRef>
         </p:style>
         <p:txBody>
-          <a:bodyPr wrap="square" lIns="144000" tIns="468000" rIns="144000" bIns="54000" rtlCol="0" anchor="t"/>
+          <a:bodyPr wrap="square" lIns="180000" tIns="72000" rIns="180000" bIns="36000" rtlCol="0" anchor="t"/>
           <a:lstStyle/>
           <a:p>
             <a:pPr algn="l">
@@ -7366,7 +6974,7 @@
               </a:spcAft>
             </a:pPr>
             <a:r>
-              <a:rPr sz="1300" b="1" dirty="0" err="1">
+              <a:rPr sz="1500" b="1" dirty="0" err="1">
                 <a:solidFill>
                   <a:srgbClr val="333333"/>
                 </a:solidFill>
@@ -7374,7 +6982,7 @@
                 <a:ea typeface="メイリオ"/>
                 <a:cs typeface="メイリオ"/>
               </a:rPr>
-              <a:t>Dazy（飲食店）</a:t>
+              <a:t>居酒屋</a:t>
             </a:r>
             <a:endParaRPr sz="1250" b="1" dirty="0">
               <a:solidFill>
@@ -7391,106 +6999,19 @@
                 <a:spcPct val="130000"/>
               </a:lnSpc>
               <a:spcAft>
-                <a:spcPts val="800"/>
-              </a:spcAft>
-            </a:pPr>
-            <a:r>
-              <a:rPr sz="1200" b="0" dirty="0" err="1">
-                <a:solidFill>
-                  <a:srgbClr val="333333"/>
-                </a:solidFill>
-                <a:latin typeface="メイリオ"/>
-                <a:ea typeface="メイリオ"/>
-                <a:cs typeface="メイリオ"/>
-              </a:rPr>
-              <a:t>来店翌日にアンケートを配信。再来店の少し前にクーポンを配信（LINEミニアプリを併用）</a:t>
-            </a:r>
-            <a:endParaRPr sz="1250" b="1" dirty="0">
-              <a:solidFill>
-                <a:srgbClr val="1F285A"/>
-              </a:solidFill>
-              <a:latin typeface="メイリオ"/>
-              <a:ea typeface="メイリオ"/>
-              <a:cs typeface="メイリオ"/>
-            </a:endParaRPr>
-          </a:p>
-          <a:p>
-            <a:pPr algn="l">
-              <a:lnSpc>
-                <a:spcPct val="130000"/>
-              </a:lnSpc>
-              <a:spcAft>
-                <a:spcPts val="1000"/>
-              </a:spcAft>
-            </a:pPr>
-            <a:r>
-              <a:rPr sz="1200" b="0" dirty="0" err="1">
-                <a:solidFill>
-                  <a:srgbClr val="333333"/>
-                </a:solidFill>
-                <a:latin typeface="メイリオ"/>
-                <a:ea typeface="メイリオ"/>
-                <a:cs typeface="メイリオ"/>
-              </a:rPr>
-              <a:t>リピーターの売上割合</a:t>
-            </a:r>
-            <a:endParaRPr sz="1250" b="1" dirty="0">
-              <a:solidFill>
-                <a:srgbClr val="1F285A"/>
-              </a:solidFill>
-              <a:latin typeface="メイリオ"/>
-              <a:ea typeface="メイリオ"/>
-              <a:cs typeface="メイリオ"/>
-            </a:endParaRPr>
-          </a:p>
-          <a:p>
-            <a:pPr algn="l">
-              <a:lnSpc>
-                <a:spcPct val="130000"/>
-              </a:lnSpc>
-              <a:spcAft>
-                <a:spcPts val="200"/>
-              </a:spcAft>
-            </a:pPr>
-            <a:r>
-              <a:rPr sz="2800" b="1" dirty="0" err="1">
-                <a:solidFill>
-                  <a:srgbClr val="1F285A"/>
-                </a:solidFill>
-                <a:latin typeface="メイリオ"/>
-                <a:ea typeface="メイリオ"/>
-                <a:cs typeface="メイリオ"/>
-              </a:rPr>
-              <a:t>7.6→12.9%</a:t>
-            </a:r>
-            <a:endParaRPr sz="1250" b="1" dirty="0">
-              <a:solidFill>
-                <a:srgbClr val="1F285A"/>
-              </a:solidFill>
-              <a:latin typeface="メイリオ"/>
-              <a:ea typeface="メイリオ"/>
-              <a:cs typeface="メイリオ"/>
-            </a:endParaRPr>
-          </a:p>
-          <a:p>
-            <a:pPr algn="l">
-              <a:lnSpc>
-                <a:spcPct val="130000"/>
-              </a:lnSpc>
-              <a:spcAft>
                 <a:spcPts val="0"/>
               </a:spcAft>
             </a:pPr>
             <a:r>
-              <a:rPr sz="1100" b="0" dirty="0" err="1">
-                <a:solidFill>
-                  <a:srgbClr val="7F7F7F"/>
+              <a:rPr sz="1300" b="0" dirty="0" err="1">
+                <a:solidFill>
+                  <a:srgbClr val="333333"/>
                 </a:solidFill>
                 <a:latin typeface="メイリオ"/>
                 <a:ea typeface="メイリオ"/>
                 <a:cs typeface="メイリオ"/>
               </a:rPr>
-              <a:t>2025年1月と3月の比較</a:t>
+              <a:t>来店翌日にアンケートを配信。再来店の少し前にクーポンを配信（LINEミニアプリを併用）</a:t>
             </a:r>
             <a:endParaRPr sz="1250" b="1" dirty="0">
               <a:solidFill>
@@ -7511,21 +7032,17 @@
         </p:nvSpPr>
         <p:spPr>
           <a:xfrm>
-            <a:off x="1224000" y="2736000"/>
-            <a:ext cx="1512000" cy="251999"/>
+            <a:off x="1080000" y="3960000"/>
+            <a:ext cx="3798000" cy="1548000"/>
           </a:xfrm>
           <a:prstGeom prst="roundRect">
             <a:avLst>
               <a:gd name="adj" fmla="val 6000"/>
             </a:avLst>
           </a:prstGeom>
-          <a:solidFill>
-            <a:srgbClr val="FFFFFF"/>
-          </a:solidFill>
+          <a:noFill/>
           <a:ln w="19050">
-            <a:solidFill>
-              <a:srgbClr val="1F285A"/>
-            </a:solidFill>
+            <a:noFill/>
           </a:ln>
           <a:effectLst/>
         </p:spPr>
@@ -7536,7 +7053,7 @@
           <a:fillRef idx="3">
             <a:schemeClr val="accent1"/>
           </a:fillRef>
-          <a:effectRef idx="2">
+          <a:effectRef idx="0">
             <a:schemeClr val="accent1"/>
           </a:effectRef>
           <a:fontRef idx="minor">
@@ -7544,27 +7061,85 @@
           </a:fontRef>
         </p:style>
         <p:txBody>
-          <a:bodyPr wrap="square" lIns="125999" tIns="90000" rIns="108000" bIns="54000" rtlCol="0" anchor="ctr"/>
+          <a:bodyPr wrap="square" lIns="180000" tIns="72000" rIns="180000" bIns="36000" rtlCol="0" anchor="t"/>
           <a:lstStyle/>
           <a:p>
-            <a:pPr algn="ctr">
+            <a:pPr algn="l">
               <a:lnSpc>
                 <a:spcPct val="130000"/>
               </a:lnSpc>
               <a:spcAft>
-                <a:spcPts val="500"/>
+                <a:spcPts val="400"/>
               </a:spcAft>
             </a:pPr>
             <a:r>
-              <a:rPr sz="1100" b="1" dirty="0" err="1">
-                <a:solidFill>
-                  <a:srgbClr val="1F285A"/>
+              <a:rPr sz="1300" b="0" dirty="0" err="1">
+                <a:solidFill>
+                  <a:srgbClr val="333333"/>
                 </a:solidFill>
                 <a:latin typeface="メイリオ"/>
                 <a:ea typeface="メイリオ"/>
                 <a:cs typeface="メイリオ"/>
               </a:rPr>
-              <a:t>LINEヤフー公式</a:t>
+              <a:t>リピーターの売上割合</a:t>
+            </a:r>
+            <a:endParaRPr sz="1250" b="1" dirty="0">
+              <a:solidFill>
+                <a:srgbClr val="1F285A"/>
+              </a:solidFill>
+              <a:latin typeface="メイリオ"/>
+              <a:ea typeface="メイリオ"/>
+              <a:cs typeface="メイリオ"/>
+            </a:endParaRPr>
+          </a:p>
+          <a:p>
+            <a:pPr algn="l">
+              <a:lnSpc>
+                <a:spcPct val="130000"/>
+              </a:lnSpc>
+              <a:spcAft>
+                <a:spcPts val="200"/>
+              </a:spcAft>
+            </a:pPr>
+            <a:r>
+              <a:rPr sz="3200" b="1" dirty="0" err="1">
+                <a:solidFill>
+                  <a:srgbClr val="1F285A"/>
+                </a:solidFill>
+                <a:latin typeface="メイリオ"/>
+                <a:ea typeface="メイリオ"/>
+                <a:cs typeface="メイリオ"/>
+              </a:rPr>
+              <a:t>7.6→12.9%</a:t>
+            </a:r>
+            <a:endParaRPr sz="1250" b="1" dirty="0">
+              <a:solidFill>
+                <a:srgbClr val="1F285A"/>
+              </a:solidFill>
+              <a:latin typeface="メイリオ"/>
+              <a:ea typeface="メイリオ"/>
+              <a:cs typeface="メイリオ"/>
+            </a:endParaRPr>
+          </a:p>
+          <a:p>
+            <a:pPr algn="l">
+              <a:lnSpc>
+                <a:spcPct val="130000"/>
+              </a:lnSpc>
+              <a:spcAft>
+                <a:spcPts val="0"/>
+              </a:spcAft>
+            </a:pPr>
+            <a:r>
+              <a:rPr sz="1100" b="0" dirty="0" err="1">
+                <a:solidFill>
+                  <a:srgbClr val="7F7F7F"/>
+                </a:solidFill>
+                <a:latin typeface="メイリオ"/>
+                <a:ea typeface="メイリオ"/>
+                <a:cs typeface="メイリオ"/>
+              </a:rPr>
+              <a:t>2025年1月と3月の比較</a:t>
             </a:r>
             <a:endParaRPr sz="1250" b="1" dirty="0">
               <a:solidFill>
@@ -7586,16 +7161,14 @@
         <p:spPr>
           <a:xfrm>
             <a:off x="5022000" y="2628000"/>
-            <a:ext cx="3798000" cy="2880000"/>
+            <a:ext cx="3798000" cy="1296000"/>
           </a:xfrm>
           <a:prstGeom prst="roundRect">
             <a:avLst>
               <a:gd name="adj" fmla="val 6000"/>
             </a:avLst>
           </a:prstGeom>
-          <a:solidFill>
-            <a:srgbClr val="FFFFFF"/>
-          </a:solidFill>
+          <a:noFill/>
           <a:ln w="19050">
             <a:noFill/>
           </a:ln>
@@ -7616,7 +7189,7 @@
           </a:fontRef>
         </p:style>
         <p:txBody>
-          <a:bodyPr wrap="square" lIns="144000" tIns="468000" rIns="144000" bIns="54000" rtlCol="0" anchor="t"/>
+          <a:bodyPr wrap="square" lIns="180000" tIns="72000" rIns="180000" bIns="36000" rtlCol="0" anchor="t"/>
           <a:lstStyle/>
           <a:p>
             <a:pPr algn="l">
@@ -7628,7 +7201,7 @@
               </a:spcAft>
             </a:pPr>
             <a:r>
-              <a:rPr sz="1300" b="1" dirty="0" err="1">
+              <a:rPr sz="1500" b="1" dirty="0" err="1">
                 <a:solidFill>
                   <a:srgbClr val="333333"/>
                 </a:solidFill>
@@ -7636,7 +7209,7 @@
                 <a:ea typeface="メイリオ"/>
                 <a:cs typeface="メイリオ"/>
               </a:rPr>
-              <a:t>たんじろう（飲食店）</a:t>
+              <a:t>焼肉店</a:t>
             </a:r>
             <a:endParaRPr sz="1250" b="1" dirty="0">
               <a:solidFill>
@@ -7653,106 +7226,19 @@
                 <a:spcPct val="130000"/>
               </a:lnSpc>
               <a:spcAft>
-                <a:spcPts val="800"/>
-              </a:spcAft>
-            </a:pPr>
-            <a:r>
-              <a:rPr sz="1200" b="0" dirty="0" err="1">
-                <a:solidFill>
-                  <a:srgbClr val="333333"/>
-                </a:solidFill>
-                <a:latin typeface="メイリオ"/>
-                <a:ea typeface="メイリオ"/>
-                <a:cs typeface="メイリオ"/>
-              </a:rPr>
-              <a:t>来店翌日の11時に、アンケートとクーポンを自動配信（LINEミニアプリを併用）</a:t>
-            </a:r>
-            <a:endParaRPr sz="1250" b="1" dirty="0">
-              <a:solidFill>
-                <a:srgbClr val="1F285A"/>
-              </a:solidFill>
-              <a:latin typeface="メイリオ"/>
-              <a:ea typeface="メイリオ"/>
-              <a:cs typeface="メイリオ"/>
-            </a:endParaRPr>
-          </a:p>
-          <a:p>
-            <a:pPr algn="l">
-              <a:lnSpc>
-                <a:spcPct val="130000"/>
-              </a:lnSpc>
-              <a:spcAft>
-                <a:spcPts val="1000"/>
-              </a:spcAft>
-            </a:pPr>
-            <a:r>
-              <a:rPr sz="1200" b="0" dirty="0" err="1">
-                <a:solidFill>
-                  <a:srgbClr val="333333"/>
-                </a:solidFill>
-                <a:latin typeface="メイリオ"/>
-                <a:ea typeface="メイリオ"/>
-                <a:cs typeface="メイリオ"/>
-              </a:rPr>
-              <a:t>リピーター率</a:t>
-            </a:r>
-            <a:endParaRPr sz="1250" b="1" dirty="0">
-              <a:solidFill>
-                <a:srgbClr val="1F285A"/>
-              </a:solidFill>
-              <a:latin typeface="メイリオ"/>
-              <a:ea typeface="メイリオ"/>
-              <a:cs typeface="メイリオ"/>
-            </a:endParaRPr>
-          </a:p>
-          <a:p>
-            <a:pPr algn="l">
-              <a:lnSpc>
-                <a:spcPct val="130000"/>
-              </a:lnSpc>
-              <a:spcAft>
-                <a:spcPts val="200"/>
-              </a:spcAft>
-            </a:pPr>
-            <a:r>
-              <a:rPr sz="2800" b="1" dirty="0" err="1">
-                <a:solidFill>
-                  <a:srgbClr val="1F285A"/>
-                </a:solidFill>
-                <a:latin typeface="メイリオ"/>
-                <a:ea typeface="メイリオ"/>
-                <a:cs typeface="メイリオ"/>
-              </a:rPr>
-              <a:t>19.4→40%超</a:t>
-            </a:r>
-            <a:endParaRPr sz="1250" b="1" dirty="0">
-              <a:solidFill>
-                <a:srgbClr val="1F285A"/>
-              </a:solidFill>
-              <a:latin typeface="メイリオ"/>
-              <a:ea typeface="メイリオ"/>
-              <a:cs typeface="メイリオ"/>
-            </a:endParaRPr>
-          </a:p>
-          <a:p>
-            <a:pPr algn="l">
-              <a:lnSpc>
-                <a:spcPct val="130000"/>
-              </a:lnSpc>
-              <a:spcAft>
                 <a:spcPts val="0"/>
               </a:spcAft>
             </a:pPr>
             <a:r>
-              <a:rPr sz="1100" b="0" dirty="0" err="1">
-                <a:solidFill>
-                  <a:srgbClr val="7F7F7F"/>
+              <a:rPr sz="1300" b="0" dirty="0" err="1">
+                <a:solidFill>
+                  <a:srgbClr val="333333"/>
                 </a:solidFill>
                 <a:latin typeface="メイリオ"/>
                 <a:ea typeface="メイリオ"/>
                 <a:cs typeface="メイリオ"/>
               </a:rPr>
-              <a:t>2024年1月と2025年1月の比較</a:t>
+              <a:t>来店翌日の11時に、アンケートとクーポンを自動配信（LINEミニアプリを併用）</a:t>
             </a:r>
             <a:endParaRPr sz="1250" b="1" dirty="0">
               <a:solidFill>
@@ -7773,21 +7259,17 @@
         </p:nvSpPr>
         <p:spPr>
           <a:xfrm>
-            <a:off x="5166000" y="2736000"/>
-            <a:ext cx="1512000" cy="251999"/>
+            <a:off x="5022000" y="3960000"/>
+            <a:ext cx="3798000" cy="1548000"/>
           </a:xfrm>
           <a:prstGeom prst="roundRect">
             <a:avLst>
               <a:gd name="adj" fmla="val 6000"/>
             </a:avLst>
           </a:prstGeom>
-          <a:solidFill>
-            <a:srgbClr val="FFFFFF"/>
-          </a:solidFill>
+          <a:noFill/>
           <a:ln w="19050">
-            <a:solidFill>
-              <a:srgbClr val="1F285A"/>
-            </a:solidFill>
+            <a:noFill/>
           </a:ln>
           <a:effectLst/>
         </p:spPr>
@@ -7798,7 +7280,7 @@
           <a:fillRef idx="3">
             <a:schemeClr val="accent1"/>
           </a:fillRef>
-          <a:effectRef idx="2">
+          <a:effectRef idx="0">
             <a:schemeClr val="accent1"/>
           </a:effectRef>
           <a:fontRef idx="minor">
@@ -7806,27 +7288,85 @@
           </a:fontRef>
         </p:style>
         <p:txBody>
-          <a:bodyPr wrap="square" lIns="125999" tIns="90000" rIns="108000" bIns="54000" rtlCol="0" anchor="ctr"/>
+          <a:bodyPr wrap="square" lIns="180000" tIns="72000" rIns="180000" bIns="36000" rtlCol="0" anchor="t"/>
           <a:lstStyle/>
           <a:p>
-            <a:pPr algn="ctr">
+            <a:pPr algn="l">
               <a:lnSpc>
                 <a:spcPct val="130000"/>
               </a:lnSpc>
               <a:spcAft>
-                <a:spcPts val="500"/>
+                <a:spcPts val="400"/>
               </a:spcAft>
             </a:pPr>
             <a:r>
-              <a:rPr sz="1100" b="1" dirty="0" err="1">
-                <a:solidFill>
-                  <a:srgbClr val="1F285A"/>
+              <a:rPr sz="1300" b="0" dirty="0" err="1">
+                <a:solidFill>
+                  <a:srgbClr val="333333"/>
                 </a:solidFill>
                 <a:latin typeface="メイリオ"/>
                 <a:ea typeface="メイリオ"/>
                 <a:cs typeface="メイリオ"/>
               </a:rPr>
-              <a:t>LINEヤフー公式</a:t>
+              <a:t>リピーター率</a:t>
+            </a:r>
+            <a:endParaRPr sz="1250" b="1" dirty="0">
+              <a:solidFill>
+                <a:srgbClr val="1F285A"/>
+              </a:solidFill>
+              <a:latin typeface="メイリオ"/>
+              <a:ea typeface="メイリオ"/>
+              <a:cs typeface="メイリオ"/>
+            </a:endParaRPr>
+          </a:p>
+          <a:p>
+            <a:pPr algn="l">
+              <a:lnSpc>
+                <a:spcPct val="130000"/>
+              </a:lnSpc>
+              <a:spcAft>
+                <a:spcPts val="200"/>
+              </a:spcAft>
+            </a:pPr>
+            <a:r>
+              <a:rPr sz="3200" b="1" dirty="0" err="1">
+                <a:solidFill>
+                  <a:srgbClr val="1F285A"/>
+                </a:solidFill>
+                <a:latin typeface="メイリオ"/>
+                <a:ea typeface="メイリオ"/>
+                <a:cs typeface="メイリオ"/>
+              </a:rPr>
+              <a:t>19.4→40%超</a:t>
+            </a:r>
+            <a:endParaRPr sz="1250" b="1" dirty="0">
+              <a:solidFill>
+                <a:srgbClr val="1F285A"/>
+              </a:solidFill>
+              <a:latin typeface="メイリオ"/>
+              <a:ea typeface="メイリオ"/>
+              <a:cs typeface="メイリオ"/>
+            </a:endParaRPr>
+          </a:p>
+          <a:p>
+            <a:pPr algn="l">
+              <a:lnSpc>
+                <a:spcPct val="130000"/>
+              </a:lnSpc>
+              <a:spcAft>
+                <a:spcPts val="0"/>
+              </a:spcAft>
+            </a:pPr>
+            <a:r>
+              <a:rPr sz="1100" b="0" dirty="0" err="1">
+                <a:solidFill>
+                  <a:srgbClr val="7F7F7F"/>
+                </a:solidFill>
+                <a:latin typeface="メイリオ"/>
+                <a:ea typeface="メイリオ"/>
+                <a:cs typeface="メイリオ"/>
+              </a:rPr>
+              <a:t>2024年1月と2025年1月の比較</a:t>
             </a:r>
             <a:endParaRPr sz="1250" b="1" dirty="0">
               <a:solidFill>
@@ -7936,7 +7476,7 @@
                 <a:ea typeface="メイリオ"/>
                 <a:cs typeface="メイリオ"/>
               </a:rPr>
-              <a:t>出典：LINEヤフー for Business 導入事例（Dazy・たんじろう）。LINEでつながった後の施策の例</a:t>
+              <a:t>※サンクスLINE単体の効果ではなく、LINEでつながった後の施策の例</a:t>
             </a:r>
           </a:p>
         </p:txBody>
@@ -12285,7 +11825,7 @@
                 <a:ea typeface="メイリオ" panose="020B0604030504040204" pitchFamily="50" charset="-128"/>
                 <a:cs typeface="メイリオ"/>
               </a:rPr>
-              <a:t>弊社運用の美容クリニック様では、予約後来院率が40〜50%改善</a:t>
+              <a:t>美容クリニックでは、予約後来院率が40〜50%改善</a:t>
             </a:r>
             <a:endParaRPr lang="ja-JP" altLang="en-US" sz="1200" dirty="0">
               <a:latin typeface="メイリオ" panose="020B0604030504040204" pitchFamily="50" charset="-128"/>

--- a/20261002_サンクスLINEのご提案_事例入り.pptx
+++ b/20261002_サンクスLINEのご提案_事例入り.pptx
@@ -3077,7 +3077,7 @@
         <p:spPr>
           <a:xfrm>
             <a:off x="1080000" y="2592000"/>
-            <a:ext cx="2484000" cy="1296000"/>
+            <a:ext cx="3798000" cy="1296000"/>
           </a:xfrm>
           <a:prstGeom prst="roundRect">
             <a:avLst>
@@ -3125,7 +3125,7 @@
                 <a:ea typeface="メイリオ"/>
                 <a:cs typeface="メイリオ"/>
               </a:rPr>
-              <a:t>保険相談</a:t>
+              <a:t>バス会社</a:t>
             </a:r>
             <a:endParaRPr sz="1250" b="1" dirty="0">
               <a:solidFill>
@@ -3154,7 +3154,7 @@
                 <a:ea typeface="メイリオ"/>
                 <a:cs typeface="メイリオ"/>
               </a:rPr>
-              <a:t>予約したのに、面談に来ない方がいる</a:t>
+              <a:t>申込み直後のLINEは、よく読まれる</a:t>
             </a:r>
             <a:endParaRPr sz="1250" b="1" dirty="0">
               <a:solidFill>
@@ -3176,7 +3176,7 @@
         <p:spPr>
           <a:xfrm>
             <a:off x="1080000" y="3924000"/>
-            <a:ext cx="2484000" cy="1475999"/>
+            <a:ext cx="3798000" cy="1475999"/>
           </a:xfrm>
           <a:prstGeom prst="roundRect">
             <a:avLst>
@@ -3224,7 +3224,7 @@
                 <a:ea typeface="メイリオ"/>
                 <a:cs typeface="メイリオ"/>
               </a:rPr>
-              <a:t>来店に至らない割合</a:t>
+              <a:t>メッセージの開封率</a:t>
             </a:r>
             <a:endParaRPr sz="1250" b="1" dirty="0">
               <a:solidFill>
@@ -3245,7 +3245,7 @@
               </a:spcAft>
             </a:pPr>
             <a:r>
-              <a:rPr sz="2600" b="1" dirty="0" err="1">
+              <a:rPr sz="3200" b="1" dirty="0" err="1">
                 <a:solidFill>
                   <a:srgbClr val="1F285A"/>
                 </a:solidFill>
@@ -3253,7 +3253,7 @@
                 <a:ea typeface="メイリオ"/>
                 <a:cs typeface="メイリオ"/>
               </a:rPr>
-              <a:t>2〜3割</a:t>
+              <a:t>約70%</a:t>
             </a:r>
             <a:endParaRPr sz="1250" b="1" dirty="0">
               <a:solidFill>
@@ -3282,7 +3282,7 @@
                 <a:ea typeface="メイリオ"/>
                 <a:cs typeface="メイリオ"/>
               </a:rPr>
-              <a:t>面談を予約したユーザーのうち</a:t>
+              <a:t>LINE通知メッセージの配信後</a:t>
             </a:r>
             <a:endParaRPr sz="1250" b="1" dirty="0">
               <a:solidFill>
@@ -3303,8 +3303,8 @@
         </p:nvSpPr>
         <p:spPr>
           <a:xfrm>
-            <a:off x="3708000" y="2592000"/>
-            <a:ext cx="2484000" cy="1296000"/>
+            <a:off x="5022000" y="2592000"/>
+            <a:ext cx="3798000" cy="1296000"/>
           </a:xfrm>
           <a:prstGeom prst="roundRect">
             <a:avLst>
@@ -3381,7 +3381,7 @@
                 <a:ea typeface="メイリオ"/>
                 <a:cs typeface="メイリオ"/>
               </a:rPr>
-              <a:t>申込み直後のLINEは、よく読まれる</a:t>
+              <a:t>読まれるだけでなく、クリックもされる</a:t>
             </a:r>
             <a:endParaRPr sz="1250" b="1" dirty="0">
               <a:solidFill>
@@ -3402,8 +3402,8 @@
         </p:nvSpPr>
         <p:spPr>
           <a:xfrm>
-            <a:off x="3708000" y="3924000"/>
-            <a:ext cx="2484000" cy="1475999"/>
+            <a:off x="5022000" y="3924000"/>
+            <a:ext cx="3798000" cy="1475999"/>
           </a:xfrm>
           <a:prstGeom prst="roundRect">
             <a:avLst>
@@ -3451,7 +3451,7 @@
                 <a:ea typeface="メイリオ"/>
                 <a:cs typeface="メイリオ"/>
               </a:rPr>
-              <a:t>メッセージの開封率</a:t>
+              <a:t>クリック率</a:t>
             </a:r>
             <a:endParaRPr sz="1250" b="1" dirty="0">
               <a:solidFill>
@@ -3472,7 +3472,7 @@
               </a:spcAft>
             </a:pPr>
             <a:r>
-              <a:rPr sz="2600" b="1" dirty="0" err="1">
+              <a:rPr sz="3200" b="1" dirty="0" err="1">
                 <a:solidFill>
                   <a:srgbClr val="1F285A"/>
                 </a:solidFill>
@@ -3480,7 +3480,7 @@
                 <a:ea typeface="メイリオ"/>
                 <a:cs typeface="メイリオ"/>
               </a:rPr>
-              <a:t>約70%</a:t>
+              <a:t>約5倍</a:t>
             </a:r>
             <a:endParaRPr sz="1250" b="1" dirty="0">
               <a:solidFill>
@@ -3509,7 +3509,7 @@
                 <a:ea typeface="メイリオ"/>
                 <a:cs typeface="メイリオ"/>
               </a:rPr>
-              <a:t>LINE通知メッセージの配信後</a:t>
+              <a:t>メルマガのクリック率との比較</a:t>
             </a:r>
             <a:endParaRPr sz="1250" b="1" dirty="0">
               <a:solidFill>
@@ -3524,234 +3524,7 @@
       </p:sp>
       <p:sp>
         <p:nvSpPr>
-          <p:cNvPr id="11" name="Rounded Rectangle 12"/>
-          <p:cNvSpPr/>
-          <p:nvPr/>
-        </p:nvSpPr>
-        <p:spPr>
-          <a:xfrm>
-            <a:off x="6336000" y="2592000"/>
-            <a:ext cx="2484000" cy="1296000"/>
-          </a:xfrm>
-          <a:prstGeom prst="roundRect">
-            <a:avLst>
-              <a:gd name="adj" fmla="val 6000"/>
-            </a:avLst>
-          </a:prstGeom>
-          <a:noFill/>
-          <a:ln w="19050">
-            <a:noFill/>
-          </a:ln>
-          <a:effectLst/>
-        </p:spPr>
-        <p:style>
-          <a:lnRef idx="1">
-            <a:schemeClr val="accent1"/>
-          </a:lnRef>
-          <a:fillRef idx="3">
-            <a:schemeClr val="accent1"/>
-          </a:fillRef>
-          <a:effectRef idx="0">
-            <a:schemeClr val="accent1"/>
-          </a:effectRef>
-          <a:fontRef idx="minor">
-            <a:schemeClr val="lt1"/>
-          </a:fontRef>
-        </p:style>
-        <p:txBody>
-          <a:bodyPr wrap="square" lIns="180000" tIns="72000" rIns="180000" bIns="36000" rtlCol="0" anchor="t"/>
-          <a:lstStyle/>
-          <a:p>
-            <a:pPr algn="l">
-              <a:lnSpc>
-                <a:spcPct val="130000"/>
-              </a:lnSpc>
-              <a:spcAft>
-                <a:spcPts val="600"/>
-              </a:spcAft>
-            </a:pPr>
-            <a:r>
-              <a:rPr sz="1500" b="1" dirty="0" err="1">
-                <a:solidFill>
-                  <a:srgbClr val="333333"/>
-                </a:solidFill>
-                <a:latin typeface="メイリオ"/>
-                <a:ea typeface="メイリオ"/>
-                <a:cs typeface="メイリオ"/>
-              </a:rPr>
-              <a:t>バス会社</a:t>
-            </a:r>
-            <a:endParaRPr sz="1250" b="1" dirty="0">
-              <a:solidFill>
-                <a:srgbClr val="1F285A"/>
-              </a:solidFill>
-              <a:latin typeface="メイリオ"/>
-              <a:ea typeface="メイリオ"/>
-              <a:cs typeface="メイリオ"/>
-            </a:endParaRPr>
-          </a:p>
-          <a:p>
-            <a:pPr algn="l">
-              <a:lnSpc>
-                <a:spcPct val="130000"/>
-              </a:lnSpc>
-              <a:spcAft>
-                <a:spcPts val="0"/>
-              </a:spcAft>
-            </a:pPr>
-            <a:r>
-              <a:rPr sz="1300" b="0" dirty="0" err="1">
-                <a:solidFill>
-                  <a:srgbClr val="333333"/>
-                </a:solidFill>
-                <a:latin typeface="メイリオ"/>
-                <a:ea typeface="メイリオ"/>
-                <a:cs typeface="メイリオ"/>
-              </a:rPr>
-              <a:t>読まれるだけでなく、クリックもされる</a:t>
-            </a:r>
-            <a:endParaRPr sz="1250" b="1" dirty="0">
-              <a:solidFill>
-                <a:srgbClr val="1F285A"/>
-              </a:solidFill>
-              <a:latin typeface="メイリオ"/>
-              <a:ea typeface="メイリオ"/>
-              <a:cs typeface="メイリオ"/>
-            </a:endParaRPr>
-          </a:p>
-        </p:txBody>
-      </p:sp>
-      <p:sp>
-        <p:nvSpPr>
-          <p:cNvPr id="12" name="Rounded Rectangle 12"/>
-          <p:cNvSpPr/>
-          <p:nvPr/>
-        </p:nvSpPr>
-        <p:spPr>
-          <a:xfrm>
-            <a:off x="6336000" y="3924000"/>
-            <a:ext cx="2484000" cy="1475999"/>
-          </a:xfrm>
-          <a:prstGeom prst="roundRect">
-            <a:avLst>
-              <a:gd name="adj" fmla="val 6000"/>
-            </a:avLst>
-          </a:prstGeom>
-          <a:noFill/>
-          <a:ln w="19050">
-            <a:noFill/>
-          </a:ln>
-          <a:effectLst/>
-        </p:spPr>
-        <p:style>
-          <a:lnRef idx="1">
-            <a:schemeClr val="accent1"/>
-          </a:lnRef>
-          <a:fillRef idx="3">
-            <a:schemeClr val="accent1"/>
-          </a:fillRef>
-          <a:effectRef idx="0">
-            <a:schemeClr val="accent1"/>
-          </a:effectRef>
-          <a:fontRef idx="minor">
-            <a:schemeClr val="lt1"/>
-          </a:fontRef>
-        </p:style>
-        <p:txBody>
-          <a:bodyPr wrap="square" lIns="180000" tIns="72000" rIns="180000" bIns="36000" rtlCol="0" anchor="t"/>
-          <a:lstStyle/>
-          <a:p>
-            <a:pPr algn="l">
-              <a:lnSpc>
-                <a:spcPct val="130000"/>
-              </a:lnSpc>
-              <a:spcAft>
-                <a:spcPts val="400"/>
-              </a:spcAft>
-            </a:pPr>
-            <a:r>
-              <a:rPr sz="1300" b="0" dirty="0" err="1">
-                <a:solidFill>
-                  <a:srgbClr val="333333"/>
-                </a:solidFill>
-                <a:latin typeface="メイリオ"/>
-                <a:ea typeface="メイリオ"/>
-                <a:cs typeface="メイリオ"/>
-              </a:rPr>
-              <a:t>クリック率</a:t>
-            </a:r>
-            <a:endParaRPr sz="1250" b="1" dirty="0">
-              <a:solidFill>
-                <a:srgbClr val="1F285A"/>
-              </a:solidFill>
-              <a:latin typeface="メイリオ"/>
-              <a:ea typeface="メイリオ"/>
-              <a:cs typeface="メイリオ"/>
-            </a:endParaRPr>
-          </a:p>
-          <a:p>
-            <a:pPr algn="l">
-              <a:lnSpc>
-                <a:spcPct val="130000"/>
-              </a:lnSpc>
-              <a:spcAft>
-                <a:spcPts val="200"/>
-              </a:spcAft>
-            </a:pPr>
-            <a:r>
-              <a:rPr sz="2600" b="1" dirty="0" err="1">
-                <a:solidFill>
-                  <a:srgbClr val="1F285A"/>
-                </a:solidFill>
-                <a:latin typeface="メイリオ"/>
-                <a:ea typeface="メイリオ"/>
-                <a:cs typeface="メイリオ"/>
-              </a:rPr>
-              <a:t>約5倍</a:t>
-            </a:r>
-            <a:endParaRPr sz="1250" b="1" dirty="0">
-              <a:solidFill>
-                <a:srgbClr val="1F285A"/>
-              </a:solidFill>
-              <a:latin typeface="メイリオ"/>
-              <a:ea typeface="メイリオ"/>
-              <a:cs typeface="メイリオ"/>
-            </a:endParaRPr>
-          </a:p>
-          <a:p>
-            <a:pPr algn="l">
-              <a:lnSpc>
-                <a:spcPct val="130000"/>
-              </a:lnSpc>
-              <a:spcAft>
-                <a:spcPts val="0"/>
-              </a:spcAft>
-            </a:pPr>
-            <a:r>
-              <a:rPr sz="1100" b="0" dirty="0" err="1">
-                <a:solidFill>
-                  <a:srgbClr val="7F7F7F"/>
-                </a:solidFill>
-                <a:latin typeface="メイリオ"/>
-                <a:ea typeface="メイリオ"/>
-                <a:cs typeface="メイリオ"/>
-              </a:rPr>
-              <a:t>メルマガのクリック率との比較</a:t>
-            </a:r>
-            <a:endParaRPr sz="1250" b="1" dirty="0">
-              <a:solidFill>
-                <a:srgbClr val="1F285A"/>
-              </a:solidFill>
-              <a:latin typeface="メイリオ"/>
-              <a:ea typeface="メイリオ"/>
-              <a:cs typeface="メイリオ"/>
-            </a:endParaRPr>
-          </a:p>
-        </p:txBody>
-      </p:sp>
-      <p:sp>
-        <p:nvSpPr>
-          <p:cNvPr id="13" name="Rounded Rectangle 4"/>
+          <p:cNvPr id="11" name="Rounded Rectangle 4"/>
           <p:cNvSpPr/>
           <p:nvPr/>
         </p:nvSpPr>
@@ -4429,7 +4202,7 @@
         <p:spPr>
           <a:xfrm>
             <a:off x="1080000" y="2448000"/>
-            <a:ext cx="2484000" cy="1296000"/>
+            <a:ext cx="3798000" cy="1296000"/>
           </a:xfrm>
           <a:prstGeom prst="roundRect">
             <a:avLst>
@@ -4528,7 +4301,7 @@
         <p:spPr>
           <a:xfrm>
             <a:off x="1080000" y="3780000"/>
-            <a:ext cx="2484000" cy="1800000"/>
+            <a:ext cx="3798000" cy="1800000"/>
           </a:xfrm>
           <a:prstGeom prst="roundRect">
             <a:avLst>
@@ -4597,7 +4370,7 @@
               </a:spcAft>
             </a:pPr>
             <a:r>
-              <a:rPr sz="2000" b="1" dirty="0" err="1">
+              <a:rPr sz="3200" b="1" dirty="0" err="1">
                 <a:solidFill>
                   <a:srgbClr val="1F285A"/>
                 </a:solidFill>
@@ -4655,8 +4428,8 @@
         </p:nvSpPr>
         <p:spPr>
           <a:xfrm>
-            <a:off x="3708000" y="2448000"/>
-            <a:ext cx="2484000" cy="1296000"/>
+            <a:off x="5022000" y="2448000"/>
+            <a:ext cx="3798000" cy="1296000"/>
           </a:xfrm>
           <a:prstGeom prst="roundRect">
             <a:avLst>
@@ -4704,7 +4477,7 @@
                 <a:ea typeface="メイリオ"/>
                 <a:cs typeface="メイリオ"/>
               </a:rPr>
-              <a:t>保険相談</a:t>
+              <a:t>美容室</a:t>
             </a:r>
             <a:endParaRPr sz="1250" b="1" dirty="0">
               <a:solidFill>
@@ -4733,7 +4506,7 @@
                 <a:ea typeface="メイリオ"/>
                 <a:cs typeface="メイリオ"/>
               </a:rPr>
-              <a:t>予約日時のリマインドを、LINE通知メッセージで配信</a:t>
+              <a:t>次回予約のリマインドをLINEで自動通知</a:t>
             </a:r>
             <a:endParaRPr sz="1250" b="1" dirty="0">
               <a:solidFill>
@@ -4754,8 +4527,8 @@
         </p:nvSpPr>
         <p:spPr>
           <a:xfrm>
-            <a:off x="3708000" y="3780000"/>
-            <a:ext cx="2484000" cy="1800000"/>
+            <a:off x="5022000" y="3780000"/>
+            <a:ext cx="3798000" cy="1800000"/>
           </a:xfrm>
           <a:prstGeom prst="roundRect">
             <a:avLst>
@@ -4803,7 +4576,7 @@
                 <a:ea typeface="メイリオ"/>
                 <a:cs typeface="メイリオ"/>
               </a:rPr>
-              <a:t>予約からの面談実施率</a:t>
+              <a:t>次回予約客数</a:t>
             </a:r>
             <a:endParaRPr sz="1250" b="1" dirty="0">
               <a:solidFill>
@@ -4824,7 +4597,7 @@
               </a:spcAft>
             </a:pPr>
             <a:r>
-              <a:rPr sz="2000" b="1" dirty="0" err="1">
+              <a:rPr sz="3200" b="1" dirty="0" err="1">
                 <a:solidFill>
                   <a:srgbClr val="1F285A"/>
                 </a:solidFill>
@@ -4832,7 +4605,7 @@
                 <a:ea typeface="メイリオ"/>
                 <a:cs typeface="メイリオ"/>
               </a:rPr>
-              <a:t>5ポイント増</a:t>
+              <a:t>20%増</a:t>
             </a:r>
             <a:endParaRPr sz="1250" b="1" dirty="0">
               <a:solidFill>
@@ -4861,7 +4634,7 @@
                 <a:ea typeface="メイリオ"/>
                 <a:cs typeface="メイリオ"/>
               </a:rPr>
-              <a:t>予約100件あたり、面談が5件増</a:t>
+              <a:t>約200→240名。リピート率も88→91%（導入前後の半年比較。LINEミニアプリを併用）</a:t>
             </a:r>
             <a:endParaRPr sz="1250" b="1" dirty="0">
               <a:solidFill>
@@ -4876,234 +4649,7 @@
       </p:sp>
       <p:sp>
         <p:nvSpPr>
-          <p:cNvPr id="17" name="Rounded Rectangle 12"/>
-          <p:cNvSpPr/>
-          <p:nvPr/>
-        </p:nvSpPr>
-        <p:spPr>
-          <a:xfrm>
-            <a:off x="6336000" y="2448000"/>
-            <a:ext cx="2484000" cy="1296000"/>
-          </a:xfrm>
-          <a:prstGeom prst="roundRect">
-            <a:avLst>
-              <a:gd name="adj" fmla="val 6000"/>
-            </a:avLst>
-          </a:prstGeom>
-          <a:noFill/>
-          <a:ln w="19050">
-            <a:noFill/>
-          </a:ln>
-          <a:effectLst/>
-        </p:spPr>
-        <p:style>
-          <a:lnRef idx="1">
-            <a:schemeClr val="accent1"/>
-          </a:lnRef>
-          <a:fillRef idx="3">
-            <a:schemeClr val="accent1"/>
-          </a:fillRef>
-          <a:effectRef idx="0">
-            <a:schemeClr val="accent1"/>
-          </a:effectRef>
-          <a:fontRef idx="minor">
-            <a:schemeClr val="lt1"/>
-          </a:fontRef>
-        </p:style>
-        <p:txBody>
-          <a:bodyPr wrap="square" lIns="180000" tIns="72000" rIns="180000" bIns="36000" rtlCol="0" anchor="t"/>
-          <a:lstStyle/>
-          <a:p>
-            <a:pPr algn="l">
-              <a:lnSpc>
-                <a:spcPct val="130000"/>
-              </a:lnSpc>
-              <a:spcAft>
-                <a:spcPts val="600"/>
-              </a:spcAft>
-            </a:pPr>
-            <a:r>
-              <a:rPr sz="1500" b="1" dirty="0" err="1">
-                <a:solidFill>
-                  <a:srgbClr val="333333"/>
-                </a:solidFill>
-                <a:latin typeface="メイリオ"/>
-                <a:ea typeface="メイリオ"/>
-                <a:cs typeface="メイリオ"/>
-              </a:rPr>
-              <a:t>美容室</a:t>
-            </a:r>
-            <a:endParaRPr sz="1250" b="1" dirty="0">
-              <a:solidFill>
-                <a:srgbClr val="1F285A"/>
-              </a:solidFill>
-              <a:latin typeface="メイリオ"/>
-              <a:ea typeface="メイリオ"/>
-              <a:cs typeface="メイリオ"/>
-            </a:endParaRPr>
-          </a:p>
-          <a:p>
-            <a:pPr algn="l">
-              <a:lnSpc>
-                <a:spcPct val="130000"/>
-              </a:lnSpc>
-              <a:spcAft>
-                <a:spcPts val="0"/>
-              </a:spcAft>
-            </a:pPr>
-            <a:r>
-              <a:rPr sz="1300" b="0" dirty="0" err="1">
-                <a:solidFill>
-                  <a:srgbClr val="333333"/>
-                </a:solidFill>
-                <a:latin typeface="メイリオ"/>
-                <a:ea typeface="メイリオ"/>
-                <a:cs typeface="メイリオ"/>
-              </a:rPr>
-              <a:t>次回予約のリマインドをLINEで自動通知</a:t>
-            </a:r>
-            <a:endParaRPr sz="1250" b="1" dirty="0">
-              <a:solidFill>
-                <a:srgbClr val="1F285A"/>
-              </a:solidFill>
-              <a:latin typeface="メイリオ"/>
-              <a:ea typeface="メイリオ"/>
-              <a:cs typeface="メイリオ"/>
-            </a:endParaRPr>
-          </a:p>
-        </p:txBody>
-      </p:sp>
-      <p:sp>
-        <p:nvSpPr>
-          <p:cNvPr id="18" name="Rounded Rectangle 12"/>
-          <p:cNvSpPr/>
-          <p:nvPr/>
-        </p:nvSpPr>
-        <p:spPr>
-          <a:xfrm>
-            <a:off x="6336000" y="3780000"/>
-            <a:ext cx="2484000" cy="1800000"/>
-          </a:xfrm>
-          <a:prstGeom prst="roundRect">
-            <a:avLst>
-              <a:gd name="adj" fmla="val 6000"/>
-            </a:avLst>
-          </a:prstGeom>
-          <a:noFill/>
-          <a:ln w="19050">
-            <a:noFill/>
-          </a:ln>
-          <a:effectLst/>
-        </p:spPr>
-        <p:style>
-          <a:lnRef idx="1">
-            <a:schemeClr val="accent1"/>
-          </a:lnRef>
-          <a:fillRef idx="3">
-            <a:schemeClr val="accent1"/>
-          </a:fillRef>
-          <a:effectRef idx="0">
-            <a:schemeClr val="accent1"/>
-          </a:effectRef>
-          <a:fontRef idx="minor">
-            <a:schemeClr val="lt1"/>
-          </a:fontRef>
-        </p:style>
-        <p:txBody>
-          <a:bodyPr wrap="square" lIns="180000" tIns="72000" rIns="180000" bIns="36000" rtlCol="0" anchor="t"/>
-          <a:lstStyle/>
-          <a:p>
-            <a:pPr algn="l">
-              <a:lnSpc>
-                <a:spcPct val="130000"/>
-              </a:lnSpc>
-              <a:spcAft>
-                <a:spcPts val="400"/>
-              </a:spcAft>
-            </a:pPr>
-            <a:r>
-              <a:rPr sz="1300" b="0" dirty="0" err="1">
-                <a:solidFill>
-                  <a:srgbClr val="333333"/>
-                </a:solidFill>
-                <a:latin typeface="メイリオ"/>
-                <a:ea typeface="メイリオ"/>
-                <a:cs typeface="メイリオ"/>
-              </a:rPr>
-              <a:t>次回予約客数</a:t>
-            </a:r>
-            <a:endParaRPr sz="1250" b="1" dirty="0">
-              <a:solidFill>
-                <a:srgbClr val="1F285A"/>
-              </a:solidFill>
-              <a:latin typeface="メイリオ"/>
-              <a:ea typeface="メイリオ"/>
-              <a:cs typeface="メイリオ"/>
-            </a:endParaRPr>
-          </a:p>
-          <a:p>
-            <a:pPr algn="l">
-              <a:lnSpc>
-                <a:spcPct val="130000"/>
-              </a:lnSpc>
-              <a:spcAft>
-                <a:spcPts val="200"/>
-              </a:spcAft>
-            </a:pPr>
-            <a:r>
-              <a:rPr sz="2000" b="1" dirty="0" err="1">
-                <a:solidFill>
-                  <a:srgbClr val="1F285A"/>
-                </a:solidFill>
-                <a:latin typeface="メイリオ"/>
-                <a:ea typeface="メイリオ"/>
-                <a:cs typeface="メイリオ"/>
-              </a:rPr>
-              <a:t>約200→240名</a:t>
-            </a:r>
-            <a:endParaRPr sz="1250" b="1" dirty="0">
-              <a:solidFill>
-                <a:srgbClr val="1F285A"/>
-              </a:solidFill>
-              <a:latin typeface="メイリオ"/>
-              <a:ea typeface="メイリオ"/>
-              <a:cs typeface="メイリオ"/>
-            </a:endParaRPr>
-          </a:p>
-          <a:p>
-            <a:pPr algn="l">
-              <a:lnSpc>
-                <a:spcPct val="130000"/>
-              </a:lnSpc>
-              <a:spcAft>
-                <a:spcPts val="0"/>
-              </a:spcAft>
-            </a:pPr>
-            <a:r>
-              <a:rPr sz="1100" b="0" dirty="0" err="1">
-                <a:solidFill>
-                  <a:srgbClr val="7F7F7F"/>
-                </a:solidFill>
-                <a:latin typeface="メイリオ"/>
-                <a:ea typeface="メイリオ"/>
-                <a:cs typeface="メイリオ"/>
-              </a:rPr>
-              <a:t>リピート率も88→91%（導入前後の半年比較。LINEミニアプリを併用）</a:t>
-            </a:r>
-            <a:endParaRPr sz="1250" b="1" dirty="0">
-              <a:solidFill>
-                <a:srgbClr val="1F285A"/>
-              </a:solidFill>
-              <a:latin typeface="メイリオ"/>
-              <a:ea typeface="メイリオ"/>
-              <a:cs typeface="メイリオ"/>
-            </a:endParaRPr>
-          </a:p>
-        </p:txBody>
-      </p:sp>
-      <p:sp>
-        <p:nvSpPr>
-          <p:cNvPr id="19" name="Rounded Rectangle 4"/>
+          <p:cNvPr id="17" name="Rounded Rectangle 4"/>
           <p:cNvSpPr/>
           <p:nvPr/>
         </p:nvSpPr>
@@ -6160,7 +5706,7 @@
                 <a:ea typeface="メイリオ"/>
                 <a:cs typeface="メイリオ"/>
               </a:rPr>
-              <a:t>LINE経由の問い合わせの面談予約率</a:t>
+              <a:t>LINEで問い合わせた方のうち</a:t>
             </a:r>
             <a:endParaRPr sz="1250" b="1" dirty="0">
               <a:solidFill>
@@ -6218,7 +5764,7 @@
                 <a:ea typeface="メイリオ"/>
                 <a:cs typeface="メイリオ"/>
               </a:rPr>
-              <a:t>他のチャネルと比べて高い</a:t>
+              <a:t>が、面談を予約（他のチャネルと比べて高い）</a:t>
             </a:r>
             <a:endParaRPr sz="1250" b="1" dirty="0">
               <a:solidFill>

--- a/20261002_サンクスLINEのご提案_事例入り.pptx
+++ b/20261002_サンクスLINEのご提案_事例入り.pptx
@@ -3077,7 +3077,7 @@
         <p:spPr>
           <a:xfrm>
             <a:off x="1080000" y="2592000"/>
-            <a:ext cx="3798000" cy="1296000"/>
+            <a:ext cx="7740000" cy="936000"/>
           </a:xfrm>
           <a:prstGeom prst="roundRect">
             <a:avLst>
@@ -3154,7 +3154,7 @@
                 <a:ea typeface="メイリオ"/>
                 <a:cs typeface="メイリオ"/>
               </a:rPr>
-              <a:t>申込み直後のLINEは、よく読まれる</a:t>
+              <a:t>申込み直後のLINE通知メッセージは、よく読まれ、クリックもされる</a:t>
             </a:r>
             <a:endParaRPr sz="1250" b="1" dirty="0">
               <a:solidFill>
@@ -3175,8 +3175,8 @@
         </p:nvSpPr>
         <p:spPr>
           <a:xfrm>
-            <a:off x="1080000" y="3924000"/>
-            <a:ext cx="3798000" cy="1475999"/>
+            <a:off x="1080000" y="3600000"/>
+            <a:ext cx="3798000" cy="1764000"/>
           </a:xfrm>
           <a:prstGeom prst="roundRect">
             <a:avLst>
@@ -3303,8 +3303,8 @@
         </p:nvSpPr>
         <p:spPr>
           <a:xfrm>
-            <a:off x="5022000" y="2592000"/>
-            <a:ext cx="3798000" cy="1296000"/>
+            <a:off x="5022000" y="3600000"/>
+            <a:ext cx="3798000" cy="1764000"/>
           </a:xfrm>
           <a:prstGeom prst="roundRect">
             <a:avLst>
@@ -3340,11 +3340,11 @@
                 <a:spcPct val="130000"/>
               </a:lnSpc>
               <a:spcAft>
-                <a:spcPts val="600"/>
+                <a:spcPts val="400"/>
               </a:spcAft>
             </a:pPr>
             <a:r>
-              <a:rPr sz="1500" b="1" dirty="0" err="1">
+              <a:rPr sz="1300" b="0" dirty="0" err="1">
                 <a:solidFill>
                   <a:srgbClr val="333333"/>
                 </a:solidFill>
@@ -3352,7 +3352,7 @@
                 <a:ea typeface="メイリオ"/>
                 <a:cs typeface="メイリオ"/>
               </a:rPr>
-              <a:t>バス会社</a:t>
+              <a:t>クリック率</a:t>
             </a:r>
             <a:endParaRPr sz="1250" b="1" dirty="0">
               <a:solidFill>
@@ -3369,19 +3369,19 @@
                 <a:spcPct val="130000"/>
               </a:lnSpc>
               <a:spcAft>
-                <a:spcPts val="0"/>
+                <a:spcPts val="200"/>
               </a:spcAft>
             </a:pPr>
             <a:r>
-              <a:rPr sz="1300" b="0" dirty="0" err="1">
-                <a:solidFill>
-                  <a:srgbClr val="333333"/>
+              <a:rPr sz="3200" b="1" dirty="0" err="1">
+                <a:solidFill>
+                  <a:srgbClr val="1F285A"/>
                 </a:solidFill>
                 <a:latin typeface="メイリオ"/>
                 <a:ea typeface="メイリオ"/>
                 <a:cs typeface="メイリオ"/>
               </a:rPr>
-              <a:t>読まれるだけでなく、クリックもされる</a:t>
+              <a:t>約5倍</a:t>
             </a:r>
             <a:endParaRPr sz="1250" b="1" dirty="0">
               <a:solidFill>
@@ -3392,66 +3392,25 @@
               <a:cs typeface="メイリオ"/>
             </a:endParaRPr>
           </a:p>
-        </p:txBody>
-      </p:sp>
-      <p:sp>
-        <p:nvSpPr>
-          <p:cNvPr id="10" name="Rounded Rectangle 12"/>
-          <p:cNvSpPr/>
-          <p:nvPr/>
-        </p:nvSpPr>
-        <p:spPr>
-          <a:xfrm>
-            <a:off x="5022000" y="3924000"/>
-            <a:ext cx="3798000" cy="1475999"/>
-          </a:xfrm>
-          <a:prstGeom prst="roundRect">
-            <a:avLst>
-              <a:gd name="adj" fmla="val 6000"/>
-            </a:avLst>
-          </a:prstGeom>
-          <a:noFill/>
-          <a:ln w="19050">
-            <a:noFill/>
-          </a:ln>
-          <a:effectLst/>
-        </p:spPr>
-        <p:style>
-          <a:lnRef idx="1">
-            <a:schemeClr val="accent1"/>
-          </a:lnRef>
-          <a:fillRef idx="3">
-            <a:schemeClr val="accent1"/>
-          </a:fillRef>
-          <a:effectRef idx="0">
-            <a:schemeClr val="accent1"/>
-          </a:effectRef>
-          <a:fontRef idx="minor">
-            <a:schemeClr val="lt1"/>
-          </a:fontRef>
-        </p:style>
-        <p:txBody>
-          <a:bodyPr wrap="square" lIns="180000" tIns="72000" rIns="180000" bIns="36000" rtlCol="0" anchor="t"/>
-          <a:lstStyle/>
           <a:p>
             <a:pPr algn="l">
               <a:lnSpc>
                 <a:spcPct val="130000"/>
               </a:lnSpc>
               <a:spcAft>
-                <a:spcPts val="400"/>
+                <a:spcPts val="0"/>
               </a:spcAft>
             </a:pPr>
             <a:r>
-              <a:rPr sz="1300" b="0" dirty="0" err="1">
-                <a:solidFill>
-                  <a:srgbClr val="333333"/>
+              <a:rPr sz="1100" b="0" dirty="0" err="1">
+                <a:solidFill>
+                  <a:srgbClr val="7F7F7F"/>
                 </a:solidFill>
                 <a:latin typeface="メイリオ"/>
                 <a:ea typeface="メイリオ"/>
                 <a:cs typeface="メイリオ"/>
               </a:rPr>
-              <a:t>クリック率</a:t>
+              <a:t>メルマガのクリック率との比較</a:t>
             </a:r>
             <a:endParaRPr sz="1250" b="1" dirty="0">
               <a:solidFill>
@@ -3462,69 +3421,11 @@
               <a:cs typeface="メイリオ"/>
             </a:endParaRPr>
           </a:p>
-          <a:p>
-            <a:pPr algn="l">
-              <a:lnSpc>
-                <a:spcPct val="130000"/>
-              </a:lnSpc>
-              <a:spcAft>
-                <a:spcPts val="200"/>
-              </a:spcAft>
-            </a:pPr>
-            <a:r>
-              <a:rPr sz="3200" b="1" dirty="0" err="1">
-                <a:solidFill>
-                  <a:srgbClr val="1F285A"/>
-                </a:solidFill>
-                <a:latin typeface="メイリオ"/>
-                <a:ea typeface="メイリオ"/>
-                <a:cs typeface="メイリオ"/>
-              </a:rPr>
-              <a:t>約5倍</a:t>
-            </a:r>
-            <a:endParaRPr sz="1250" b="1" dirty="0">
-              <a:solidFill>
-                <a:srgbClr val="1F285A"/>
-              </a:solidFill>
-              <a:latin typeface="メイリオ"/>
-              <a:ea typeface="メイリオ"/>
-              <a:cs typeface="メイリオ"/>
-            </a:endParaRPr>
-          </a:p>
-          <a:p>
-            <a:pPr algn="l">
-              <a:lnSpc>
-                <a:spcPct val="130000"/>
-              </a:lnSpc>
-              <a:spcAft>
-                <a:spcPts val="0"/>
-              </a:spcAft>
-            </a:pPr>
-            <a:r>
-              <a:rPr sz="1100" b="0" dirty="0" err="1">
-                <a:solidFill>
-                  <a:srgbClr val="7F7F7F"/>
-                </a:solidFill>
-                <a:latin typeface="メイリオ"/>
-                <a:ea typeface="メイリオ"/>
-                <a:cs typeface="メイリオ"/>
-              </a:rPr>
-              <a:t>メルマガのクリック率との比較</a:t>
-            </a:r>
-            <a:endParaRPr sz="1250" b="1" dirty="0">
-              <a:solidFill>
-                <a:srgbClr val="1F285A"/>
-              </a:solidFill>
-              <a:latin typeface="メイリオ"/>
-              <a:ea typeface="メイリオ"/>
-              <a:cs typeface="メイリオ"/>
-            </a:endParaRPr>
-          </a:p>
         </p:txBody>
       </p:sp>
       <p:sp>
         <p:nvSpPr>
-          <p:cNvPr id="11" name="Rounded Rectangle 4"/>
+          <p:cNvPr id="10" name="Rounded Rectangle 4"/>
           <p:cNvSpPr/>
           <p:nvPr/>
         </p:nvSpPr>

--- a/20261002_サンクスLINEのご提案_事例入り.pptx
+++ b/20261002_サンクスLINEのご提案_事例入り.pptx
@@ -3649,7 +3649,7 @@
         </p:nvSpPr>
         <p:spPr>
           <a:xfrm>
-            <a:off x="1080000" y="1655999"/>
+            <a:off x="1080000" y="1728000"/>
             <a:ext cx="1655999" cy="612000"/>
           </a:xfrm>
           <a:prstGeom prst="roundRect">
@@ -3723,7 +3723,7 @@
         </p:nvSpPr>
         <p:spPr>
           <a:xfrm>
-            <a:off x="2754000" y="1817999"/>
+            <a:off x="2754000" y="1889999"/>
             <a:ext cx="324000" cy="288000"/>
           </a:xfrm>
           <a:prstGeom prst="rightArrow">
@@ -3772,7 +3772,7 @@
         </p:nvSpPr>
         <p:spPr>
           <a:xfrm>
-            <a:off x="3096000" y="1655999"/>
+            <a:off x="3096000" y="1728000"/>
             <a:ext cx="1655999" cy="612000"/>
           </a:xfrm>
           <a:prstGeom prst="roundRect">
@@ -3851,7 +3851,7 @@
         </p:nvSpPr>
         <p:spPr>
           <a:xfrm>
-            <a:off x="4770000" y="1817999"/>
+            <a:off x="4770000" y="1889999"/>
             <a:ext cx="324000" cy="288000"/>
           </a:xfrm>
           <a:prstGeom prst="rightArrow">
@@ -3900,7 +3900,7 @@
         </p:nvSpPr>
         <p:spPr>
           <a:xfrm>
-            <a:off x="5112000" y="1655999"/>
+            <a:off x="5112000" y="1728000"/>
             <a:ext cx="1655999" cy="612000"/>
           </a:xfrm>
           <a:prstGeom prst="roundRect">
@@ -3979,7 +3979,7 @@
         </p:nvSpPr>
         <p:spPr>
           <a:xfrm>
-            <a:off x="6785999" y="1817999"/>
+            <a:off x="6785999" y="1889999"/>
             <a:ext cx="324000" cy="288000"/>
           </a:xfrm>
           <a:prstGeom prst="rightArrow">
@@ -4028,7 +4028,7 @@
         </p:nvSpPr>
         <p:spPr>
           <a:xfrm>
-            <a:off x="7127999" y="1655999"/>
+            <a:off x="7127999" y="1728000"/>
             <a:ext cx="1655999" cy="612000"/>
           </a:xfrm>
           <a:prstGeom prst="roundRect">
@@ -4102,7 +4102,7 @@
         </p:nvSpPr>
         <p:spPr>
           <a:xfrm>
-            <a:off x="1080000" y="2448000"/>
+            <a:off x="1080000" y="2628000"/>
             <a:ext cx="3798000" cy="1296000"/>
           </a:xfrm>
           <a:prstGeom prst="roundRect">
@@ -4201,8 +4201,8 @@
         </p:nvSpPr>
         <p:spPr>
           <a:xfrm>
-            <a:off x="1080000" y="3780000"/>
-            <a:ext cx="3798000" cy="1800000"/>
+            <a:off x="1080000" y="3960000"/>
+            <a:ext cx="3798000" cy="1548000"/>
           </a:xfrm>
           <a:prstGeom prst="roundRect">
             <a:avLst>
@@ -4329,7 +4329,7 @@
         </p:nvSpPr>
         <p:spPr>
           <a:xfrm>
-            <a:off x="5022000" y="2448000"/>
+            <a:off x="5022000" y="2628000"/>
             <a:ext cx="3798000" cy="1296000"/>
           </a:xfrm>
           <a:prstGeom prst="roundRect">
@@ -4428,8 +4428,8 @@
         </p:nvSpPr>
         <p:spPr>
           <a:xfrm>
-            <a:off x="5022000" y="3780000"/>
-            <a:ext cx="3798000" cy="1800000"/>
+            <a:off x="5022000" y="3960000"/>
+            <a:ext cx="3798000" cy="1548000"/>
           </a:xfrm>
           <a:prstGeom prst="roundRect">
             <a:avLst>

--- a/20261002_サンクスLINEのご提案_事例入り.pptx
+++ b/20261002_サンクスLINEのご提案_事例入り.pptx
@@ -2890,8 +2890,8 @@
         </p:nvSpPr>
         <p:spPr>
           <a:xfrm>
-            <a:off x="547200" y="161078"/>
-            <a:ext cx="8784000" cy="289843"/>
+            <a:off x="547200" y="136800"/>
+            <a:ext cx="8784000" cy="338400"/>
           </a:xfrm>
           <a:prstGeom prst="rect">
             <a:avLst/>
@@ -3076,8 +3076,8 @@
         </p:nvSpPr>
         <p:spPr>
           <a:xfrm>
-            <a:off x="1080000" y="2592000"/>
-            <a:ext cx="7740000" cy="936000"/>
+            <a:off x="1080000" y="2628000"/>
+            <a:ext cx="7740000" cy="1296000"/>
           </a:xfrm>
           <a:prstGeom prst="roundRect">
             <a:avLst>
@@ -3175,8 +3175,8 @@
         </p:nvSpPr>
         <p:spPr>
           <a:xfrm>
-            <a:off x="1080000" y="3600000"/>
-            <a:ext cx="3798000" cy="1764000"/>
+            <a:off x="1080000" y="3960000"/>
+            <a:ext cx="3798000" cy="1548000"/>
           </a:xfrm>
           <a:prstGeom prst="roundRect">
             <a:avLst>
@@ -3303,8 +3303,8 @@
         </p:nvSpPr>
         <p:spPr>
           <a:xfrm>
-            <a:off x="5022000" y="3600000"/>
-            <a:ext cx="3798000" cy="1764000"/>
+            <a:off x="5022000" y="3960000"/>
+            <a:ext cx="3798000" cy="1548000"/>
           </a:xfrm>
           <a:prstGeom prst="roundRect">
             <a:avLst>
@@ -3431,7 +3431,7 @@
         </p:nvSpPr>
         <p:spPr>
           <a:xfrm>
-            <a:off x="1080000" y="5580000"/>
+            <a:off x="1080000" y="5652000"/>
             <a:ext cx="7740000" cy="432000"/>
           </a:xfrm>
           <a:prstGeom prst="roundRect">

--- a/20261002_サンクスLINEのご提案_事例入り.pptx
+++ b/20261002_サンクスLINEのご提案_事例入り.pptx
@@ -3077,7 +3077,7 @@
         <p:spPr>
           <a:xfrm>
             <a:off x="1080000" y="2628000"/>
-            <a:ext cx="7740000" cy="1296000"/>
+            <a:ext cx="2484000" cy="1296000"/>
           </a:xfrm>
           <a:prstGeom prst="roundRect">
             <a:avLst>
@@ -3125,7 +3125,7 @@
                 <a:ea typeface="メイリオ"/>
                 <a:cs typeface="メイリオ"/>
               </a:rPr>
-              <a:t>バス会社</a:t>
+              <a:t>つながる</a:t>
             </a:r>
             <a:endParaRPr sz="1250" b="1" dirty="0">
               <a:solidFill>
@@ -3154,7 +3154,7 @@
                 <a:ea typeface="メイリオ"/>
                 <a:cs typeface="メイリオ"/>
               </a:rPr>
-              <a:t>申込み直後のLINE通知メッセージは、よく読まれ、クリックもされる</a:t>
+              <a:t>申込み完了の画面は、関心が一番高い瞬間</a:t>
             </a:r>
             <a:endParaRPr sz="1250" b="1" dirty="0">
               <a:solidFill>
@@ -3176,7 +3176,7 @@
         <p:spPr>
           <a:xfrm>
             <a:off x="1080000" y="3960000"/>
-            <a:ext cx="3798000" cy="1548000"/>
+            <a:ext cx="2484000" cy="1548000"/>
           </a:xfrm>
           <a:prstGeom prst="roundRect">
             <a:avLst>
@@ -3224,7 +3224,7 @@
                 <a:ea typeface="メイリオ"/>
                 <a:cs typeface="メイリオ"/>
               </a:rPr>
-              <a:t>メッセージの開封率</a:t>
+              <a:t>友だち追加のタイミング</a:t>
             </a:r>
             <a:endParaRPr sz="1250" b="1" dirty="0">
               <a:solidFill>
@@ -3245,7 +3245,7 @@
               </a:spcAft>
             </a:pPr>
             <a:r>
-              <a:rPr sz="3200" b="1" dirty="0" err="1">
+              <a:rPr sz="2000" b="1" dirty="0" err="1">
                 <a:solidFill>
                   <a:srgbClr val="1F285A"/>
                 </a:solidFill>
@@ -3253,7 +3253,7 @@
                 <a:ea typeface="メイリオ"/>
                 <a:cs typeface="メイリオ"/>
               </a:rPr>
-              <a:t>約70%</a:t>
+              <a:t>申込み直後</a:t>
             </a:r>
             <a:endParaRPr sz="1250" b="1" dirty="0">
               <a:solidFill>
@@ -3282,7 +3282,7 @@
                 <a:ea typeface="メイリオ"/>
                 <a:cs typeface="メイリオ"/>
               </a:rPr>
-              <a:t>LINE通知メッセージの配信後</a:t>
+              <a:t>完了画面からLINEへ移行</a:t>
             </a:r>
             <a:endParaRPr sz="1250" b="1" dirty="0">
               <a:solidFill>
@@ -3303,8 +3303,8 @@
         </p:nvSpPr>
         <p:spPr>
           <a:xfrm>
-            <a:off x="5022000" y="3960000"/>
-            <a:ext cx="3798000" cy="1548000"/>
+            <a:off x="3708000" y="2628000"/>
+            <a:ext cx="2484000" cy="1296000"/>
           </a:xfrm>
           <a:prstGeom prst="roundRect">
             <a:avLst>
@@ -3340,11 +3340,11 @@
                 <a:spcPct val="130000"/>
               </a:lnSpc>
               <a:spcAft>
-                <a:spcPts val="400"/>
+                <a:spcPts val="600"/>
               </a:spcAft>
             </a:pPr>
             <a:r>
-              <a:rPr sz="1300" b="0" dirty="0" err="1">
+              <a:rPr sz="1500" b="1" dirty="0" err="1">
                 <a:solidFill>
                   <a:srgbClr val="333333"/>
                 </a:solidFill>
@@ -3352,7 +3352,7 @@
                 <a:ea typeface="メイリオ"/>
                 <a:cs typeface="メイリオ"/>
               </a:rPr>
-              <a:t>クリック率</a:t>
+              <a:t>読まれる</a:t>
             </a:r>
             <a:endParaRPr sz="1250" b="1" dirty="0">
               <a:solidFill>
@@ -3369,19 +3369,19 @@
                 <a:spcPct val="130000"/>
               </a:lnSpc>
               <a:spcAft>
-                <a:spcPts val="200"/>
+                <a:spcPts val="0"/>
               </a:spcAft>
             </a:pPr>
             <a:r>
-              <a:rPr sz="3200" b="1" dirty="0" err="1">
-                <a:solidFill>
-                  <a:srgbClr val="1F285A"/>
+              <a:rPr sz="1300" b="0" dirty="0" err="1">
+                <a:solidFill>
+                  <a:srgbClr val="333333"/>
                 </a:solidFill>
                 <a:latin typeface="メイリオ"/>
                 <a:ea typeface="メイリオ"/>
                 <a:cs typeface="メイリオ"/>
               </a:rPr>
-              <a:t>約5倍</a:t>
+              <a:t>バス会社：申込み直後のLINE通知メッセージは、よく読まれる</a:t>
             </a:r>
             <a:endParaRPr sz="1250" b="1" dirty="0">
               <a:solidFill>
@@ -3392,6 +3392,105 @@
               <a:cs typeface="メイリオ"/>
             </a:endParaRPr>
           </a:p>
+        </p:txBody>
+      </p:sp>
+      <p:sp>
+        <p:nvSpPr>
+          <p:cNvPr id="10" name="Rounded Rectangle 12"/>
+          <p:cNvSpPr/>
+          <p:nvPr/>
+        </p:nvSpPr>
+        <p:spPr>
+          <a:xfrm>
+            <a:off x="3708000" y="3960000"/>
+            <a:ext cx="2484000" cy="1548000"/>
+          </a:xfrm>
+          <a:prstGeom prst="roundRect">
+            <a:avLst>
+              <a:gd name="adj" fmla="val 6000"/>
+            </a:avLst>
+          </a:prstGeom>
+          <a:noFill/>
+          <a:ln w="19050">
+            <a:noFill/>
+          </a:ln>
+          <a:effectLst/>
+        </p:spPr>
+        <p:style>
+          <a:lnRef idx="1">
+            <a:schemeClr val="accent1"/>
+          </a:lnRef>
+          <a:fillRef idx="3">
+            <a:schemeClr val="accent1"/>
+          </a:fillRef>
+          <a:effectRef idx="0">
+            <a:schemeClr val="accent1"/>
+          </a:effectRef>
+          <a:fontRef idx="minor">
+            <a:schemeClr val="lt1"/>
+          </a:fontRef>
+        </p:style>
+        <p:txBody>
+          <a:bodyPr wrap="square" lIns="180000" tIns="72000" rIns="180000" bIns="36000" rtlCol="0" anchor="t"/>
+          <a:lstStyle/>
+          <a:p>
+            <a:pPr algn="l">
+              <a:lnSpc>
+                <a:spcPct val="130000"/>
+              </a:lnSpc>
+              <a:spcAft>
+                <a:spcPts val="400"/>
+              </a:spcAft>
+            </a:pPr>
+            <a:r>
+              <a:rPr sz="1300" b="0" dirty="0" err="1">
+                <a:solidFill>
+                  <a:srgbClr val="333333"/>
+                </a:solidFill>
+                <a:latin typeface="メイリオ"/>
+                <a:ea typeface="メイリオ"/>
+                <a:cs typeface="メイリオ"/>
+              </a:rPr>
+              <a:t>メッセージの開封率</a:t>
+            </a:r>
+            <a:endParaRPr sz="1250" b="1" dirty="0">
+              <a:solidFill>
+                <a:srgbClr val="1F285A"/>
+              </a:solidFill>
+              <a:latin typeface="メイリオ"/>
+              <a:ea typeface="メイリオ"/>
+              <a:cs typeface="メイリオ"/>
+            </a:endParaRPr>
+          </a:p>
+          <a:p>
+            <a:pPr algn="l">
+              <a:lnSpc>
+                <a:spcPct val="130000"/>
+              </a:lnSpc>
+              <a:spcAft>
+                <a:spcPts val="200"/>
+              </a:spcAft>
+            </a:pPr>
+            <a:r>
+              <a:rPr sz="2000" b="1" dirty="0" err="1">
+                <a:solidFill>
+                  <a:srgbClr val="1F285A"/>
+                </a:solidFill>
+                <a:latin typeface="メイリオ"/>
+                <a:ea typeface="メイリオ"/>
+                <a:cs typeface="メイリオ"/>
+              </a:rPr>
+              <a:t>約70%</a:t>
+            </a:r>
+            <a:endParaRPr sz="1250" b="1" dirty="0">
+              <a:solidFill>
+                <a:srgbClr val="1F285A"/>
+              </a:solidFill>
+              <a:latin typeface="メイリオ"/>
+              <a:ea typeface="メイリオ"/>
+              <a:cs typeface="メイリオ"/>
+            </a:endParaRPr>
+          </a:p>
           <a:p>
             <a:pPr algn="l">
               <a:lnSpc>
@@ -3410,7 +3509,7 @@
                 <a:ea typeface="メイリオ"/>
                 <a:cs typeface="メイリオ"/>
               </a:rPr>
-              <a:t>メルマガのクリック率との比較</a:t>
+              <a:t>クリック率はメルマガの約5倍</a:t>
             </a:r>
             <a:endParaRPr sz="1250" b="1" dirty="0">
               <a:solidFill>
@@ -3425,7 +3524,234 @@
       </p:sp>
       <p:sp>
         <p:nvSpPr>
-          <p:cNvPr id="10" name="Rounded Rectangle 4"/>
+          <p:cNvPr id="11" name="Rounded Rectangle 12"/>
+          <p:cNvSpPr/>
+          <p:nvPr/>
+        </p:nvSpPr>
+        <p:spPr>
+          <a:xfrm>
+            <a:off x="6336000" y="2628000"/>
+            <a:ext cx="2484000" cy="1296000"/>
+          </a:xfrm>
+          <a:prstGeom prst="roundRect">
+            <a:avLst>
+              <a:gd name="adj" fmla="val 6000"/>
+            </a:avLst>
+          </a:prstGeom>
+          <a:noFill/>
+          <a:ln w="19050">
+            <a:noFill/>
+          </a:ln>
+          <a:effectLst/>
+        </p:spPr>
+        <p:style>
+          <a:lnRef idx="1">
+            <a:schemeClr val="accent1"/>
+          </a:lnRef>
+          <a:fillRef idx="3">
+            <a:schemeClr val="accent1"/>
+          </a:fillRef>
+          <a:effectRef idx="0">
+            <a:schemeClr val="accent1"/>
+          </a:effectRef>
+          <a:fontRef idx="minor">
+            <a:schemeClr val="lt1"/>
+          </a:fontRef>
+        </p:style>
+        <p:txBody>
+          <a:bodyPr wrap="square" lIns="180000" tIns="72000" rIns="180000" bIns="36000" rtlCol="0" anchor="t"/>
+          <a:lstStyle/>
+          <a:p>
+            <a:pPr algn="l">
+              <a:lnSpc>
+                <a:spcPct val="130000"/>
+              </a:lnSpc>
+              <a:spcAft>
+                <a:spcPts val="600"/>
+              </a:spcAft>
+            </a:pPr>
+            <a:r>
+              <a:rPr sz="1500" b="1" dirty="0" err="1">
+                <a:solidFill>
+                  <a:srgbClr val="333333"/>
+                </a:solidFill>
+                <a:latin typeface="メイリオ"/>
+                <a:ea typeface="メイリオ"/>
+                <a:cs typeface="メイリオ"/>
+              </a:rPr>
+              <a:t>動く</a:t>
+            </a:r>
+            <a:endParaRPr sz="1250" b="1" dirty="0">
+              <a:solidFill>
+                <a:srgbClr val="1F285A"/>
+              </a:solidFill>
+              <a:latin typeface="メイリオ"/>
+              <a:ea typeface="メイリオ"/>
+              <a:cs typeface="メイリオ"/>
+            </a:endParaRPr>
+          </a:p>
+          <a:p>
+            <a:pPr algn="l">
+              <a:lnSpc>
+                <a:spcPct val="130000"/>
+              </a:lnSpc>
+              <a:spcAft>
+                <a:spcPts val="0"/>
+              </a:spcAft>
+            </a:pPr>
+            <a:r>
+              <a:rPr sz="1300" b="0" dirty="0" err="1">
+                <a:solidFill>
+                  <a:srgbClr val="333333"/>
+                </a:solidFill>
+                <a:latin typeface="メイリオ"/>
+                <a:ea typeface="メイリオ"/>
+                <a:cs typeface="メイリオ"/>
+              </a:rPr>
+              <a:t>美容クリニック：予約確認・前日のお知らせをLINEで配信</a:t>
+            </a:r>
+            <a:endParaRPr sz="1250" b="1" dirty="0">
+              <a:solidFill>
+                <a:srgbClr val="1F285A"/>
+              </a:solidFill>
+              <a:latin typeface="メイリオ"/>
+              <a:ea typeface="メイリオ"/>
+              <a:cs typeface="メイリオ"/>
+            </a:endParaRPr>
+          </a:p>
+        </p:txBody>
+      </p:sp>
+      <p:sp>
+        <p:nvSpPr>
+          <p:cNvPr id="12" name="Rounded Rectangle 12"/>
+          <p:cNvSpPr/>
+          <p:nvPr/>
+        </p:nvSpPr>
+        <p:spPr>
+          <a:xfrm>
+            <a:off x="6336000" y="3960000"/>
+            <a:ext cx="2484000" cy="1548000"/>
+          </a:xfrm>
+          <a:prstGeom prst="roundRect">
+            <a:avLst>
+              <a:gd name="adj" fmla="val 6000"/>
+            </a:avLst>
+          </a:prstGeom>
+          <a:noFill/>
+          <a:ln w="19050">
+            <a:noFill/>
+          </a:ln>
+          <a:effectLst/>
+        </p:spPr>
+        <p:style>
+          <a:lnRef idx="1">
+            <a:schemeClr val="accent1"/>
+          </a:lnRef>
+          <a:fillRef idx="3">
+            <a:schemeClr val="accent1"/>
+          </a:fillRef>
+          <a:effectRef idx="0">
+            <a:schemeClr val="accent1"/>
+          </a:effectRef>
+          <a:fontRef idx="minor">
+            <a:schemeClr val="lt1"/>
+          </a:fontRef>
+        </p:style>
+        <p:txBody>
+          <a:bodyPr wrap="square" lIns="180000" tIns="72000" rIns="180000" bIns="36000" rtlCol="0" anchor="t"/>
+          <a:lstStyle/>
+          <a:p>
+            <a:pPr algn="l">
+              <a:lnSpc>
+                <a:spcPct val="130000"/>
+              </a:lnSpc>
+              <a:spcAft>
+                <a:spcPts val="400"/>
+              </a:spcAft>
+            </a:pPr>
+            <a:r>
+              <a:rPr sz="1300" b="0" dirty="0" err="1">
+                <a:solidFill>
+                  <a:srgbClr val="333333"/>
+                </a:solidFill>
+                <a:latin typeface="メイリオ"/>
+                <a:ea typeface="メイリオ"/>
+                <a:cs typeface="メイリオ"/>
+              </a:rPr>
+              <a:t>予約後の来院率</a:t>
+            </a:r>
+            <a:endParaRPr sz="1250" b="1" dirty="0">
+              <a:solidFill>
+                <a:srgbClr val="1F285A"/>
+              </a:solidFill>
+              <a:latin typeface="メイリオ"/>
+              <a:ea typeface="メイリオ"/>
+              <a:cs typeface="メイリオ"/>
+            </a:endParaRPr>
+          </a:p>
+          <a:p>
+            <a:pPr algn="l">
+              <a:lnSpc>
+                <a:spcPct val="130000"/>
+              </a:lnSpc>
+              <a:spcAft>
+                <a:spcPts val="200"/>
+              </a:spcAft>
+            </a:pPr>
+            <a:r>
+              <a:rPr sz="2000" b="1" dirty="0" err="1">
+                <a:solidFill>
+                  <a:srgbClr val="1F285A"/>
+                </a:solidFill>
+                <a:latin typeface="メイリオ"/>
+                <a:ea typeface="メイリオ"/>
+                <a:cs typeface="メイリオ"/>
+              </a:rPr>
+              <a:t>40〜50%改善</a:t>
+            </a:r>
+            <a:endParaRPr sz="1250" b="1" dirty="0">
+              <a:solidFill>
+                <a:srgbClr val="1F285A"/>
+              </a:solidFill>
+              <a:latin typeface="メイリオ"/>
+              <a:ea typeface="メイリオ"/>
+              <a:cs typeface="メイリオ"/>
+            </a:endParaRPr>
+          </a:p>
+          <a:p>
+            <a:pPr algn="l">
+              <a:lnSpc>
+                <a:spcPct val="130000"/>
+              </a:lnSpc>
+              <a:spcAft>
+                <a:spcPts val="0"/>
+              </a:spcAft>
+            </a:pPr>
+            <a:r>
+              <a:rPr sz="1100" b="0" dirty="0" err="1">
+                <a:solidFill>
+                  <a:srgbClr val="7F7F7F"/>
+                </a:solidFill>
+                <a:latin typeface="メイリオ"/>
+                <a:ea typeface="メイリオ"/>
+                <a:cs typeface="メイリオ"/>
+              </a:rPr>
+              <a:t/>
+            </a:r>
+            <a:endParaRPr sz="1250" b="1" dirty="0">
+              <a:solidFill>
+                <a:srgbClr val="1F285A"/>
+              </a:solidFill>
+              <a:latin typeface="メイリオ"/>
+              <a:ea typeface="メイリオ"/>
+              <a:cs typeface="メイリオ"/>
+            </a:endParaRPr>
+          </a:p>
+        </p:txBody>
+      </p:sp>
+      <p:sp>
+        <p:nvSpPr>
+          <p:cNvPr id="13" name="Rounded Rectangle 4"/>
           <p:cNvSpPr/>
           <p:nvPr/>
         </p:nvSpPr>
@@ -11212,8 +11538,8 @@
         </p:nvSpPr>
         <p:spPr>
           <a:xfrm>
-            <a:off x="115187" y="5639542"/>
-            <a:ext cx="5785781" cy="461665"/>
+            <a:off x="0" y="5639542"/>
+            <a:ext cx="5971903" cy="523220"/>
           </a:xfrm>
           <a:prstGeom prst="rect">
             <a:avLst/>
@@ -11232,7 +11558,7 @@
           <a:p>
             <a:pPr algn="ctr"/>
             <a:r>
-              <a:rPr lang="ja-JP" altLang="ja-JP" sz="1200" dirty="0">
+              <a:rPr lang="ja-JP" altLang="ja-JP" sz="1400" dirty="0">
                 <a:latin typeface="メイリオ" panose="020B0604030504040204" pitchFamily="50" charset="-128"/>
                 <a:ea typeface="メイリオ" panose="020B0604030504040204" pitchFamily="50" charset="-128"/>
                 <a:cs typeface="メイリオ"/>
@@ -11240,7 +11566,7 @@
               <a:t>高開封率のLINEに誘導</a:t>
             </a:r>
             <a:r>
-              <a:rPr lang="ja-JP" altLang="en-US" sz="1200" dirty="0">
+              <a:rPr lang="ja-JP" altLang="en-US" sz="1400" dirty="0">
                 <a:latin typeface="メイリオ" panose="020B0604030504040204" pitchFamily="50" charset="-128"/>
                 <a:ea typeface="メイリオ" panose="020B0604030504040204" pitchFamily="50" charset="-128"/>
                 <a:cs typeface="メイリオ"/>
@@ -11248,14 +11574,14 @@
               <a:t>して</a:t>
             </a:r>
             <a:r>
-              <a:rPr lang="ja-JP" altLang="ja-JP" sz="1200" dirty="0">
+              <a:rPr lang="ja-JP" altLang="ja-JP" sz="1400" dirty="0">
                 <a:latin typeface="メイリオ" panose="020B0604030504040204" pitchFamily="50" charset="-128"/>
                 <a:ea typeface="メイリオ" panose="020B0604030504040204" pitchFamily="50" charset="-128"/>
                 <a:cs typeface="メイリオ"/>
               </a:rPr>
               <a:t>反響→実売上への引上げ率、リピート率改善。</a:t>
             </a:r>
-            <a:endParaRPr lang="en-US" altLang="ja-JP" sz="1200" dirty="0">
+            <a:endParaRPr lang="en-US" altLang="ja-JP" sz="1400" dirty="0">
               <a:latin typeface="メイリオ" panose="020B0604030504040204" pitchFamily="50" charset="-128"/>
               <a:ea typeface="メイリオ" panose="020B0604030504040204" pitchFamily="50" charset="-128"/>
               <a:cs typeface="メイリオ"/>
@@ -11264,7 +11590,7 @@
           <a:p>
             <a:pPr algn="ctr"/>
             <a:r>
-              <a:rPr lang="ja-JP" altLang="ja-JP" sz="1200" dirty="0" b="1">
+              <a:rPr lang="ja-JP" altLang="ja-JP" sz="1400" b="1" dirty="0">
                 <a:solidFill>
                   <a:srgbClr val="1F285A"/>
                 </a:solidFill>
@@ -11274,7 +11600,7 @@
               </a:rPr>
               <a:t>美容クリニックでは、予約後来院率が40〜50%改善</a:t>
             </a:r>
-            <a:endParaRPr lang="ja-JP" altLang="en-US" sz="1200" dirty="0">
+            <a:endParaRPr lang="ja-JP" altLang="en-US" sz="1400" dirty="0">
               <a:latin typeface="メイリオ" panose="020B0604030504040204" pitchFamily="50" charset="-128"/>
               <a:ea typeface="メイリオ" panose="020B0604030504040204" pitchFamily="50" charset="-128"/>
               <a:cs typeface="メイリオ"/>

--- a/20261002_サンクスLINEのご提案_事例入り.pptx
+++ b/20261002_サンクスLINEのご提案_事例入り.pptx
@@ -3011,8 +3011,8 @@
         </p:nvSpPr>
         <p:spPr>
           <a:xfrm>
-            <a:off x="1080000" y="1620000"/>
-            <a:ext cx="7740000" cy="792000"/>
+            <a:off x="1080000" y="1512000"/>
+            <a:ext cx="7740000" cy="1044000"/>
           </a:xfrm>
           <a:prstGeom prst="rect">
             <a:avLst/>
@@ -3030,11 +3030,11 @@
                 <a:spcPct val="115000"/>
               </a:lnSpc>
               <a:spcAft>
-                <a:spcPts val="600"/>
+                <a:spcPts val="400"/>
               </a:spcAft>
             </a:pPr>
             <a:r>
-              <a:rPr sz="1800" b="1">
+              <a:rPr sz="1700" b="1">
                 <a:solidFill>
                   <a:srgbClr val="1F285A"/>
                 </a:solidFill>
@@ -3051,11 +3051,11 @@
                 <a:spcPct val="115000"/>
               </a:lnSpc>
               <a:spcAft>
-                <a:spcPts val="600"/>
+                <a:spcPts val="400"/>
               </a:spcAft>
             </a:pPr>
             <a:r>
-              <a:rPr sz="1800" b="1">
+              <a:rPr sz="1700" b="1">
                 <a:solidFill>
                   <a:srgbClr val="1F285A"/>
                 </a:solidFill>
@@ -3064,6 +3064,27 @@
                 <a:cs typeface="メイリオ"/>
               </a:rPr>
               <a:t>広告費を増やしても、この離脱層は減らない。</a:t>
+            </a:r>
+          </a:p>
+          <a:p>
+            <a:pPr algn="l">
+              <a:lnSpc>
+                <a:spcPct val="115000"/>
+              </a:lnSpc>
+              <a:spcAft>
+                <a:spcPts val="400"/>
+              </a:spcAft>
+            </a:pPr>
+            <a:r>
+              <a:rPr sz="1700" b="1">
+                <a:solidFill>
+                  <a:srgbClr val="1F285A"/>
+                </a:solidFill>
+                <a:latin typeface="メイリオ"/>
+                <a:ea typeface="メイリオ"/>
+                <a:cs typeface="メイリオ"/>
+              </a:rPr>
+              <a:t>申込み完了の画面は、関心が一番高い瞬間。ここでLINEにつなげる。</a:t>
             </a:r>
           </a:p>
         </p:txBody>
@@ -3077,7 +3098,7 @@
         <p:spPr>
           <a:xfrm>
             <a:off x="1080000" y="2628000"/>
-            <a:ext cx="2484000" cy="1296000"/>
+            <a:ext cx="3798000" cy="1296000"/>
           </a:xfrm>
           <a:prstGeom prst="roundRect">
             <a:avLst>
@@ -3125,7 +3146,7 @@
                 <a:ea typeface="メイリオ"/>
                 <a:cs typeface="メイリオ"/>
               </a:rPr>
-              <a:t>つながる</a:t>
+              <a:t>読まれる</a:t>
             </a:r>
             <a:endParaRPr sz="1250" b="1" dirty="0">
               <a:solidFill>
@@ -3154,7 +3175,7 @@
                 <a:ea typeface="メイリオ"/>
                 <a:cs typeface="メイリオ"/>
               </a:rPr>
-              <a:t>申込み完了の画面は、関心が一番高い瞬間</a:t>
+              <a:t>バス会社：申込み直後のLINE通知メッセージは、よく読まれ、クリックもされる</a:t>
             </a:r>
             <a:endParaRPr sz="1250" b="1" dirty="0">
               <a:solidFill>
@@ -3176,7 +3197,7 @@
         <p:spPr>
           <a:xfrm>
             <a:off x="1080000" y="3960000"/>
-            <a:ext cx="2484000" cy="1548000"/>
+            <a:ext cx="3798000" cy="1548000"/>
           </a:xfrm>
           <a:prstGeom prst="roundRect">
             <a:avLst>
@@ -3224,7 +3245,7 @@
                 <a:ea typeface="メイリオ"/>
                 <a:cs typeface="メイリオ"/>
               </a:rPr>
-              <a:t>友だち追加のタイミング</a:t>
+              <a:t>メッセージの開封率</a:t>
             </a:r>
             <a:endParaRPr sz="1250" b="1" dirty="0">
               <a:solidFill>
@@ -3245,7 +3266,7 @@
               </a:spcAft>
             </a:pPr>
             <a:r>
-              <a:rPr sz="2000" b="1" dirty="0" err="1">
+              <a:rPr sz="3200" b="1" dirty="0" err="1">
                 <a:solidFill>
                   <a:srgbClr val="1F285A"/>
                 </a:solidFill>
@@ -3253,7 +3274,7 @@
                 <a:ea typeface="メイリオ"/>
                 <a:cs typeface="メイリオ"/>
               </a:rPr>
-              <a:t>申込み直後</a:t>
+              <a:t>約70%</a:t>
             </a:r>
             <a:endParaRPr sz="1250" b="1" dirty="0">
               <a:solidFill>
@@ -3282,7 +3303,7 @@
                 <a:ea typeface="メイリオ"/>
                 <a:cs typeface="メイリオ"/>
               </a:rPr>
-              <a:t>完了画面からLINEへ移行</a:t>
+              <a:t>クリック率はメルマガの約5倍</a:t>
             </a:r>
             <a:endParaRPr sz="1250" b="1" dirty="0">
               <a:solidFill>
@@ -3303,8 +3324,8 @@
         </p:nvSpPr>
         <p:spPr>
           <a:xfrm>
-            <a:off x="3708000" y="2628000"/>
-            <a:ext cx="2484000" cy="1296000"/>
+            <a:off x="5022000" y="2628000"/>
+            <a:ext cx="3798000" cy="1296000"/>
           </a:xfrm>
           <a:prstGeom prst="roundRect">
             <a:avLst>
@@ -3352,7 +3373,7 @@
                 <a:ea typeface="メイリオ"/>
                 <a:cs typeface="メイリオ"/>
               </a:rPr>
-              <a:t>読まれる</a:t>
+              <a:t>動く</a:t>
             </a:r>
             <a:endParaRPr sz="1250" b="1" dirty="0">
               <a:solidFill>
@@ -3381,7 +3402,7 @@
                 <a:ea typeface="メイリオ"/>
                 <a:cs typeface="メイリオ"/>
               </a:rPr>
-              <a:t>バス会社：申込み直後のLINE通知メッセージは、よく読まれる</a:t>
+              <a:t>美容クリニック：予約完了画面からLINEへ誘導し、予約確認・前日のお知らせを配信</a:t>
             </a:r>
             <a:endParaRPr sz="1250" b="1" dirty="0">
               <a:solidFill>
@@ -3402,8 +3423,8 @@
         </p:nvSpPr>
         <p:spPr>
           <a:xfrm>
-            <a:off x="3708000" y="3960000"/>
-            <a:ext cx="2484000" cy="1548000"/>
+            <a:off x="5022000" y="3960000"/>
+            <a:ext cx="3798000" cy="1548000"/>
           </a:xfrm>
           <a:prstGeom prst="roundRect">
             <a:avLst>
@@ -3451,7 +3472,7 @@
                 <a:ea typeface="メイリオ"/>
                 <a:cs typeface="メイリオ"/>
               </a:rPr>
-              <a:t>メッセージの開封率</a:t>
+              <a:t>予約後の来院率</a:t>
             </a:r>
             <a:endParaRPr sz="1250" b="1" dirty="0">
               <a:solidFill>
@@ -3472,7 +3493,7 @@
               </a:spcAft>
             </a:pPr>
             <a:r>
-              <a:rPr sz="2000" b="1" dirty="0" err="1">
+              <a:rPr sz="3200" b="1" dirty="0" err="1">
                 <a:solidFill>
                   <a:srgbClr val="1F285A"/>
                 </a:solidFill>
@@ -3480,7 +3501,7 @@
                 <a:ea typeface="メイリオ"/>
                 <a:cs typeface="メイリオ"/>
               </a:rPr>
-              <a:t>約70%</a:t>
+              <a:t>40〜50%改善</a:t>
             </a:r>
             <a:endParaRPr sz="1250" b="1" dirty="0">
               <a:solidFill>
@@ -3509,7 +3530,7 @@
                 <a:ea typeface="メイリオ"/>
                 <a:cs typeface="メイリオ"/>
               </a:rPr>
-              <a:t>クリック率はメルマガの約5倍</a:t>
+              <a:t/>
             </a:r>
             <a:endParaRPr sz="1250" b="1" dirty="0">
               <a:solidFill>
@@ -3524,234 +3545,7 @@
       </p:sp>
       <p:sp>
         <p:nvSpPr>
-          <p:cNvPr id="11" name="Rounded Rectangle 12"/>
-          <p:cNvSpPr/>
-          <p:nvPr/>
-        </p:nvSpPr>
-        <p:spPr>
-          <a:xfrm>
-            <a:off x="6336000" y="2628000"/>
-            <a:ext cx="2484000" cy="1296000"/>
-          </a:xfrm>
-          <a:prstGeom prst="roundRect">
-            <a:avLst>
-              <a:gd name="adj" fmla="val 6000"/>
-            </a:avLst>
-          </a:prstGeom>
-          <a:noFill/>
-          <a:ln w="19050">
-            <a:noFill/>
-          </a:ln>
-          <a:effectLst/>
-        </p:spPr>
-        <p:style>
-          <a:lnRef idx="1">
-            <a:schemeClr val="accent1"/>
-          </a:lnRef>
-          <a:fillRef idx="3">
-            <a:schemeClr val="accent1"/>
-          </a:fillRef>
-          <a:effectRef idx="0">
-            <a:schemeClr val="accent1"/>
-          </a:effectRef>
-          <a:fontRef idx="minor">
-            <a:schemeClr val="lt1"/>
-          </a:fontRef>
-        </p:style>
-        <p:txBody>
-          <a:bodyPr wrap="square" lIns="180000" tIns="72000" rIns="180000" bIns="36000" rtlCol="0" anchor="t"/>
-          <a:lstStyle/>
-          <a:p>
-            <a:pPr algn="l">
-              <a:lnSpc>
-                <a:spcPct val="130000"/>
-              </a:lnSpc>
-              <a:spcAft>
-                <a:spcPts val="600"/>
-              </a:spcAft>
-            </a:pPr>
-            <a:r>
-              <a:rPr sz="1500" b="1" dirty="0" err="1">
-                <a:solidFill>
-                  <a:srgbClr val="333333"/>
-                </a:solidFill>
-                <a:latin typeface="メイリオ"/>
-                <a:ea typeface="メイリオ"/>
-                <a:cs typeface="メイリオ"/>
-              </a:rPr>
-              <a:t>動く</a:t>
-            </a:r>
-            <a:endParaRPr sz="1250" b="1" dirty="0">
-              <a:solidFill>
-                <a:srgbClr val="1F285A"/>
-              </a:solidFill>
-              <a:latin typeface="メイリオ"/>
-              <a:ea typeface="メイリオ"/>
-              <a:cs typeface="メイリオ"/>
-            </a:endParaRPr>
-          </a:p>
-          <a:p>
-            <a:pPr algn="l">
-              <a:lnSpc>
-                <a:spcPct val="130000"/>
-              </a:lnSpc>
-              <a:spcAft>
-                <a:spcPts val="0"/>
-              </a:spcAft>
-            </a:pPr>
-            <a:r>
-              <a:rPr sz="1300" b="0" dirty="0" err="1">
-                <a:solidFill>
-                  <a:srgbClr val="333333"/>
-                </a:solidFill>
-                <a:latin typeface="メイリオ"/>
-                <a:ea typeface="メイリオ"/>
-                <a:cs typeface="メイリオ"/>
-              </a:rPr>
-              <a:t>美容クリニック：予約確認・前日のお知らせをLINEで配信</a:t>
-            </a:r>
-            <a:endParaRPr sz="1250" b="1" dirty="0">
-              <a:solidFill>
-                <a:srgbClr val="1F285A"/>
-              </a:solidFill>
-              <a:latin typeface="メイリオ"/>
-              <a:ea typeface="メイリオ"/>
-              <a:cs typeface="メイリオ"/>
-            </a:endParaRPr>
-          </a:p>
-        </p:txBody>
-      </p:sp>
-      <p:sp>
-        <p:nvSpPr>
-          <p:cNvPr id="12" name="Rounded Rectangle 12"/>
-          <p:cNvSpPr/>
-          <p:nvPr/>
-        </p:nvSpPr>
-        <p:spPr>
-          <a:xfrm>
-            <a:off x="6336000" y="3960000"/>
-            <a:ext cx="2484000" cy="1548000"/>
-          </a:xfrm>
-          <a:prstGeom prst="roundRect">
-            <a:avLst>
-              <a:gd name="adj" fmla="val 6000"/>
-            </a:avLst>
-          </a:prstGeom>
-          <a:noFill/>
-          <a:ln w="19050">
-            <a:noFill/>
-          </a:ln>
-          <a:effectLst/>
-        </p:spPr>
-        <p:style>
-          <a:lnRef idx="1">
-            <a:schemeClr val="accent1"/>
-          </a:lnRef>
-          <a:fillRef idx="3">
-            <a:schemeClr val="accent1"/>
-          </a:fillRef>
-          <a:effectRef idx="0">
-            <a:schemeClr val="accent1"/>
-          </a:effectRef>
-          <a:fontRef idx="minor">
-            <a:schemeClr val="lt1"/>
-          </a:fontRef>
-        </p:style>
-        <p:txBody>
-          <a:bodyPr wrap="square" lIns="180000" tIns="72000" rIns="180000" bIns="36000" rtlCol="0" anchor="t"/>
-          <a:lstStyle/>
-          <a:p>
-            <a:pPr algn="l">
-              <a:lnSpc>
-                <a:spcPct val="130000"/>
-              </a:lnSpc>
-              <a:spcAft>
-                <a:spcPts val="400"/>
-              </a:spcAft>
-            </a:pPr>
-            <a:r>
-              <a:rPr sz="1300" b="0" dirty="0" err="1">
-                <a:solidFill>
-                  <a:srgbClr val="333333"/>
-                </a:solidFill>
-                <a:latin typeface="メイリオ"/>
-                <a:ea typeface="メイリオ"/>
-                <a:cs typeface="メイリオ"/>
-              </a:rPr>
-              <a:t>予約後の来院率</a:t>
-            </a:r>
-            <a:endParaRPr sz="1250" b="1" dirty="0">
-              <a:solidFill>
-                <a:srgbClr val="1F285A"/>
-              </a:solidFill>
-              <a:latin typeface="メイリオ"/>
-              <a:ea typeface="メイリオ"/>
-              <a:cs typeface="メイリオ"/>
-            </a:endParaRPr>
-          </a:p>
-          <a:p>
-            <a:pPr algn="l">
-              <a:lnSpc>
-                <a:spcPct val="130000"/>
-              </a:lnSpc>
-              <a:spcAft>
-                <a:spcPts val="200"/>
-              </a:spcAft>
-            </a:pPr>
-            <a:r>
-              <a:rPr sz="2000" b="1" dirty="0" err="1">
-                <a:solidFill>
-                  <a:srgbClr val="1F285A"/>
-                </a:solidFill>
-                <a:latin typeface="メイリオ"/>
-                <a:ea typeface="メイリオ"/>
-                <a:cs typeface="メイリオ"/>
-              </a:rPr>
-              <a:t>40〜50%改善</a:t>
-            </a:r>
-            <a:endParaRPr sz="1250" b="1" dirty="0">
-              <a:solidFill>
-                <a:srgbClr val="1F285A"/>
-              </a:solidFill>
-              <a:latin typeface="メイリオ"/>
-              <a:ea typeface="メイリオ"/>
-              <a:cs typeface="メイリオ"/>
-            </a:endParaRPr>
-          </a:p>
-          <a:p>
-            <a:pPr algn="l">
-              <a:lnSpc>
-                <a:spcPct val="130000"/>
-              </a:lnSpc>
-              <a:spcAft>
-                <a:spcPts val="0"/>
-              </a:spcAft>
-            </a:pPr>
-            <a:r>
-              <a:rPr sz="1100" b="0" dirty="0" err="1">
-                <a:solidFill>
-                  <a:srgbClr val="7F7F7F"/>
-                </a:solidFill>
-                <a:latin typeface="メイリオ"/>
-                <a:ea typeface="メイリオ"/>
-                <a:cs typeface="メイリオ"/>
-              </a:rPr>
-              <a:t/>
-            </a:r>
-            <a:endParaRPr sz="1250" b="1" dirty="0">
-              <a:solidFill>
-                <a:srgbClr val="1F285A"/>
-              </a:solidFill>
-              <a:latin typeface="メイリオ"/>
-              <a:ea typeface="メイリオ"/>
-              <a:cs typeface="メイリオ"/>
-            </a:endParaRPr>
-          </a:p>
-        </p:txBody>
-      </p:sp>
-      <p:sp>
-        <p:nvSpPr>
-          <p:cNvPr id="13" name="Rounded Rectangle 4"/>
+          <p:cNvPr id="11" name="Rounded Rectangle 4"/>
           <p:cNvSpPr/>
           <p:nvPr/>
         </p:nvSpPr>
@@ -4429,7 +4223,7 @@
         <p:spPr>
           <a:xfrm>
             <a:off x="1080000" y="2628000"/>
-            <a:ext cx="3798000" cy="1296000"/>
+            <a:ext cx="7740000" cy="1296000"/>
           </a:xfrm>
           <a:prstGeom prst="roundRect">
             <a:avLst>
@@ -4477,7 +4271,7 @@
                 <a:ea typeface="メイリオ"/>
                 <a:cs typeface="メイリオ"/>
               </a:rPr>
-              <a:t>美容クリニック</a:t>
+              <a:t>美容室</a:t>
             </a:r>
             <a:endParaRPr sz="1250" b="1" dirty="0">
               <a:solidFill>
@@ -4506,7 +4300,7 @@
                 <a:ea typeface="メイリオ"/>
                 <a:cs typeface="メイリオ"/>
               </a:rPr>
-              <a:t>予約完了画面からLINEへ誘導し、予約確認・前日のお知らせを配信</a:t>
+              <a:t>次回予約のリマインドをLINEで自動通知</a:t>
             </a:r>
             <a:endParaRPr sz="1250" b="1" dirty="0">
               <a:solidFill>
@@ -4528,7 +4322,7 @@
         <p:spPr>
           <a:xfrm>
             <a:off x="1080000" y="3960000"/>
-            <a:ext cx="3798000" cy="1548000"/>
+            <a:ext cx="7740000" cy="1548000"/>
           </a:xfrm>
           <a:prstGeom prst="roundRect">
             <a:avLst>
@@ -4576,7 +4370,7 @@
                 <a:ea typeface="メイリオ"/>
                 <a:cs typeface="メイリオ"/>
               </a:rPr>
-              <a:t>予約後の来院率</a:t>
+              <a:t>次回予約客数</a:t>
             </a:r>
             <a:endParaRPr sz="1250" b="1" dirty="0">
               <a:solidFill>
@@ -4605,7 +4399,7 @@
                 <a:ea typeface="メイリオ"/>
                 <a:cs typeface="メイリオ"/>
               </a:rPr>
-              <a:t>40〜50%改善</a:t>
+              <a:t>20%増</a:t>
             </a:r>
             <a:endParaRPr sz="1250" b="1" dirty="0">
               <a:solidFill>
@@ -4634,7 +4428,7 @@
                 <a:ea typeface="メイリオ"/>
                 <a:cs typeface="メイリオ"/>
               </a:rPr>
-              <a:t/>
+              <a:t>約200→240名。リピート率も88→91%（導入前後の半年比較。LINEミニアプリを併用）</a:t>
             </a:r>
             <a:endParaRPr sz="1250" b="1" dirty="0">
               <a:solidFill>
@@ -4649,234 +4443,7 @@
       </p:sp>
       <p:sp>
         <p:nvSpPr>
-          <p:cNvPr id="15" name="Rounded Rectangle 12"/>
-          <p:cNvSpPr/>
-          <p:nvPr/>
-        </p:nvSpPr>
-        <p:spPr>
-          <a:xfrm>
-            <a:off x="5022000" y="2628000"/>
-            <a:ext cx="3798000" cy="1296000"/>
-          </a:xfrm>
-          <a:prstGeom prst="roundRect">
-            <a:avLst>
-              <a:gd name="adj" fmla="val 6000"/>
-            </a:avLst>
-          </a:prstGeom>
-          <a:noFill/>
-          <a:ln w="19050">
-            <a:noFill/>
-          </a:ln>
-          <a:effectLst/>
-        </p:spPr>
-        <p:style>
-          <a:lnRef idx="1">
-            <a:schemeClr val="accent1"/>
-          </a:lnRef>
-          <a:fillRef idx="3">
-            <a:schemeClr val="accent1"/>
-          </a:fillRef>
-          <a:effectRef idx="0">
-            <a:schemeClr val="accent1"/>
-          </a:effectRef>
-          <a:fontRef idx="minor">
-            <a:schemeClr val="lt1"/>
-          </a:fontRef>
-        </p:style>
-        <p:txBody>
-          <a:bodyPr wrap="square" lIns="180000" tIns="72000" rIns="180000" bIns="36000" rtlCol="0" anchor="t"/>
-          <a:lstStyle/>
-          <a:p>
-            <a:pPr algn="l">
-              <a:lnSpc>
-                <a:spcPct val="130000"/>
-              </a:lnSpc>
-              <a:spcAft>
-                <a:spcPts val="600"/>
-              </a:spcAft>
-            </a:pPr>
-            <a:r>
-              <a:rPr sz="1500" b="1" dirty="0" err="1">
-                <a:solidFill>
-                  <a:srgbClr val="333333"/>
-                </a:solidFill>
-                <a:latin typeface="メイリオ"/>
-                <a:ea typeface="メイリオ"/>
-                <a:cs typeface="メイリオ"/>
-              </a:rPr>
-              <a:t>美容室</a:t>
-            </a:r>
-            <a:endParaRPr sz="1250" b="1" dirty="0">
-              <a:solidFill>
-                <a:srgbClr val="1F285A"/>
-              </a:solidFill>
-              <a:latin typeface="メイリオ"/>
-              <a:ea typeface="メイリオ"/>
-              <a:cs typeface="メイリオ"/>
-            </a:endParaRPr>
-          </a:p>
-          <a:p>
-            <a:pPr algn="l">
-              <a:lnSpc>
-                <a:spcPct val="130000"/>
-              </a:lnSpc>
-              <a:spcAft>
-                <a:spcPts val="0"/>
-              </a:spcAft>
-            </a:pPr>
-            <a:r>
-              <a:rPr sz="1300" b="0" dirty="0" err="1">
-                <a:solidFill>
-                  <a:srgbClr val="333333"/>
-                </a:solidFill>
-                <a:latin typeface="メイリオ"/>
-                <a:ea typeface="メイリオ"/>
-                <a:cs typeface="メイリオ"/>
-              </a:rPr>
-              <a:t>次回予約のリマインドをLINEで自動通知</a:t>
-            </a:r>
-            <a:endParaRPr sz="1250" b="1" dirty="0">
-              <a:solidFill>
-                <a:srgbClr val="1F285A"/>
-              </a:solidFill>
-              <a:latin typeface="メイリオ"/>
-              <a:ea typeface="メイリオ"/>
-              <a:cs typeface="メイリオ"/>
-            </a:endParaRPr>
-          </a:p>
-        </p:txBody>
-      </p:sp>
-      <p:sp>
-        <p:nvSpPr>
-          <p:cNvPr id="16" name="Rounded Rectangle 12"/>
-          <p:cNvSpPr/>
-          <p:nvPr/>
-        </p:nvSpPr>
-        <p:spPr>
-          <a:xfrm>
-            <a:off x="5022000" y="3960000"/>
-            <a:ext cx="3798000" cy="1548000"/>
-          </a:xfrm>
-          <a:prstGeom prst="roundRect">
-            <a:avLst>
-              <a:gd name="adj" fmla="val 6000"/>
-            </a:avLst>
-          </a:prstGeom>
-          <a:noFill/>
-          <a:ln w="19050">
-            <a:noFill/>
-          </a:ln>
-          <a:effectLst/>
-        </p:spPr>
-        <p:style>
-          <a:lnRef idx="1">
-            <a:schemeClr val="accent1"/>
-          </a:lnRef>
-          <a:fillRef idx="3">
-            <a:schemeClr val="accent1"/>
-          </a:fillRef>
-          <a:effectRef idx="0">
-            <a:schemeClr val="accent1"/>
-          </a:effectRef>
-          <a:fontRef idx="minor">
-            <a:schemeClr val="lt1"/>
-          </a:fontRef>
-        </p:style>
-        <p:txBody>
-          <a:bodyPr wrap="square" lIns="180000" tIns="72000" rIns="180000" bIns="36000" rtlCol="0" anchor="t"/>
-          <a:lstStyle/>
-          <a:p>
-            <a:pPr algn="l">
-              <a:lnSpc>
-                <a:spcPct val="130000"/>
-              </a:lnSpc>
-              <a:spcAft>
-                <a:spcPts val="400"/>
-              </a:spcAft>
-            </a:pPr>
-            <a:r>
-              <a:rPr sz="1300" b="0" dirty="0" err="1">
-                <a:solidFill>
-                  <a:srgbClr val="333333"/>
-                </a:solidFill>
-                <a:latin typeface="メイリオ"/>
-                <a:ea typeface="メイリオ"/>
-                <a:cs typeface="メイリオ"/>
-              </a:rPr>
-              <a:t>次回予約客数</a:t>
-            </a:r>
-            <a:endParaRPr sz="1250" b="1" dirty="0">
-              <a:solidFill>
-                <a:srgbClr val="1F285A"/>
-              </a:solidFill>
-              <a:latin typeface="メイリオ"/>
-              <a:ea typeface="メイリオ"/>
-              <a:cs typeface="メイリオ"/>
-            </a:endParaRPr>
-          </a:p>
-          <a:p>
-            <a:pPr algn="l">
-              <a:lnSpc>
-                <a:spcPct val="130000"/>
-              </a:lnSpc>
-              <a:spcAft>
-                <a:spcPts val="200"/>
-              </a:spcAft>
-            </a:pPr>
-            <a:r>
-              <a:rPr sz="3200" b="1" dirty="0" err="1">
-                <a:solidFill>
-                  <a:srgbClr val="1F285A"/>
-                </a:solidFill>
-                <a:latin typeface="メイリオ"/>
-                <a:ea typeface="メイリオ"/>
-                <a:cs typeface="メイリオ"/>
-              </a:rPr>
-              <a:t>20%増</a:t>
-            </a:r>
-            <a:endParaRPr sz="1250" b="1" dirty="0">
-              <a:solidFill>
-                <a:srgbClr val="1F285A"/>
-              </a:solidFill>
-              <a:latin typeface="メイリオ"/>
-              <a:ea typeface="メイリオ"/>
-              <a:cs typeface="メイリオ"/>
-            </a:endParaRPr>
-          </a:p>
-          <a:p>
-            <a:pPr algn="l">
-              <a:lnSpc>
-                <a:spcPct val="130000"/>
-              </a:lnSpc>
-              <a:spcAft>
-                <a:spcPts val="0"/>
-              </a:spcAft>
-            </a:pPr>
-            <a:r>
-              <a:rPr sz="1100" b="0" dirty="0" err="1">
-                <a:solidFill>
-                  <a:srgbClr val="7F7F7F"/>
-                </a:solidFill>
-                <a:latin typeface="メイリオ"/>
-                <a:ea typeface="メイリオ"/>
-                <a:cs typeface="メイリオ"/>
-              </a:rPr>
-              <a:t>約200→240名。リピート率も88→91%（導入前後の半年比較。LINEミニアプリを併用）</a:t>
-            </a:r>
-            <a:endParaRPr sz="1250" b="1" dirty="0">
-              <a:solidFill>
-                <a:srgbClr val="1F285A"/>
-              </a:solidFill>
-              <a:latin typeface="メイリオ"/>
-              <a:ea typeface="メイリオ"/>
-              <a:cs typeface="メイリオ"/>
-            </a:endParaRPr>
-          </a:p>
-        </p:txBody>
-      </p:sp>
-      <p:sp>
-        <p:nvSpPr>
-          <p:cNvPr id="17" name="Rounded Rectangle 4"/>
+          <p:cNvPr id="15" name="Rounded Rectangle 4"/>
           <p:cNvSpPr/>
           <p:nvPr/>
         </p:nvSpPr>

--- a/20261002_サンクスLINEのご提案_事例入り.pptx
+++ b/20261002_サンクスLINEのご提案_事例入り.pptx
@@ -12,10 +12,9 @@
     <p:handoutMasterId r:id="rId9"/>
   </p:handoutMasterIdLst>
   <p:sldIdLst>
-    <p:sldId id="3008" r:id="rId7"/>
+    <p:sldId id="3008" r:id="rId14"/>
     <p:sldId id="2971" r:id="rId3"/>
     <p:sldId id="2972" r:id="rId4"/>
-    <p:sldId id="2904" r:id="rId5"/>
     <p:sldId id="3007" r:id="rId6"/>
   </p:sldIdLst>
   <p:sldSz cx="9906000" cy="6858000" type="A4"/>
@@ -2955,7 +2954,33 @@
                 <a:ea typeface="メイリオ"/>
                 <a:cs typeface="メイリオ"/>
               </a:rPr>
-              <a:t>申込みの直後に、LINEでつながる</a:t>
+              <a:t>申込み直後の“熱量が高い瞬間”に、LINEでつながる</a:t>
+            </a:r>
+            <a:endParaRPr sz="1600" dirty="0">
+              <a:solidFill>
+                <a:srgbClr val="333333"/>
+              </a:solidFill>
+              <a:latin typeface="メイリオ"/>
+              <a:ea typeface="メイリオ"/>
+              <a:cs typeface="メイリオ"/>
+            </a:endParaRPr>
+          </a:p>
+          <a:p>
+            <a:pPr algn="l">
+              <a:lnSpc>
+                <a:spcPct val="130000"/>
+              </a:lnSpc>
+            </a:pPr>
+            <a:r>
+              <a:rPr lang="en-US" altLang="ja-JP" sz="1800" dirty="0" b="0">
+                <a:solidFill>
+                  <a:srgbClr val="333333"/>
+                </a:solidFill>
+                <a:latin typeface="メイリオ"/>
+                <a:ea typeface="メイリオ"/>
+                <a:cs typeface="メイリオ"/>
+              </a:rPr>
+              <a:t>申込み直後からLINEで接点を持ち、来店・商談までの離脱を防止。</a:t>
             </a:r>
             <a:endParaRPr sz="1600" dirty="0">
               <a:solidFill>
@@ -3098,7 +3123,7 @@
         <p:spPr>
           <a:xfrm>
             <a:off x="1080000" y="2628000"/>
-            <a:ext cx="3798000" cy="1296000"/>
+            <a:ext cx="3798000" cy="1044000"/>
           </a:xfrm>
           <a:prstGeom prst="roundRect">
             <a:avLst>
@@ -3196,8 +3221,8 @@
         </p:nvSpPr>
         <p:spPr>
           <a:xfrm>
-            <a:off x="1080000" y="3960000"/>
-            <a:ext cx="3798000" cy="1548000"/>
+            <a:off x="1080000" y="3707999"/>
+            <a:ext cx="3798000" cy="1800000"/>
           </a:xfrm>
           <a:prstGeom prst="roundRect">
             <a:avLst>
@@ -3291,11 +3316,11 @@
                 <a:spcPct val="130000"/>
               </a:lnSpc>
               <a:spcAft>
-                <a:spcPts val="0"/>
+                <a:spcPts val="200"/>
               </a:spcAft>
             </a:pPr>
             <a:r>
-              <a:rPr sz="1100" b="0" dirty="0" err="1">
+              <a:rPr sz="1150" b="0" dirty="0" err="1">
                 <a:solidFill>
                   <a:srgbClr val="7F7F7F"/>
                 </a:solidFill>
@@ -3325,7 +3350,7 @@
         <p:spPr>
           <a:xfrm>
             <a:off x="5022000" y="2628000"/>
-            <a:ext cx="3798000" cy="1296000"/>
+            <a:ext cx="3798000" cy="1044000"/>
           </a:xfrm>
           <a:prstGeom prst="roundRect">
             <a:avLst>
@@ -3423,8 +3448,8 @@
         </p:nvSpPr>
         <p:spPr>
           <a:xfrm>
-            <a:off x="5022000" y="3960000"/>
-            <a:ext cx="3798000" cy="1548000"/>
+            <a:off x="5022000" y="3707999"/>
+            <a:ext cx="3798000" cy="1800000"/>
           </a:xfrm>
           <a:prstGeom prst="roundRect">
             <a:avLst>
@@ -3518,11 +3543,11 @@
                 <a:spcPct val="130000"/>
               </a:lnSpc>
               <a:spcAft>
-                <a:spcPts val="0"/>
+                <a:spcPts val="200"/>
               </a:spcAft>
             </a:pPr>
             <a:r>
-              <a:rPr sz="1100" b="0" dirty="0" err="1">
+              <a:rPr sz="1150" b="0" dirty="0" err="1">
                 <a:solidFill>
                   <a:srgbClr val="7F7F7F"/>
                 </a:solidFill>
@@ -3672,7 +3697,7 @@
                 <a:ea typeface="メイリオ"/>
                 <a:cs typeface="メイリオ"/>
               </a:rPr>
-              <a:t>シーン1｜来店・来院の予約</a:t>
+              <a:t>シーン1・2｜来店・来院の予約／資料請求</a:t>
             </a:r>
           </a:p>
         </p:txBody>
@@ -3713,7 +3738,33 @@
                 <a:ea typeface="メイリオ"/>
                 <a:cs typeface="メイリオ"/>
               </a:rPr>
-              <a:t>予約を、来店・来院につなげる</a:t>
+              <a:t>申込み後のLINEフォローで、来店・面談までつなげる</a:t>
+            </a:r>
+            <a:endParaRPr lang="en-US" sz="1600" dirty="0">
+              <a:solidFill>
+                <a:srgbClr val="333333"/>
+              </a:solidFill>
+              <a:latin typeface="メイリオ"/>
+              <a:ea typeface="メイリオ"/>
+              <a:cs typeface="メイリオ"/>
+            </a:endParaRPr>
+          </a:p>
+          <a:p>
+            <a:pPr algn="l">
+              <a:lnSpc>
+                <a:spcPct val="130000"/>
+              </a:lnSpc>
+            </a:pPr>
+            <a:r>
+              <a:rPr sz="1800" dirty="0" err="1" b="0">
+                <a:solidFill>
+                  <a:srgbClr val="333333"/>
+                </a:solidFill>
+                <a:latin typeface="メイリオ"/>
+                <a:ea typeface="メイリオ"/>
+                <a:cs typeface="メイリオ"/>
+              </a:rPr>
+              <a:t>予約確認・リマインド・ステップ配信で、申込み後の離脱を防止</a:t>
             </a:r>
             <a:endParaRPr lang="en-US" sz="1600" dirty="0">
               <a:solidFill>
@@ -3822,7 +3873,7 @@
                 <a:ea typeface="メイリオ"/>
                 <a:cs typeface="メイリオ"/>
               </a:rPr>
-              <a:t>予約完了</a:t>
+              <a:t>申込み完了</a:t>
             </a:r>
             <a:endParaRPr sz="1250" b="1" dirty="0">
               <a:solidFill>
@@ -3958,7 +4009,7 @@
                 <a:ea typeface="メイリオ"/>
                 <a:cs typeface="メイリオ"/>
               </a:rPr>
-              <a:t>予約確認</a:t>
+              <a:t>つながる</a:t>
             </a:r>
           </a:p>
         </p:txBody>
@@ -4068,7 +4119,7 @@
                 <a:ea typeface="メイリオ"/>
                 <a:cs typeface="メイリオ"/>
               </a:rPr>
-              <a:t>前日に</a:t>
+              <a:t>確認・リマインド・</a:t>
             </a:r>
           </a:p>
           <a:p>
@@ -4086,7 +4137,7 @@
                 <a:ea typeface="メイリオ"/>
                 <a:cs typeface="メイリオ"/>
               </a:rPr>
-              <a:t>お知らせ</a:t>
+              <a:t>情報配信</a:t>
             </a:r>
           </a:p>
         </p:txBody>
@@ -4201,7 +4252,36 @@
                 <a:ea typeface="メイリオ"/>
                 <a:cs typeface="メイリオ"/>
               </a:rPr>
-              <a:t>来店</a:t>
+              <a:t>来店・面談・</a:t>
+            </a:r>
+            <a:endParaRPr sz="1250" b="1" dirty="0">
+              <a:solidFill>
+                <a:srgbClr val="1F285A"/>
+              </a:solidFill>
+              <a:latin typeface="メイリオ"/>
+              <a:ea typeface="メイリオ"/>
+              <a:cs typeface="メイリオ"/>
+            </a:endParaRPr>
+          </a:p>
+          <a:p>
+            <a:pPr algn="ctr">
+              <a:lnSpc>
+                <a:spcPct val="130000"/>
+              </a:lnSpc>
+              <a:spcAft>
+                <a:spcPts val="500"/>
+              </a:spcAft>
+            </a:pPr>
+            <a:r>
+              <a:rPr sz="1300" b="1" dirty="0" err="1">
+                <a:solidFill>
+                  <a:srgbClr val="1F285A"/>
+                </a:solidFill>
+                <a:latin typeface="メイリオ"/>
+                <a:ea typeface="メイリオ"/>
+                <a:cs typeface="メイリオ"/>
+              </a:rPr>
+              <a:t>商談</a:t>
             </a:r>
             <a:endParaRPr sz="1250" b="1" dirty="0">
               <a:solidFill>
@@ -4223,7 +4303,7 @@
         <p:spPr>
           <a:xfrm>
             <a:off x="1080000" y="2628000"/>
-            <a:ext cx="7740000" cy="1296000"/>
+            <a:ext cx="2484000" cy="1044000"/>
           </a:xfrm>
           <a:prstGeom prst="roundRect">
             <a:avLst>
@@ -4300,7 +4380,7 @@
                 <a:ea typeface="メイリオ"/>
                 <a:cs typeface="メイリオ"/>
               </a:rPr>
-              <a:t>次回予約のリマインドをLINEで自動通知</a:t>
+              <a:t>予約後のフォロー</a:t>
             </a:r>
             <a:endParaRPr sz="1250" b="1" dirty="0">
               <a:solidFill>
@@ -4321,8 +4401,8 @@
         </p:nvSpPr>
         <p:spPr>
           <a:xfrm>
-            <a:off x="1080000" y="3960000"/>
-            <a:ext cx="7740000" cy="1548000"/>
+            <a:off x="1080000" y="3707999"/>
+            <a:ext cx="2484000" cy="1800000"/>
           </a:xfrm>
           <a:prstGeom prst="roundRect">
             <a:avLst>
@@ -4391,7 +4471,7 @@
               </a:spcAft>
             </a:pPr>
             <a:r>
-              <a:rPr sz="3200" b="1" dirty="0" err="1">
+              <a:rPr sz="2800" b="1" dirty="0" err="1">
                 <a:solidFill>
                   <a:srgbClr val="1F285A"/>
                 </a:solidFill>
@@ -4416,11 +4496,11 @@
                 <a:spcPct val="130000"/>
               </a:lnSpc>
               <a:spcAft>
-                <a:spcPts val="0"/>
+                <a:spcPts val="200"/>
               </a:spcAft>
             </a:pPr>
             <a:r>
-              <a:rPr sz="1100" b="0" dirty="0" err="1">
+              <a:rPr sz="1150" b="0" dirty="0" err="1">
                 <a:solidFill>
                   <a:srgbClr val="7F7F7F"/>
                 </a:solidFill>
@@ -4428,7 +4508,7 @@
                 <a:ea typeface="メイリオ"/>
                 <a:cs typeface="メイリオ"/>
               </a:rPr>
-              <a:t>約200→240名。リピート率も88→91%（導入前後の半年比較。LINEミニアプリを併用）</a:t>
+              <a:t>約200名 → 約240名</a:t>
             </a:r>
             <a:endParaRPr sz="1250" b="1" dirty="0">
               <a:solidFill>
@@ -4439,11 +4519,494 @@
               <a:cs typeface="メイリオ"/>
             </a:endParaRPr>
           </a:p>
+          <a:p>
+            <a:pPr algn="l">
+              <a:lnSpc>
+                <a:spcPct val="130000"/>
+              </a:lnSpc>
+              <a:spcAft>
+                <a:spcPts val="200"/>
+              </a:spcAft>
+            </a:pPr>
+            <a:r>
+              <a:rPr sz="1000" b="0" dirty="0" err="1">
+                <a:solidFill>
+                  <a:srgbClr val="7F7F7F"/>
+                </a:solidFill>
+                <a:latin typeface="メイリオ"/>
+                <a:ea typeface="メイリオ"/>
+                <a:cs typeface="メイリオ"/>
+              </a:rPr>
+              <a:t>リピート率も88% → 91%（導入前後の半年比較。LINEミニアプリを併用）</a:t>
+            </a:r>
+            <a:endParaRPr sz="1250" b="1" dirty="0">
+              <a:solidFill>
+                <a:srgbClr val="1F285A"/>
+              </a:solidFill>
+              <a:latin typeface="メイリオ"/>
+              <a:ea typeface="メイリオ"/>
+              <a:cs typeface="メイリオ"/>
+            </a:endParaRPr>
+          </a:p>
         </p:txBody>
       </p:sp>
       <p:sp>
         <p:nvSpPr>
-          <p:cNvPr id="15" name="Rounded Rectangle 4"/>
+          <p:cNvPr id="15" name="Rounded Rectangle 12"/>
+          <p:cNvSpPr/>
+          <p:nvPr/>
+        </p:nvSpPr>
+        <p:spPr>
+          <a:xfrm>
+            <a:off x="3708000" y="2628000"/>
+            <a:ext cx="2484000" cy="1044000"/>
+          </a:xfrm>
+          <a:prstGeom prst="roundRect">
+            <a:avLst>
+              <a:gd name="adj" fmla="val 6000"/>
+            </a:avLst>
+          </a:prstGeom>
+          <a:noFill/>
+          <a:ln w="19050">
+            <a:noFill/>
+          </a:ln>
+          <a:effectLst/>
+        </p:spPr>
+        <p:style>
+          <a:lnRef idx="1">
+            <a:schemeClr val="accent1"/>
+          </a:lnRef>
+          <a:fillRef idx="3">
+            <a:schemeClr val="accent1"/>
+          </a:fillRef>
+          <a:effectRef idx="0">
+            <a:schemeClr val="accent1"/>
+          </a:effectRef>
+          <a:fontRef idx="minor">
+            <a:schemeClr val="lt1"/>
+          </a:fontRef>
+        </p:style>
+        <p:txBody>
+          <a:bodyPr wrap="square" lIns="180000" tIns="72000" rIns="180000" bIns="36000" rtlCol="0" anchor="t"/>
+          <a:lstStyle/>
+          <a:p>
+            <a:pPr algn="l">
+              <a:lnSpc>
+                <a:spcPct val="130000"/>
+              </a:lnSpc>
+              <a:spcAft>
+                <a:spcPts val="600"/>
+              </a:spcAft>
+            </a:pPr>
+            <a:r>
+              <a:rPr sz="1500" b="1" dirty="0" err="1">
+                <a:solidFill>
+                  <a:srgbClr val="333333"/>
+                </a:solidFill>
+                <a:latin typeface="メイリオ"/>
+                <a:ea typeface="メイリオ"/>
+                <a:cs typeface="メイリオ"/>
+              </a:rPr>
+              <a:t>皮膚科クリニック</a:t>
+            </a:r>
+            <a:endParaRPr sz="1250" b="1" dirty="0">
+              <a:solidFill>
+                <a:srgbClr val="1F285A"/>
+              </a:solidFill>
+              <a:latin typeface="メイリオ"/>
+              <a:ea typeface="メイリオ"/>
+              <a:cs typeface="メイリオ"/>
+            </a:endParaRPr>
+          </a:p>
+          <a:p>
+            <a:pPr algn="l">
+              <a:lnSpc>
+                <a:spcPct val="130000"/>
+              </a:lnSpc>
+              <a:spcAft>
+                <a:spcPts val="0"/>
+              </a:spcAft>
+            </a:pPr>
+            <a:r>
+              <a:rPr sz="1300" b="0" dirty="0" err="1">
+                <a:solidFill>
+                  <a:srgbClr val="333333"/>
+                </a:solidFill>
+                <a:latin typeface="メイリオ"/>
+                <a:ea typeface="メイリオ"/>
+                <a:cs typeface="メイリオ"/>
+              </a:rPr>
+              <a:t>友だち追加後のステップ配信</a:t>
+            </a:r>
+            <a:endParaRPr sz="1250" b="1" dirty="0">
+              <a:solidFill>
+                <a:srgbClr val="1F285A"/>
+              </a:solidFill>
+              <a:latin typeface="メイリオ"/>
+              <a:ea typeface="メイリオ"/>
+              <a:cs typeface="メイリオ"/>
+            </a:endParaRPr>
+          </a:p>
+        </p:txBody>
+      </p:sp>
+      <p:sp>
+        <p:nvSpPr>
+          <p:cNvPr id="16" name="Rounded Rectangle 12"/>
+          <p:cNvSpPr/>
+          <p:nvPr/>
+        </p:nvSpPr>
+        <p:spPr>
+          <a:xfrm>
+            <a:off x="3708000" y="3707999"/>
+            <a:ext cx="2484000" cy="1800000"/>
+          </a:xfrm>
+          <a:prstGeom prst="roundRect">
+            <a:avLst>
+              <a:gd name="adj" fmla="val 6000"/>
+            </a:avLst>
+          </a:prstGeom>
+          <a:noFill/>
+          <a:ln w="19050">
+            <a:noFill/>
+          </a:ln>
+          <a:effectLst/>
+        </p:spPr>
+        <p:style>
+          <a:lnRef idx="1">
+            <a:schemeClr val="accent1"/>
+          </a:lnRef>
+          <a:fillRef idx="3">
+            <a:schemeClr val="accent1"/>
+          </a:fillRef>
+          <a:effectRef idx="0">
+            <a:schemeClr val="accent1"/>
+          </a:effectRef>
+          <a:fontRef idx="minor">
+            <a:schemeClr val="lt1"/>
+          </a:fontRef>
+        </p:style>
+        <p:txBody>
+          <a:bodyPr wrap="square" lIns="180000" tIns="72000" rIns="180000" bIns="36000" rtlCol="0" anchor="t"/>
+          <a:lstStyle/>
+          <a:p>
+            <a:pPr algn="l">
+              <a:lnSpc>
+                <a:spcPct val="130000"/>
+              </a:lnSpc>
+              <a:spcAft>
+                <a:spcPts val="400"/>
+              </a:spcAft>
+            </a:pPr>
+            <a:r>
+              <a:rPr sz="1300" b="0" dirty="0" err="1">
+                <a:solidFill>
+                  <a:srgbClr val="333333"/>
+                </a:solidFill>
+                <a:latin typeface="メイリオ"/>
+                <a:ea typeface="メイリオ"/>
+                <a:cs typeface="メイリオ"/>
+              </a:rPr>
+              <a:t>LINE経由の予約数</a:t>
+            </a:r>
+            <a:endParaRPr sz="1250" b="1" dirty="0">
+              <a:solidFill>
+                <a:srgbClr val="1F285A"/>
+              </a:solidFill>
+              <a:latin typeface="メイリオ"/>
+              <a:ea typeface="メイリオ"/>
+              <a:cs typeface="メイリオ"/>
+            </a:endParaRPr>
+          </a:p>
+          <a:p>
+            <a:pPr algn="l">
+              <a:lnSpc>
+                <a:spcPct val="130000"/>
+              </a:lnSpc>
+              <a:spcAft>
+                <a:spcPts val="200"/>
+              </a:spcAft>
+            </a:pPr>
+            <a:r>
+              <a:rPr sz="2800" b="1" dirty="0" err="1">
+                <a:solidFill>
+                  <a:srgbClr val="1F285A"/>
+                </a:solidFill>
+                <a:latin typeface="メイリオ"/>
+                <a:ea typeface="メイリオ"/>
+                <a:cs typeface="メイリオ"/>
+              </a:rPr>
+              <a:t>約1.2倍</a:t>
+            </a:r>
+            <a:endParaRPr sz="1250" b="1" dirty="0">
+              <a:solidFill>
+                <a:srgbClr val="1F285A"/>
+              </a:solidFill>
+              <a:latin typeface="メイリオ"/>
+              <a:ea typeface="メイリオ"/>
+              <a:cs typeface="メイリオ"/>
+            </a:endParaRPr>
+          </a:p>
+          <a:p>
+            <a:pPr algn="l">
+              <a:lnSpc>
+                <a:spcPct val="130000"/>
+              </a:lnSpc>
+              <a:spcAft>
+                <a:spcPts val="200"/>
+              </a:spcAft>
+            </a:pPr>
+            <a:r>
+              <a:rPr sz="1150" b="0" dirty="0" err="1">
+                <a:solidFill>
+                  <a:srgbClr val="7F7F7F"/>
+                </a:solidFill>
+                <a:latin typeface="メイリオ"/>
+                <a:ea typeface="メイリオ"/>
+                <a:cs typeface="メイリオ"/>
+              </a:rPr>
+              <a:t>ステップ配信実施前との比較</a:t>
+            </a:r>
+            <a:endParaRPr sz="1250" b="1" dirty="0">
+              <a:solidFill>
+                <a:srgbClr val="1F285A"/>
+              </a:solidFill>
+              <a:latin typeface="メイリオ"/>
+              <a:ea typeface="メイリオ"/>
+              <a:cs typeface="メイリオ"/>
+            </a:endParaRPr>
+          </a:p>
+        </p:txBody>
+      </p:sp>
+      <p:sp>
+        <p:nvSpPr>
+          <p:cNvPr id="17" name="Rounded Rectangle 12"/>
+          <p:cNvSpPr/>
+          <p:nvPr/>
+        </p:nvSpPr>
+        <p:spPr>
+          <a:xfrm>
+            <a:off x="6336000" y="2628000"/>
+            <a:ext cx="2484000" cy="1044000"/>
+          </a:xfrm>
+          <a:prstGeom prst="roundRect">
+            <a:avLst>
+              <a:gd name="adj" fmla="val 6000"/>
+            </a:avLst>
+          </a:prstGeom>
+          <a:noFill/>
+          <a:ln w="19050">
+            <a:noFill/>
+          </a:ln>
+          <a:effectLst/>
+        </p:spPr>
+        <p:style>
+          <a:lnRef idx="1">
+            <a:schemeClr val="accent1"/>
+          </a:lnRef>
+          <a:fillRef idx="3">
+            <a:schemeClr val="accent1"/>
+          </a:fillRef>
+          <a:effectRef idx="0">
+            <a:schemeClr val="accent1"/>
+          </a:effectRef>
+          <a:fontRef idx="minor">
+            <a:schemeClr val="lt1"/>
+          </a:fontRef>
+        </p:style>
+        <p:txBody>
+          <a:bodyPr wrap="square" lIns="180000" tIns="72000" rIns="180000" bIns="36000" rtlCol="0" anchor="t"/>
+          <a:lstStyle/>
+          <a:p>
+            <a:pPr algn="l">
+              <a:lnSpc>
+                <a:spcPct val="130000"/>
+              </a:lnSpc>
+              <a:spcAft>
+                <a:spcPts val="600"/>
+              </a:spcAft>
+            </a:pPr>
+            <a:r>
+              <a:rPr sz="1500" b="1" dirty="0" err="1">
+                <a:solidFill>
+                  <a:srgbClr val="333333"/>
+                </a:solidFill>
+                <a:latin typeface="メイリオ"/>
+                <a:ea typeface="メイリオ"/>
+                <a:cs typeface="メイリオ"/>
+              </a:rPr>
+              <a:t>就職支援</a:t>
+            </a:r>
+            <a:endParaRPr sz="1250" b="1" dirty="0">
+              <a:solidFill>
+                <a:srgbClr val="1F285A"/>
+              </a:solidFill>
+              <a:latin typeface="メイリオ"/>
+              <a:ea typeface="メイリオ"/>
+              <a:cs typeface="メイリオ"/>
+            </a:endParaRPr>
+          </a:p>
+          <a:p>
+            <a:pPr algn="l">
+              <a:lnSpc>
+                <a:spcPct val="130000"/>
+              </a:lnSpc>
+              <a:spcAft>
+                <a:spcPts val="0"/>
+              </a:spcAft>
+            </a:pPr>
+            <a:r>
+              <a:rPr sz="1300" b="0" dirty="0" err="1">
+                <a:solidFill>
+                  <a:srgbClr val="333333"/>
+                </a:solidFill>
+                <a:latin typeface="メイリオ"/>
+                <a:ea typeface="メイリオ"/>
+                <a:cs typeface="メイリオ"/>
+              </a:rPr>
+              <a:t>LINEチャットで面談へ誘導</a:t>
+            </a:r>
+            <a:endParaRPr sz="1250" b="1" dirty="0">
+              <a:solidFill>
+                <a:srgbClr val="1F285A"/>
+              </a:solidFill>
+              <a:latin typeface="メイリオ"/>
+              <a:ea typeface="メイリオ"/>
+              <a:cs typeface="メイリオ"/>
+            </a:endParaRPr>
+          </a:p>
+        </p:txBody>
+      </p:sp>
+      <p:sp>
+        <p:nvSpPr>
+          <p:cNvPr id="18" name="Rounded Rectangle 12"/>
+          <p:cNvSpPr/>
+          <p:nvPr/>
+        </p:nvSpPr>
+        <p:spPr>
+          <a:xfrm>
+            <a:off x="6336000" y="3707999"/>
+            <a:ext cx="2484000" cy="1800000"/>
+          </a:xfrm>
+          <a:prstGeom prst="roundRect">
+            <a:avLst>
+              <a:gd name="adj" fmla="val 6000"/>
+            </a:avLst>
+          </a:prstGeom>
+          <a:noFill/>
+          <a:ln w="19050">
+            <a:noFill/>
+          </a:ln>
+          <a:effectLst/>
+        </p:spPr>
+        <p:style>
+          <a:lnRef idx="1">
+            <a:schemeClr val="accent1"/>
+          </a:lnRef>
+          <a:fillRef idx="3">
+            <a:schemeClr val="accent1"/>
+          </a:fillRef>
+          <a:effectRef idx="0">
+            <a:schemeClr val="accent1"/>
+          </a:effectRef>
+          <a:fontRef idx="minor">
+            <a:schemeClr val="lt1"/>
+          </a:fontRef>
+        </p:style>
+        <p:txBody>
+          <a:bodyPr wrap="square" lIns="180000" tIns="72000" rIns="180000" bIns="36000" rtlCol="0" anchor="t"/>
+          <a:lstStyle/>
+          <a:p>
+            <a:pPr algn="l">
+              <a:lnSpc>
+                <a:spcPct val="130000"/>
+              </a:lnSpc>
+              <a:spcAft>
+                <a:spcPts val="400"/>
+              </a:spcAft>
+            </a:pPr>
+            <a:r>
+              <a:rPr sz="1300" b="0" dirty="0" err="1">
+                <a:solidFill>
+                  <a:srgbClr val="333333"/>
+                </a:solidFill>
+                <a:latin typeface="メイリオ"/>
+                <a:ea typeface="メイリオ"/>
+                <a:cs typeface="メイリオ"/>
+              </a:rPr>
+              <a:t>問い合わせた方のうち</a:t>
+            </a:r>
+            <a:endParaRPr sz="1250" b="1" dirty="0">
+              <a:solidFill>
+                <a:srgbClr val="1F285A"/>
+              </a:solidFill>
+              <a:latin typeface="メイリオ"/>
+              <a:ea typeface="メイリオ"/>
+              <a:cs typeface="メイリオ"/>
+            </a:endParaRPr>
+          </a:p>
+          <a:p>
+            <a:pPr algn="l">
+              <a:lnSpc>
+                <a:spcPct val="130000"/>
+              </a:lnSpc>
+              <a:spcAft>
+                <a:spcPts val="200"/>
+              </a:spcAft>
+            </a:pPr>
+            <a:r>
+              <a:rPr sz="2800" b="1" dirty="0" err="1">
+                <a:solidFill>
+                  <a:srgbClr val="1F285A"/>
+                </a:solidFill>
+                <a:latin typeface="メイリオ"/>
+                <a:ea typeface="メイリオ"/>
+                <a:cs typeface="メイリオ"/>
+              </a:rPr>
+              <a:t>55%</a:t>
+            </a:r>
+            <a:endParaRPr sz="1250" b="1" dirty="0">
+              <a:solidFill>
+                <a:srgbClr val="1F285A"/>
+              </a:solidFill>
+              <a:latin typeface="メイリオ"/>
+              <a:ea typeface="メイリオ"/>
+              <a:cs typeface="メイリオ"/>
+            </a:endParaRPr>
+          </a:p>
+          <a:p>
+            <a:pPr algn="l">
+              <a:lnSpc>
+                <a:spcPct val="130000"/>
+              </a:lnSpc>
+              <a:spcAft>
+                <a:spcPts val="200"/>
+              </a:spcAft>
+            </a:pPr>
+            <a:r>
+              <a:rPr sz="1150" b="0" dirty="0" err="1">
+                <a:solidFill>
+                  <a:srgbClr val="7F7F7F"/>
+                </a:solidFill>
+                <a:latin typeface="メイリオ"/>
+                <a:ea typeface="メイリオ"/>
+                <a:cs typeface="メイリオ"/>
+              </a:rPr>
+              <a:t>が面談予約。他チャネルと比べても高い水準</a:t>
+            </a:r>
+            <a:endParaRPr sz="1250" b="1" dirty="0">
+              <a:solidFill>
+                <a:srgbClr val="1F285A"/>
+              </a:solidFill>
+              <a:latin typeface="メイリオ"/>
+              <a:ea typeface="メイリオ"/>
+              <a:cs typeface="メイリオ"/>
+            </a:endParaRPr>
+          </a:p>
+        </p:txBody>
+      </p:sp>
+      <p:sp>
+        <p:nvSpPr>
+          <p:cNvPr id="19" name="Rounded Rectangle 4"/>
           <p:cNvSpPr/>
           <p:nvPr/>
         </p:nvSpPr>
@@ -4497,7 +5060,7 @@
                 <a:ea typeface="メイリオ"/>
                 <a:cs typeface="メイリオ"/>
               </a:rPr>
-              <a:t>無断キャンセルを防ぎ、来店につなげる</a:t>
+              <a:t>申込み後の離脱を防ぎ、来店・面談・商談につなげる</a:t>
             </a:r>
           </a:p>
         </p:txBody>
@@ -4506,1136 +5069,6 @@
     <p:extLst>
       <p:ext uri="{BB962C8B-B14F-4D97-AF65-F5344CB8AC3E}">
         <p14:creationId xmlns:p14="http://schemas.microsoft.com/office/powerpoint/2010/main" val="1715909323"/>
-      </p:ext>
-    </p:extLst>
-  </p:cSld>
-  <p:clrMapOvr>
-    <a:masterClrMapping/>
-  </p:clrMapOvr>
-</p:sld>
-</file>
-
-<file path=ppt/slides/slide3.xml><?xml version="1.0" encoding="utf-8"?>
-<p:sld xmlns:a="http://schemas.openxmlformats.org/drawingml/2006/main" xmlns:r="http://schemas.openxmlformats.org/officeDocument/2006/relationships" xmlns:p="http://schemas.openxmlformats.org/presentationml/2006/main">
-  <p:cSld>
-    <p:spTree>
-      <p:nvGrpSpPr>
-        <p:cNvPr id="2" name=""/>
-        <p:cNvGrpSpPr/>
-        <p:nvPr/>
-      </p:nvGrpSpPr>
-      <p:grpSpPr>
-        <a:xfrm>
-          <a:off x="0" y="0"/>
-          <a:ext cx="0" cy="0"/>
-          <a:chOff x="0" y="0"/>
-          <a:chExt cx="0" cy="0"/>
-        </a:xfrm>
-      </p:grpSpPr>
-      <p:sp>
-        <p:nvSpPr>
-          <p:cNvPr id="3" name="TextBox 1"/>
-          <p:cNvSpPr txBox="1"/>
-          <p:nvPr/>
-        </p:nvSpPr>
-        <p:spPr>
-          <a:xfrm>
-            <a:off x="547200" y="136800"/>
-            <a:ext cx="8784000" cy="338400"/>
-          </a:xfrm>
-          <a:prstGeom prst="rect">
-            <a:avLst/>
-          </a:prstGeom>
-          <a:noFill/>
-        </p:spPr>
-        <p:txBody>
-          <a:bodyPr wrap="square" lIns="0" tIns="21600" rIns="0" bIns="21600" anchor="ctr">
-            <a:spAutoFit/>
-          </a:bodyPr>
-          <a:lstStyle/>
-          <a:p>
-            <a:pPr algn="l"/>
-            <a:r>
-              <a:rPr sz="1600" b="1">
-                <a:solidFill>
-                  <a:srgbClr val="002060"/>
-                </a:solidFill>
-                <a:latin typeface="メイリオ"/>
-                <a:ea typeface="メイリオ"/>
-                <a:cs typeface="メイリオ"/>
-              </a:rPr>
-              <a:t>シーン2｜資料請求</a:t>
-            </a:r>
-          </a:p>
-        </p:txBody>
-      </p:sp>
-      <p:sp>
-        <p:nvSpPr>
-          <p:cNvPr id="4" name="TextBox 2"/>
-          <p:cNvSpPr txBox="1"/>
-          <p:nvPr/>
-        </p:nvSpPr>
-        <p:spPr>
-          <a:xfrm>
-            <a:off x="432000" y="684000"/>
-            <a:ext cx="9036000" cy="432000"/>
-          </a:xfrm>
-          <a:prstGeom prst="rect">
-            <a:avLst/>
-          </a:prstGeom>
-          <a:noFill/>
-        </p:spPr>
-        <p:txBody>
-          <a:bodyPr wrap="square" lIns="0" tIns="21600" rIns="0" bIns="21600" anchor="ctr">
-            <a:spAutoFit/>
-          </a:bodyPr>
-          <a:lstStyle/>
-          <a:p>
-            <a:pPr algn="l">
-              <a:lnSpc>
-                <a:spcPct val="130000"/>
-              </a:lnSpc>
-            </a:pPr>
-            <a:r>
-              <a:rPr sz="1800" dirty="0" err="1" b="0">
-                <a:solidFill>
-                  <a:srgbClr val="333333"/>
-                </a:solidFill>
-                <a:latin typeface="メイリオ"/>
-                <a:ea typeface="メイリオ"/>
-                <a:cs typeface="メイリオ"/>
-              </a:rPr>
-              <a:t>資料請求を、予約・商談につなげる</a:t>
-            </a:r>
-            <a:endParaRPr sz="1600" dirty="0">
-              <a:solidFill>
-                <a:srgbClr val="333333"/>
-              </a:solidFill>
-              <a:latin typeface="メイリオ"/>
-              <a:ea typeface="メイリオ"/>
-              <a:cs typeface="メイリオ"/>
-            </a:endParaRPr>
-          </a:p>
-        </p:txBody>
-      </p:sp>
-      <p:cxnSp>
-        <p:nvCxnSpPr>
-          <p:cNvPr id="5" name="Connector 3"/>
-          <p:cNvCxnSpPr/>
-          <p:nvPr/>
-        </p:nvCxnSpPr>
-        <p:spPr>
-          <a:xfrm>
-            <a:off x="0" y="1389600"/>
-            <a:ext cx="9907200" cy="0"/>
-          </a:xfrm>
-          <a:prstGeom prst="line">
-            <a:avLst/>
-          </a:prstGeom>
-          <a:ln w="12700">
-            <a:solidFill>
-              <a:srgbClr val="D9D9D9"/>
-            </a:solidFill>
-          </a:ln>
-        </p:spPr>
-        <p:style>
-          <a:lnRef idx="2">
-            <a:schemeClr val="accent1"/>
-          </a:lnRef>
-          <a:fillRef idx="0">
-            <a:schemeClr val="accent1"/>
-          </a:fillRef>
-          <a:effectRef idx="1">
-            <a:schemeClr val="accent1"/>
-          </a:effectRef>
-          <a:fontRef idx="minor">
-            <a:schemeClr val="tx1"/>
-          </a:fontRef>
-        </p:style>
-      </p:cxnSp>
-      <p:sp>
-        <p:nvSpPr>
-          <p:cNvPr id="6" name="Rounded Rectangle 12"/>
-          <p:cNvSpPr/>
-          <p:nvPr/>
-        </p:nvSpPr>
-        <p:spPr>
-          <a:xfrm>
-            <a:off x="1080000" y="1728000"/>
-            <a:ext cx="1655999" cy="612000"/>
-          </a:xfrm>
-          <a:prstGeom prst="roundRect">
-            <a:avLst>
-              <a:gd name="adj" fmla="val 6000"/>
-            </a:avLst>
-          </a:prstGeom>
-          <a:solidFill>
-            <a:srgbClr val="FFFFFF"/>
-          </a:solidFill>
-          <a:ln w="19050">
-            <a:solidFill>
-              <a:srgbClr val="1F285A"/>
-            </a:solidFill>
-          </a:ln>
-          <a:effectLst/>
-        </p:spPr>
-        <p:style>
-          <a:lnRef idx="1">
-            <a:schemeClr val="accent1"/>
-          </a:lnRef>
-          <a:fillRef idx="3">
-            <a:schemeClr val="accent1"/>
-          </a:fillRef>
-          <a:effectRef idx="2">
-            <a:schemeClr val="accent1"/>
-          </a:effectRef>
-          <a:fontRef idx="minor">
-            <a:schemeClr val="lt1"/>
-          </a:fontRef>
-        </p:style>
-        <p:txBody>
-          <a:bodyPr wrap="square" lIns="125999" tIns="90000" rIns="108000" bIns="54000" rtlCol="0" anchor="ctr"/>
-          <a:lstStyle/>
-          <a:p>
-            <a:pPr algn="ctr">
-              <a:lnSpc>
-                <a:spcPct val="130000"/>
-              </a:lnSpc>
-              <a:spcAft>
-                <a:spcPts val="500"/>
-              </a:spcAft>
-            </a:pPr>
-            <a:r>
-              <a:rPr sz="1300" b="1" dirty="0" err="1">
-                <a:solidFill>
-                  <a:srgbClr val="1F285A"/>
-                </a:solidFill>
-                <a:latin typeface="メイリオ"/>
-                <a:ea typeface="メイリオ"/>
-                <a:cs typeface="メイリオ"/>
-              </a:rPr>
-              <a:t>資料請求</a:t>
-            </a:r>
-            <a:endParaRPr sz="1250" b="1" dirty="0">
-              <a:solidFill>
-                <a:srgbClr val="1F285A"/>
-              </a:solidFill>
-              <a:latin typeface="メイリオ"/>
-              <a:ea typeface="メイリオ"/>
-              <a:cs typeface="メイリオ"/>
-            </a:endParaRPr>
-          </a:p>
-        </p:txBody>
-      </p:sp>
-      <p:sp>
-        <p:nvSpPr>
-          <p:cNvPr id="7" name="Right Arrow 5"/>
-          <p:cNvSpPr/>
-          <p:nvPr/>
-        </p:nvSpPr>
-        <p:spPr>
-          <a:xfrm>
-            <a:off x="2754000" y="1889999"/>
-            <a:ext cx="324000" cy="288000"/>
-          </a:xfrm>
-          <a:prstGeom prst="rightArrow">
-            <a:avLst/>
-          </a:prstGeom>
-          <a:solidFill>
-            <a:srgbClr val="1F285A"/>
-          </a:solidFill>
-          <a:ln>
-            <a:noFill/>
-          </a:ln>
-          <a:effectLst/>
-        </p:spPr>
-        <p:style>
-          <a:lnRef idx="1">
-            <a:schemeClr val="accent1"/>
-          </a:lnRef>
-          <a:fillRef idx="3">
-            <a:schemeClr val="accent1"/>
-          </a:fillRef>
-          <a:effectRef idx="2">
-            <a:schemeClr val="accent1"/>
-          </a:effectRef>
-          <a:fontRef idx="minor">
-            <a:schemeClr val="lt1"/>
-          </a:fontRef>
-        </p:style>
-        <p:txBody>
-          <a:bodyPr rtlCol="0" anchor="ctr"/>
-          <a:lstStyle/>
-          <a:p>
-            <a:pPr algn="ctr"/>
-            <a:endParaRPr>
-              <a:latin typeface="メイリオ"/>
-              <a:ea typeface="メイリオ"/>
-              <a:cs typeface="メイリオ"/>
-            </a:endParaRPr>
-          </a:p>
-        </p:txBody>
-      </p:sp>
-      <p:sp>
-        <p:nvSpPr>
-          <p:cNvPr id="8" name="Rounded Rectangle 4"/>
-          <p:cNvSpPr/>
-          <p:nvPr/>
-        </p:nvSpPr>
-        <p:spPr>
-          <a:xfrm>
-            <a:off x="3096000" y="1728000"/>
-            <a:ext cx="1655999" cy="612000"/>
-          </a:xfrm>
-          <a:prstGeom prst="roundRect">
-            <a:avLst>
-              <a:gd name="adj" fmla="val 10000"/>
-            </a:avLst>
-          </a:prstGeom>
-          <a:solidFill>
-            <a:srgbClr val="1F285A"/>
-          </a:solidFill>
-          <a:ln>
-            <a:noFill/>
-          </a:ln>
-          <a:effectLst/>
-        </p:spPr>
-        <p:style>
-          <a:lnRef idx="1">
-            <a:schemeClr val="accent1"/>
-          </a:lnRef>
-          <a:fillRef idx="3">
-            <a:schemeClr val="accent1"/>
-          </a:fillRef>
-          <a:effectRef idx="2">
-            <a:schemeClr val="accent1"/>
-          </a:effectRef>
-          <a:fontRef idx="minor">
-            <a:schemeClr val="lt1"/>
-          </a:fontRef>
-        </p:style>
-        <p:txBody>
-          <a:bodyPr wrap="square" lIns="54000" tIns="18000" rIns="54000" bIns="18000" rtlCol="0" anchor="ctr"/>
-          <a:lstStyle/>
-          <a:p>
-            <a:pPr algn="ctr">
-              <a:lnSpc>
-                <a:spcPct val="120000"/>
-              </a:lnSpc>
-            </a:pPr>
-            <a:r>
-              <a:rPr sz="1300" b="1">
-                <a:solidFill>
-                  <a:srgbClr val="FFFFFF"/>
-                </a:solidFill>
-                <a:latin typeface="メイリオ"/>
-                <a:ea typeface="メイリオ"/>
-                <a:cs typeface="メイリオ"/>
-              </a:rPr>
-              <a:t>LINEへ案内</a:t>
-            </a:r>
-          </a:p>
-        </p:txBody>
-      </p:sp>
-      <p:sp>
-        <p:nvSpPr>
-          <p:cNvPr id="9" name="Right Arrow 5"/>
-          <p:cNvSpPr/>
-          <p:nvPr/>
-        </p:nvSpPr>
-        <p:spPr>
-          <a:xfrm>
-            <a:off x="4770000" y="1889999"/>
-            <a:ext cx="324000" cy="288000"/>
-          </a:xfrm>
-          <a:prstGeom prst="rightArrow">
-            <a:avLst/>
-          </a:prstGeom>
-          <a:solidFill>
-            <a:srgbClr val="1F285A"/>
-          </a:solidFill>
-          <a:ln>
-            <a:noFill/>
-          </a:ln>
-          <a:effectLst/>
-        </p:spPr>
-        <p:style>
-          <a:lnRef idx="1">
-            <a:schemeClr val="accent1"/>
-          </a:lnRef>
-          <a:fillRef idx="3">
-            <a:schemeClr val="accent1"/>
-          </a:fillRef>
-          <a:effectRef idx="2">
-            <a:schemeClr val="accent1"/>
-          </a:effectRef>
-          <a:fontRef idx="minor">
-            <a:schemeClr val="lt1"/>
-          </a:fontRef>
-        </p:style>
-        <p:txBody>
-          <a:bodyPr rtlCol="0" anchor="ctr"/>
-          <a:lstStyle/>
-          <a:p>
-            <a:pPr algn="ctr"/>
-            <a:endParaRPr>
-              <a:latin typeface="メイリオ"/>
-              <a:ea typeface="メイリオ"/>
-              <a:cs typeface="メイリオ"/>
-            </a:endParaRPr>
-          </a:p>
-        </p:txBody>
-      </p:sp>
-      <p:sp>
-        <p:nvSpPr>
-          <p:cNvPr id="10" name="Rounded Rectangle 4"/>
-          <p:cNvSpPr/>
-          <p:nvPr/>
-        </p:nvSpPr>
-        <p:spPr>
-          <a:xfrm>
-            <a:off x="5112000" y="1728000"/>
-            <a:ext cx="1655999" cy="612000"/>
-          </a:xfrm>
-          <a:prstGeom prst="roundRect">
-            <a:avLst>
-              <a:gd name="adj" fmla="val 10000"/>
-            </a:avLst>
-          </a:prstGeom>
-          <a:solidFill>
-            <a:srgbClr val="1F285A"/>
-          </a:solidFill>
-          <a:ln>
-            <a:noFill/>
-          </a:ln>
-          <a:effectLst/>
-        </p:spPr>
-        <p:style>
-          <a:lnRef idx="1">
-            <a:schemeClr val="accent1"/>
-          </a:lnRef>
-          <a:fillRef idx="3">
-            <a:schemeClr val="accent1"/>
-          </a:fillRef>
-          <a:effectRef idx="2">
-            <a:schemeClr val="accent1"/>
-          </a:effectRef>
-          <a:fontRef idx="minor">
-            <a:schemeClr val="lt1"/>
-          </a:fontRef>
-        </p:style>
-        <p:txBody>
-          <a:bodyPr wrap="square" lIns="54000" tIns="18000" rIns="54000" bIns="18000" rtlCol="0" anchor="ctr"/>
-          <a:lstStyle/>
-          <a:p>
-            <a:pPr algn="ctr">
-              <a:lnSpc>
-                <a:spcPct val="120000"/>
-              </a:lnSpc>
-            </a:pPr>
-            <a:r>
-              <a:rPr sz="1300" b="1">
-                <a:solidFill>
-                  <a:srgbClr val="FFFFFF"/>
-                </a:solidFill>
-                <a:latin typeface="メイリオ"/>
-                <a:ea typeface="メイリオ"/>
-                <a:cs typeface="メイリオ"/>
-              </a:rPr>
-              <a:t>事例・動画を</a:t>
-            </a:r>
-          </a:p>
-          <a:p>
-            <a:pPr algn="ctr">
-              <a:lnSpc>
-                <a:spcPct val="120000"/>
-              </a:lnSpc>
-            </a:pPr>
-            <a:r>
-              <a:rPr sz="1300" b="1">
-                <a:solidFill>
-                  <a:srgbClr val="FFFFFF"/>
-                </a:solidFill>
-                <a:latin typeface="メイリオ"/>
-                <a:ea typeface="メイリオ"/>
-                <a:cs typeface="メイリオ"/>
-              </a:rPr>
-              <a:t>配信</a:t>
-            </a:r>
-          </a:p>
-        </p:txBody>
-      </p:sp>
-      <p:sp>
-        <p:nvSpPr>
-          <p:cNvPr id="11" name="Right Arrow 5"/>
-          <p:cNvSpPr/>
-          <p:nvPr/>
-        </p:nvSpPr>
-        <p:spPr>
-          <a:xfrm>
-            <a:off x="6785999" y="1889999"/>
-            <a:ext cx="324000" cy="288000"/>
-          </a:xfrm>
-          <a:prstGeom prst="rightArrow">
-            <a:avLst/>
-          </a:prstGeom>
-          <a:solidFill>
-            <a:srgbClr val="1F285A"/>
-          </a:solidFill>
-          <a:ln>
-            <a:noFill/>
-          </a:ln>
-          <a:effectLst/>
-        </p:spPr>
-        <p:style>
-          <a:lnRef idx="1">
-            <a:schemeClr val="accent1"/>
-          </a:lnRef>
-          <a:fillRef idx="3">
-            <a:schemeClr val="accent1"/>
-          </a:fillRef>
-          <a:effectRef idx="2">
-            <a:schemeClr val="accent1"/>
-          </a:effectRef>
-          <a:fontRef idx="minor">
-            <a:schemeClr val="lt1"/>
-          </a:fontRef>
-        </p:style>
-        <p:txBody>
-          <a:bodyPr rtlCol="0" anchor="ctr"/>
-          <a:lstStyle/>
-          <a:p>
-            <a:pPr algn="ctr"/>
-            <a:endParaRPr>
-              <a:latin typeface="メイリオ"/>
-              <a:ea typeface="メイリオ"/>
-              <a:cs typeface="メイリオ"/>
-            </a:endParaRPr>
-          </a:p>
-        </p:txBody>
-      </p:sp>
-      <p:sp>
-        <p:nvSpPr>
-          <p:cNvPr id="12" name="Rounded Rectangle 12"/>
-          <p:cNvSpPr/>
-          <p:nvPr/>
-        </p:nvSpPr>
-        <p:spPr>
-          <a:xfrm>
-            <a:off x="7127999" y="1728000"/>
-            <a:ext cx="1655999" cy="612000"/>
-          </a:xfrm>
-          <a:prstGeom prst="roundRect">
-            <a:avLst>
-              <a:gd name="adj" fmla="val 6000"/>
-            </a:avLst>
-          </a:prstGeom>
-          <a:solidFill>
-            <a:srgbClr val="FFFFFF"/>
-          </a:solidFill>
-          <a:ln w="19050">
-            <a:solidFill>
-              <a:srgbClr val="1F285A"/>
-            </a:solidFill>
-          </a:ln>
-          <a:effectLst/>
-        </p:spPr>
-        <p:style>
-          <a:lnRef idx="1">
-            <a:schemeClr val="accent1"/>
-          </a:lnRef>
-          <a:fillRef idx="3">
-            <a:schemeClr val="accent1"/>
-          </a:fillRef>
-          <a:effectRef idx="2">
-            <a:schemeClr val="accent1"/>
-          </a:effectRef>
-          <a:fontRef idx="minor">
-            <a:schemeClr val="lt1"/>
-          </a:fontRef>
-        </p:style>
-        <p:txBody>
-          <a:bodyPr wrap="square" lIns="125999" tIns="90000" rIns="108000" bIns="54000" rtlCol="0" anchor="ctr"/>
-          <a:lstStyle/>
-          <a:p>
-            <a:pPr algn="ctr">
-              <a:lnSpc>
-                <a:spcPct val="130000"/>
-              </a:lnSpc>
-              <a:spcAft>
-                <a:spcPts val="500"/>
-              </a:spcAft>
-            </a:pPr>
-            <a:r>
-              <a:rPr sz="1300" b="1" dirty="0" err="1">
-                <a:solidFill>
-                  <a:srgbClr val="1F285A"/>
-                </a:solidFill>
-                <a:latin typeface="メイリオ"/>
-                <a:ea typeface="メイリオ"/>
-                <a:cs typeface="メイリオ"/>
-              </a:rPr>
-              <a:t>見学・商談</a:t>
-            </a:r>
-            <a:endParaRPr sz="1250" b="1" dirty="0">
-              <a:solidFill>
-                <a:srgbClr val="1F285A"/>
-              </a:solidFill>
-              <a:latin typeface="メイリオ"/>
-              <a:ea typeface="メイリオ"/>
-              <a:cs typeface="メイリオ"/>
-            </a:endParaRPr>
-          </a:p>
-          <a:p>
-            <a:pPr algn="ctr">
-              <a:lnSpc>
-                <a:spcPct val="130000"/>
-              </a:lnSpc>
-              <a:spcAft>
-                <a:spcPts val="500"/>
-              </a:spcAft>
-            </a:pPr>
-            <a:r>
-              <a:rPr sz="1300" b="1" dirty="0" err="1">
-                <a:solidFill>
-                  <a:srgbClr val="1F285A"/>
-                </a:solidFill>
-                <a:latin typeface="メイリオ"/>
-                <a:ea typeface="メイリオ"/>
-                <a:cs typeface="メイリオ"/>
-              </a:rPr>
-              <a:t>の予約</a:t>
-            </a:r>
-            <a:endParaRPr sz="1250" b="1" dirty="0">
-              <a:solidFill>
-                <a:srgbClr val="1F285A"/>
-              </a:solidFill>
-              <a:latin typeface="メイリオ"/>
-              <a:ea typeface="メイリオ"/>
-              <a:cs typeface="メイリオ"/>
-            </a:endParaRPr>
-          </a:p>
-        </p:txBody>
-      </p:sp>
-      <p:sp>
-        <p:nvSpPr>
-          <p:cNvPr id="13" name="Rounded Rectangle 12"/>
-          <p:cNvSpPr/>
-          <p:nvPr/>
-        </p:nvSpPr>
-        <p:spPr>
-          <a:xfrm>
-            <a:off x="1080000" y="2628000"/>
-            <a:ext cx="3798000" cy="1296000"/>
-          </a:xfrm>
-          <a:prstGeom prst="roundRect">
-            <a:avLst>
-              <a:gd name="adj" fmla="val 6000"/>
-            </a:avLst>
-          </a:prstGeom>
-          <a:noFill/>
-          <a:ln w="19050">
-            <a:noFill/>
-          </a:ln>
-          <a:effectLst/>
-        </p:spPr>
-        <p:style>
-          <a:lnRef idx="1">
-            <a:schemeClr val="accent1"/>
-          </a:lnRef>
-          <a:fillRef idx="3">
-            <a:schemeClr val="accent1"/>
-          </a:fillRef>
-          <a:effectRef idx="0">
-            <a:schemeClr val="accent1"/>
-          </a:effectRef>
-          <a:fontRef idx="minor">
-            <a:schemeClr val="lt1"/>
-          </a:fontRef>
-        </p:style>
-        <p:txBody>
-          <a:bodyPr wrap="square" lIns="180000" tIns="72000" rIns="180000" bIns="36000" rtlCol="0" anchor="t"/>
-          <a:lstStyle/>
-          <a:p>
-            <a:pPr algn="l">
-              <a:lnSpc>
-                <a:spcPct val="130000"/>
-              </a:lnSpc>
-              <a:spcAft>
-                <a:spcPts val="600"/>
-              </a:spcAft>
-            </a:pPr>
-            <a:r>
-              <a:rPr sz="1500" b="1" dirty="0" err="1">
-                <a:solidFill>
-                  <a:srgbClr val="333333"/>
-                </a:solidFill>
-                <a:latin typeface="メイリオ"/>
-                <a:ea typeface="メイリオ"/>
-                <a:cs typeface="メイリオ"/>
-              </a:rPr>
-              <a:t>皮膚科クリニック</a:t>
-            </a:r>
-            <a:endParaRPr sz="1250" b="1" dirty="0">
-              <a:solidFill>
-                <a:srgbClr val="1F285A"/>
-              </a:solidFill>
-              <a:latin typeface="メイリオ"/>
-              <a:ea typeface="メイリオ"/>
-              <a:cs typeface="メイリオ"/>
-            </a:endParaRPr>
-          </a:p>
-          <a:p>
-            <a:pPr algn="l">
-              <a:lnSpc>
-                <a:spcPct val="130000"/>
-              </a:lnSpc>
-              <a:spcAft>
-                <a:spcPts val="0"/>
-              </a:spcAft>
-            </a:pPr>
-            <a:r>
-              <a:rPr sz="1300" b="0" dirty="0" err="1">
-                <a:solidFill>
-                  <a:srgbClr val="333333"/>
-                </a:solidFill>
-                <a:latin typeface="メイリオ"/>
-                <a:ea typeface="メイリオ"/>
-                <a:cs typeface="メイリオ"/>
-              </a:rPr>
-              <a:t>友だち追加後のステップ配信で、予約を案内</a:t>
-            </a:r>
-            <a:endParaRPr sz="1250" b="1" dirty="0">
-              <a:solidFill>
-                <a:srgbClr val="1F285A"/>
-              </a:solidFill>
-              <a:latin typeface="メイリオ"/>
-              <a:ea typeface="メイリオ"/>
-              <a:cs typeface="メイリオ"/>
-            </a:endParaRPr>
-          </a:p>
-        </p:txBody>
-      </p:sp>
-      <p:sp>
-        <p:nvSpPr>
-          <p:cNvPr id="14" name="Rounded Rectangle 12"/>
-          <p:cNvSpPr/>
-          <p:nvPr/>
-        </p:nvSpPr>
-        <p:spPr>
-          <a:xfrm>
-            <a:off x="1080000" y="3960000"/>
-            <a:ext cx="3798000" cy="1548000"/>
-          </a:xfrm>
-          <a:prstGeom prst="roundRect">
-            <a:avLst>
-              <a:gd name="adj" fmla="val 6000"/>
-            </a:avLst>
-          </a:prstGeom>
-          <a:noFill/>
-          <a:ln w="19050">
-            <a:noFill/>
-          </a:ln>
-          <a:effectLst/>
-        </p:spPr>
-        <p:style>
-          <a:lnRef idx="1">
-            <a:schemeClr val="accent1"/>
-          </a:lnRef>
-          <a:fillRef idx="3">
-            <a:schemeClr val="accent1"/>
-          </a:fillRef>
-          <a:effectRef idx="0">
-            <a:schemeClr val="accent1"/>
-          </a:effectRef>
-          <a:fontRef idx="minor">
-            <a:schemeClr val="lt1"/>
-          </a:fontRef>
-        </p:style>
-        <p:txBody>
-          <a:bodyPr wrap="square" lIns="180000" tIns="72000" rIns="180000" bIns="36000" rtlCol="0" anchor="t"/>
-          <a:lstStyle/>
-          <a:p>
-            <a:pPr algn="l">
-              <a:lnSpc>
-                <a:spcPct val="130000"/>
-              </a:lnSpc>
-              <a:spcAft>
-                <a:spcPts val="400"/>
-              </a:spcAft>
-            </a:pPr>
-            <a:r>
-              <a:rPr sz="1300" b="0" dirty="0" err="1">
-                <a:solidFill>
-                  <a:srgbClr val="333333"/>
-                </a:solidFill>
-                <a:latin typeface="メイリオ"/>
-                <a:ea typeface="メイリオ"/>
-                <a:cs typeface="メイリオ"/>
-              </a:rPr>
-              <a:t>LINE経由の予約数</a:t>
-            </a:r>
-            <a:endParaRPr sz="1250" b="1" dirty="0">
-              <a:solidFill>
-                <a:srgbClr val="1F285A"/>
-              </a:solidFill>
-              <a:latin typeface="メイリオ"/>
-              <a:ea typeface="メイリオ"/>
-              <a:cs typeface="メイリオ"/>
-            </a:endParaRPr>
-          </a:p>
-          <a:p>
-            <a:pPr algn="l">
-              <a:lnSpc>
-                <a:spcPct val="130000"/>
-              </a:lnSpc>
-              <a:spcAft>
-                <a:spcPts val="200"/>
-              </a:spcAft>
-            </a:pPr>
-            <a:r>
-              <a:rPr sz="3200" b="1" dirty="0" err="1">
-                <a:solidFill>
-                  <a:srgbClr val="1F285A"/>
-                </a:solidFill>
-                <a:latin typeface="メイリオ"/>
-                <a:ea typeface="メイリオ"/>
-                <a:cs typeface="メイリオ"/>
-              </a:rPr>
-              <a:t>約1.2倍</a:t>
-            </a:r>
-            <a:endParaRPr sz="1250" b="1" dirty="0">
-              <a:solidFill>
-                <a:srgbClr val="1F285A"/>
-              </a:solidFill>
-              <a:latin typeface="メイリオ"/>
-              <a:ea typeface="メイリオ"/>
-              <a:cs typeface="メイリオ"/>
-            </a:endParaRPr>
-          </a:p>
-          <a:p>
-            <a:pPr algn="l">
-              <a:lnSpc>
-                <a:spcPct val="130000"/>
-              </a:lnSpc>
-              <a:spcAft>
-                <a:spcPts val="0"/>
-              </a:spcAft>
-            </a:pPr>
-            <a:r>
-              <a:rPr sz="1100" b="0" dirty="0" err="1">
-                <a:solidFill>
-                  <a:srgbClr val="7F7F7F"/>
-                </a:solidFill>
-                <a:latin typeface="メイリオ"/>
-                <a:ea typeface="メイリオ"/>
-                <a:cs typeface="メイリオ"/>
-              </a:rPr>
-              <a:t>ステップ配信の実施前との比較</a:t>
-            </a:r>
-            <a:endParaRPr sz="1250" b="1" dirty="0">
-              <a:solidFill>
-                <a:srgbClr val="1F285A"/>
-              </a:solidFill>
-              <a:latin typeface="メイリオ"/>
-              <a:ea typeface="メイリオ"/>
-              <a:cs typeface="メイリオ"/>
-            </a:endParaRPr>
-          </a:p>
-        </p:txBody>
-      </p:sp>
-      <p:sp>
-        <p:nvSpPr>
-          <p:cNvPr id="15" name="Rounded Rectangle 12"/>
-          <p:cNvSpPr/>
-          <p:nvPr/>
-        </p:nvSpPr>
-        <p:spPr>
-          <a:xfrm>
-            <a:off x="5022000" y="2628000"/>
-            <a:ext cx="3798000" cy="1296000"/>
-          </a:xfrm>
-          <a:prstGeom prst="roundRect">
-            <a:avLst>
-              <a:gd name="adj" fmla="val 6000"/>
-            </a:avLst>
-          </a:prstGeom>
-          <a:noFill/>
-          <a:ln w="19050">
-            <a:noFill/>
-          </a:ln>
-          <a:effectLst/>
-        </p:spPr>
-        <p:style>
-          <a:lnRef idx="1">
-            <a:schemeClr val="accent1"/>
-          </a:lnRef>
-          <a:fillRef idx="3">
-            <a:schemeClr val="accent1"/>
-          </a:fillRef>
-          <a:effectRef idx="0">
-            <a:schemeClr val="accent1"/>
-          </a:effectRef>
-          <a:fontRef idx="minor">
-            <a:schemeClr val="lt1"/>
-          </a:fontRef>
-        </p:style>
-        <p:txBody>
-          <a:bodyPr wrap="square" lIns="180000" tIns="72000" rIns="180000" bIns="36000" rtlCol="0" anchor="t"/>
-          <a:lstStyle/>
-          <a:p>
-            <a:pPr algn="l">
-              <a:lnSpc>
-                <a:spcPct val="130000"/>
-              </a:lnSpc>
-              <a:spcAft>
-                <a:spcPts val="600"/>
-              </a:spcAft>
-            </a:pPr>
-            <a:r>
-              <a:rPr sz="1500" b="1" dirty="0" err="1">
-                <a:solidFill>
-                  <a:srgbClr val="333333"/>
-                </a:solidFill>
-                <a:latin typeface="メイリオ"/>
-                <a:ea typeface="メイリオ"/>
-                <a:cs typeface="メイリオ"/>
-              </a:rPr>
-              <a:t>就職支援</a:t>
-            </a:r>
-            <a:endParaRPr sz="1250" b="1" dirty="0">
-              <a:solidFill>
-                <a:srgbClr val="1F285A"/>
-              </a:solidFill>
-              <a:latin typeface="メイリオ"/>
-              <a:ea typeface="メイリオ"/>
-              <a:cs typeface="メイリオ"/>
-            </a:endParaRPr>
-          </a:p>
-          <a:p>
-            <a:pPr algn="l">
-              <a:lnSpc>
-                <a:spcPct val="130000"/>
-              </a:lnSpc>
-              <a:spcAft>
-                <a:spcPts val="0"/>
-              </a:spcAft>
-            </a:pPr>
-            <a:r>
-              <a:rPr sz="1300" b="0" dirty="0" err="1">
-                <a:solidFill>
-                  <a:srgbClr val="333333"/>
-                </a:solidFill>
-                <a:latin typeface="メイリオ"/>
-                <a:ea typeface="メイリオ"/>
-                <a:cs typeface="メイリオ"/>
-              </a:rPr>
-              <a:t>LINEのチャットボットで情報を提供し、面談予約へ</a:t>
-            </a:r>
-            <a:endParaRPr sz="1250" b="1" dirty="0">
-              <a:solidFill>
-                <a:srgbClr val="1F285A"/>
-              </a:solidFill>
-              <a:latin typeface="メイリオ"/>
-              <a:ea typeface="メイリオ"/>
-              <a:cs typeface="メイリオ"/>
-            </a:endParaRPr>
-          </a:p>
-        </p:txBody>
-      </p:sp>
-      <p:sp>
-        <p:nvSpPr>
-          <p:cNvPr id="16" name="Rounded Rectangle 12"/>
-          <p:cNvSpPr/>
-          <p:nvPr/>
-        </p:nvSpPr>
-        <p:spPr>
-          <a:xfrm>
-            <a:off x="5022000" y="3960000"/>
-            <a:ext cx="3798000" cy="1548000"/>
-          </a:xfrm>
-          <a:prstGeom prst="roundRect">
-            <a:avLst>
-              <a:gd name="adj" fmla="val 6000"/>
-            </a:avLst>
-          </a:prstGeom>
-          <a:noFill/>
-          <a:ln w="19050">
-            <a:noFill/>
-          </a:ln>
-          <a:effectLst/>
-        </p:spPr>
-        <p:style>
-          <a:lnRef idx="1">
-            <a:schemeClr val="accent1"/>
-          </a:lnRef>
-          <a:fillRef idx="3">
-            <a:schemeClr val="accent1"/>
-          </a:fillRef>
-          <a:effectRef idx="0">
-            <a:schemeClr val="accent1"/>
-          </a:effectRef>
-          <a:fontRef idx="minor">
-            <a:schemeClr val="lt1"/>
-          </a:fontRef>
-        </p:style>
-        <p:txBody>
-          <a:bodyPr wrap="square" lIns="180000" tIns="72000" rIns="180000" bIns="36000" rtlCol="0" anchor="t"/>
-          <a:lstStyle/>
-          <a:p>
-            <a:pPr algn="l">
-              <a:lnSpc>
-                <a:spcPct val="130000"/>
-              </a:lnSpc>
-              <a:spcAft>
-                <a:spcPts val="400"/>
-              </a:spcAft>
-            </a:pPr>
-            <a:r>
-              <a:rPr sz="1300" b="0" dirty="0" err="1">
-                <a:solidFill>
-                  <a:srgbClr val="333333"/>
-                </a:solidFill>
-                <a:latin typeface="メイリオ"/>
-                <a:ea typeface="メイリオ"/>
-                <a:cs typeface="メイリオ"/>
-              </a:rPr>
-              <a:t>LINEで問い合わせた方のうち</a:t>
-            </a:r>
-            <a:endParaRPr sz="1250" b="1" dirty="0">
-              <a:solidFill>
-                <a:srgbClr val="1F285A"/>
-              </a:solidFill>
-              <a:latin typeface="メイリオ"/>
-              <a:ea typeface="メイリオ"/>
-              <a:cs typeface="メイリオ"/>
-            </a:endParaRPr>
-          </a:p>
-          <a:p>
-            <a:pPr algn="l">
-              <a:lnSpc>
-                <a:spcPct val="130000"/>
-              </a:lnSpc>
-              <a:spcAft>
-                <a:spcPts val="200"/>
-              </a:spcAft>
-            </a:pPr>
-            <a:r>
-              <a:rPr sz="3200" b="1" dirty="0" err="1">
-                <a:solidFill>
-                  <a:srgbClr val="1F285A"/>
-                </a:solidFill>
-                <a:latin typeface="メイリオ"/>
-                <a:ea typeface="メイリオ"/>
-                <a:cs typeface="メイリオ"/>
-              </a:rPr>
-              <a:t>55%</a:t>
-            </a:r>
-            <a:endParaRPr sz="1250" b="1" dirty="0">
-              <a:solidFill>
-                <a:srgbClr val="1F285A"/>
-              </a:solidFill>
-              <a:latin typeface="メイリオ"/>
-              <a:ea typeface="メイリオ"/>
-              <a:cs typeface="メイリオ"/>
-            </a:endParaRPr>
-          </a:p>
-          <a:p>
-            <a:pPr algn="l">
-              <a:lnSpc>
-                <a:spcPct val="130000"/>
-              </a:lnSpc>
-              <a:spcAft>
-                <a:spcPts val="0"/>
-              </a:spcAft>
-            </a:pPr>
-            <a:r>
-              <a:rPr sz="1100" b="0" dirty="0" err="1">
-                <a:solidFill>
-                  <a:srgbClr val="7F7F7F"/>
-                </a:solidFill>
-                <a:latin typeface="メイリオ"/>
-                <a:ea typeface="メイリオ"/>
-                <a:cs typeface="メイリオ"/>
-              </a:rPr>
-              <a:t>が、面談を予約（他のチャネルと比べて高い）</a:t>
-            </a:r>
-            <a:endParaRPr sz="1250" b="1" dirty="0">
-              <a:solidFill>
-                <a:srgbClr val="1F285A"/>
-              </a:solidFill>
-              <a:latin typeface="メイリオ"/>
-              <a:ea typeface="メイリオ"/>
-              <a:cs typeface="メイリオ"/>
-            </a:endParaRPr>
-          </a:p>
-        </p:txBody>
-      </p:sp>
-      <p:sp>
-        <p:nvSpPr>
-          <p:cNvPr id="17" name="Rounded Rectangle 4"/>
-          <p:cNvSpPr/>
-          <p:nvPr/>
-        </p:nvSpPr>
-        <p:spPr>
-          <a:xfrm>
-            <a:off x="1080000" y="5652000"/>
-            <a:ext cx="7740000" cy="432000"/>
-          </a:xfrm>
-          <a:prstGeom prst="roundRect">
-            <a:avLst>
-              <a:gd name="adj" fmla="val 10000"/>
-            </a:avLst>
-          </a:prstGeom>
-          <a:solidFill>
-            <a:srgbClr val="333333"/>
-          </a:solidFill>
-          <a:ln>
-            <a:noFill/>
-          </a:ln>
-          <a:effectLst/>
-        </p:spPr>
-        <p:style>
-          <a:lnRef idx="1">
-            <a:schemeClr val="accent1"/>
-          </a:lnRef>
-          <a:fillRef idx="3">
-            <a:schemeClr val="accent1"/>
-          </a:fillRef>
-          <a:effectRef idx="2">
-            <a:schemeClr val="accent1"/>
-          </a:effectRef>
-          <a:fontRef idx="minor">
-            <a:schemeClr val="lt1"/>
-          </a:fontRef>
-        </p:style>
-        <p:txBody>
-          <a:bodyPr wrap="square" lIns="54000" tIns="18000" rIns="54000" bIns="18000" rtlCol="0" anchor="ctr"/>
-          <a:lstStyle/>
-          <a:p>
-            <a:pPr algn="ctr">
-              <a:lnSpc>
-                <a:spcPct val="120000"/>
-              </a:lnSpc>
-            </a:pPr>
-            <a:r>
-              <a:rPr sz="1500" b="1">
-                <a:solidFill>
-                  <a:srgbClr val="FFFFFF"/>
-                </a:solidFill>
-                <a:latin typeface="メイリオ"/>
-                <a:ea typeface="メイリオ"/>
-                <a:cs typeface="メイリオ"/>
-              </a:rPr>
-              <a:t>資料請求のみで終わらせず、予約・商談につなげる</a:t>
-            </a:r>
-          </a:p>
-        </p:txBody>
-      </p:sp>
-    </p:spTree>
-    <p:extLst>
-      <p:ext uri="{BB962C8B-B14F-4D97-AF65-F5344CB8AC3E}">
-        <p14:creationId xmlns:p14="http://schemas.microsoft.com/office/powerpoint/2010/main" val="3939997984"/>
       </p:ext>
     </p:extLst>
   </p:cSld>
@@ -5735,7 +5168,33 @@
                 <a:ea typeface="メイリオ"/>
                 <a:cs typeface="メイリオ"/>
               </a:rPr>
-              <a:t>来店・購入の後も、LINEでつながり続ける</a:t>
+              <a:t>来店・購入後のLINEフォローで、リピートを伸ばす</a:t>
+            </a:r>
+            <a:endParaRPr sz="1600" dirty="0">
+              <a:solidFill>
+                <a:srgbClr val="333333"/>
+              </a:solidFill>
+              <a:latin typeface="メイリオ"/>
+              <a:ea typeface="メイリオ"/>
+              <a:cs typeface="メイリオ"/>
+            </a:endParaRPr>
+          </a:p>
+          <a:p>
+            <a:pPr algn="l">
+              <a:lnSpc>
+                <a:spcPct val="130000"/>
+              </a:lnSpc>
+            </a:pPr>
+            <a:r>
+              <a:rPr sz="1800" dirty="0" err="1" b="0">
+                <a:solidFill>
+                  <a:srgbClr val="333333"/>
+                </a:solidFill>
+                <a:latin typeface="メイリオ"/>
+                <a:ea typeface="メイリオ"/>
+                <a:cs typeface="メイリオ"/>
+              </a:rPr>
+              <a:t>アンケート・クーポン・次回来店タイミングの配信で、再来店を後押し</a:t>
             </a:r>
             <a:endParaRPr sz="1600" dirty="0">
               <a:solidFill>
@@ -6090,7 +5549,7 @@
                 <a:ea typeface="メイリオ"/>
                 <a:cs typeface="メイリオ"/>
               </a:rPr>
-              <a:t>次のタイミングで</a:t>
+              <a:t>適切なタイミングで</a:t>
             </a:r>
           </a:p>
           <a:p>
@@ -6223,7 +5682,7 @@
                 <a:ea typeface="メイリオ"/>
                 <a:cs typeface="メイリオ"/>
               </a:rPr>
-              <a:t>再来店</a:t>
+              <a:t>再来店・</a:t>
             </a:r>
             <a:endParaRPr sz="1250" b="1" dirty="0">
               <a:solidFill>
@@ -6274,7 +5733,7 @@
         <p:spPr>
           <a:xfrm>
             <a:off x="1080000" y="2628000"/>
-            <a:ext cx="3798000" cy="1296000"/>
+            <a:ext cx="3798000" cy="1044000"/>
           </a:xfrm>
           <a:prstGeom prst="roundRect">
             <a:avLst>
@@ -6372,8 +5831,8 @@
         </p:nvSpPr>
         <p:spPr>
           <a:xfrm>
-            <a:off x="1080000" y="3960000"/>
-            <a:ext cx="3798000" cy="1548000"/>
+            <a:off x="1080000" y="3707999"/>
+            <a:ext cx="3798000" cy="1800000"/>
           </a:xfrm>
           <a:prstGeom prst="roundRect">
             <a:avLst>
@@ -6442,7 +5901,7 @@
               </a:spcAft>
             </a:pPr>
             <a:r>
-              <a:rPr sz="3200" b="1" dirty="0" err="1">
+              <a:rPr sz="2800" b="1" dirty="0" err="1">
                 <a:solidFill>
                   <a:srgbClr val="1F285A"/>
                 </a:solidFill>
@@ -6450,7 +5909,7 @@
                 <a:ea typeface="メイリオ"/>
                 <a:cs typeface="メイリオ"/>
               </a:rPr>
-              <a:t>7.6→12.9%</a:t>
+              <a:t>7.6% → 12.9%</a:t>
             </a:r>
             <a:endParaRPr sz="1250" b="1" dirty="0">
               <a:solidFill>
@@ -6467,11 +5926,11 @@
                 <a:spcPct val="130000"/>
               </a:lnSpc>
               <a:spcAft>
-                <a:spcPts val="0"/>
+                <a:spcPts val="200"/>
               </a:spcAft>
             </a:pPr>
             <a:r>
-              <a:rPr sz="1100" b="0" dirty="0" err="1">
+              <a:rPr sz="1150" b="0" dirty="0" err="1">
                 <a:solidFill>
                   <a:srgbClr val="7F7F7F"/>
                 </a:solidFill>
@@ -6501,7 +5960,7 @@
         <p:spPr>
           <a:xfrm>
             <a:off x="5022000" y="2628000"/>
-            <a:ext cx="3798000" cy="1296000"/>
+            <a:ext cx="3798000" cy="1044000"/>
           </a:xfrm>
           <a:prstGeom prst="roundRect">
             <a:avLst>
@@ -6599,8 +6058,8 @@
         </p:nvSpPr>
         <p:spPr>
           <a:xfrm>
-            <a:off x="5022000" y="3960000"/>
-            <a:ext cx="3798000" cy="1548000"/>
+            <a:off x="5022000" y="3707999"/>
+            <a:ext cx="3798000" cy="1800000"/>
           </a:xfrm>
           <a:prstGeom prst="roundRect">
             <a:avLst>
@@ -6669,7 +6128,7 @@
               </a:spcAft>
             </a:pPr>
             <a:r>
-              <a:rPr sz="3200" b="1" dirty="0" err="1">
+              <a:rPr sz="2800" b="1" dirty="0" err="1">
                 <a:solidFill>
                   <a:srgbClr val="1F285A"/>
                 </a:solidFill>
@@ -6677,7 +6136,7 @@
                 <a:ea typeface="メイリオ"/>
                 <a:cs typeface="メイリオ"/>
               </a:rPr>
-              <a:t>19.4→40%超</a:t>
+              <a:t>19.4% → 40%超</a:t>
             </a:r>
             <a:endParaRPr sz="1250" b="1" dirty="0">
               <a:solidFill>
@@ -6694,11 +6153,11 @@
                 <a:spcPct val="130000"/>
               </a:lnSpc>
               <a:spcAft>
-                <a:spcPts val="0"/>
+                <a:spcPts val="200"/>
               </a:spcAft>
             </a:pPr>
             <a:r>
-              <a:rPr sz="1100" b="0" dirty="0" err="1">
+              <a:rPr sz="1150" b="0" dirty="0" err="1">
                 <a:solidFill>
                   <a:srgbClr val="7F7F7F"/>
                 </a:solidFill>
@@ -6829,7 +6288,7 @@
 </p:sld>
 </file>
 
-<file path=ppt/slides/slide5.xml><?xml version="1.0" encoding="utf-8"?>
+<file path=ppt/slides/slide6.xml><?xml version="1.0" encoding="utf-8"?>
 <p:sld xmlns:a="http://schemas.openxmlformats.org/drawingml/2006/main" xmlns:p="http://schemas.openxmlformats.org/presentationml/2006/main" xmlns:r="http://schemas.openxmlformats.org/officeDocument/2006/relationships">
   <p:cSld>
     <p:spTree>

--- a/20261002_サンクスLINEのご提案_事例入り.pptx
+++ b/20261002_サンクスLINEのご提案_事例入り.pptx
@@ -3697,7 +3697,7 @@
                 <a:ea typeface="メイリオ"/>
                 <a:cs typeface="メイリオ"/>
               </a:rPr>
-              <a:t>シーン1・2｜来店・来院の予約／資料請求</a:t>
+              <a:t>実例｜来店・来院の予約／資料請求</a:t>
             </a:r>
           </a:p>
         </p:txBody>
@@ -5127,7 +5127,7 @@
                 <a:ea typeface="メイリオ"/>
                 <a:cs typeface="メイリオ"/>
               </a:rPr>
-              <a:t>シーン3｜購入・来店の後</a:t>
+              <a:t>実例｜購入・来店の後</a:t>
             </a:r>
           </a:p>
         </p:txBody>

--- a/20261002_サンクスLINEのご提案_事例入り.pptx
+++ b/20261002_サンクスLINEのご提案_事例入り.pptx
@@ -3030,36 +3030,58 @@
       </p:cxnSp>
       <p:sp>
         <p:nvSpPr>
-          <p:cNvPr id="6" name="TextBox 19"/>
-          <p:cNvSpPr txBox="1"/>
+          <p:cNvPr id="6" name="Rounded Rectangle 12"/>
+          <p:cNvSpPr/>
           <p:nvPr/>
         </p:nvSpPr>
         <p:spPr>
           <a:xfrm>
-            <a:off x="1080000" y="1512000"/>
-            <a:ext cx="7740000" cy="1044000"/>
+            <a:off x="1080000" y="1728000"/>
+            <a:ext cx="1655999" cy="612000"/>
           </a:xfrm>
-          <a:prstGeom prst="rect">
-            <a:avLst/>
+          <a:prstGeom prst="roundRect">
+            <a:avLst>
+              <a:gd name="adj" fmla="val 6000"/>
+            </a:avLst>
           </a:prstGeom>
-          <a:noFill/>
+          <a:solidFill>
+            <a:srgbClr val="FFFFFF"/>
+          </a:solidFill>
+          <a:ln w="19050">
+            <a:solidFill>
+              <a:srgbClr val="1F285A"/>
+            </a:solidFill>
+          </a:ln>
+          <a:effectLst/>
         </p:spPr>
+        <p:style>
+          <a:lnRef idx="1">
+            <a:schemeClr val="accent1"/>
+          </a:lnRef>
+          <a:fillRef idx="3">
+            <a:schemeClr val="accent1"/>
+          </a:fillRef>
+          <a:effectRef idx="2">
+            <a:schemeClr val="accent1"/>
+          </a:effectRef>
+          <a:fontRef idx="minor">
+            <a:schemeClr val="lt1"/>
+          </a:fontRef>
+        </p:style>
         <p:txBody>
-          <a:bodyPr wrap="square" lIns="0" tIns="21600" rIns="0" bIns="21600" anchor="t">
-            <a:spAutoFit/>
-          </a:bodyPr>
+          <a:bodyPr wrap="square" lIns="125999" tIns="90000" rIns="108000" bIns="54000" rtlCol="0" anchor="ctr"/>
           <a:lstStyle/>
           <a:p>
-            <a:pPr algn="l">
+            <a:pPr algn="ctr">
               <a:lnSpc>
-                <a:spcPct val="115000"/>
+                <a:spcPct val="130000"/>
               </a:lnSpc>
               <a:spcAft>
-                <a:spcPts val="400"/>
+                <a:spcPts val="500"/>
               </a:spcAft>
             </a:pPr>
             <a:r>
-              <a:rPr sz="1700" b="1">
+              <a:rPr sz="1300" b="1" dirty="0" err="1">
                 <a:solidFill>
                   <a:srgbClr val="1F285A"/>
                 </a:solidFill>
@@ -3067,63 +3089,408 @@
                 <a:ea typeface="メイリオ"/>
                 <a:cs typeface="メイリオ"/>
               </a:rPr>
-              <a:t>申込み⇒来店までに、一定数が離脱する。</a:t>
-            </a:r>
-          </a:p>
-          <a:p>
-            <a:pPr algn="l">
-              <a:lnSpc>
-                <a:spcPct val="115000"/>
-              </a:lnSpc>
-              <a:spcAft>
-                <a:spcPts val="400"/>
-              </a:spcAft>
-            </a:pPr>
-            <a:r>
-              <a:rPr sz="1700" b="1">
-                <a:solidFill>
-                  <a:srgbClr val="1F285A"/>
-                </a:solidFill>
-                <a:latin typeface="メイリオ"/>
-                <a:ea typeface="メイリオ"/>
-                <a:cs typeface="メイリオ"/>
-              </a:rPr>
-              <a:t>広告費を増やしても、この離脱層は減らない。</a:t>
-            </a:r>
-          </a:p>
-          <a:p>
-            <a:pPr algn="l">
-              <a:lnSpc>
-                <a:spcPct val="115000"/>
-              </a:lnSpc>
-              <a:spcAft>
-                <a:spcPts val="400"/>
-              </a:spcAft>
-            </a:pPr>
-            <a:r>
-              <a:rPr sz="1700" b="1">
-                <a:solidFill>
-                  <a:srgbClr val="1F285A"/>
-                </a:solidFill>
-                <a:latin typeface="メイリオ"/>
-                <a:ea typeface="メイリオ"/>
-                <a:cs typeface="メイリオ"/>
-              </a:rPr>
-              <a:t>申込み完了の画面は、関心が一番高い瞬間。ここでLINEにつなげる。</a:t>
-            </a:r>
+              <a:t>申込み完了</a:t>
+            </a:r>
+            <a:endParaRPr sz="1250" b="1" dirty="0">
+              <a:solidFill>
+                <a:srgbClr val="1F285A"/>
+              </a:solidFill>
+              <a:latin typeface="メイリオ"/>
+              <a:ea typeface="メイリオ"/>
+              <a:cs typeface="メイリオ"/>
+            </a:endParaRPr>
           </a:p>
         </p:txBody>
       </p:sp>
       <p:sp>
         <p:nvSpPr>
-          <p:cNvPr id="7" name="Rounded Rectangle 12"/>
+          <p:cNvPr id="7" name="Right Arrow 5"/>
+          <p:cNvSpPr/>
+          <p:nvPr/>
+        </p:nvSpPr>
+        <p:spPr>
+          <a:xfrm>
+            <a:off x="2754000" y="1889999"/>
+            <a:ext cx="324000" cy="288000"/>
+          </a:xfrm>
+          <a:prstGeom prst="rightArrow">
+            <a:avLst/>
+          </a:prstGeom>
+          <a:solidFill>
+            <a:srgbClr val="1F285A"/>
+          </a:solidFill>
+          <a:ln>
+            <a:noFill/>
+          </a:ln>
+          <a:effectLst/>
+        </p:spPr>
+        <p:style>
+          <a:lnRef idx="1">
+            <a:schemeClr val="accent1"/>
+          </a:lnRef>
+          <a:fillRef idx="3">
+            <a:schemeClr val="accent1"/>
+          </a:fillRef>
+          <a:effectRef idx="2">
+            <a:schemeClr val="accent1"/>
+          </a:effectRef>
+          <a:fontRef idx="minor">
+            <a:schemeClr val="lt1"/>
+          </a:fontRef>
+        </p:style>
+        <p:txBody>
+          <a:bodyPr rtlCol="0" anchor="ctr"/>
+          <a:lstStyle/>
+          <a:p>
+            <a:pPr algn="ctr"/>
+            <a:endParaRPr>
+              <a:latin typeface="メイリオ"/>
+              <a:ea typeface="メイリオ"/>
+              <a:cs typeface="メイリオ"/>
+            </a:endParaRPr>
+          </a:p>
+        </p:txBody>
+      </p:sp>
+      <p:sp>
+        <p:nvSpPr>
+          <p:cNvPr id="8" name="Rounded Rectangle 4"/>
+          <p:cNvSpPr/>
+          <p:nvPr/>
+        </p:nvSpPr>
+        <p:spPr>
+          <a:xfrm>
+            <a:off x="3096000" y="1728000"/>
+            <a:ext cx="1655999" cy="612000"/>
+          </a:xfrm>
+          <a:prstGeom prst="roundRect">
+            <a:avLst>
+              <a:gd name="adj" fmla="val 10000"/>
+            </a:avLst>
+          </a:prstGeom>
+          <a:solidFill>
+            <a:srgbClr val="1F285A"/>
+          </a:solidFill>
+          <a:ln>
+            <a:noFill/>
+          </a:ln>
+          <a:effectLst/>
+        </p:spPr>
+        <p:style>
+          <a:lnRef idx="1">
+            <a:schemeClr val="accent1"/>
+          </a:lnRef>
+          <a:fillRef idx="3">
+            <a:schemeClr val="accent1"/>
+          </a:fillRef>
+          <a:effectRef idx="2">
+            <a:schemeClr val="accent1"/>
+          </a:effectRef>
+          <a:fontRef idx="minor">
+            <a:schemeClr val="lt1"/>
+          </a:fontRef>
+        </p:style>
+        <p:txBody>
+          <a:bodyPr wrap="square" lIns="54000" tIns="18000" rIns="54000" bIns="18000" rtlCol="0" anchor="ctr"/>
+          <a:lstStyle/>
+          <a:p>
+            <a:pPr algn="ctr">
+              <a:lnSpc>
+                <a:spcPct val="120000"/>
+              </a:lnSpc>
+            </a:pPr>
+            <a:r>
+              <a:rPr sz="1300" b="1">
+                <a:solidFill>
+                  <a:srgbClr val="FFFFFF"/>
+                </a:solidFill>
+                <a:latin typeface="メイリオ"/>
+                <a:ea typeface="メイリオ"/>
+                <a:cs typeface="メイリオ"/>
+              </a:rPr>
+              <a:t>LINEで</a:t>
+            </a:r>
+          </a:p>
+          <a:p>
+            <a:pPr algn="ctr">
+              <a:lnSpc>
+                <a:spcPct val="120000"/>
+              </a:lnSpc>
+            </a:pPr>
+            <a:r>
+              <a:rPr sz="1300" b="1">
+                <a:solidFill>
+                  <a:srgbClr val="FFFFFF"/>
+                </a:solidFill>
+                <a:latin typeface="メイリオ"/>
+                <a:ea typeface="メイリオ"/>
+                <a:cs typeface="メイリオ"/>
+              </a:rPr>
+              <a:t>つながる</a:t>
+            </a:r>
+          </a:p>
+        </p:txBody>
+      </p:sp>
+      <p:sp>
+        <p:nvSpPr>
+          <p:cNvPr id="9" name="Right Arrow 5"/>
+          <p:cNvSpPr/>
+          <p:nvPr/>
+        </p:nvSpPr>
+        <p:spPr>
+          <a:xfrm>
+            <a:off x="4770000" y="1889999"/>
+            <a:ext cx="324000" cy="288000"/>
+          </a:xfrm>
+          <a:prstGeom prst="rightArrow">
+            <a:avLst/>
+          </a:prstGeom>
+          <a:solidFill>
+            <a:srgbClr val="1F285A"/>
+          </a:solidFill>
+          <a:ln>
+            <a:noFill/>
+          </a:ln>
+          <a:effectLst/>
+        </p:spPr>
+        <p:style>
+          <a:lnRef idx="1">
+            <a:schemeClr val="accent1"/>
+          </a:lnRef>
+          <a:fillRef idx="3">
+            <a:schemeClr val="accent1"/>
+          </a:fillRef>
+          <a:effectRef idx="2">
+            <a:schemeClr val="accent1"/>
+          </a:effectRef>
+          <a:fontRef idx="minor">
+            <a:schemeClr val="lt1"/>
+          </a:fontRef>
+        </p:style>
+        <p:txBody>
+          <a:bodyPr rtlCol="0" anchor="ctr"/>
+          <a:lstStyle/>
+          <a:p>
+            <a:pPr algn="ctr"/>
+            <a:endParaRPr>
+              <a:latin typeface="メイリオ"/>
+              <a:ea typeface="メイリオ"/>
+              <a:cs typeface="メイリオ"/>
+            </a:endParaRPr>
+          </a:p>
+        </p:txBody>
+      </p:sp>
+      <p:sp>
+        <p:nvSpPr>
+          <p:cNvPr id="10" name="Rounded Rectangle 4"/>
+          <p:cNvSpPr/>
+          <p:nvPr/>
+        </p:nvSpPr>
+        <p:spPr>
+          <a:xfrm>
+            <a:off x="5112000" y="1728000"/>
+            <a:ext cx="1655999" cy="612000"/>
+          </a:xfrm>
+          <a:prstGeom prst="roundRect">
+            <a:avLst>
+              <a:gd name="adj" fmla="val 10000"/>
+            </a:avLst>
+          </a:prstGeom>
+          <a:solidFill>
+            <a:srgbClr val="1F285A"/>
+          </a:solidFill>
+          <a:ln>
+            <a:noFill/>
+          </a:ln>
+          <a:effectLst/>
+        </p:spPr>
+        <p:style>
+          <a:lnRef idx="1">
+            <a:schemeClr val="accent1"/>
+          </a:lnRef>
+          <a:fillRef idx="3">
+            <a:schemeClr val="accent1"/>
+          </a:fillRef>
+          <a:effectRef idx="2">
+            <a:schemeClr val="accent1"/>
+          </a:effectRef>
+          <a:fontRef idx="minor">
+            <a:schemeClr val="lt1"/>
+          </a:fontRef>
+        </p:style>
+        <p:txBody>
+          <a:bodyPr wrap="square" lIns="54000" tIns="18000" rIns="54000" bIns="18000" rtlCol="0" anchor="ctr"/>
+          <a:lstStyle/>
+          <a:p>
+            <a:pPr algn="ctr">
+              <a:lnSpc>
+                <a:spcPct val="120000"/>
+              </a:lnSpc>
+            </a:pPr>
+            <a:r>
+              <a:rPr sz="1300" b="1">
+                <a:solidFill>
+                  <a:srgbClr val="FFFFFF"/>
+                </a:solidFill>
+                <a:latin typeface="メイリオ"/>
+                <a:ea typeface="メイリオ"/>
+                <a:cs typeface="メイリオ"/>
+              </a:rPr>
+              <a:t>離脱を</a:t>
+            </a:r>
+          </a:p>
+          <a:p>
+            <a:pPr algn="ctr">
+              <a:lnSpc>
+                <a:spcPct val="120000"/>
+              </a:lnSpc>
+            </a:pPr>
+            <a:r>
+              <a:rPr sz="1300" b="1">
+                <a:solidFill>
+                  <a:srgbClr val="FFFFFF"/>
+                </a:solidFill>
+                <a:latin typeface="メイリオ"/>
+                <a:ea typeface="メイリオ"/>
+                <a:cs typeface="メイリオ"/>
+              </a:rPr>
+              <a:t>防ぐ</a:t>
+            </a:r>
+          </a:p>
+        </p:txBody>
+      </p:sp>
+      <p:sp>
+        <p:nvSpPr>
+          <p:cNvPr id="11" name="Right Arrow 5"/>
+          <p:cNvSpPr/>
+          <p:nvPr/>
+        </p:nvSpPr>
+        <p:spPr>
+          <a:xfrm>
+            <a:off x="6785999" y="1889999"/>
+            <a:ext cx="324000" cy="288000"/>
+          </a:xfrm>
+          <a:prstGeom prst="rightArrow">
+            <a:avLst/>
+          </a:prstGeom>
+          <a:solidFill>
+            <a:srgbClr val="1F285A"/>
+          </a:solidFill>
+          <a:ln>
+            <a:noFill/>
+          </a:ln>
+          <a:effectLst/>
+        </p:spPr>
+        <p:style>
+          <a:lnRef idx="1">
+            <a:schemeClr val="accent1"/>
+          </a:lnRef>
+          <a:fillRef idx="3">
+            <a:schemeClr val="accent1"/>
+          </a:fillRef>
+          <a:effectRef idx="2">
+            <a:schemeClr val="accent1"/>
+          </a:effectRef>
+          <a:fontRef idx="minor">
+            <a:schemeClr val="lt1"/>
+          </a:fontRef>
+        </p:style>
+        <p:txBody>
+          <a:bodyPr rtlCol="0" anchor="ctr"/>
+          <a:lstStyle/>
+          <a:p>
+            <a:pPr algn="ctr"/>
+            <a:endParaRPr>
+              <a:latin typeface="メイリオ"/>
+              <a:ea typeface="メイリオ"/>
+              <a:cs typeface="メイリオ"/>
+            </a:endParaRPr>
+          </a:p>
+        </p:txBody>
+      </p:sp>
+      <p:sp>
+        <p:nvSpPr>
+          <p:cNvPr id="12" name="Rounded Rectangle 12"/>
+          <p:cNvSpPr/>
+          <p:nvPr/>
+        </p:nvSpPr>
+        <p:spPr>
+          <a:xfrm>
+            <a:off x="7127999" y="1728000"/>
+            <a:ext cx="1655999" cy="612000"/>
+          </a:xfrm>
+          <a:prstGeom prst="roundRect">
+            <a:avLst>
+              <a:gd name="adj" fmla="val 6000"/>
+            </a:avLst>
+          </a:prstGeom>
+          <a:solidFill>
+            <a:srgbClr val="FFFFFF"/>
+          </a:solidFill>
+          <a:ln w="19050">
+            <a:solidFill>
+              <a:srgbClr val="1F285A"/>
+            </a:solidFill>
+          </a:ln>
+          <a:effectLst/>
+        </p:spPr>
+        <p:style>
+          <a:lnRef idx="1">
+            <a:schemeClr val="accent1"/>
+          </a:lnRef>
+          <a:fillRef idx="3">
+            <a:schemeClr val="accent1"/>
+          </a:fillRef>
+          <a:effectRef idx="2">
+            <a:schemeClr val="accent1"/>
+          </a:effectRef>
+          <a:fontRef idx="minor">
+            <a:schemeClr val="lt1"/>
+          </a:fontRef>
+        </p:style>
+        <p:txBody>
+          <a:bodyPr wrap="square" lIns="125999" tIns="90000" rIns="108000" bIns="54000" rtlCol="0" anchor="ctr"/>
+          <a:lstStyle/>
+          <a:p>
+            <a:pPr algn="ctr">
+              <a:lnSpc>
+                <a:spcPct val="130000"/>
+              </a:lnSpc>
+              <a:spcAft>
+                <a:spcPts val="500"/>
+              </a:spcAft>
+            </a:pPr>
+            <a:r>
+              <a:rPr sz="1300" b="1" dirty="0" err="1">
+                <a:solidFill>
+                  <a:srgbClr val="1F285A"/>
+                </a:solidFill>
+                <a:latin typeface="メイリオ"/>
+                <a:ea typeface="メイリオ"/>
+                <a:cs typeface="メイリオ"/>
+              </a:rPr>
+              <a:t>来店・商談</a:t>
+            </a:r>
+            <a:endParaRPr sz="1250" b="1" dirty="0">
+              <a:solidFill>
+                <a:srgbClr val="1F285A"/>
+              </a:solidFill>
+              <a:latin typeface="メイリオ"/>
+              <a:ea typeface="メイリオ"/>
+              <a:cs typeface="メイリオ"/>
+            </a:endParaRPr>
+          </a:p>
+        </p:txBody>
+      </p:sp>
+      <p:sp>
+        <p:nvSpPr>
+          <p:cNvPr id="13" name="Rounded Rectangle 12"/>
           <p:cNvSpPr/>
           <p:nvPr/>
         </p:nvSpPr>
         <p:spPr>
           <a:xfrm>
             <a:off x="1080000" y="2628000"/>
-            <a:ext cx="3798000" cy="1044000"/>
+            <a:ext cx="2952000" cy="1044000"/>
           </a:xfrm>
           <a:prstGeom prst="roundRect">
             <a:avLst>
@@ -3171,7 +3538,7 @@
                 <a:ea typeface="メイリオ"/>
                 <a:cs typeface="メイリオ"/>
               </a:rPr>
-              <a:t>読まれる</a:t>
+              <a:t>離脱</a:t>
             </a:r>
             <a:endParaRPr sz="1250" b="1" dirty="0">
               <a:solidFill>
@@ -3200,7 +3567,7 @@
                 <a:ea typeface="メイリオ"/>
                 <a:cs typeface="メイリオ"/>
               </a:rPr>
-              <a:t>バス会社：申込み直後のLINE通知メッセージは、よく読まれ、クリックもされる</a:t>
+              <a:t>広告費を増やしても、この離脱層は減らない</a:t>
             </a:r>
             <a:endParaRPr sz="1250" b="1" dirty="0">
               <a:solidFill>
@@ -3215,14 +3582,14 @@
       </p:sp>
       <p:sp>
         <p:nvSpPr>
-          <p:cNvPr id="8" name="Rounded Rectangle 12"/>
+          <p:cNvPr id="14" name="Rounded Rectangle 12"/>
           <p:cNvSpPr/>
           <p:nvPr/>
         </p:nvSpPr>
         <p:spPr>
           <a:xfrm>
             <a:off x="1080000" y="3707999"/>
-            <a:ext cx="3798000" cy="1800000"/>
+            <a:ext cx="2952000" cy="1800000"/>
           </a:xfrm>
           <a:prstGeom prst="roundRect">
             <a:avLst>
@@ -3270,7 +3637,7 @@
                 <a:ea typeface="メイリオ"/>
                 <a:cs typeface="メイリオ"/>
               </a:rPr>
-              <a:t>メッセージの開封率</a:t>
+              <a:t>申込み⇒来店までに</a:t>
             </a:r>
             <a:endParaRPr sz="1250" b="1" dirty="0">
               <a:solidFill>
@@ -3291,7 +3658,7 @@
               </a:spcAft>
             </a:pPr>
             <a:r>
-              <a:rPr sz="3200" b="1" dirty="0" err="1">
+              <a:rPr sz="2200" b="1" dirty="0" err="1">
                 <a:solidFill>
                   <a:srgbClr val="1F285A"/>
                 </a:solidFill>
@@ -3299,7 +3666,7 @@
                 <a:ea typeface="メイリオ"/>
                 <a:cs typeface="メイリオ"/>
               </a:rPr>
-              <a:t>約70%</a:t>
+              <a:t>一定数が離脱</a:t>
             </a:r>
             <a:endParaRPr sz="1250" b="1" dirty="0">
               <a:solidFill>
@@ -3320,7 +3687,7 @@
               </a:spcAft>
             </a:pPr>
             <a:r>
-              <a:rPr sz="1150" b="0" dirty="0" err="1">
+              <a:rPr sz="1050" b="0" dirty="0" err="1">
                 <a:solidFill>
                   <a:srgbClr val="7F7F7F"/>
                 </a:solidFill>
@@ -3328,7 +3695,7 @@
                 <a:ea typeface="メイリオ"/>
                 <a:cs typeface="メイリオ"/>
               </a:rPr>
-              <a:t>クリック率はメルマガの約5倍</a:t>
+              <a:t/>
             </a:r>
             <a:endParaRPr sz="1250" b="1" dirty="0">
               <a:solidFill>
@@ -3343,14 +3710,14 @@
       </p:sp>
       <p:sp>
         <p:nvSpPr>
-          <p:cNvPr id="9" name="Rounded Rectangle 12"/>
+          <p:cNvPr id="15" name="Rounded Rectangle 12"/>
           <p:cNvSpPr/>
           <p:nvPr/>
         </p:nvSpPr>
         <p:spPr>
           <a:xfrm>
-            <a:off x="5022000" y="2628000"/>
-            <a:ext cx="3798000" cy="1044000"/>
+            <a:off x="4176000" y="2628000"/>
+            <a:ext cx="2952000" cy="1044000"/>
           </a:xfrm>
           <a:prstGeom prst="roundRect">
             <a:avLst>
@@ -3427,7 +3794,7 @@
                 <a:ea typeface="メイリオ"/>
                 <a:cs typeface="メイリオ"/>
               </a:rPr>
-              <a:t>美容クリニック：予約完了画面からLINEへ誘導し、予約確認・前日のお知らせを配信</a:t>
+              <a:t>美容クリニック：予約確認・前日のお知らせをLINEで配信</a:t>
             </a:r>
             <a:endParaRPr sz="1250" b="1" dirty="0">
               <a:solidFill>
@@ -3442,14 +3809,14 @@
       </p:sp>
       <p:sp>
         <p:nvSpPr>
-          <p:cNvPr id="10" name="Rounded Rectangle 12"/>
+          <p:cNvPr id="16" name="Rounded Rectangle 12"/>
           <p:cNvSpPr/>
           <p:nvPr/>
         </p:nvSpPr>
         <p:spPr>
           <a:xfrm>
-            <a:off x="5022000" y="3707999"/>
-            <a:ext cx="3798000" cy="1800000"/>
+            <a:off x="4176000" y="3707999"/>
+            <a:ext cx="2952000" cy="1800000"/>
           </a:xfrm>
           <a:prstGeom prst="roundRect">
             <a:avLst>
@@ -3518,7 +3885,7 @@
               </a:spcAft>
             </a:pPr>
             <a:r>
-              <a:rPr sz="3200" b="1" dirty="0" err="1">
+              <a:rPr sz="2200" b="1" dirty="0" err="1">
                 <a:solidFill>
                   <a:srgbClr val="1F285A"/>
                 </a:solidFill>
@@ -3547,7 +3914,7 @@
               </a:spcAft>
             </a:pPr>
             <a:r>
-              <a:rPr sz="1150" b="0" dirty="0" err="1">
+              <a:rPr sz="1050" b="0" dirty="0" err="1">
                 <a:solidFill>
                   <a:srgbClr val="7F7F7F"/>
                 </a:solidFill>
@@ -3570,7 +3937,169 @@
       </p:sp>
       <p:sp>
         <p:nvSpPr>
-          <p:cNvPr id="11" name="Rounded Rectangle 4"/>
+          <p:cNvPr id="17" name="Rounded Rectangle 12"/>
+          <p:cNvSpPr/>
+          <p:nvPr/>
+        </p:nvSpPr>
+        <p:spPr>
+          <a:xfrm>
+            <a:off x="7343999" y="2628000"/>
+            <a:ext cx="1475999" cy="2628000"/>
+          </a:xfrm>
+          <a:prstGeom prst="roundRect">
+            <a:avLst>
+              <a:gd name="adj" fmla="val 6000"/>
+            </a:avLst>
+          </a:prstGeom>
+          <a:solidFill>
+            <a:srgbClr val="FFFFFF"/>
+          </a:solidFill>
+          <a:ln w="19050">
+            <a:solidFill>
+              <a:srgbClr val="7F7F7F"/>
+            </a:solidFill>
+            <a:prstDash val="dash"/>
+          </a:ln>
+          <a:effectLst/>
+        </p:spPr>
+        <p:style>
+          <a:lnRef idx="1">
+            <a:schemeClr val="accent1"/>
+          </a:lnRef>
+          <a:fillRef idx="3">
+            <a:schemeClr val="accent1"/>
+          </a:fillRef>
+          <a:effectRef idx="0">
+            <a:schemeClr val="accent1"/>
+          </a:effectRef>
+          <a:fontRef idx="minor">
+            <a:schemeClr val="lt1"/>
+          </a:fontRef>
+        </p:style>
+        <p:txBody>
+          <a:bodyPr wrap="square" lIns="125999" tIns="90000" rIns="108000" bIns="54000" rtlCol="0" anchor="ctr"/>
+          <a:lstStyle/>
+          <a:p>
+            <a:pPr algn="l">
+              <a:lnSpc>
+                <a:spcPct val="130000"/>
+              </a:lnSpc>
+              <a:spcAft>
+                <a:spcPts val="500"/>
+              </a:spcAft>
+            </a:pPr>
+            <a:r>
+              <a:rPr sz="1050" b="1" dirty="0" err="1">
+                <a:solidFill>
+                  <a:srgbClr val="7F7F7F"/>
+                </a:solidFill>
+                <a:latin typeface="メイリオ"/>
+                <a:ea typeface="メイリオ"/>
+                <a:cs typeface="メイリオ"/>
+              </a:rPr>
+              <a:t>［画像］</a:t>
+            </a:r>
+            <a:endParaRPr sz="1250" b="1" dirty="0">
+              <a:solidFill>
+                <a:srgbClr val="1F285A"/>
+              </a:solidFill>
+              <a:latin typeface="メイリオ"/>
+              <a:ea typeface="メイリオ"/>
+              <a:cs typeface="メイリオ"/>
+            </a:endParaRPr>
+          </a:p>
+          <a:p>
+            <a:pPr algn="l">
+              <a:lnSpc>
+                <a:spcPct val="130000"/>
+              </a:lnSpc>
+              <a:spcAft>
+                <a:spcPts val="500"/>
+              </a:spcAft>
+            </a:pPr>
+            <a:r>
+              <a:rPr sz="1050" b="1" dirty="0" err="1">
+                <a:solidFill>
+                  <a:srgbClr val="7F7F7F"/>
+                </a:solidFill>
+                <a:latin typeface="メイリオ"/>
+                <a:ea typeface="メイリオ"/>
+                <a:cs typeface="メイリオ"/>
+              </a:rPr>
+              <a:t>申込み直後の</a:t>
+            </a:r>
+            <a:endParaRPr sz="1250" b="1" dirty="0">
+              <a:solidFill>
+                <a:srgbClr val="1F285A"/>
+              </a:solidFill>
+              <a:latin typeface="メイリオ"/>
+              <a:ea typeface="メイリオ"/>
+              <a:cs typeface="メイリオ"/>
+            </a:endParaRPr>
+          </a:p>
+          <a:p>
+            <a:pPr algn="l">
+              <a:lnSpc>
+                <a:spcPct val="130000"/>
+              </a:lnSpc>
+              <a:spcAft>
+                <a:spcPts val="500"/>
+              </a:spcAft>
+            </a:pPr>
+            <a:r>
+              <a:rPr sz="1050" b="1" dirty="0" err="1">
+                <a:solidFill>
+                  <a:srgbClr val="7F7F7F"/>
+                </a:solidFill>
+                <a:latin typeface="メイリオ"/>
+                <a:ea typeface="メイリオ"/>
+                <a:cs typeface="メイリオ"/>
+              </a:rPr>
+              <a:t>LINEメッセージ</a:t>
+            </a:r>
+            <a:endParaRPr sz="1250" b="1" dirty="0">
+              <a:solidFill>
+                <a:srgbClr val="1F285A"/>
+              </a:solidFill>
+              <a:latin typeface="メイリオ"/>
+              <a:ea typeface="メイリオ"/>
+              <a:cs typeface="メイリオ"/>
+            </a:endParaRPr>
+          </a:p>
+          <a:p>
+            <a:pPr algn="l">
+              <a:lnSpc>
+                <a:spcPct val="130000"/>
+              </a:lnSpc>
+              <a:spcAft>
+                <a:spcPts val="500"/>
+              </a:spcAft>
+            </a:pPr>
+            <a:r>
+              <a:rPr sz="900" b="0" dirty="0" err="1">
+                <a:solidFill>
+                  <a:srgbClr val="7F7F7F"/>
+                </a:solidFill>
+                <a:latin typeface="メイリオ"/>
+                <a:ea typeface="メイリオ"/>
+                <a:cs typeface="メイリオ"/>
+              </a:rPr>
+              <a:t>msg_s2.png</a:t>
+            </a:r>
+            <a:endParaRPr sz="1250" b="1" dirty="0">
+              <a:solidFill>
+                <a:srgbClr val="1F285A"/>
+              </a:solidFill>
+              <a:latin typeface="メイリオ"/>
+              <a:ea typeface="メイリオ"/>
+              <a:cs typeface="メイリオ"/>
+            </a:endParaRPr>
+          </a:p>
+        </p:txBody>
+      </p:sp>
+      <p:sp>
+        <p:nvSpPr>
+          <p:cNvPr id="18" name="Rounded Rectangle 4"/>
           <p:cNvSpPr/>
           <p:nvPr/>
         </p:nvSpPr>
@@ -4303,7 +4832,7 @@
         <p:spPr>
           <a:xfrm>
             <a:off x="1080000" y="2628000"/>
-            <a:ext cx="2484000" cy="1044000"/>
+            <a:ext cx="1920000" cy="1044000"/>
           </a:xfrm>
           <a:prstGeom prst="roundRect">
             <a:avLst>
@@ -4331,7 +4860,7 @@
           </a:fontRef>
         </p:style>
         <p:txBody>
-          <a:bodyPr wrap="square" lIns="180000" tIns="72000" rIns="180000" bIns="36000" rtlCol="0" anchor="t"/>
+          <a:bodyPr wrap="square" lIns="108000" tIns="72000" rIns="72000" bIns="36000" rtlCol="0" anchor="t"/>
           <a:lstStyle/>
           <a:p>
             <a:pPr algn="l">
@@ -4343,7 +4872,7 @@
               </a:spcAft>
             </a:pPr>
             <a:r>
-              <a:rPr sz="1500" b="1" dirty="0" err="1">
+              <a:rPr sz="1400" b="1" dirty="0" err="1">
                 <a:solidFill>
                   <a:srgbClr val="333333"/>
                 </a:solidFill>
@@ -4372,7 +4901,7 @@
               </a:spcAft>
             </a:pPr>
             <a:r>
-              <a:rPr sz="1300" b="0" dirty="0" err="1">
+              <a:rPr sz="1250" b="0" dirty="0" err="1">
                 <a:solidFill>
                   <a:srgbClr val="333333"/>
                 </a:solidFill>
@@ -4402,7 +4931,7 @@
         <p:spPr>
           <a:xfrm>
             <a:off x="1080000" y="3707999"/>
-            <a:ext cx="2484000" cy="1800000"/>
+            <a:ext cx="1920000" cy="1800000"/>
           </a:xfrm>
           <a:prstGeom prst="roundRect">
             <a:avLst>
@@ -4430,7 +4959,7 @@
           </a:fontRef>
         </p:style>
         <p:txBody>
-          <a:bodyPr wrap="square" lIns="180000" tIns="72000" rIns="180000" bIns="36000" rtlCol="0" anchor="t"/>
+          <a:bodyPr wrap="square" lIns="108000" tIns="72000" rIns="72000" bIns="36000" rtlCol="0" anchor="t"/>
           <a:lstStyle/>
           <a:p>
             <a:pPr algn="l">
@@ -4471,7 +5000,7 @@
               </a:spcAft>
             </a:pPr>
             <a:r>
-              <a:rPr sz="2800" b="1" dirty="0" err="1">
+              <a:rPr sz="2200" b="1" dirty="0" err="1">
                 <a:solidFill>
                   <a:srgbClr val="1F285A"/>
                 </a:solidFill>
@@ -4500,7 +5029,7 @@
               </a:spcAft>
             </a:pPr>
             <a:r>
-              <a:rPr sz="1150" b="0" dirty="0" err="1">
+              <a:rPr sz="1050" b="0" dirty="0" err="1">
                 <a:solidFill>
                   <a:srgbClr val="7F7F7F"/>
                 </a:solidFill>
@@ -4509,35 +5038,6 @@
                 <a:cs typeface="メイリオ"/>
               </a:rPr>
               <a:t>約200名 → 約240名</a:t>
-            </a:r>
-            <a:endParaRPr sz="1250" b="1" dirty="0">
-              <a:solidFill>
-                <a:srgbClr val="1F285A"/>
-              </a:solidFill>
-              <a:latin typeface="メイリオ"/>
-              <a:ea typeface="メイリオ"/>
-              <a:cs typeface="メイリオ"/>
-            </a:endParaRPr>
-          </a:p>
-          <a:p>
-            <a:pPr algn="l">
-              <a:lnSpc>
-                <a:spcPct val="130000"/>
-              </a:lnSpc>
-              <a:spcAft>
-                <a:spcPts val="200"/>
-              </a:spcAft>
-            </a:pPr>
-            <a:r>
-              <a:rPr sz="1000" b="0" dirty="0" err="1">
-                <a:solidFill>
-                  <a:srgbClr val="7F7F7F"/>
-                </a:solidFill>
-                <a:latin typeface="メイリオ"/>
-                <a:ea typeface="メイリオ"/>
-                <a:cs typeface="メイリオ"/>
-              </a:rPr>
-              <a:t>リピート率も88% → 91%（導入前後の半年比較。LINEミニアプリを併用）</a:t>
             </a:r>
             <a:endParaRPr sz="1250" b="1" dirty="0">
               <a:solidFill>
@@ -4558,8 +5058,8 @@
         </p:nvSpPr>
         <p:spPr>
           <a:xfrm>
-            <a:off x="3708000" y="2628000"/>
-            <a:ext cx="2484000" cy="1044000"/>
+            <a:off x="3144000" y="2628000"/>
+            <a:ext cx="1920000" cy="1044000"/>
           </a:xfrm>
           <a:prstGeom prst="roundRect">
             <a:avLst>
@@ -4587,7 +5087,7 @@
           </a:fontRef>
         </p:style>
         <p:txBody>
-          <a:bodyPr wrap="square" lIns="180000" tIns="72000" rIns="180000" bIns="36000" rtlCol="0" anchor="t"/>
+          <a:bodyPr wrap="square" lIns="108000" tIns="72000" rIns="72000" bIns="36000" rtlCol="0" anchor="t"/>
           <a:lstStyle/>
           <a:p>
             <a:pPr algn="l">
@@ -4599,7 +5099,7 @@
               </a:spcAft>
             </a:pPr>
             <a:r>
-              <a:rPr sz="1500" b="1" dirty="0" err="1">
+              <a:rPr sz="1400" b="1" dirty="0" err="1">
                 <a:solidFill>
                   <a:srgbClr val="333333"/>
                 </a:solidFill>
@@ -4628,7 +5128,7 @@
               </a:spcAft>
             </a:pPr>
             <a:r>
-              <a:rPr sz="1300" b="0" dirty="0" err="1">
+              <a:rPr sz="1250" b="0" dirty="0" err="1">
                 <a:solidFill>
                   <a:srgbClr val="333333"/>
                 </a:solidFill>
@@ -4657,8 +5157,8 @@
         </p:nvSpPr>
         <p:spPr>
           <a:xfrm>
-            <a:off x="3708000" y="3707999"/>
-            <a:ext cx="2484000" cy="1800000"/>
+            <a:off x="3144000" y="3707999"/>
+            <a:ext cx="1920000" cy="1800000"/>
           </a:xfrm>
           <a:prstGeom prst="roundRect">
             <a:avLst>
@@ -4686,7 +5186,7 @@
           </a:fontRef>
         </p:style>
         <p:txBody>
-          <a:bodyPr wrap="square" lIns="180000" tIns="72000" rIns="180000" bIns="36000" rtlCol="0" anchor="t"/>
+          <a:bodyPr wrap="square" lIns="108000" tIns="72000" rIns="72000" bIns="36000" rtlCol="0" anchor="t"/>
           <a:lstStyle/>
           <a:p>
             <a:pPr algn="l">
@@ -4727,7 +5227,7 @@
               </a:spcAft>
             </a:pPr>
             <a:r>
-              <a:rPr sz="2800" b="1" dirty="0" err="1">
+              <a:rPr sz="2200" b="1" dirty="0" err="1">
                 <a:solidFill>
                   <a:srgbClr val="1F285A"/>
                 </a:solidFill>
@@ -4735,7 +5235,7 @@
                 <a:ea typeface="メイリオ"/>
                 <a:cs typeface="メイリオ"/>
               </a:rPr>
-              <a:t>約1.2倍</a:t>
+              <a:t>約20%増</a:t>
             </a:r>
             <a:endParaRPr sz="1250" b="1" dirty="0">
               <a:solidFill>
@@ -4756,7 +5256,7 @@
               </a:spcAft>
             </a:pPr>
             <a:r>
-              <a:rPr sz="1150" b="0" dirty="0" err="1">
+              <a:rPr sz="1050" b="0" dirty="0" err="1">
                 <a:solidFill>
                   <a:srgbClr val="7F7F7F"/>
                 </a:solidFill>
@@ -4785,8 +5285,8 @@
         </p:nvSpPr>
         <p:spPr>
           <a:xfrm>
-            <a:off x="6336000" y="2628000"/>
-            <a:ext cx="2484000" cy="1044000"/>
+            <a:off x="5208000" y="2628000"/>
+            <a:ext cx="1920000" cy="1044000"/>
           </a:xfrm>
           <a:prstGeom prst="roundRect">
             <a:avLst>
@@ -4814,7 +5314,7 @@
           </a:fontRef>
         </p:style>
         <p:txBody>
-          <a:bodyPr wrap="square" lIns="180000" tIns="72000" rIns="180000" bIns="36000" rtlCol="0" anchor="t"/>
+          <a:bodyPr wrap="square" lIns="108000" tIns="72000" rIns="72000" bIns="36000" rtlCol="0" anchor="t"/>
           <a:lstStyle/>
           <a:p>
             <a:pPr algn="l">
@@ -4826,7 +5326,7 @@
               </a:spcAft>
             </a:pPr>
             <a:r>
-              <a:rPr sz="1500" b="1" dirty="0" err="1">
+              <a:rPr sz="1400" b="1" dirty="0" err="1">
                 <a:solidFill>
                   <a:srgbClr val="333333"/>
                 </a:solidFill>
@@ -4855,7 +5355,7 @@
               </a:spcAft>
             </a:pPr>
             <a:r>
-              <a:rPr sz="1300" b="0" dirty="0" err="1">
+              <a:rPr sz="1250" b="0" dirty="0" err="1">
                 <a:solidFill>
                   <a:srgbClr val="333333"/>
                 </a:solidFill>
@@ -4884,8 +5384,8 @@
         </p:nvSpPr>
         <p:spPr>
           <a:xfrm>
-            <a:off x="6336000" y="3707999"/>
-            <a:ext cx="2484000" cy="1800000"/>
+            <a:off x="5208000" y="3707999"/>
+            <a:ext cx="1920000" cy="1800000"/>
           </a:xfrm>
           <a:prstGeom prst="roundRect">
             <a:avLst>
@@ -4913,7 +5413,7 @@
           </a:fontRef>
         </p:style>
         <p:txBody>
-          <a:bodyPr wrap="square" lIns="180000" tIns="72000" rIns="180000" bIns="36000" rtlCol="0" anchor="t"/>
+          <a:bodyPr wrap="square" lIns="108000" tIns="72000" rIns="72000" bIns="36000" rtlCol="0" anchor="t"/>
           <a:lstStyle/>
           <a:p>
             <a:pPr algn="l">
@@ -4954,7 +5454,7 @@
               </a:spcAft>
             </a:pPr>
             <a:r>
-              <a:rPr sz="2800" b="1" dirty="0" err="1">
+              <a:rPr sz="2200" b="1" dirty="0" err="1">
                 <a:solidFill>
                   <a:srgbClr val="1F285A"/>
                 </a:solidFill>
@@ -4983,7 +5483,7 @@
               </a:spcAft>
             </a:pPr>
             <a:r>
-              <a:rPr sz="1150" b="0" dirty="0" err="1">
+              <a:rPr sz="1050" b="0" dirty="0" err="1">
                 <a:solidFill>
                   <a:srgbClr val="7F7F7F"/>
                 </a:solidFill>
@@ -4991,7 +5491,7 @@
                 <a:ea typeface="メイリオ"/>
                 <a:cs typeface="メイリオ"/>
               </a:rPr>
-              <a:t>が面談予約。他チャネルと比べても高い水準</a:t>
+              <a:t>が面談予約（他チャネルより高い）</a:t>
             </a:r>
             <a:endParaRPr sz="1250" b="1" dirty="0">
               <a:solidFill>
@@ -5006,7 +5506,169 @@
       </p:sp>
       <p:sp>
         <p:nvSpPr>
-          <p:cNvPr id="19" name="Rounded Rectangle 4"/>
+          <p:cNvPr id="19" name="Rounded Rectangle 12"/>
+          <p:cNvSpPr/>
+          <p:nvPr/>
+        </p:nvSpPr>
+        <p:spPr>
+          <a:xfrm>
+            <a:off x="7343999" y="2628000"/>
+            <a:ext cx="1475999" cy="2628000"/>
+          </a:xfrm>
+          <a:prstGeom prst="roundRect">
+            <a:avLst>
+              <a:gd name="adj" fmla="val 6000"/>
+            </a:avLst>
+          </a:prstGeom>
+          <a:solidFill>
+            <a:srgbClr val="FFFFFF"/>
+          </a:solidFill>
+          <a:ln w="19050">
+            <a:solidFill>
+              <a:srgbClr val="7F7F7F"/>
+            </a:solidFill>
+            <a:prstDash val="dash"/>
+          </a:ln>
+          <a:effectLst/>
+        </p:spPr>
+        <p:style>
+          <a:lnRef idx="1">
+            <a:schemeClr val="accent1"/>
+          </a:lnRef>
+          <a:fillRef idx="3">
+            <a:schemeClr val="accent1"/>
+          </a:fillRef>
+          <a:effectRef idx="0">
+            <a:schemeClr val="accent1"/>
+          </a:effectRef>
+          <a:fontRef idx="minor">
+            <a:schemeClr val="lt1"/>
+          </a:fontRef>
+        </p:style>
+        <p:txBody>
+          <a:bodyPr wrap="square" lIns="125999" tIns="90000" rIns="108000" bIns="54000" rtlCol="0" anchor="ctr"/>
+          <a:lstStyle/>
+          <a:p>
+            <a:pPr algn="l">
+              <a:lnSpc>
+                <a:spcPct val="130000"/>
+              </a:lnSpc>
+              <a:spcAft>
+                <a:spcPts val="500"/>
+              </a:spcAft>
+            </a:pPr>
+            <a:r>
+              <a:rPr sz="1050" b="1" dirty="0" err="1">
+                <a:solidFill>
+                  <a:srgbClr val="7F7F7F"/>
+                </a:solidFill>
+                <a:latin typeface="メイリオ"/>
+                <a:ea typeface="メイリオ"/>
+                <a:cs typeface="メイリオ"/>
+              </a:rPr>
+              <a:t>［画像］</a:t>
+            </a:r>
+            <a:endParaRPr sz="1250" b="1" dirty="0">
+              <a:solidFill>
+                <a:srgbClr val="1F285A"/>
+              </a:solidFill>
+              <a:latin typeface="メイリオ"/>
+              <a:ea typeface="メイリオ"/>
+              <a:cs typeface="メイリオ"/>
+            </a:endParaRPr>
+          </a:p>
+          <a:p>
+            <a:pPr algn="l">
+              <a:lnSpc>
+                <a:spcPct val="130000"/>
+              </a:lnSpc>
+              <a:spcAft>
+                <a:spcPts val="500"/>
+              </a:spcAft>
+            </a:pPr>
+            <a:r>
+              <a:rPr sz="1050" b="1" dirty="0" err="1">
+                <a:solidFill>
+                  <a:srgbClr val="7F7F7F"/>
+                </a:solidFill>
+                <a:latin typeface="メイリオ"/>
+                <a:ea typeface="メイリオ"/>
+                <a:cs typeface="メイリオ"/>
+              </a:rPr>
+              <a:t>予約確認・前日の</a:t>
+            </a:r>
+            <a:endParaRPr sz="1250" b="1" dirty="0">
+              <a:solidFill>
+                <a:srgbClr val="1F285A"/>
+              </a:solidFill>
+              <a:latin typeface="メイリオ"/>
+              <a:ea typeface="メイリオ"/>
+              <a:cs typeface="メイリオ"/>
+            </a:endParaRPr>
+          </a:p>
+          <a:p>
+            <a:pPr algn="l">
+              <a:lnSpc>
+                <a:spcPct val="130000"/>
+              </a:lnSpc>
+              <a:spcAft>
+                <a:spcPts val="500"/>
+              </a:spcAft>
+            </a:pPr>
+            <a:r>
+              <a:rPr sz="1050" b="1" dirty="0" err="1">
+                <a:solidFill>
+                  <a:srgbClr val="7F7F7F"/>
+                </a:solidFill>
+                <a:latin typeface="メイリオ"/>
+                <a:ea typeface="メイリオ"/>
+                <a:cs typeface="メイリオ"/>
+              </a:rPr>
+              <a:t>LINEメッセージ</a:t>
+            </a:r>
+            <a:endParaRPr sz="1250" b="1" dirty="0">
+              <a:solidFill>
+                <a:srgbClr val="1F285A"/>
+              </a:solidFill>
+              <a:latin typeface="メイリオ"/>
+              <a:ea typeface="メイリオ"/>
+              <a:cs typeface="メイリオ"/>
+            </a:endParaRPr>
+          </a:p>
+          <a:p>
+            <a:pPr algn="l">
+              <a:lnSpc>
+                <a:spcPct val="130000"/>
+              </a:lnSpc>
+              <a:spcAft>
+                <a:spcPts val="500"/>
+              </a:spcAft>
+            </a:pPr>
+            <a:r>
+              <a:rPr sz="900" b="0" dirty="0" err="1">
+                <a:solidFill>
+                  <a:srgbClr val="7F7F7F"/>
+                </a:solidFill>
+                <a:latin typeface="メイリオ"/>
+                <a:ea typeface="メイリオ"/>
+                <a:cs typeface="メイリオ"/>
+              </a:rPr>
+              <a:t>msg_s3.png</a:t>
+            </a:r>
+            <a:endParaRPr sz="1250" b="1" dirty="0">
+              <a:solidFill>
+                <a:srgbClr val="1F285A"/>
+              </a:solidFill>
+              <a:latin typeface="メイリオ"/>
+              <a:ea typeface="メイリオ"/>
+              <a:cs typeface="メイリオ"/>
+            </a:endParaRPr>
+          </a:p>
+        </p:txBody>
+      </p:sp>
+      <p:sp>
+        <p:nvSpPr>
+          <p:cNvPr id="20" name="Rounded Rectangle 4"/>
           <p:cNvSpPr/>
           <p:nvPr/>
         </p:nvSpPr>
@@ -5061,6 +5723,47 @@
                 <a:cs typeface="メイリオ"/>
               </a:rPr>
               <a:t>申込み後の離脱を防ぎ、来店・面談・商談につなげる</a:t>
+            </a:r>
+          </a:p>
+        </p:txBody>
+      </p:sp>
+      <p:sp>
+        <p:nvSpPr>
+          <p:cNvPr id="21" name="TextBox 19"/>
+          <p:cNvSpPr txBox="1"/>
+          <p:nvPr/>
+        </p:nvSpPr>
+        <p:spPr>
+          <a:xfrm>
+            <a:off x="1080000" y="6156000"/>
+            <a:ext cx="7740000" cy="251999"/>
+          </a:xfrm>
+          <a:prstGeom prst="rect">
+            <a:avLst/>
+          </a:prstGeom>
+          <a:noFill/>
+        </p:spPr>
+        <p:txBody>
+          <a:bodyPr wrap="square" lIns="0" tIns="21600" rIns="0" bIns="21600" anchor="t">
+            <a:spAutoFit/>
+          </a:bodyPr>
+          <a:lstStyle/>
+          <a:p>
+            <a:pPr algn="l">
+              <a:lnSpc>
+                <a:spcPct val="115000"/>
+              </a:lnSpc>
+            </a:pPr>
+            <a:r>
+              <a:rPr sz="1000" b="0">
+                <a:solidFill>
+                  <a:srgbClr val="7F7F7F"/>
+                </a:solidFill>
+                <a:latin typeface="メイリオ"/>
+                <a:ea typeface="メイリオ"/>
+                <a:cs typeface="メイリオ"/>
+              </a:rPr>
+              <a:t>※美容室：リピート率も88% → 91%（導入前後の半年比較。LINEミニアプリを併用）</a:t>
             </a:r>
           </a:p>
         </p:txBody>
@@ -5733,7 +6436,7 @@
         <p:spPr>
           <a:xfrm>
             <a:off x="1080000" y="2628000"/>
-            <a:ext cx="3798000" cy="1044000"/>
+            <a:ext cx="2952000" cy="1044000"/>
           </a:xfrm>
           <a:prstGeom prst="roundRect">
             <a:avLst>
@@ -5810,7 +6513,7 @@
                 <a:ea typeface="メイリオ"/>
                 <a:cs typeface="メイリオ"/>
               </a:rPr>
-              <a:t>来店翌日にアンケートを配信。再来店の少し前にクーポンを配信（LINEミニアプリを併用）</a:t>
+              <a:t>来店翌日のアンケートと、再来店前のクーポンを配信</a:t>
             </a:r>
             <a:endParaRPr sz="1250" b="1" dirty="0">
               <a:solidFill>
@@ -5832,7 +6535,7 @@
         <p:spPr>
           <a:xfrm>
             <a:off x="1080000" y="3707999"/>
-            <a:ext cx="3798000" cy="1800000"/>
+            <a:ext cx="2952000" cy="1800000"/>
           </a:xfrm>
           <a:prstGeom prst="roundRect">
             <a:avLst>
@@ -5901,7 +6604,7 @@
               </a:spcAft>
             </a:pPr>
             <a:r>
-              <a:rPr sz="2800" b="1" dirty="0" err="1">
+              <a:rPr sz="2200" b="1" dirty="0" err="1">
                 <a:solidFill>
                   <a:srgbClr val="1F285A"/>
                 </a:solidFill>
@@ -5930,7 +6633,7 @@
               </a:spcAft>
             </a:pPr>
             <a:r>
-              <a:rPr sz="1150" b="0" dirty="0" err="1">
+              <a:rPr sz="1050" b="0" dirty="0" err="1">
                 <a:solidFill>
                   <a:srgbClr val="7F7F7F"/>
                 </a:solidFill>
@@ -5959,8 +6662,8 @@
         </p:nvSpPr>
         <p:spPr>
           <a:xfrm>
-            <a:off x="5022000" y="2628000"/>
-            <a:ext cx="3798000" cy="1044000"/>
+            <a:off x="4176000" y="2628000"/>
+            <a:ext cx="2952000" cy="1044000"/>
           </a:xfrm>
           <a:prstGeom prst="roundRect">
             <a:avLst>
@@ -6037,7 +6740,7 @@
                 <a:ea typeface="メイリオ"/>
                 <a:cs typeface="メイリオ"/>
               </a:rPr>
-              <a:t>来店翌日の11時に、アンケートとクーポンを自動配信（LINEミニアプリを併用）</a:t>
+              <a:t>来店翌日11時に、アンケートとクーポンを自動配信</a:t>
             </a:r>
             <a:endParaRPr sz="1250" b="1" dirty="0">
               <a:solidFill>
@@ -6058,8 +6761,8 @@
         </p:nvSpPr>
         <p:spPr>
           <a:xfrm>
-            <a:off x="5022000" y="3707999"/>
-            <a:ext cx="3798000" cy="1800000"/>
+            <a:off x="4176000" y="3707999"/>
+            <a:ext cx="2952000" cy="1800000"/>
           </a:xfrm>
           <a:prstGeom prst="roundRect">
             <a:avLst>
@@ -6128,7 +6831,7 @@
               </a:spcAft>
             </a:pPr>
             <a:r>
-              <a:rPr sz="2800" b="1" dirty="0" err="1">
+              <a:rPr sz="2200" b="1" dirty="0" err="1">
                 <a:solidFill>
                   <a:srgbClr val="1F285A"/>
                 </a:solidFill>
@@ -6157,7 +6860,7 @@
               </a:spcAft>
             </a:pPr>
             <a:r>
-              <a:rPr sz="1150" b="0" dirty="0" err="1">
+              <a:rPr sz="1050" b="0" dirty="0" err="1">
                 <a:solidFill>
                   <a:srgbClr val="7F7F7F"/>
                 </a:solidFill>
@@ -6180,7 +6883,169 @@
       </p:sp>
       <p:sp>
         <p:nvSpPr>
-          <p:cNvPr id="17" name="Rounded Rectangle 4"/>
+          <p:cNvPr id="17" name="Rounded Rectangle 12"/>
+          <p:cNvSpPr/>
+          <p:nvPr/>
+        </p:nvSpPr>
+        <p:spPr>
+          <a:xfrm>
+            <a:off x="7343999" y="2628000"/>
+            <a:ext cx="1475999" cy="2628000"/>
+          </a:xfrm>
+          <a:prstGeom prst="roundRect">
+            <a:avLst>
+              <a:gd name="adj" fmla="val 6000"/>
+            </a:avLst>
+          </a:prstGeom>
+          <a:solidFill>
+            <a:srgbClr val="FFFFFF"/>
+          </a:solidFill>
+          <a:ln w="19050">
+            <a:solidFill>
+              <a:srgbClr val="7F7F7F"/>
+            </a:solidFill>
+            <a:prstDash val="dash"/>
+          </a:ln>
+          <a:effectLst/>
+        </p:spPr>
+        <p:style>
+          <a:lnRef idx="1">
+            <a:schemeClr val="accent1"/>
+          </a:lnRef>
+          <a:fillRef idx="3">
+            <a:schemeClr val="accent1"/>
+          </a:fillRef>
+          <a:effectRef idx="0">
+            <a:schemeClr val="accent1"/>
+          </a:effectRef>
+          <a:fontRef idx="minor">
+            <a:schemeClr val="lt1"/>
+          </a:fontRef>
+        </p:style>
+        <p:txBody>
+          <a:bodyPr wrap="square" lIns="125999" tIns="90000" rIns="108000" bIns="54000" rtlCol="0" anchor="ctr"/>
+          <a:lstStyle/>
+          <a:p>
+            <a:pPr algn="l">
+              <a:lnSpc>
+                <a:spcPct val="130000"/>
+              </a:lnSpc>
+              <a:spcAft>
+                <a:spcPts val="500"/>
+              </a:spcAft>
+            </a:pPr>
+            <a:r>
+              <a:rPr sz="1050" b="1" dirty="0" err="1">
+                <a:solidFill>
+                  <a:srgbClr val="7F7F7F"/>
+                </a:solidFill>
+                <a:latin typeface="メイリオ"/>
+                <a:ea typeface="メイリオ"/>
+                <a:cs typeface="メイリオ"/>
+              </a:rPr>
+              <a:t>［画像］</a:t>
+            </a:r>
+            <a:endParaRPr sz="1250" b="1" dirty="0">
+              <a:solidFill>
+                <a:srgbClr val="1F285A"/>
+              </a:solidFill>
+              <a:latin typeface="メイリオ"/>
+              <a:ea typeface="メイリオ"/>
+              <a:cs typeface="メイリオ"/>
+            </a:endParaRPr>
+          </a:p>
+          <a:p>
+            <a:pPr algn="l">
+              <a:lnSpc>
+                <a:spcPct val="130000"/>
+              </a:lnSpc>
+              <a:spcAft>
+                <a:spcPts val="500"/>
+              </a:spcAft>
+            </a:pPr>
+            <a:r>
+              <a:rPr sz="1050" b="1" dirty="0" err="1">
+                <a:solidFill>
+                  <a:srgbClr val="7F7F7F"/>
+                </a:solidFill>
+                <a:latin typeface="メイリオ"/>
+                <a:ea typeface="メイリオ"/>
+                <a:cs typeface="メイリオ"/>
+              </a:rPr>
+              <a:t>アンケート・クーポンの</a:t>
+            </a:r>
+            <a:endParaRPr sz="1250" b="1" dirty="0">
+              <a:solidFill>
+                <a:srgbClr val="1F285A"/>
+              </a:solidFill>
+              <a:latin typeface="メイリオ"/>
+              <a:ea typeface="メイリオ"/>
+              <a:cs typeface="メイリオ"/>
+            </a:endParaRPr>
+          </a:p>
+          <a:p>
+            <a:pPr algn="l">
+              <a:lnSpc>
+                <a:spcPct val="130000"/>
+              </a:lnSpc>
+              <a:spcAft>
+                <a:spcPts val="500"/>
+              </a:spcAft>
+            </a:pPr>
+            <a:r>
+              <a:rPr sz="1050" b="1" dirty="0" err="1">
+                <a:solidFill>
+                  <a:srgbClr val="7F7F7F"/>
+                </a:solidFill>
+                <a:latin typeface="メイリオ"/>
+                <a:ea typeface="メイリオ"/>
+                <a:cs typeface="メイリオ"/>
+              </a:rPr>
+              <a:t>LINEメッセージ</a:t>
+            </a:r>
+            <a:endParaRPr sz="1250" b="1" dirty="0">
+              <a:solidFill>
+                <a:srgbClr val="1F285A"/>
+              </a:solidFill>
+              <a:latin typeface="メイリオ"/>
+              <a:ea typeface="メイリオ"/>
+              <a:cs typeface="メイリオ"/>
+            </a:endParaRPr>
+          </a:p>
+          <a:p>
+            <a:pPr algn="l">
+              <a:lnSpc>
+                <a:spcPct val="130000"/>
+              </a:lnSpc>
+              <a:spcAft>
+                <a:spcPts val="500"/>
+              </a:spcAft>
+            </a:pPr>
+            <a:r>
+              <a:rPr sz="900" b="0" dirty="0" err="1">
+                <a:solidFill>
+                  <a:srgbClr val="7F7F7F"/>
+                </a:solidFill>
+                <a:latin typeface="メイリオ"/>
+                <a:ea typeface="メイリオ"/>
+                <a:cs typeface="メイリオ"/>
+              </a:rPr>
+              <a:t>msg_s4.png</a:t>
+            </a:r>
+            <a:endParaRPr sz="1250" b="1" dirty="0">
+              <a:solidFill>
+                <a:srgbClr val="1F285A"/>
+              </a:solidFill>
+              <a:latin typeface="メイリオ"/>
+              <a:ea typeface="メイリオ"/>
+              <a:cs typeface="メイリオ"/>
+            </a:endParaRPr>
+          </a:p>
+        </p:txBody>
+      </p:sp>
+      <p:sp>
+        <p:nvSpPr>
+          <p:cNvPr id="18" name="Rounded Rectangle 4"/>
           <p:cNvSpPr/>
           <p:nvPr/>
         </p:nvSpPr>
@@ -6241,7 +7106,7 @@
       </p:sp>
       <p:sp>
         <p:nvSpPr>
-          <p:cNvPr id="18" name="TextBox 19"/>
+          <p:cNvPr id="19" name="TextBox 19"/>
           <p:cNvSpPr txBox="1"/>
           <p:nvPr/>
         </p:nvSpPr>
@@ -6275,7 +7140,7 @@
                 <a:ea typeface="メイリオ"/>
                 <a:cs typeface="メイリオ"/>
               </a:rPr>
-              <a:t>※サンクスLINE単体の効果ではなく、LINEでつながった後の施策の例</a:t>
+              <a:t>※サンクスLINE単体の効果ではなく、LINEでつながった後の施策の例（居酒屋・焼肉店はLINEミニアプリを併用）</a:t>
             </a:r>
           </a:p>
         </p:txBody>

--- a/20261002_サンクスLINEのご提案_事例入り.pptx
+++ b/20261002_サンクスLINEのご提案_事例入り.pptx
@@ -3490,7 +3490,7 @@
         <p:spPr>
           <a:xfrm>
             <a:off x="1080000" y="2628000"/>
-            <a:ext cx="2952000" cy="1044000"/>
+            <a:ext cx="2718000" cy="1044000"/>
           </a:xfrm>
           <a:prstGeom prst="roundRect">
             <a:avLst>
@@ -3589,7 +3589,7 @@
         <p:spPr>
           <a:xfrm>
             <a:off x="1080000" y="3707999"/>
-            <a:ext cx="2952000" cy="1800000"/>
+            <a:ext cx="2718000" cy="1800000"/>
           </a:xfrm>
           <a:prstGeom prst="roundRect">
             <a:avLst>
@@ -3716,8 +3716,8 @@
         </p:nvSpPr>
         <p:spPr>
           <a:xfrm>
-            <a:off x="4176000" y="2628000"/>
-            <a:ext cx="2952000" cy="1044000"/>
+            <a:off x="3941999" y="2628000"/>
+            <a:ext cx="2718000" cy="1044000"/>
           </a:xfrm>
           <a:prstGeom prst="roundRect">
             <a:avLst>
@@ -3815,8 +3815,8 @@
         </p:nvSpPr>
         <p:spPr>
           <a:xfrm>
-            <a:off x="4176000" y="3707999"/>
-            <a:ext cx="2952000" cy="1800000"/>
+            <a:off x="3941999" y="3707999"/>
+            <a:ext cx="2718000" cy="1800000"/>
           </a:xfrm>
           <a:prstGeom prst="roundRect">
             <a:avLst>
@@ -3935,168 +3935,35 @@
           </a:p>
         </p:txBody>
       </p:sp>
-      <p:sp>
-        <p:nvSpPr>
-          <p:cNvPr id="17" name="Rounded Rectangle 12"/>
-          <p:cNvSpPr/>
+      <p:pic>
+        <p:nvPicPr>
+          <p:cNvPr id="17" name="Picture 13" descr="thanks_msg_s2.png"/>
+          <p:cNvPicPr>
+            <a:picLocks noChangeAspect="1"/>
+          </p:cNvPicPr>
           <p:nvPr/>
-        </p:nvSpPr>
+        </p:nvPicPr>
+        <p:blipFill>
+          <a:blip r:embed="rId3"/>
+          <a:stretch>
+            <a:fillRect/>
+          </a:stretch>
+        </p:blipFill>
         <p:spPr>
           <a:xfrm>
-            <a:off x="7343999" y="2628000"/>
-            <a:ext cx="1475999" cy="2628000"/>
-          </a:xfrm>
-          <a:prstGeom prst="roundRect">
-            <a:avLst>
-              <a:gd name="adj" fmla="val 6000"/>
-            </a:avLst>
-          </a:prstGeom>
-          <a:solidFill>
-            <a:srgbClr val="FFFFFF"/>
-          </a:solidFill>
-          <a:ln w="19050">
+            <a:off x="6876000" y="2628000"/>
+            <a:ext cx="1944000" cy="1743391"/>
+          </a:xfrm>
+          <a:prstGeom prst="rect">
+            <a:avLst/>
+          </a:prstGeom>
+          <a:ln w="12700">
             <a:solidFill>
-              <a:srgbClr val="7F7F7F"/>
+              <a:srgbClr val="D9D9D9"/>
             </a:solidFill>
-            <a:prstDash val="dash"/>
           </a:ln>
-          <a:effectLst/>
-        </p:spPr>
-        <p:style>
-          <a:lnRef idx="1">
-            <a:schemeClr val="accent1"/>
-          </a:lnRef>
-          <a:fillRef idx="3">
-            <a:schemeClr val="accent1"/>
-          </a:fillRef>
-          <a:effectRef idx="0">
-            <a:schemeClr val="accent1"/>
-          </a:effectRef>
-          <a:fontRef idx="minor">
-            <a:schemeClr val="lt1"/>
-          </a:fontRef>
-        </p:style>
-        <p:txBody>
-          <a:bodyPr wrap="square" lIns="125999" tIns="90000" rIns="108000" bIns="54000" rtlCol="0" anchor="ctr"/>
-          <a:lstStyle/>
-          <a:p>
-            <a:pPr algn="l">
-              <a:lnSpc>
-                <a:spcPct val="130000"/>
-              </a:lnSpc>
-              <a:spcAft>
-                <a:spcPts val="500"/>
-              </a:spcAft>
-            </a:pPr>
-            <a:r>
-              <a:rPr sz="1050" b="1" dirty="0" err="1">
-                <a:solidFill>
-                  <a:srgbClr val="7F7F7F"/>
-                </a:solidFill>
-                <a:latin typeface="メイリオ"/>
-                <a:ea typeface="メイリオ"/>
-                <a:cs typeface="メイリオ"/>
-              </a:rPr>
-              <a:t>［画像］</a:t>
-            </a:r>
-            <a:endParaRPr sz="1250" b="1" dirty="0">
-              <a:solidFill>
-                <a:srgbClr val="1F285A"/>
-              </a:solidFill>
-              <a:latin typeface="メイリオ"/>
-              <a:ea typeface="メイリオ"/>
-              <a:cs typeface="メイリオ"/>
-            </a:endParaRPr>
-          </a:p>
-          <a:p>
-            <a:pPr algn="l">
-              <a:lnSpc>
-                <a:spcPct val="130000"/>
-              </a:lnSpc>
-              <a:spcAft>
-                <a:spcPts val="500"/>
-              </a:spcAft>
-            </a:pPr>
-            <a:r>
-              <a:rPr sz="1050" b="1" dirty="0" err="1">
-                <a:solidFill>
-                  <a:srgbClr val="7F7F7F"/>
-                </a:solidFill>
-                <a:latin typeface="メイリオ"/>
-                <a:ea typeface="メイリオ"/>
-                <a:cs typeface="メイリオ"/>
-              </a:rPr>
-              <a:t>申込み直後の</a:t>
-            </a:r>
-            <a:endParaRPr sz="1250" b="1" dirty="0">
-              <a:solidFill>
-                <a:srgbClr val="1F285A"/>
-              </a:solidFill>
-              <a:latin typeface="メイリオ"/>
-              <a:ea typeface="メイリオ"/>
-              <a:cs typeface="メイリオ"/>
-            </a:endParaRPr>
-          </a:p>
-          <a:p>
-            <a:pPr algn="l">
-              <a:lnSpc>
-                <a:spcPct val="130000"/>
-              </a:lnSpc>
-              <a:spcAft>
-                <a:spcPts val="500"/>
-              </a:spcAft>
-            </a:pPr>
-            <a:r>
-              <a:rPr sz="1050" b="1" dirty="0" err="1">
-                <a:solidFill>
-                  <a:srgbClr val="7F7F7F"/>
-                </a:solidFill>
-                <a:latin typeface="メイリオ"/>
-                <a:ea typeface="メイリオ"/>
-                <a:cs typeface="メイリオ"/>
-              </a:rPr>
-              <a:t>LINEメッセージ</a:t>
-            </a:r>
-            <a:endParaRPr sz="1250" b="1" dirty="0">
-              <a:solidFill>
-                <a:srgbClr val="1F285A"/>
-              </a:solidFill>
-              <a:latin typeface="メイリオ"/>
-              <a:ea typeface="メイリオ"/>
-              <a:cs typeface="メイリオ"/>
-            </a:endParaRPr>
-          </a:p>
-          <a:p>
-            <a:pPr algn="l">
-              <a:lnSpc>
-                <a:spcPct val="130000"/>
-              </a:lnSpc>
-              <a:spcAft>
-                <a:spcPts val="500"/>
-              </a:spcAft>
-            </a:pPr>
-            <a:r>
-              <a:rPr sz="900" b="0" dirty="0" err="1">
-                <a:solidFill>
-                  <a:srgbClr val="7F7F7F"/>
-                </a:solidFill>
-                <a:latin typeface="メイリオ"/>
-                <a:ea typeface="メイリオ"/>
-                <a:cs typeface="メイリオ"/>
-              </a:rPr>
-              <a:t>msg_s2.png</a:t>
-            </a:r>
-            <a:endParaRPr sz="1250" b="1" dirty="0">
-              <a:solidFill>
-                <a:srgbClr val="1F285A"/>
-              </a:solidFill>
-              <a:latin typeface="メイリオ"/>
-              <a:ea typeface="メイリオ"/>
-              <a:cs typeface="メイリオ"/>
-            </a:endParaRPr>
-          </a:p>
-        </p:txBody>
-      </p:sp>
+        </p:spPr>
+      </p:pic>
       <p:sp>
         <p:nvSpPr>
           <p:cNvPr id="18" name="Rounded Rectangle 4"/>
@@ -4832,7 +4699,7 @@
         <p:spPr>
           <a:xfrm>
             <a:off x="1080000" y="2628000"/>
-            <a:ext cx="1920000" cy="1044000"/>
+            <a:ext cx="1763999" cy="1044000"/>
           </a:xfrm>
           <a:prstGeom prst="roundRect">
             <a:avLst>
@@ -4872,7 +4739,7 @@
               </a:spcAft>
             </a:pPr>
             <a:r>
-              <a:rPr sz="1400" b="1" dirty="0" err="1">
+              <a:rPr sz="1300" b="1" dirty="0" err="1">
                 <a:solidFill>
                   <a:srgbClr val="333333"/>
                 </a:solidFill>
@@ -4901,7 +4768,7 @@
               </a:spcAft>
             </a:pPr>
             <a:r>
-              <a:rPr sz="1250" b="0" dirty="0" err="1">
+              <a:rPr sz="1150" b="0" dirty="0" err="1">
                 <a:solidFill>
                   <a:srgbClr val="333333"/>
                 </a:solidFill>
@@ -4931,7 +4798,7 @@
         <p:spPr>
           <a:xfrm>
             <a:off x="1080000" y="3707999"/>
-            <a:ext cx="1920000" cy="1800000"/>
+            <a:ext cx="1763999" cy="1800000"/>
           </a:xfrm>
           <a:prstGeom prst="roundRect">
             <a:avLst>
@@ -5058,8 +4925,8 @@
         </p:nvSpPr>
         <p:spPr>
           <a:xfrm>
-            <a:off x="3144000" y="2628000"/>
-            <a:ext cx="1920000" cy="1044000"/>
+            <a:off x="2988000" y="2628000"/>
+            <a:ext cx="1763999" cy="1044000"/>
           </a:xfrm>
           <a:prstGeom prst="roundRect">
             <a:avLst>
@@ -5099,7 +4966,7 @@
               </a:spcAft>
             </a:pPr>
             <a:r>
-              <a:rPr sz="1400" b="1" dirty="0" err="1">
+              <a:rPr sz="1300" b="1" dirty="0" err="1">
                 <a:solidFill>
                   <a:srgbClr val="333333"/>
                 </a:solidFill>
@@ -5128,7 +4995,7 @@
               </a:spcAft>
             </a:pPr>
             <a:r>
-              <a:rPr sz="1250" b="0" dirty="0" err="1">
+              <a:rPr sz="1150" b="0" dirty="0" err="1">
                 <a:solidFill>
                   <a:srgbClr val="333333"/>
                 </a:solidFill>
@@ -5157,8 +5024,8 @@
         </p:nvSpPr>
         <p:spPr>
           <a:xfrm>
-            <a:off x="3144000" y="3707999"/>
-            <a:ext cx="1920000" cy="1800000"/>
+            <a:off x="2988000" y="3707999"/>
+            <a:ext cx="1763999" cy="1800000"/>
           </a:xfrm>
           <a:prstGeom prst="roundRect">
             <a:avLst>
@@ -5285,8 +5152,8 @@
         </p:nvSpPr>
         <p:spPr>
           <a:xfrm>
-            <a:off x="5208000" y="2628000"/>
-            <a:ext cx="1920000" cy="1044000"/>
+            <a:off x="4896000" y="2628000"/>
+            <a:ext cx="1763999" cy="1044000"/>
           </a:xfrm>
           <a:prstGeom prst="roundRect">
             <a:avLst>
@@ -5326,7 +5193,7 @@
               </a:spcAft>
             </a:pPr>
             <a:r>
-              <a:rPr sz="1400" b="1" dirty="0" err="1">
+              <a:rPr sz="1300" b="1" dirty="0" err="1">
                 <a:solidFill>
                   <a:srgbClr val="333333"/>
                 </a:solidFill>
@@ -5355,7 +5222,7 @@
               </a:spcAft>
             </a:pPr>
             <a:r>
-              <a:rPr sz="1250" b="0" dirty="0" err="1">
+              <a:rPr sz="1150" b="0" dirty="0" err="1">
                 <a:solidFill>
                   <a:srgbClr val="333333"/>
                 </a:solidFill>
@@ -5384,8 +5251,8 @@
         </p:nvSpPr>
         <p:spPr>
           <a:xfrm>
-            <a:off x="5208000" y="3707999"/>
-            <a:ext cx="1920000" cy="1800000"/>
+            <a:off x="4896000" y="3707999"/>
+            <a:ext cx="1763999" cy="1800000"/>
           </a:xfrm>
           <a:prstGeom prst="roundRect">
             <a:avLst>
@@ -5433,7 +5300,7 @@
                 <a:ea typeface="メイリオ"/>
                 <a:cs typeface="メイリオ"/>
               </a:rPr>
-              <a:t>問い合わせた方のうち</a:t>
+              <a:t>問い合わせた方の</a:t>
             </a:r>
             <a:endParaRPr sz="1250" b="1" dirty="0">
               <a:solidFill>
@@ -5504,168 +5371,35 @@
           </a:p>
         </p:txBody>
       </p:sp>
-      <p:sp>
-        <p:nvSpPr>
-          <p:cNvPr id="19" name="Rounded Rectangle 12"/>
-          <p:cNvSpPr/>
+      <p:pic>
+        <p:nvPicPr>
+          <p:cNvPr id="19" name="Picture 13" descr="thanks_msg_s3.png"/>
+          <p:cNvPicPr>
+            <a:picLocks noChangeAspect="1"/>
+          </p:cNvPicPr>
           <p:nvPr/>
-        </p:nvSpPr>
+        </p:nvPicPr>
+        <p:blipFill>
+          <a:blip r:embed="rId3"/>
+          <a:stretch>
+            <a:fillRect/>
+          </a:stretch>
+        </p:blipFill>
         <p:spPr>
           <a:xfrm>
-            <a:off x="7343999" y="2628000"/>
-            <a:ext cx="1475999" cy="2628000"/>
-          </a:xfrm>
-          <a:prstGeom prst="roundRect">
-            <a:avLst>
-              <a:gd name="adj" fmla="val 6000"/>
-            </a:avLst>
-          </a:prstGeom>
-          <a:solidFill>
-            <a:srgbClr val="FFFFFF"/>
-          </a:solidFill>
-          <a:ln w="19050">
+            <a:off x="6876000" y="2628000"/>
+            <a:ext cx="1944000" cy="1621851"/>
+          </a:xfrm>
+          <a:prstGeom prst="rect">
+            <a:avLst/>
+          </a:prstGeom>
+          <a:ln w="12700">
             <a:solidFill>
-              <a:srgbClr val="7F7F7F"/>
+              <a:srgbClr val="D9D9D9"/>
             </a:solidFill>
-            <a:prstDash val="dash"/>
           </a:ln>
-          <a:effectLst/>
-        </p:spPr>
-        <p:style>
-          <a:lnRef idx="1">
-            <a:schemeClr val="accent1"/>
-          </a:lnRef>
-          <a:fillRef idx="3">
-            <a:schemeClr val="accent1"/>
-          </a:fillRef>
-          <a:effectRef idx="0">
-            <a:schemeClr val="accent1"/>
-          </a:effectRef>
-          <a:fontRef idx="minor">
-            <a:schemeClr val="lt1"/>
-          </a:fontRef>
-        </p:style>
-        <p:txBody>
-          <a:bodyPr wrap="square" lIns="125999" tIns="90000" rIns="108000" bIns="54000" rtlCol="0" anchor="ctr"/>
-          <a:lstStyle/>
-          <a:p>
-            <a:pPr algn="l">
-              <a:lnSpc>
-                <a:spcPct val="130000"/>
-              </a:lnSpc>
-              <a:spcAft>
-                <a:spcPts val="500"/>
-              </a:spcAft>
-            </a:pPr>
-            <a:r>
-              <a:rPr sz="1050" b="1" dirty="0" err="1">
-                <a:solidFill>
-                  <a:srgbClr val="7F7F7F"/>
-                </a:solidFill>
-                <a:latin typeface="メイリオ"/>
-                <a:ea typeface="メイリオ"/>
-                <a:cs typeface="メイリオ"/>
-              </a:rPr>
-              <a:t>［画像］</a:t>
-            </a:r>
-            <a:endParaRPr sz="1250" b="1" dirty="0">
-              <a:solidFill>
-                <a:srgbClr val="1F285A"/>
-              </a:solidFill>
-              <a:latin typeface="メイリオ"/>
-              <a:ea typeface="メイリオ"/>
-              <a:cs typeface="メイリオ"/>
-            </a:endParaRPr>
-          </a:p>
-          <a:p>
-            <a:pPr algn="l">
-              <a:lnSpc>
-                <a:spcPct val="130000"/>
-              </a:lnSpc>
-              <a:spcAft>
-                <a:spcPts val="500"/>
-              </a:spcAft>
-            </a:pPr>
-            <a:r>
-              <a:rPr sz="1050" b="1" dirty="0" err="1">
-                <a:solidFill>
-                  <a:srgbClr val="7F7F7F"/>
-                </a:solidFill>
-                <a:latin typeface="メイリオ"/>
-                <a:ea typeface="メイリオ"/>
-                <a:cs typeface="メイリオ"/>
-              </a:rPr>
-              <a:t>予約確認・前日の</a:t>
-            </a:r>
-            <a:endParaRPr sz="1250" b="1" dirty="0">
-              <a:solidFill>
-                <a:srgbClr val="1F285A"/>
-              </a:solidFill>
-              <a:latin typeface="メイリオ"/>
-              <a:ea typeface="メイリオ"/>
-              <a:cs typeface="メイリオ"/>
-            </a:endParaRPr>
-          </a:p>
-          <a:p>
-            <a:pPr algn="l">
-              <a:lnSpc>
-                <a:spcPct val="130000"/>
-              </a:lnSpc>
-              <a:spcAft>
-                <a:spcPts val="500"/>
-              </a:spcAft>
-            </a:pPr>
-            <a:r>
-              <a:rPr sz="1050" b="1" dirty="0" err="1">
-                <a:solidFill>
-                  <a:srgbClr val="7F7F7F"/>
-                </a:solidFill>
-                <a:latin typeface="メイリオ"/>
-                <a:ea typeface="メイリオ"/>
-                <a:cs typeface="メイリオ"/>
-              </a:rPr>
-              <a:t>LINEメッセージ</a:t>
-            </a:r>
-            <a:endParaRPr sz="1250" b="1" dirty="0">
-              <a:solidFill>
-                <a:srgbClr val="1F285A"/>
-              </a:solidFill>
-              <a:latin typeface="メイリオ"/>
-              <a:ea typeface="メイリオ"/>
-              <a:cs typeface="メイリオ"/>
-            </a:endParaRPr>
-          </a:p>
-          <a:p>
-            <a:pPr algn="l">
-              <a:lnSpc>
-                <a:spcPct val="130000"/>
-              </a:lnSpc>
-              <a:spcAft>
-                <a:spcPts val="500"/>
-              </a:spcAft>
-            </a:pPr>
-            <a:r>
-              <a:rPr sz="900" b="0" dirty="0" err="1">
-                <a:solidFill>
-                  <a:srgbClr val="7F7F7F"/>
-                </a:solidFill>
-                <a:latin typeface="メイリオ"/>
-                <a:ea typeface="メイリオ"/>
-                <a:cs typeface="メイリオ"/>
-              </a:rPr>
-              <a:t>msg_s3.png</a:t>
-            </a:r>
-            <a:endParaRPr sz="1250" b="1" dirty="0">
-              <a:solidFill>
-                <a:srgbClr val="1F285A"/>
-              </a:solidFill>
-              <a:latin typeface="メイリオ"/>
-              <a:ea typeface="メイリオ"/>
-              <a:cs typeface="メイリオ"/>
-            </a:endParaRPr>
-          </a:p>
-        </p:txBody>
-      </p:sp>
+        </p:spPr>
+      </p:pic>
       <p:sp>
         <p:nvSpPr>
           <p:cNvPr id="20" name="Rounded Rectangle 4"/>
@@ -6436,7 +6170,7 @@
         <p:spPr>
           <a:xfrm>
             <a:off x="1080000" y="2628000"/>
-            <a:ext cx="2952000" cy="1044000"/>
+            <a:ext cx="2718000" cy="1044000"/>
           </a:xfrm>
           <a:prstGeom prst="roundRect">
             <a:avLst>
@@ -6535,7 +6269,7 @@
         <p:spPr>
           <a:xfrm>
             <a:off x="1080000" y="3707999"/>
-            <a:ext cx="2952000" cy="1800000"/>
+            <a:ext cx="2718000" cy="1800000"/>
           </a:xfrm>
           <a:prstGeom prst="roundRect">
             <a:avLst>
@@ -6604,7 +6338,7 @@
               </a:spcAft>
             </a:pPr>
             <a:r>
-              <a:rPr sz="2200" b="1" dirty="0" err="1">
+              <a:rPr sz="2000" b="1" dirty="0" err="1">
                 <a:solidFill>
                   <a:srgbClr val="1F285A"/>
                 </a:solidFill>
@@ -6662,8 +6396,8 @@
         </p:nvSpPr>
         <p:spPr>
           <a:xfrm>
-            <a:off x="4176000" y="2628000"/>
-            <a:ext cx="2952000" cy="1044000"/>
+            <a:off x="3941999" y="2628000"/>
+            <a:ext cx="2718000" cy="1044000"/>
           </a:xfrm>
           <a:prstGeom prst="roundRect">
             <a:avLst>
@@ -6761,8 +6495,8 @@
         </p:nvSpPr>
         <p:spPr>
           <a:xfrm>
-            <a:off x="4176000" y="3707999"/>
-            <a:ext cx="2952000" cy="1800000"/>
+            <a:off x="3941999" y="3707999"/>
+            <a:ext cx="2718000" cy="1800000"/>
           </a:xfrm>
           <a:prstGeom prst="roundRect">
             <a:avLst>
@@ -6831,7 +6565,7 @@
               </a:spcAft>
             </a:pPr>
             <a:r>
-              <a:rPr sz="2200" b="1" dirty="0" err="1">
+              <a:rPr sz="2000" b="1" dirty="0" err="1">
                 <a:solidFill>
                   <a:srgbClr val="1F285A"/>
                 </a:solidFill>
@@ -6881,168 +6615,35 @@
           </a:p>
         </p:txBody>
       </p:sp>
-      <p:sp>
-        <p:nvSpPr>
-          <p:cNvPr id="17" name="Rounded Rectangle 12"/>
-          <p:cNvSpPr/>
+      <p:pic>
+        <p:nvPicPr>
+          <p:cNvPr id="17" name="Picture 13" descr="thanks_msg_s4.png"/>
+          <p:cNvPicPr>
+            <a:picLocks noChangeAspect="1"/>
+          </p:cNvPicPr>
           <p:nvPr/>
-        </p:nvSpPr>
+        </p:nvPicPr>
+        <p:blipFill>
+          <a:blip r:embed="rId2"/>
+          <a:stretch>
+            <a:fillRect/>
+          </a:stretch>
+        </p:blipFill>
         <p:spPr>
           <a:xfrm>
-            <a:off x="7343999" y="2628000"/>
-            <a:ext cx="1475999" cy="2628000"/>
-          </a:xfrm>
-          <a:prstGeom prst="roundRect">
-            <a:avLst>
-              <a:gd name="adj" fmla="val 6000"/>
-            </a:avLst>
-          </a:prstGeom>
-          <a:solidFill>
-            <a:srgbClr val="FFFFFF"/>
-          </a:solidFill>
-          <a:ln w="19050">
+            <a:off x="6876000" y="2628000"/>
+            <a:ext cx="1944000" cy="2151940"/>
+          </a:xfrm>
+          <a:prstGeom prst="rect">
+            <a:avLst/>
+          </a:prstGeom>
+          <a:ln w="12700">
             <a:solidFill>
-              <a:srgbClr val="7F7F7F"/>
+              <a:srgbClr val="D9D9D9"/>
             </a:solidFill>
-            <a:prstDash val="dash"/>
           </a:ln>
-          <a:effectLst/>
-        </p:spPr>
-        <p:style>
-          <a:lnRef idx="1">
-            <a:schemeClr val="accent1"/>
-          </a:lnRef>
-          <a:fillRef idx="3">
-            <a:schemeClr val="accent1"/>
-          </a:fillRef>
-          <a:effectRef idx="0">
-            <a:schemeClr val="accent1"/>
-          </a:effectRef>
-          <a:fontRef idx="minor">
-            <a:schemeClr val="lt1"/>
-          </a:fontRef>
-        </p:style>
-        <p:txBody>
-          <a:bodyPr wrap="square" lIns="125999" tIns="90000" rIns="108000" bIns="54000" rtlCol="0" anchor="ctr"/>
-          <a:lstStyle/>
-          <a:p>
-            <a:pPr algn="l">
-              <a:lnSpc>
-                <a:spcPct val="130000"/>
-              </a:lnSpc>
-              <a:spcAft>
-                <a:spcPts val="500"/>
-              </a:spcAft>
-            </a:pPr>
-            <a:r>
-              <a:rPr sz="1050" b="1" dirty="0" err="1">
-                <a:solidFill>
-                  <a:srgbClr val="7F7F7F"/>
-                </a:solidFill>
-                <a:latin typeface="メイリオ"/>
-                <a:ea typeface="メイリオ"/>
-                <a:cs typeface="メイリオ"/>
-              </a:rPr>
-              <a:t>［画像］</a:t>
-            </a:r>
-            <a:endParaRPr sz="1250" b="1" dirty="0">
-              <a:solidFill>
-                <a:srgbClr val="1F285A"/>
-              </a:solidFill>
-              <a:latin typeface="メイリオ"/>
-              <a:ea typeface="メイリオ"/>
-              <a:cs typeface="メイリオ"/>
-            </a:endParaRPr>
-          </a:p>
-          <a:p>
-            <a:pPr algn="l">
-              <a:lnSpc>
-                <a:spcPct val="130000"/>
-              </a:lnSpc>
-              <a:spcAft>
-                <a:spcPts val="500"/>
-              </a:spcAft>
-            </a:pPr>
-            <a:r>
-              <a:rPr sz="1050" b="1" dirty="0" err="1">
-                <a:solidFill>
-                  <a:srgbClr val="7F7F7F"/>
-                </a:solidFill>
-                <a:latin typeface="メイリオ"/>
-                <a:ea typeface="メイリオ"/>
-                <a:cs typeface="メイリオ"/>
-              </a:rPr>
-              <a:t>アンケート・クーポンの</a:t>
-            </a:r>
-            <a:endParaRPr sz="1250" b="1" dirty="0">
-              <a:solidFill>
-                <a:srgbClr val="1F285A"/>
-              </a:solidFill>
-              <a:latin typeface="メイリオ"/>
-              <a:ea typeface="メイリオ"/>
-              <a:cs typeface="メイリオ"/>
-            </a:endParaRPr>
-          </a:p>
-          <a:p>
-            <a:pPr algn="l">
-              <a:lnSpc>
-                <a:spcPct val="130000"/>
-              </a:lnSpc>
-              <a:spcAft>
-                <a:spcPts val="500"/>
-              </a:spcAft>
-            </a:pPr>
-            <a:r>
-              <a:rPr sz="1050" b="1" dirty="0" err="1">
-                <a:solidFill>
-                  <a:srgbClr val="7F7F7F"/>
-                </a:solidFill>
-                <a:latin typeface="メイリオ"/>
-                <a:ea typeface="メイリオ"/>
-                <a:cs typeface="メイリオ"/>
-              </a:rPr>
-              <a:t>LINEメッセージ</a:t>
-            </a:r>
-            <a:endParaRPr sz="1250" b="1" dirty="0">
-              <a:solidFill>
-                <a:srgbClr val="1F285A"/>
-              </a:solidFill>
-              <a:latin typeface="メイリオ"/>
-              <a:ea typeface="メイリオ"/>
-              <a:cs typeface="メイリオ"/>
-            </a:endParaRPr>
-          </a:p>
-          <a:p>
-            <a:pPr algn="l">
-              <a:lnSpc>
-                <a:spcPct val="130000"/>
-              </a:lnSpc>
-              <a:spcAft>
-                <a:spcPts val="500"/>
-              </a:spcAft>
-            </a:pPr>
-            <a:r>
-              <a:rPr sz="900" b="0" dirty="0" err="1">
-                <a:solidFill>
-                  <a:srgbClr val="7F7F7F"/>
-                </a:solidFill>
-                <a:latin typeface="メイリオ"/>
-                <a:ea typeface="メイリオ"/>
-                <a:cs typeface="メイリオ"/>
-              </a:rPr>
-              <a:t>msg_s4.png</a:t>
-            </a:r>
-            <a:endParaRPr sz="1250" b="1" dirty="0">
-              <a:solidFill>
-                <a:srgbClr val="1F285A"/>
-              </a:solidFill>
-              <a:latin typeface="メイリオ"/>
-              <a:ea typeface="メイリオ"/>
-              <a:cs typeface="メイリオ"/>
-            </a:endParaRPr>
-          </a:p>
-        </p:txBody>
-      </p:sp>
+        </p:spPr>
+      </p:pic>
       <p:sp>
         <p:nvSpPr>
           <p:cNvPr id="18" name="Rounded Rectangle 4"/>

--- a/20261002_サンクスLINEのご提案_事例入り.pptx
+++ b/20261002_サンクスLINEのご提案_事例入り.pptx
@@ -6,15 +6,15 @@
     <p:sldMasterId id="2147483687" r:id="rId2"/>
   </p:sldMasterIdLst>
   <p:notesMasterIdLst>
-    <p:notesMasterId r:id="rId8"/>
+    <p:notesMasterId r:id="rId7"/>
   </p:notesMasterIdLst>
   <p:handoutMasterIdLst>
-    <p:handoutMasterId r:id="rId9"/>
+    <p:handoutMasterId r:id="rId8"/>
   </p:handoutMasterIdLst>
   <p:sldIdLst>
-    <p:sldId id="3008" r:id="rId14"/>
-    <p:sldId id="2971" r:id="rId3"/>
-    <p:sldId id="2972" r:id="rId4"/>
+    <p:sldId id="3008" r:id="rId3"/>
+    <p:sldId id="2971" r:id="rId4"/>
+    <p:sldId id="2972" r:id="rId5"/>
     <p:sldId id="3007" r:id="rId6"/>
   </p:sldIdLst>
   <p:sldSz cx="9906000" cy="6858000" type="A4"/>
@@ -317,7 +317,7 @@
           <a:p>
             <a:fld id="{6AF8158D-F6B1-45E0-9831-E70689DC8490}" type="datetimeFigureOut">
               <a:rPr kumimoji="1" lang="ja-JP" altLang="en-US" smtClean="0"/>
-              <a:t>2026/9/30</a:t>
+              <a:t>2026/10/5</a:t>
             </a:fld>
             <a:endParaRPr kumimoji="1" lang="ja-JP" altLang="en-US"/>
           </a:p>
@@ -705,7 +705,7 @@
           <a:p>
             <a:fld id="{022E43C0-6795-4B13-B37C-259C826D4B6A}" type="slidenum">
               <a:rPr kumimoji="1" lang="ja-JP" altLang="en-US" smtClean="0"/>
-              <a:t>1</a:t>
+              <a:t>2</a:t>
             </a:fld>
             <a:endParaRPr kumimoji="1" lang="ja-JP" altLang="en-US"/>
           </a:p>
@@ -813,7 +813,7 @@
           <a:p>
             <a:fld id="{022E43C0-6795-4B13-B37C-259C826D4B6A}" type="slidenum">
               <a:rPr kumimoji="1" lang="ja-JP" altLang="en-US" smtClean="0"/>
-              <a:t>2</a:t>
+              <a:t>3</a:t>
             </a:fld>
             <a:endParaRPr kumimoji="1" lang="ja-JP" altLang="en-US"/>
           </a:p>
@@ -2863,13 +2863,7 @@
   <p:cSld>
     <p:spTree>
       <p:nvGrpSpPr>
-        <p:cNvPr id="2" name="">
-          <a:extLst>
-            <a:ext uri="{FF2B5EF4-FFF2-40B4-BE49-F238E27FC236}">
-              <a16:creationId xmlns:a16="http://schemas.microsoft.com/office/drawing/2014/main" id="{AD6A8E8E-25CB-4B86-C4F6-E5A7023586F7}"/>
-            </a:ext>
-          </a:extLst>
-        </p:cNvPr>
+        <p:cNvPr id="1" name=""/>
         <p:cNvGrpSpPr/>
         <p:nvPr/>
       </p:nvGrpSpPr>
@@ -2881,3889 +2875,6 @@
           <a:chExt cx="0" cy="0"/>
         </a:xfrm>
       </p:grpSpPr>
-      <p:sp>
-        <p:nvSpPr>
-          <p:cNvPr id="3" name="TextBox 1"/>
-          <p:cNvSpPr txBox="1"/>
-          <p:nvPr/>
-        </p:nvSpPr>
-        <p:spPr>
-          <a:xfrm>
-            <a:off x="547200" y="136800"/>
-            <a:ext cx="8784000" cy="338400"/>
-          </a:xfrm>
-          <a:prstGeom prst="rect">
-            <a:avLst/>
-          </a:prstGeom>
-          <a:noFill/>
-        </p:spPr>
-        <p:txBody>
-          <a:bodyPr wrap="square" lIns="0" tIns="21600" rIns="0" bIns="21600" anchor="ctr">
-            <a:spAutoFit/>
-          </a:bodyPr>
-          <a:lstStyle/>
-          <a:p>
-            <a:pPr algn="l"/>
-            <a:r>
-              <a:rPr sz="1600" b="1" dirty="0">
-                <a:solidFill>
-                  <a:srgbClr val="002060"/>
-                </a:solidFill>
-                <a:latin typeface="メイリオ"/>
-                <a:ea typeface="メイリオ"/>
-                <a:cs typeface="メイリオ"/>
-              </a:rPr>
-              <a:t>サンクスLINE｜重要性</a:t>
-            </a:r>
-          </a:p>
-        </p:txBody>
-      </p:sp>
-      <p:sp>
-        <p:nvSpPr>
-          <p:cNvPr id="4" name="TextBox 2"/>
-          <p:cNvSpPr txBox="1"/>
-          <p:nvPr/>
-        </p:nvSpPr>
-        <p:spPr>
-          <a:xfrm>
-            <a:off x="432000" y="684000"/>
-            <a:ext cx="9036000" cy="432000"/>
-          </a:xfrm>
-          <a:prstGeom prst="rect">
-            <a:avLst/>
-          </a:prstGeom>
-          <a:noFill/>
-        </p:spPr>
-        <p:txBody>
-          <a:bodyPr wrap="square" lIns="0" tIns="21600" rIns="0" bIns="21600" anchor="ctr">
-            <a:spAutoFit/>
-          </a:bodyPr>
-          <a:lstStyle/>
-          <a:p>
-            <a:pPr algn="l">
-              <a:lnSpc>
-                <a:spcPct val="130000"/>
-              </a:lnSpc>
-            </a:pPr>
-            <a:r>
-              <a:rPr lang="en-US" altLang="ja-JP" sz="1800" dirty="0" b="0">
-                <a:solidFill>
-                  <a:srgbClr val="333333"/>
-                </a:solidFill>
-                <a:latin typeface="メイリオ"/>
-                <a:ea typeface="メイリオ"/>
-                <a:cs typeface="メイリオ"/>
-              </a:rPr>
-              <a:t>申込み直後の“熱量が高い瞬間”に、LINEでつながる</a:t>
-            </a:r>
-            <a:endParaRPr sz="1600" dirty="0">
-              <a:solidFill>
-                <a:srgbClr val="333333"/>
-              </a:solidFill>
-              <a:latin typeface="メイリオ"/>
-              <a:ea typeface="メイリオ"/>
-              <a:cs typeface="メイリオ"/>
-            </a:endParaRPr>
-          </a:p>
-          <a:p>
-            <a:pPr algn="l">
-              <a:lnSpc>
-                <a:spcPct val="130000"/>
-              </a:lnSpc>
-            </a:pPr>
-            <a:r>
-              <a:rPr lang="en-US" altLang="ja-JP" sz="1800" dirty="0" b="0">
-                <a:solidFill>
-                  <a:srgbClr val="333333"/>
-                </a:solidFill>
-                <a:latin typeface="メイリオ"/>
-                <a:ea typeface="メイリオ"/>
-                <a:cs typeface="メイリオ"/>
-              </a:rPr>
-              <a:t>申込み直後からLINEで接点を持ち、来店・商談までの離脱を防止。</a:t>
-            </a:r>
-            <a:endParaRPr sz="1600" dirty="0">
-              <a:solidFill>
-                <a:srgbClr val="333333"/>
-              </a:solidFill>
-              <a:latin typeface="メイリオ"/>
-              <a:ea typeface="メイリオ"/>
-              <a:cs typeface="メイリオ"/>
-            </a:endParaRPr>
-          </a:p>
-        </p:txBody>
-      </p:sp>
-      <p:cxnSp>
-        <p:nvCxnSpPr>
-          <p:cNvPr id="5" name="Connector 3"/>
-          <p:cNvCxnSpPr/>
-          <p:nvPr/>
-        </p:nvCxnSpPr>
-        <p:spPr>
-          <a:xfrm>
-            <a:off x="0" y="1389600"/>
-            <a:ext cx="9907200" cy="0"/>
-          </a:xfrm>
-          <a:prstGeom prst="line">
-            <a:avLst/>
-          </a:prstGeom>
-          <a:ln w="12700">
-            <a:solidFill>
-              <a:srgbClr val="D9D9D9"/>
-            </a:solidFill>
-          </a:ln>
-        </p:spPr>
-        <p:style>
-          <a:lnRef idx="2">
-            <a:schemeClr val="accent1"/>
-          </a:lnRef>
-          <a:fillRef idx="0">
-            <a:schemeClr val="accent1"/>
-          </a:fillRef>
-          <a:effectRef idx="1">
-            <a:schemeClr val="accent1"/>
-          </a:effectRef>
-          <a:fontRef idx="minor">
-            <a:schemeClr val="tx1"/>
-          </a:fontRef>
-        </p:style>
-      </p:cxnSp>
-      <p:sp>
-        <p:nvSpPr>
-          <p:cNvPr id="6" name="Rounded Rectangle 12"/>
-          <p:cNvSpPr/>
-          <p:nvPr/>
-        </p:nvSpPr>
-        <p:spPr>
-          <a:xfrm>
-            <a:off x="1080000" y="1728000"/>
-            <a:ext cx="1655999" cy="612000"/>
-          </a:xfrm>
-          <a:prstGeom prst="roundRect">
-            <a:avLst>
-              <a:gd name="adj" fmla="val 6000"/>
-            </a:avLst>
-          </a:prstGeom>
-          <a:solidFill>
-            <a:srgbClr val="FFFFFF"/>
-          </a:solidFill>
-          <a:ln w="19050">
-            <a:solidFill>
-              <a:srgbClr val="1F285A"/>
-            </a:solidFill>
-          </a:ln>
-          <a:effectLst/>
-        </p:spPr>
-        <p:style>
-          <a:lnRef idx="1">
-            <a:schemeClr val="accent1"/>
-          </a:lnRef>
-          <a:fillRef idx="3">
-            <a:schemeClr val="accent1"/>
-          </a:fillRef>
-          <a:effectRef idx="2">
-            <a:schemeClr val="accent1"/>
-          </a:effectRef>
-          <a:fontRef idx="minor">
-            <a:schemeClr val="lt1"/>
-          </a:fontRef>
-        </p:style>
-        <p:txBody>
-          <a:bodyPr wrap="square" lIns="125999" tIns="90000" rIns="108000" bIns="54000" rtlCol="0" anchor="ctr"/>
-          <a:lstStyle/>
-          <a:p>
-            <a:pPr algn="ctr">
-              <a:lnSpc>
-                <a:spcPct val="130000"/>
-              </a:lnSpc>
-              <a:spcAft>
-                <a:spcPts val="500"/>
-              </a:spcAft>
-            </a:pPr>
-            <a:r>
-              <a:rPr sz="1300" b="1" dirty="0" err="1">
-                <a:solidFill>
-                  <a:srgbClr val="1F285A"/>
-                </a:solidFill>
-                <a:latin typeface="メイリオ"/>
-                <a:ea typeface="メイリオ"/>
-                <a:cs typeface="メイリオ"/>
-              </a:rPr>
-              <a:t>申込み完了</a:t>
-            </a:r>
-            <a:endParaRPr sz="1250" b="1" dirty="0">
-              <a:solidFill>
-                <a:srgbClr val="1F285A"/>
-              </a:solidFill>
-              <a:latin typeface="メイリオ"/>
-              <a:ea typeface="メイリオ"/>
-              <a:cs typeface="メイリオ"/>
-            </a:endParaRPr>
-          </a:p>
-        </p:txBody>
-      </p:sp>
-      <p:sp>
-        <p:nvSpPr>
-          <p:cNvPr id="7" name="Right Arrow 5"/>
-          <p:cNvSpPr/>
-          <p:nvPr/>
-        </p:nvSpPr>
-        <p:spPr>
-          <a:xfrm>
-            <a:off x="2754000" y="1889999"/>
-            <a:ext cx="324000" cy="288000"/>
-          </a:xfrm>
-          <a:prstGeom prst="rightArrow">
-            <a:avLst/>
-          </a:prstGeom>
-          <a:solidFill>
-            <a:srgbClr val="1F285A"/>
-          </a:solidFill>
-          <a:ln>
-            <a:noFill/>
-          </a:ln>
-          <a:effectLst/>
-        </p:spPr>
-        <p:style>
-          <a:lnRef idx="1">
-            <a:schemeClr val="accent1"/>
-          </a:lnRef>
-          <a:fillRef idx="3">
-            <a:schemeClr val="accent1"/>
-          </a:fillRef>
-          <a:effectRef idx="2">
-            <a:schemeClr val="accent1"/>
-          </a:effectRef>
-          <a:fontRef idx="minor">
-            <a:schemeClr val="lt1"/>
-          </a:fontRef>
-        </p:style>
-        <p:txBody>
-          <a:bodyPr rtlCol="0" anchor="ctr"/>
-          <a:lstStyle/>
-          <a:p>
-            <a:pPr algn="ctr"/>
-            <a:endParaRPr>
-              <a:latin typeface="メイリオ"/>
-              <a:ea typeface="メイリオ"/>
-              <a:cs typeface="メイリオ"/>
-            </a:endParaRPr>
-          </a:p>
-        </p:txBody>
-      </p:sp>
-      <p:sp>
-        <p:nvSpPr>
-          <p:cNvPr id="8" name="Rounded Rectangle 4"/>
-          <p:cNvSpPr/>
-          <p:nvPr/>
-        </p:nvSpPr>
-        <p:spPr>
-          <a:xfrm>
-            <a:off x="3096000" y="1728000"/>
-            <a:ext cx="1655999" cy="612000"/>
-          </a:xfrm>
-          <a:prstGeom prst="roundRect">
-            <a:avLst>
-              <a:gd name="adj" fmla="val 10000"/>
-            </a:avLst>
-          </a:prstGeom>
-          <a:solidFill>
-            <a:srgbClr val="1F285A"/>
-          </a:solidFill>
-          <a:ln>
-            <a:noFill/>
-          </a:ln>
-          <a:effectLst/>
-        </p:spPr>
-        <p:style>
-          <a:lnRef idx="1">
-            <a:schemeClr val="accent1"/>
-          </a:lnRef>
-          <a:fillRef idx="3">
-            <a:schemeClr val="accent1"/>
-          </a:fillRef>
-          <a:effectRef idx="2">
-            <a:schemeClr val="accent1"/>
-          </a:effectRef>
-          <a:fontRef idx="minor">
-            <a:schemeClr val="lt1"/>
-          </a:fontRef>
-        </p:style>
-        <p:txBody>
-          <a:bodyPr wrap="square" lIns="54000" tIns="18000" rIns="54000" bIns="18000" rtlCol="0" anchor="ctr"/>
-          <a:lstStyle/>
-          <a:p>
-            <a:pPr algn="ctr">
-              <a:lnSpc>
-                <a:spcPct val="120000"/>
-              </a:lnSpc>
-            </a:pPr>
-            <a:r>
-              <a:rPr sz="1300" b="1">
-                <a:solidFill>
-                  <a:srgbClr val="FFFFFF"/>
-                </a:solidFill>
-                <a:latin typeface="メイリオ"/>
-                <a:ea typeface="メイリオ"/>
-                <a:cs typeface="メイリオ"/>
-              </a:rPr>
-              <a:t>LINEで</a:t>
-            </a:r>
-          </a:p>
-          <a:p>
-            <a:pPr algn="ctr">
-              <a:lnSpc>
-                <a:spcPct val="120000"/>
-              </a:lnSpc>
-            </a:pPr>
-            <a:r>
-              <a:rPr sz="1300" b="1">
-                <a:solidFill>
-                  <a:srgbClr val="FFFFFF"/>
-                </a:solidFill>
-                <a:latin typeface="メイリオ"/>
-                <a:ea typeface="メイリオ"/>
-                <a:cs typeface="メイリオ"/>
-              </a:rPr>
-              <a:t>つながる</a:t>
-            </a:r>
-          </a:p>
-        </p:txBody>
-      </p:sp>
-      <p:sp>
-        <p:nvSpPr>
-          <p:cNvPr id="9" name="Right Arrow 5"/>
-          <p:cNvSpPr/>
-          <p:nvPr/>
-        </p:nvSpPr>
-        <p:spPr>
-          <a:xfrm>
-            <a:off x="4770000" y="1889999"/>
-            <a:ext cx="324000" cy="288000"/>
-          </a:xfrm>
-          <a:prstGeom prst="rightArrow">
-            <a:avLst/>
-          </a:prstGeom>
-          <a:solidFill>
-            <a:srgbClr val="1F285A"/>
-          </a:solidFill>
-          <a:ln>
-            <a:noFill/>
-          </a:ln>
-          <a:effectLst/>
-        </p:spPr>
-        <p:style>
-          <a:lnRef idx="1">
-            <a:schemeClr val="accent1"/>
-          </a:lnRef>
-          <a:fillRef idx="3">
-            <a:schemeClr val="accent1"/>
-          </a:fillRef>
-          <a:effectRef idx="2">
-            <a:schemeClr val="accent1"/>
-          </a:effectRef>
-          <a:fontRef idx="minor">
-            <a:schemeClr val="lt1"/>
-          </a:fontRef>
-        </p:style>
-        <p:txBody>
-          <a:bodyPr rtlCol="0" anchor="ctr"/>
-          <a:lstStyle/>
-          <a:p>
-            <a:pPr algn="ctr"/>
-            <a:endParaRPr>
-              <a:latin typeface="メイリオ"/>
-              <a:ea typeface="メイリオ"/>
-              <a:cs typeface="メイリオ"/>
-            </a:endParaRPr>
-          </a:p>
-        </p:txBody>
-      </p:sp>
-      <p:sp>
-        <p:nvSpPr>
-          <p:cNvPr id="10" name="Rounded Rectangle 4"/>
-          <p:cNvSpPr/>
-          <p:nvPr/>
-        </p:nvSpPr>
-        <p:spPr>
-          <a:xfrm>
-            <a:off x="5112000" y="1728000"/>
-            <a:ext cx="1655999" cy="612000"/>
-          </a:xfrm>
-          <a:prstGeom prst="roundRect">
-            <a:avLst>
-              <a:gd name="adj" fmla="val 10000"/>
-            </a:avLst>
-          </a:prstGeom>
-          <a:solidFill>
-            <a:srgbClr val="1F285A"/>
-          </a:solidFill>
-          <a:ln>
-            <a:noFill/>
-          </a:ln>
-          <a:effectLst/>
-        </p:spPr>
-        <p:style>
-          <a:lnRef idx="1">
-            <a:schemeClr val="accent1"/>
-          </a:lnRef>
-          <a:fillRef idx="3">
-            <a:schemeClr val="accent1"/>
-          </a:fillRef>
-          <a:effectRef idx="2">
-            <a:schemeClr val="accent1"/>
-          </a:effectRef>
-          <a:fontRef idx="minor">
-            <a:schemeClr val="lt1"/>
-          </a:fontRef>
-        </p:style>
-        <p:txBody>
-          <a:bodyPr wrap="square" lIns="54000" tIns="18000" rIns="54000" bIns="18000" rtlCol="0" anchor="ctr"/>
-          <a:lstStyle/>
-          <a:p>
-            <a:pPr algn="ctr">
-              <a:lnSpc>
-                <a:spcPct val="120000"/>
-              </a:lnSpc>
-            </a:pPr>
-            <a:r>
-              <a:rPr sz="1300" b="1">
-                <a:solidFill>
-                  <a:srgbClr val="FFFFFF"/>
-                </a:solidFill>
-                <a:latin typeface="メイリオ"/>
-                <a:ea typeface="メイリオ"/>
-                <a:cs typeface="メイリオ"/>
-              </a:rPr>
-              <a:t>離脱を</a:t>
-            </a:r>
-          </a:p>
-          <a:p>
-            <a:pPr algn="ctr">
-              <a:lnSpc>
-                <a:spcPct val="120000"/>
-              </a:lnSpc>
-            </a:pPr>
-            <a:r>
-              <a:rPr sz="1300" b="1">
-                <a:solidFill>
-                  <a:srgbClr val="FFFFFF"/>
-                </a:solidFill>
-                <a:latin typeface="メイリオ"/>
-                <a:ea typeface="メイリオ"/>
-                <a:cs typeface="メイリオ"/>
-              </a:rPr>
-              <a:t>防ぐ</a:t>
-            </a:r>
-          </a:p>
-        </p:txBody>
-      </p:sp>
-      <p:sp>
-        <p:nvSpPr>
-          <p:cNvPr id="11" name="Right Arrow 5"/>
-          <p:cNvSpPr/>
-          <p:nvPr/>
-        </p:nvSpPr>
-        <p:spPr>
-          <a:xfrm>
-            <a:off x="6785999" y="1889999"/>
-            <a:ext cx="324000" cy="288000"/>
-          </a:xfrm>
-          <a:prstGeom prst="rightArrow">
-            <a:avLst/>
-          </a:prstGeom>
-          <a:solidFill>
-            <a:srgbClr val="1F285A"/>
-          </a:solidFill>
-          <a:ln>
-            <a:noFill/>
-          </a:ln>
-          <a:effectLst/>
-        </p:spPr>
-        <p:style>
-          <a:lnRef idx="1">
-            <a:schemeClr val="accent1"/>
-          </a:lnRef>
-          <a:fillRef idx="3">
-            <a:schemeClr val="accent1"/>
-          </a:fillRef>
-          <a:effectRef idx="2">
-            <a:schemeClr val="accent1"/>
-          </a:effectRef>
-          <a:fontRef idx="minor">
-            <a:schemeClr val="lt1"/>
-          </a:fontRef>
-        </p:style>
-        <p:txBody>
-          <a:bodyPr rtlCol="0" anchor="ctr"/>
-          <a:lstStyle/>
-          <a:p>
-            <a:pPr algn="ctr"/>
-            <a:endParaRPr>
-              <a:latin typeface="メイリオ"/>
-              <a:ea typeface="メイリオ"/>
-              <a:cs typeface="メイリオ"/>
-            </a:endParaRPr>
-          </a:p>
-        </p:txBody>
-      </p:sp>
-      <p:sp>
-        <p:nvSpPr>
-          <p:cNvPr id="12" name="Rounded Rectangle 12"/>
-          <p:cNvSpPr/>
-          <p:nvPr/>
-        </p:nvSpPr>
-        <p:spPr>
-          <a:xfrm>
-            <a:off x="7127999" y="1728000"/>
-            <a:ext cx="1655999" cy="612000"/>
-          </a:xfrm>
-          <a:prstGeom prst="roundRect">
-            <a:avLst>
-              <a:gd name="adj" fmla="val 6000"/>
-            </a:avLst>
-          </a:prstGeom>
-          <a:solidFill>
-            <a:srgbClr val="FFFFFF"/>
-          </a:solidFill>
-          <a:ln w="19050">
-            <a:solidFill>
-              <a:srgbClr val="1F285A"/>
-            </a:solidFill>
-          </a:ln>
-          <a:effectLst/>
-        </p:spPr>
-        <p:style>
-          <a:lnRef idx="1">
-            <a:schemeClr val="accent1"/>
-          </a:lnRef>
-          <a:fillRef idx="3">
-            <a:schemeClr val="accent1"/>
-          </a:fillRef>
-          <a:effectRef idx="2">
-            <a:schemeClr val="accent1"/>
-          </a:effectRef>
-          <a:fontRef idx="minor">
-            <a:schemeClr val="lt1"/>
-          </a:fontRef>
-        </p:style>
-        <p:txBody>
-          <a:bodyPr wrap="square" lIns="125999" tIns="90000" rIns="108000" bIns="54000" rtlCol="0" anchor="ctr"/>
-          <a:lstStyle/>
-          <a:p>
-            <a:pPr algn="ctr">
-              <a:lnSpc>
-                <a:spcPct val="130000"/>
-              </a:lnSpc>
-              <a:spcAft>
-                <a:spcPts val="500"/>
-              </a:spcAft>
-            </a:pPr>
-            <a:r>
-              <a:rPr sz="1300" b="1" dirty="0" err="1">
-                <a:solidFill>
-                  <a:srgbClr val="1F285A"/>
-                </a:solidFill>
-                <a:latin typeface="メイリオ"/>
-                <a:ea typeface="メイリオ"/>
-                <a:cs typeface="メイリオ"/>
-              </a:rPr>
-              <a:t>来店・商談</a:t>
-            </a:r>
-            <a:endParaRPr sz="1250" b="1" dirty="0">
-              <a:solidFill>
-                <a:srgbClr val="1F285A"/>
-              </a:solidFill>
-              <a:latin typeface="メイリオ"/>
-              <a:ea typeface="メイリオ"/>
-              <a:cs typeface="メイリオ"/>
-            </a:endParaRPr>
-          </a:p>
-        </p:txBody>
-      </p:sp>
-      <p:sp>
-        <p:nvSpPr>
-          <p:cNvPr id="13" name="Rounded Rectangle 12"/>
-          <p:cNvSpPr/>
-          <p:nvPr/>
-        </p:nvSpPr>
-        <p:spPr>
-          <a:xfrm>
-            <a:off x="1080000" y="2628000"/>
-            <a:ext cx="2718000" cy="1044000"/>
-          </a:xfrm>
-          <a:prstGeom prst="roundRect">
-            <a:avLst>
-              <a:gd name="adj" fmla="val 6000"/>
-            </a:avLst>
-          </a:prstGeom>
-          <a:noFill/>
-          <a:ln w="19050">
-            <a:noFill/>
-          </a:ln>
-          <a:effectLst/>
-        </p:spPr>
-        <p:style>
-          <a:lnRef idx="1">
-            <a:schemeClr val="accent1"/>
-          </a:lnRef>
-          <a:fillRef idx="3">
-            <a:schemeClr val="accent1"/>
-          </a:fillRef>
-          <a:effectRef idx="0">
-            <a:schemeClr val="accent1"/>
-          </a:effectRef>
-          <a:fontRef idx="minor">
-            <a:schemeClr val="lt1"/>
-          </a:fontRef>
-        </p:style>
-        <p:txBody>
-          <a:bodyPr wrap="square" lIns="180000" tIns="72000" rIns="180000" bIns="36000" rtlCol="0" anchor="t"/>
-          <a:lstStyle/>
-          <a:p>
-            <a:pPr algn="l">
-              <a:lnSpc>
-                <a:spcPct val="130000"/>
-              </a:lnSpc>
-              <a:spcAft>
-                <a:spcPts val="600"/>
-              </a:spcAft>
-            </a:pPr>
-            <a:r>
-              <a:rPr sz="1500" b="1" dirty="0" err="1">
-                <a:solidFill>
-                  <a:srgbClr val="333333"/>
-                </a:solidFill>
-                <a:latin typeface="メイリオ"/>
-                <a:ea typeface="メイリオ"/>
-                <a:cs typeface="メイリオ"/>
-              </a:rPr>
-              <a:t>離脱</a:t>
-            </a:r>
-            <a:endParaRPr sz="1250" b="1" dirty="0">
-              <a:solidFill>
-                <a:srgbClr val="1F285A"/>
-              </a:solidFill>
-              <a:latin typeface="メイリオ"/>
-              <a:ea typeface="メイリオ"/>
-              <a:cs typeface="メイリオ"/>
-            </a:endParaRPr>
-          </a:p>
-          <a:p>
-            <a:pPr algn="l">
-              <a:lnSpc>
-                <a:spcPct val="130000"/>
-              </a:lnSpc>
-              <a:spcAft>
-                <a:spcPts val="0"/>
-              </a:spcAft>
-            </a:pPr>
-            <a:r>
-              <a:rPr sz="1300" b="0" dirty="0" err="1">
-                <a:solidFill>
-                  <a:srgbClr val="333333"/>
-                </a:solidFill>
-                <a:latin typeface="メイリオ"/>
-                <a:ea typeface="メイリオ"/>
-                <a:cs typeface="メイリオ"/>
-              </a:rPr>
-              <a:t>広告費を増やしても、この離脱層は減らない</a:t>
-            </a:r>
-            <a:endParaRPr sz="1250" b="1" dirty="0">
-              <a:solidFill>
-                <a:srgbClr val="1F285A"/>
-              </a:solidFill>
-              <a:latin typeface="メイリオ"/>
-              <a:ea typeface="メイリオ"/>
-              <a:cs typeface="メイリオ"/>
-            </a:endParaRPr>
-          </a:p>
-        </p:txBody>
-      </p:sp>
-      <p:sp>
-        <p:nvSpPr>
-          <p:cNvPr id="14" name="Rounded Rectangle 12"/>
-          <p:cNvSpPr/>
-          <p:nvPr/>
-        </p:nvSpPr>
-        <p:spPr>
-          <a:xfrm>
-            <a:off x="1080000" y="3707999"/>
-            <a:ext cx="2718000" cy="1800000"/>
-          </a:xfrm>
-          <a:prstGeom prst="roundRect">
-            <a:avLst>
-              <a:gd name="adj" fmla="val 6000"/>
-            </a:avLst>
-          </a:prstGeom>
-          <a:noFill/>
-          <a:ln w="19050">
-            <a:noFill/>
-          </a:ln>
-          <a:effectLst/>
-        </p:spPr>
-        <p:style>
-          <a:lnRef idx="1">
-            <a:schemeClr val="accent1"/>
-          </a:lnRef>
-          <a:fillRef idx="3">
-            <a:schemeClr val="accent1"/>
-          </a:fillRef>
-          <a:effectRef idx="0">
-            <a:schemeClr val="accent1"/>
-          </a:effectRef>
-          <a:fontRef idx="minor">
-            <a:schemeClr val="lt1"/>
-          </a:fontRef>
-        </p:style>
-        <p:txBody>
-          <a:bodyPr wrap="square" lIns="180000" tIns="72000" rIns="180000" bIns="36000" rtlCol="0" anchor="t"/>
-          <a:lstStyle/>
-          <a:p>
-            <a:pPr algn="l">
-              <a:lnSpc>
-                <a:spcPct val="130000"/>
-              </a:lnSpc>
-              <a:spcAft>
-                <a:spcPts val="400"/>
-              </a:spcAft>
-            </a:pPr>
-            <a:r>
-              <a:rPr sz="1300" b="0" dirty="0" err="1">
-                <a:solidFill>
-                  <a:srgbClr val="333333"/>
-                </a:solidFill>
-                <a:latin typeface="メイリオ"/>
-                <a:ea typeface="メイリオ"/>
-                <a:cs typeface="メイリオ"/>
-              </a:rPr>
-              <a:t>申込み⇒来店までに</a:t>
-            </a:r>
-            <a:endParaRPr sz="1250" b="1" dirty="0">
-              <a:solidFill>
-                <a:srgbClr val="1F285A"/>
-              </a:solidFill>
-              <a:latin typeface="メイリオ"/>
-              <a:ea typeface="メイリオ"/>
-              <a:cs typeface="メイリオ"/>
-            </a:endParaRPr>
-          </a:p>
-          <a:p>
-            <a:pPr algn="l">
-              <a:lnSpc>
-                <a:spcPct val="130000"/>
-              </a:lnSpc>
-              <a:spcAft>
-                <a:spcPts val="200"/>
-              </a:spcAft>
-            </a:pPr>
-            <a:r>
-              <a:rPr sz="2200" b="1" dirty="0" err="1">
-                <a:solidFill>
-                  <a:srgbClr val="1F285A"/>
-                </a:solidFill>
-                <a:latin typeface="メイリオ"/>
-                <a:ea typeface="メイリオ"/>
-                <a:cs typeface="メイリオ"/>
-              </a:rPr>
-              <a:t>一定数が離脱</a:t>
-            </a:r>
-            <a:endParaRPr sz="1250" b="1" dirty="0">
-              <a:solidFill>
-                <a:srgbClr val="1F285A"/>
-              </a:solidFill>
-              <a:latin typeface="メイリオ"/>
-              <a:ea typeface="メイリオ"/>
-              <a:cs typeface="メイリオ"/>
-            </a:endParaRPr>
-          </a:p>
-          <a:p>
-            <a:pPr algn="l">
-              <a:lnSpc>
-                <a:spcPct val="130000"/>
-              </a:lnSpc>
-              <a:spcAft>
-                <a:spcPts val="200"/>
-              </a:spcAft>
-            </a:pPr>
-            <a:r>
-              <a:rPr sz="1050" b="0" dirty="0" err="1">
-                <a:solidFill>
-                  <a:srgbClr val="7F7F7F"/>
-                </a:solidFill>
-                <a:latin typeface="メイリオ"/>
-                <a:ea typeface="メイリオ"/>
-                <a:cs typeface="メイリオ"/>
-              </a:rPr>
-              <a:t/>
-            </a:r>
-            <a:endParaRPr sz="1250" b="1" dirty="0">
-              <a:solidFill>
-                <a:srgbClr val="1F285A"/>
-              </a:solidFill>
-              <a:latin typeface="メイリオ"/>
-              <a:ea typeface="メイリオ"/>
-              <a:cs typeface="メイリオ"/>
-            </a:endParaRPr>
-          </a:p>
-        </p:txBody>
-      </p:sp>
-      <p:sp>
-        <p:nvSpPr>
-          <p:cNvPr id="15" name="Rounded Rectangle 12"/>
-          <p:cNvSpPr/>
-          <p:nvPr/>
-        </p:nvSpPr>
-        <p:spPr>
-          <a:xfrm>
-            <a:off x="3941999" y="2628000"/>
-            <a:ext cx="2718000" cy="1044000"/>
-          </a:xfrm>
-          <a:prstGeom prst="roundRect">
-            <a:avLst>
-              <a:gd name="adj" fmla="val 6000"/>
-            </a:avLst>
-          </a:prstGeom>
-          <a:noFill/>
-          <a:ln w="19050">
-            <a:noFill/>
-          </a:ln>
-          <a:effectLst/>
-        </p:spPr>
-        <p:style>
-          <a:lnRef idx="1">
-            <a:schemeClr val="accent1"/>
-          </a:lnRef>
-          <a:fillRef idx="3">
-            <a:schemeClr val="accent1"/>
-          </a:fillRef>
-          <a:effectRef idx="0">
-            <a:schemeClr val="accent1"/>
-          </a:effectRef>
-          <a:fontRef idx="minor">
-            <a:schemeClr val="lt1"/>
-          </a:fontRef>
-        </p:style>
-        <p:txBody>
-          <a:bodyPr wrap="square" lIns="180000" tIns="72000" rIns="180000" bIns="36000" rtlCol="0" anchor="t"/>
-          <a:lstStyle/>
-          <a:p>
-            <a:pPr algn="l">
-              <a:lnSpc>
-                <a:spcPct val="130000"/>
-              </a:lnSpc>
-              <a:spcAft>
-                <a:spcPts val="600"/>
-              </a:spcAft>
-            </a:pPr>
-            <a:r>
-              <a:rPr sz="1500" b="1" dirty="0" err="1">
-                <a:solidFill>
-                  <a:srgbClr val="333333"/>
-                </a:solidFill>
-                <a:latin typeface="メイリオ"/>
-                <a:ea typeface="メイリオ"/>
-                <a:cs typeface="メイリオ"/>
-              </a:rPr>
-              <a:t>動く</a:t>
-            </a:r>
-            <a:endParaRPr sz="1250" b="1" dirty="0">
-              <a:solidFill>
-                <a:srgbClr val="1F285A"/>
-              </a:solidFill>
-              <a:latin typeface="メイリオ"/>
-              <a:ea typeface="メイリオ"/>
-              <a:cs typeface="メイリオ"/>
-            </a:endParaRPr>
-          </a:p>
-          <a:p>
-            <a:pPr algn="l">
-              <a:lnSpc>
-                <a:spcPct val="130000"/>
-              </a:lnSpc>
-              <a:spcAft>
-                <a:spcPts val="0"/>
-              </a:spcAft>
-            </a:pPr>
-            <a:r>
-              <a:rPr sz="1300" b="0" dirty="0" err="1">
-                <a:solidFill>
-                  <a:srgbClr val="333333"/>
-                </a:solidFill>
-                <a:latin typeface="メイリオ"/>
-                <a:ea typeface="メイリオ"/>
-                <a:cs typeface="メイリオ"/>
-              </a:rPr>
-              <a:t>美容クリニック：予約確認・前日のお知らせをLINEで配信</a:t>
-            </a:r>
-            <a:endParaRPr sz="1250" b="1" dirty="0">
-              <a:solidFill>
-                <a:srgbClr val="1F285A"/>
-              </a:solidFill>
-              <a:latin typeface="メイリオ"/>
-              <a:ea typeface="メイリオ"/>
-              <a:cs typeface="メイリオ"/>
-            </a:endParaRPr>
-          </a:p>
-        </p:txBody>
-      </p:sp>
-      <p:sp>
-        <p:nvSpPr>
-          <p:cNvPr id="16" name="Rounded Rectangle 12"/>
-          <p:cNvSpPr/>
-          <p:nvPr/>
-        </p:nvSpPr>
-        <p:spPr>
-          <a:xfrm>
-            <a:off x="3941999" y="3707999"/>
-            <a:ext cx="2718000" cy="1800000"/>
-          </a:xfrm>
-          <a:prstGeom prst="roundRect">
-            <a:avLst>
-              <a:gd name="adj" fmla="val 6000"/>
-            </a:avLst>
-          </a:prstGeom>
-          <a:noFill/>
-          <a:ln w="19050">
-            <a:noFill/>
-          </a:ln>
-          <a:effectLst/>
-        </p:spPr>
-        <p:style>
-          <a:lnRef idx="1">
-            <a:schemeClr val="accent1"/>
-          </a:lnRef>
-          <a:fillRef idx="3">
-            <a:schemeClr val="accent1"/>
-          </a:fillRef>
-          <a:effectRef idx="0">
-            <a:schemeClr val="accent1"/>
-          </a:effectRef>
-          <a:fontRef idx="minor">
-            <a:schemeClr val="lt1"/>
-          </a:fontRef>
-        </p:style>
-        <p:txBody>
-          <a:bodyPr wrap="square" lIns="180000" tIns="72000" rIns="180000" bIns="36000" rtlCol="0" anchor="t"/>
-          <a:lstStyle/>
-          <a:p>
-            <a:pPr algn="l">
-              <a:lnSpc>
-                <a:spcPct val="130000"/>
-              </a:lnSpc>
-              <a:spcAft>
-                <a:spcPts val="400"/>
-              </a:spcAft>
-            </a:pPr>
-            <a:r>
-              <a:rPr sz="1300" b="0" dirty="0" err="1">
-                <a:solidFill>
-                  <a:srgbClr val="333333"/>
-                </a:solidFill>
-                <a:latin typeface="メイリオ"/>
-                <a:ea typeface="メイリオ"/>
-                <a:cs typeface="メイリオ"/>
-              </a:rPr>
-              <a:t>予約後の来院率</a:t>
-            </a:r>
-            <a:endParaRPr sz="1250" b="1" dirty="0">
-              <a:solidFill>
-                <a:srgbClr val="1F285A"/>
-              </a:solidFill>
-              <a:latin typeface="メイリオ"/>
-              <a:ea typeface="メイリオ"/>
-              <a:cs typeface="メイリオ"/>
-            </a:endParaRPr>
-          </a:p>
-          <a:p>
-            <a:pPr algn="l">
-              <a:lnSpc>
-                <a:spcPct val="130000"/>
-              </a:lnSpc>
-              <a:spcAft>
-                <a:spcPts val="200"/>
-              </a:spcAft>
-            </a:pPr>
-            <a:r>
-              <a:rPr sz="2200" b="1" dirty="0" err="1">
-                <a:solidFill>
-                  <a:srgbClr val="1F285A"/>
-                </a:solidFill>
-                <a:latin typeface="メイリオ"/>
-                <a:ea typeface="メイリオ"/>
-                <a:cs typeface="メイリオ"/>
-              </a:rPr>
-              <a:t>40〜50%改善</a:t>
-            </a:r>
-            <a:endParaRPr sz="1250" b="1" dirty="0">
-              <a:solidFill>
-                <a:srgbClr val="1F285A"/>
-              </a:solidFill>
-              <a:latin typeface="メイリオ"/>
-              <a:ea typeface="メイリオ"/>
-              <a:cs typeface="メイリオ"/>
-            </a:endParaRPr>
-          </a:p>
-          <a:p>
-            <a:pPr algn="l">
-              <a:lnSpc>
-                <a:spcPct val="130000"/>
-              </a:lnSpc>
-              <a:spcAft>
-                <a:spcPts val="200"/>
-              </a:spcAft>
-            </a:pPr>
-            <a:r>
-              <a:rPr sz="1050" b="0" dirty="0" err="1">
-                <a:solidFill>
-                  <a:srgbClr val="7F7F7F"/>
-                </a:solidFill>
-                <a:latin typeface="メイリオ"/>
-                <a:ea typeface="メイリオ"/>
-                <a:cs typeface="メイリオ"/>
-              </a:rPr>
-              <a:t/>
-            </a:r>
-            <a:endParaRPr sz="1250" b="1" dirty="0">
-              <a:solidFill>
-                <a:srgbClr val="1F285A"/>
-              </a:solidFill>
-              <a:latin typeface="メイリオ"/>
-              <a:ea typeface="メイリオ"/>
-              <a:cs typeface="メイリオ"/>
-            </a:endParaRPr>
-          </a:p>
-        </p:txBody>
-      </p:sp>
-      <p:pic>
-        <p:nvPicPr>
-          <p:cNvPr id="17" name="Picture 13" descr="thanks_msg_s2.png"/>
-          <p:cNvPicPr>
-            <a:picLocks noChangeAspect="1"/>
-          </p:cNvPicPr>
-          <p:nvPr/>
-        </p:nvPicPr>
-        <p:blipFill>
-          <a:blip r:embed="rId3"/>
-          <a:stretch>
-            <a:fillRect/>
-          </a:stretch>
-        </p:blipFill>
-        <p:spPr>
-          <a:xfrm>
-            <a:off x="6876000" y="2628000"/>
-            <a:ext cx="1944000" cy="1743391"/>
-          </a:xfrm>
-          <a:prstGeom prst="rect">
-            <a:avLst/>
-          </a:prstGeom>
-          <a:ln w="12700">
-            <a:solidFill>
-              <a:srgbClr val="D9D9D9"/>
-            </a:solidFill>
-          </a:ln>
-        </p:spPr>
-      </p:pic>
-      <p:sp>
-        <p:nvSpPr>
-          <p:cNvPr id="18" name="Rounded Rectangle 4"/>
-          <p:cNvSpPr/>
-          <p:nvPr/>
-        </p:nvSpPr>
-        <p:spPr>
-          <a:xfrm>
-            <a:off x="1080000" y="5652000"/>
-            <a:ext cx="7740000" cy="432000"/>
-          </a:xfrm>
-          <a:prstGeom prst="roundRect">
-            <a:avLst>
-              <a:gd name="adj" fmla="val 10000"/>
-            </a:avLst>
-          </a:prstGeom>
-          <a:solidFill>
-            <a:srgbClr val="333333"/>
-          </a:solidFill>
-          <a:ln>
-            <a:noFill/>
-          </a:ln>
-          <a:effectLst/>
-        </p:spPr>
-        <p:style>
-          <a:lnRef idx="1">
-            <a:schemeClr val="accent1"/>
-          </a:lnRef>
-          <a:fillRef idx="3">
-            <a:schemeClr val="accent1"/>
-          </a:fillRef>
-          <a:effectRef idx="2">
-            <a:schemeClr val="accent1"/>
-          </a:effectRef>
-          <a:fontRef idx="minor">
-            <a:schemeClr val="lt1"/>
-          </a:fontRef>
-        </p:style>
-        <p:txBody>
-          <a:bodyPr wrap="square" lIns="54000" tIns="18000" rIns="54000" bIns="18000" rtlCol="0" anchor="ctr"/>
-          <a:lstStyle/>
-          <a:p>
-            <a:pPr algn="ctr">
-              <a:lnSpc>
-                <a:spcPct val="120000"/>
-              </a:lnSpc>
-            </a:pPr>
-            <a:r>
-              <a:rPr sz="1500" b="1">
-                <a:solidFill>
-                  <a:srgbClr val="FFFFFF"/>
-                </a:solidFill>
-                <a:latin typeface="メイリオ"/>
-                <a:ea typeface="メイリオ"/>
-                <a:cs typeface="メイリオ"/>
-              </a:rPr>
-              <a:t>関心が一番高い申込み直後に、LINEでつながるのが最適</a:t>
-            </a:r>
-          </a:p>
-        </p:txBody>
-      </p:sp>
-    </p:spTree>
-    <p:extLst>
-      <p:ext uri="{BB962C8B-B14F-4D97-AF65-F5344CB8AC3E}">
-        <p14:creationId xmlns:p14="http://schemas.microsoft.com/office/powerpoint/2010/main" val="2378484531"/>
-      </p:ext>
-    </p:extLst>
-  </p:cSld>
-  <p:clrMapOvr>
-    <a:masterClrMapping/>
-  </p:clrMapOvr>
-</p:sld>
-</file>
-
-<file path=ppt/slides/slide2.xml><?xml version="1.0" encoding="utf-8"?>
-<p:sld xmlns:a="http://schemas.openxmlformats.org/drawingml/2006/main" xmlns:r="http://schemas.openxmlformats.org/officeDocument/2006/relationships" xmlns:p="http://schemas.openxmlformats.org/presentationml/2006/main">
-  <p:cSld>
-    <p:spTree>
-      <p:nvGrpSpPr>
-        <p:cNvPr id="2" name="">
-          <a:extLst>
-            <a:ext uri="{FF2B5EF4-FFF2-40B4-BE49-F238E27FC236}">
-              <a16:creationId xmlns:a16="http://schemas.microsoft.com/office/drawing/2014/main" id="{E70E5221-666F-DE20-B9E8-FDFC607CC22D}"/>
-            </a:ext>
-          </a:extLst>
-        </p:cNvPr>
-        <p:cNvGrpSpPr/>
-        <p:nvPr/>
-      </p:nvGrpSpPr>
-      <p:grpSpPr>
-        <a:xfrm>
-          <a:off x="0" y="0"/>
-          <a:ext cx="0" cy="0"/>
-          <a:chOff x="0" y="0"/>
-          <a:chExt cx="0" cy="0"/>
-        </a:xfrm>
-      </p:grpSpPr>
-      <p:sp>
-        <p:nvSpPr>
-          <p:cNvPr id="3" name="TextBox 1"/>
-          <p:cNvSpPr txBox="1"/>
-          <p:nvPr/>
-        </p:nvSpPr>
-        <p:spPr>
-          <a:xfrm>
-            <a:off x="547200" y="136800"/>
-            <a:ext cx="8784000" cy="338400"/>
-          </a:xfrm>
-          <a:prstGeom prst="rect">
-            <a:avLst/>
-          </a:prstGeom>
-          <a:noFill/>
-        </p:spPr>
-        <p:txBody>
-          <a:bodyPr wrap="square" lIns="0" tIns="21600" rIns="0" bIns="21600" anchor="ctr">
-            <a:spAutoFit/>
-          </a:bodyPr>
-          <a:lstStyle/>
-          <a:p>
-            <a:pPr algn="l"/>
-            <a:r>
-              <a:rPr sz="1600" b="1">
-                <a:solidFill>
-                  <a:srgbClr val="002060"/>
-                </a:solidFill>
-                <a:latin typeface="メイリオ"/>
-                <a:ea typeface="メイリオ"/>
-                <a:cs typeface="メイリオ"/>
-              </a:rPr>
-              <a:t>実例｜来店・来院の予約／資料請求</a:t>
-            </a:r>
-          </a:p>
-        </p:txBody>
-      </p:sp>
-      <p:sp>
-        <p:nvSpPr>
-          <p:cNvPr id="4" name="TextBox 2"/>
-          <p:cNvSpPr txBox="1"/>
-          <p:nvPr/>
-        </p:nvSpPr>
-        <p:spPr>
-          <a:xfrm>
-            <a:off x="432000" y="684000"/>
-            <a:ext cx="9036000" cy="432000"/>
-          </a:xfrm>
-          <a:prstGeom prst="rect">
-            <a:avLst/>
-          </a:prstGeom>
-          <a:noFill/>
-        </p:spPr>
-        <p:txBody>
-          <a:bodyPr wrap="square" lIns="0" tIns="21600" rIns="0" bIns="21600" anchor="ctr">
-            <a:spAutoFit/>
-          </a:bodyPr>
-          <a:lstStyle/>
-          <a:p>
-            <a:pPr algn="l">
-              <a:lnSpc>
-                <a:spcPct val="130000"/>
-              </a:lnSpc>
-            </a:pPr>
-            <a:r>
-              <a:rPr sz="1800" dirty="0" err="1" b="0">
-                <a:solidFill>
-                  <a:srgbClr val="333333"/>
-                </a:solidFill>
-                <a:latin typeface="メイリオ"/>
-                <a:ea typeface="メイリオ"/>
-                <a:cs typeface="メイリオ"/>
-              </a:rPr>
-              <a:t>申込み後のLINEフォローで、来店・面談までつなげる</a:t>
-            </a:r>
-            <a:endParaRPr lang="en-US" sz="1600" dirty="0">
-              <a:solidFill>
-                <a:srgbClr val="333333"/>
-              </a:solidFill>
-              <a:latin typeface="メイリオ"/>
-              <a:ea typeface="メイリオ"/>
-              <a:cs typeface="メイリオ"/>
-            </a:endParaRPr>
-          </a:p>
-          <a:p>
-            <a:pPr algn="l">
-              <a:lnSpc>
-                <a:spcPct val="130000"/>
-              </a:lnSpc>
-            </a:pPr>
-            <a:r>
-              <a:rPr sz="1800" dirty="0" err="1" b="0">
-                <a:solidFill>
-                  <a:srgbClr val="333333"/>
-                </a:solidFill>
-                <a:latin typeface="メイリオ"/>
-                <a:ea typeface="メイリオ"/>
-                <a:cs typeface="メイリオ"/>
-              </a:rPr>
-              <a:t>予約確認・リマインド・ステップ配信で、申込み後の離脱を防止</a:t>
-            </a:r>
-            <a:endParaRPr lang="en-US" sz="1600" dirty="0">
-              <a:solidFill>
-                <a:srgbClr val="333333"/>
-              </a:solidFill>
-              <a:latin typeface="メイリオ"/>
-              <a:ea typeface="メイリオ"/>
-              <a:cs typeface="メイリオ"/>
-            </a:endParaRPr>
-          </a:p>
-        </p:txBody>
-      </p:sp>
-      <p:cxnSp>
-        <p:nvCxnSpPr>
-          <p:cNvPr id="5" name="Connector 3"/>
-          <p:cNvCxnSpPr/>
-          <p:nvPr/>
-        </p:nvCxnSpPr>
-        <p:spPr>
-          <a:xfrm>
-            <a:off x="0" y="1389600"/>
-            <a:ext cx="9907200" cy="0"/>
-          </a:xfrm>
-          <a:prstGeom prst="line">
-            <a:avLst/>
-          </a:prstGeom>
-          <a:ln w="12700">
-            <a:solidFill>
-              <a:srgbClr val="D9D9D9"/>
-            </a:solidFill>
-          </a:ln>
-        </p:spPr>
-        <p:style>
-          <a:lnRef idx="2">
-            <a:schemeClr val="accent1"/>
-          </a:lnRef>
-          <a:fillRef idx="0">
-            <a:schemeClr val="accent1"/>
-          </a:fillRef>
-          <a:effectRef idx="1">
-            <a:schemeClr val="accent1"/>
-          </a:effectRef>
-          <a:fontRef idx="minor">
-            <a:schemeClr val="tx1"/>
-          </a:fontRef>
-        </p:style>
-      </p:cxnSp>
-      <p:sp>
-        <p:nvSpPr>
-          <p:cNvPr id="6" name="Rounded Rectangle 12"/>
-          <p:cNvSpPr/>
-          <p:nvPr/>
-        </p:nvSpPr>
-        <p:spPr>
-          <a:xfrm>
-            <a:off x="1080000" y="1728000"/>
-            <a:ext cx="1655999" cy="612000"/>
-          </a:xfrm>
-          <a:prstGeom prst="roundRect">
-            <a:avLst>
-              <a:gd name="adj" fmla="val 6000"/>
-            </a:avLst>
-          </a:prstGeom>
-          <a:solidFill>
-            <a:srgbClr val="FFFFFF"/>
-          </a:solidFill>
-          <a:ln w="19050">
-            <a:solidFill>
-              <a:srgbClr val="1F285A"/>
-            </a:solidFill>
-          </a:ln>
-          <a:effectLst/>
-        </p:spPr>
-        <p:style>
-          <a:lnRef idx="1">
-            <a:schemeClr val="accent1"/>
-          </a:lnRef>
-          <a:fillRef idx="3">
-            <a:schemeClr val="accent1"/>
-          </a:fillRef>
-          <a:effectRef idx="2">
-            <a:schemeClr val="accent1"/>
-          </a:effectRef>
-          <a:fontRef idx="minor">
-            <a:schemeClr val="lt1"/>
-          </a:fontRef>
-        </p:style>
-        <p:txBody>
-          <a:bodyPr wrap="square" lIns="125999" tIns="90000" rIns="108000" bIns="54000" rtlCol="0" anchor="ctr"/>
-          <a:lstStyle/>
-          <a:p>
-            <a:pPr algn="ctr">
-              <a:lnSpc>
-                <a:spcPct val="130000"/>
-              </a:lnSpc>
-              <a:spcAft>
-                <a:spcPts val="500"/>
-              </a:spcAft>
-            </a:pPr>
-            <a:r>
-              <a:rPr sz="1300" b="1" dirty="0" err="1">
-                <a:solidFill>
-                  <a:srgbClr val="1F285A"/>
-                </a:solidFill>
-                <a:latin typeface="メイリオ"/>
-                <a:ea typeface="メイリオ"/>
-                <a:cs typeface="メイリオ"/>
-              </a:rPr>
-              <a:t>申込み完了</a:t>
-            </a:r>
-            <a:endParaRPr sz="1250" b="1" dirty="0">
-              <a:solidFill>
-                <a:srgbClr val="1F285A"/>
-              </a:solidFill>
-              <a:latin typeface="メイリオ"/>
-              <a:ea typeface="メイリオ"/>
-              <a:cs typeface="メイリオ"/>
-            </a:endParaRPr>
-          </a:p>
-        </p:txBody>
-      </p:sp>
-      <p:sp>
-        <p:nvSpPr>
-          <p:cNvPr id="7" name="Right Arrow 5"/>
-          <p:cNvSpPr/>
-          <p:nvPr/>
-        </p:nvSpPr>
-        <p:spPr>
-          <a:xfrm>
-            <a:off x="2754000" y="1889999"/>
-            <a:ext cx="324000" cy="288000"/>
-          </a:xfrm>
-          <a:prstGeom prst="rightArrow">
-            <a:avLst/>
-          </a:prstGeom>
-          <a:solidFill>
-            <a:srgbClr val="1F285A"/>
-          </a:solidFill>
-          <a:ln>
-            <a:noFill/>
-          </a:ln>
-          <a:effectLst/>
-        </p:spPr>
-        <p:style>
-          <a:lnRef idx="1">
-            <a:schemeClr val="accent1"/>
-          </a:lnRef>
-          <a:fillRef idx="3">
-            <a:schemeClr val="accent1"/>
-          </a:fillRef>
-          <a:effectRef idx="2">
-            <a:schemeClr val="accent1"/>
-          </a:effectRef>
-          <a:fontRef idx="minor">
-            <a:schemeClr val="lt1"/>
-          </a:fontRef>
-        </p:style>
-        <p:txBody>
-          <a:bodyPr rtlCol="0" anchor="ctr"/>
-          <a:lstStyle/>
-          <a:p>
-            <a:pPr algn="ctr"/>
-            <a:endParaRPr>
-              <a:latin typeface="メイリオ"/>
-              <a:ea typeface="メイリオ"/>
-              <a:cs typeface="メイリオ"/>
-            </a:endParaRPr>
-          </a:p>
-        </p:txBody>
-      </p:sp>
-      <p:sp>
-        <p:nvSpPr>
-          <p:cNvPr id="8" name="Rounded Rectangle 4"/>
-          <p:cNvSpPr/>
-          <p:nvPr/>
-        </p:nvSpPr>
-        <p:spPr>
-          <a:xfrm>
-            <a:off x="3096000" y="1728000"/>
-            <a:ext cx="1655999" cy="612000"/>
-          </a:xfrm>
-          <a:prstGeom prst="roundRect">
-            <a:avLst>
-              <a:gd name="adj" fmla="val 10000"/>
-            </a:avLst>
-          </a:prstGeom>
-          <a:solidFill>
-            <a:srgbClr val="1F285A"/>
-          </a:solidFill>
-          <a:ln>
-            <a:noFill/>
-          </a:ln>
-          <a:effectLst/>
-        </p:spPr>
-        <p:style>
-          <a:lnRef idx="1">
-            <a:schemeClr val="accent1"/>
-          </a:lnRef>
-          <a:fillRef idx="3">
-            <a:schemeClr val="accent1"/>
-          </a:fillRef>
-          <a:effectRef idx="2">
-            <a:schemeClr val="accent1"/>
-          </a:effectRef>
-          <a:fontRef idx="minor">
-            <a:schemeClr val="lt1"/>
-          </a:fontRef>
-        </p:style>
-        <p:txBody>
-          <a:bodyPr wrap="square" lIns="54000" tIns="18000" rIns="54000" bIns="18000" rtlCol="0" anchor="ctr"/>
-          <a:lstStyle/>
-          <a:p>
-            <a:pPr algn="ctr">
-              <a:lnSpc>
-                <a:spcPct val="120000"/>
-              </a:lnSpc>
-            </a:pPr>
-            <a:r>
-              <a:rPr sz="1300" b="1">
-                <a:solidFill>
-                  <a:srgbClr val="FFFFFF"/>
-                </a:solidFill>
-                <a:latin typeface="メイリオ"/>
-                <a:ea typeface="メイリオ"/>
-                <a:cs typeface="メイリオ"/>
-              </a:rPr>
-              <a:t>LINEで</a:t>
-            </a:r>
-          </a:p>
-          <a:p>
-            <a:pPr algn="ctr">
-              <a:lnSpc>
-                <a:spcPct val="120000"/>
-              </a:lnSpc>
-            </a:pPr>
-            <a:r>
-              <a:rPr sz="1300" b="1">
-                <a:solidFill>
-                  <a:srgbClr val="FFFFFF"/>
-                </a:solidFill>
-                <a:latin typeface="メイリオ"/>
-                <a:ea typeface="メイリオ"/>
-                <a:cs typeface="メイリオ"/>
-              </a:rPr>
-              <a:t>つながる</a:t>
-            </a:r>
-          </a:p>
-        </p:txBody>
-      </p:sp>
-      <p:sp>
-        <p:nvSpPr>
-          <p:cNvPr id="9" name="Right Arrow 5"/>
-          <p:cNvSpPr/>
-          <p:nvPr/>
-        </p:nvSpPr>
-        <p:spPr>
-          <a:xfrm>
-            <a:off x="4770000" y="1889999"/>
-            <a:ext cx="324000" cy="288000"/>
-          </a:xfrm>
-          <a:prstGeom prst="rightArrow">
-            <a:avLst/>
-          </a:prstGeom>
-          <a:solidFill>
-            <a:srgbClr val="1F285A"/>
-          </a:solidFill>
-          <a:ln>
-            <a:noFill/>
-          </a:ln>
-          <a:effectLst/>
-        </p:spPr>
-        <p:style>
-          <a:lnRef idx="1">
-            <a:schemeClr val="accent1"/>
-          </a:lnRef>
-          <a:fillRef idx="3">
-            <a:schemeClr val="accent1"/>
-          </a:fillRef>
-          <a:effectRef idx="2">
-            <a:schemeClr val="accent1"/>
-          </a:effectRef>
-          <a:fontRef idx="minor">
-            <a:schemeClr val="lt1"/>
-          </a:fontRef>
-        </p:style>
-        <p:txBody>
-          <a:bodyPr rtlCol="0" anchor="ctr"/>
-          <a:lstStyle/>
-          <a:p>
-            <a:pPr algn="ctr"/>
-            <a:endParaRPr>
-              <a:latin typeface="メイリオ"/>
-              <a:ea typeface="メイリオ"/>
-              <a:cs typeface="メイリオ"/>
-            </a:endParaRPr>
-          </a:p>
-        </p:txBody>
-      </p:sp>
-      <p:sp>
-        <p:nvSpPr>
-          <p:cNvPr id="10" name="Rounded Rectangle 4"/>
-          <p:cNvSpPr/>
-          <p:nvPr/>
-        </p:nvSpPr>
-        <p:spPr>
-          <a:xfrm>
-            <a:off x="5112000" y="1728000"/>
-            <a:ext cx="1655999" cy="612000"/>
-          </a:xfrm>
-          <a:prstGeom prst="roundRect">
-            <a:avLst>
-              <a:gd name="adj" fmla="val 10000"/>
-            </a:avLst>
-          </a:prstGeom>
-          <a:solidFill>
-            <a:srgbClr val="1F285A"/>
-          </a:solidFill>
-          <a:ln>
-            <a:noFill/>
-          </a:ln>
-          <a:effectLst/>
-        </p:spPr>
-        <p:style>
-          <a:lnRef idx="1">
-            <a:schemeClr val="accent1"/>
-          </a:lnRef>
-          <a:fillRef idx="3">
-            <a:schemeClr val="accent1"/>
-          </a:fillRef>
-          <a:effectRef idx="2">
-            <a:schemeClr val="accent1"/>
-          </a:effectRef>
-          <a:fontRef idx="minor">
-            <a:schemeClr val="lt1"/>
-          </a:fontRef>
-        </p:style>
-        <p:txBody>
-          <a:bodyPr wrap="square" lIns="54000" tIns="18000" rIns="54000" bIns="18000" rtlCol="0" anchor="ctr"/>
-          <a:lstStyle/>
-          <a:p>
-            <a:pPr algn="ctr">
-              <a:lnSpc>
-                <a:spcPct val="120000"/>
-              </a:lnSpc>
-            </a:pPr>
-            <a:r>
-              <a:rPr sz="1300" b="1">
-                <a:solidFill>
-                  <a:srgbClr val="FFFFFF"/>
-                </a:solidFill>
-                <a:latin typeface="メイリオ"/>
-                <a:ea typeface="メイリオ"/>
-                <a:cs typeface="メイリオ"/>
-              </a:rPr>
-              <a:t>確認・リマインド・</a:t>
-            </a:r>
-          </a:p>
-          <a:p>
-            <a:pPr algn="ctr">
-              <a:lnSpc>
-                <a:spcPct val="120000"/>
-              </a:lnSpc>
-            </a:pPr>
-            <a:r>
-              <a:rPr sz="1300" b="1">
-                <a:solidFill>
-                  <a:srgbClr val="FFFFFF"/>
-                </a:solidFill>
-                <a:latin typeface="メイリオ"/>
-                <a:ea typeface="メイリオ"/>
-                <a:cs typeface="メイリオ"/>
-              </a:rPr>
-              <a:t>情報配信</a:t>
-            </a:r>
-          </a:p>
-        </p:txBody>
-      </p:sp>
-      <p:sp>
-        <p:nvSpPr>
-          <p:cNvPr id="11" name="Right Arrow 5"/>
-          <p:cNvSpPr/>
-          <p:nvPr/>
-        </p:nvSpPr>
-        <p:spPr>
-          <a:xfrm>
-            <a:off x="6785999" y="1889999"/>
-            <a:ext cx="324000" cy="288000"/>
-          </a:xfrm>
-          <a:prstGeom prst="rightArrow">
-            <a:avLst/>
-          </a:prstGeom>
-          <a:solidFill>
-            <a:srgbClr val="1F285A"/>
-          </a:solidFill>
-          <a:ln>
-            <a:noFill/>
-          </a:ln>
-          <a:effectLst/>
-        </p:spPr>
-        <p:style>
-          <a:lnRef idx="1">
-            <a:schemeClr val="accent1"/>
-          </a:lnRef>
-          <a:fillRef idx="3">
-            <a:schemeClr val="accent1"/>
-          </a:fillRef>
-          <a:effectRef idx="2">
-            <a:schemeClr val="accent1"/>
-          </a:effectRef>
-          <a:fontRef idx="minor">
-            <a:schemeClr val="lt1"/>
-          </a:fontRef>
-        </p:style>
-        <p:txBody>
-          <a:bodyPr rtlCol="0" anchor="ctr"/>
-          <a:lstStyle/>
-          <a:p>
-            <a:pPr algn="ctr"/>
-            <a:endParaRPr>
-              <a:latin typeface="メイリオ"/>
-              <a:ea typeface="メイリオ"/>
-              <a:cs typeface="メイリオ"/>
-            </a:endParaRPr>
-          </a:p>
-        </p:txBody>
-      </p:sp>
-      <p:sp>
-        <p:nvSpPr>
-          <p:cNvPr id="12" name="Rounded Rectangle 12"/>
-          <p:cNvSpPr/>
-          <p:nvPr/>
-        </p:nvSpPr>
-        <p:spPr>
-          <a:xfrm>
-            <a:off x="7127999" y="1728000"/>
-            <a:ext cx="1655999" cy="612000"/>
-          </a:xfrm>
-          <a:prstGeom prst="roundRect">
-            <a:avLst>
-              <a:gd name="adj" fmla="val 6000"/>
-            </a:avLst>
-          </a:prstGeom>
-          <a:solidFill>
-            <a:srgbClr val="FFFFFF"/>
-          </a:solidFill>
-          <a:ln w="19050">
-            <a:solidFill>
-              <a:srgbClr val="1F285A"/>
-            </a:solidFill>
-          </a:ln>
-          <a:effectLst/>
-        </p:spPr>
-        <p:style>
-          <a:lnRef idx="1">
-            <a:schemeClr val="accent1"/>
-          </a:lnRef>
-          <a:fillRef idx="3">
-            <a:schemeClr val="accent1"/>
-          </a:fillRef>
-          <a:effectRef idx="2">
-            <a:schemeClr val="accent1"/>
-          </a:effectRef>
-          <a:fontRef idx="minor">
-            <a:schemeClr val="lt1"/>
-          </a:fontRef>
-        </p:style>
-        <p:txBody>
-          <a:bodyPr wrap="square" lIns="125999" tIns="90000" rIns="108000" bIns="54000" rtlCol="0" anchor="ctr"/>
-          <a:lstStyle/>
-          <a:p>
-            <a:pPr algn="ctr">
-              <a:lnSpc>
-                <a:spcPct val="130000"/>
-              </a:lnSpc>
-              <a:spcAft>
-                <a:spcPts val="500"/>
-              </a:spcAft>
-            </a:pPr>
-            <a:r>
-              <a:rPr sz="1300" b="1" dirty="0" err="1">
-                <a:solidFill>
-                  <a:srgbClr val="1F285A"/>
-                </a:solidFill>
-                <a:latin typeface="メイリオ"/>
-                <a:ea typeface="メイリオ"/>
-                <a:cs typeface="メイリオ"/>
-              </a:rPr>
-              <a:t>来店・面談・</a:t>
-            </a:r>
-            <a:endParaRPr sz="1250" b="1" dirty="0">
-              <a:solidFill>
-                <a:srgbClr val="1F285A"/>
-              </a:solidFill>
-              <a:latin typeface="メイリオ"/>
-              <a:ea typeface="メイリオ"/>
-              <a:cs typeface="メイリオ"/>
-            </a:endParaRPr>
-          </a:p>
-          <a:p>
-            <a:pPr algn="ctr">
-              <a:lnSpc>
-                <a:spcPct val="130000"/>
-              </a:lnSpc>
-              <a:spcAft>
-                <a:spcPts val="500"/>
-              </a:spcAft>
-            </a:pPr>
-            <a:r>
-              <a:rPr sz="1300" b="1" dirty="0" err="1">
-                <a:solidFill>
-                  <a:srgbClr val="1F285A"/>
-                </a:solidFill>
-                <a:latin typeface="メイリオ"/>
-                <a:ea typeface="メイリオ"/>
-                <a:cs typeface="メイリオ"/>
-              </a:rPr>
-              <a:t>商談</a:t>
-            </a:r>
-            <a:endParaRPr sz="1250" b="1" dirty="0">
-              <a:solidFill>
-                <a:srgbClr val="1F285A"/>
-              </a:solidFill>
-              <a:latin typeface="メイリオ"/>
-              <a:ea typeface="メイリオ"/>
-              <a:cs typeface="メイリオ"/>
-            </a:endParaRPr>
-          </a:p>
-        </p:txBody>
-      </p:sp>
-      <p:sp>
-        <p:nvSpPr>
-          <p:cNvPr id="13" name="Rounded Rectangle 12"/>
-          <p:cNvSpPr/>
-          <p:nvPr/>
-        </p:nvSpPr>
-        <p:spPr>
-          <a:xfrm>
-            <a:off x="1080000" y="2628000"/>
-            <a:ext cx="1763999" cy="1044000"/>
-          </a:xfrm>
-          <a:prstGeom prst="roundRect">
-            <a:avLst>
-              <a:gd name="adj" fmla="val 6000"/>
-            </a:avLst>
-          </a:prstGeom>
-          <a:noFill/>
-          <a:ln w="19050">
-            <a:noFill/>
-          </a:ln>
-          <a:effectLst/>
-        </p:spPr>
-        <p:style>
-          <a:lnRef idx="1">
-            <a:schemeClr val="accent1"/>
-          </a:lnRef>
-          <a:fillRef idx="3">
-            <a:schemeClr val="accent1"/>
-          </a:fillRef>
-          <a:effectRef idx="0">
-            <a:schemeClr val="accent1"/>
-          </a:effectRef>
-          <a:fontRef idx="minor">
-            <a:schemeClr val="lt1"/>
-          </a:fontRef>
-        </p:style>
-        <p:txBody>
-          <a:bodyPr wrap="square" lIns="108000" tIns="72000" rIns="72000" bIns="36000" rtlCol="0" anchor="t"/>
-          <a:lstStyle/>
-          <a:p>
-            <a:pPr algn="l">
-              <a:lnSpc>
-                <a:spcPct val="130000"/>
-              </a:lnSpc>
-              <a:spcAft>
-                <a:spcPts val="600"/>
-              </a:spcAft>
-            </a:pPr>
-            <a:r>
-              <a:rPr sz="1300" b="1" dirty="0" err="1">
-                <a:solidFill>
-                  <a:srgbClr val="333333"/>
-                </a:solidFill>
-                <a:latin typeface="メイリオ"/>
-                <a:ea typeface="メイリオ"/>
-                <a:cs typeface="メイリオ"/>
-              </a:rPr>
-              <a:t>美容室</a:t>
-            </a:r>
-            <a:endParaRPr sz="1250" b="1" dirty="0">
-              <a:solidFill>
-                <a:srgbClr val="1F285A"/>
-              </a:solidFill>
-              <a:latin typeface="メイリオ"/>
-              <a:ea typeface="メイリオ"/>
-              <a:cs typeface="メイリオ"/>
-            </a:endParaRPr>
-          </a:p>
-          <a:p>
-            <a:pPr algn="l">
-              <a:lnSpc>
-                <a:spcPct val="130000"/>
-              </a:lnSpc>
-              <a:spcAft>
-                <a:spcPts val="0"/>
-              </a:spcAft>
-            </a:pPr>
-            <a:r>
-              <a:rPr sz="1150" b="0" dirty="0" err="1">
-                <a:solidFill>
-                  <a:srgbClr val="333333"/>
-                </a:solidFill>
-                <a:latin typeface="メイリオ"/>
-                <a:ea typeface="メイリオ"/>
-                <a:cs typeface="メイリオ"/>
-              </a:rPr>
-              <a:t>予約後のフォロー</a:t>
-            </a:r>
-            <a:endParaRPr sz="1250" b="1" dirty="0">
-              <a:solidFill>
-                <a:srgbClr val="1F285A"/>
-              </a:solidFill>
-              <a:latin typeface="メイリオ"/>
-              <a:ea typeface="メイリオ"/>
-              <a:cs typeface="メイリオ"/>
-            </a:endParaRPr>
-          </a:p>
-        </p:txBody>
-      </p:sp>
-      <p:sp>
-        <p:nvSpPr>
-          <p:cNvPr id="14" name="Rounded Rectangle 12"/>
-          <p:cNvSpPr/>
-          <p:nvPr/>
-        </p:nvSpPr>
-        <p:spPr>
-          <a:xfrm>
-            <a:off x="1080000" y="3707999"/>
-            <a:ext cx="1763999" cy="1800000"/>
-          </a:xfrm>
-          <a:prstGeom prst="roundRect">
-            <a:avLst>
-              <a:gd name="adj" fmla="val 6000"/>
-            </a:avLst>
-          </a:prstGeom>
-          <a:noFill/>
-          <a:ln w="19050">
-            <a:noFill/>
-          </a:ln>
-          <a:effectLst/>
-        </p:spPr>
-        <p:style>
-          <a:lnRef idx="1">
-            <a:schemeClr val="accent1"/>
-          </a:lnRef>
-          <a:fillRef idx="3">
-            <a:schemeClr val="accent1"/>
-          </a:fillRef>
-          <a:effectRef idx="0">
-            <a:schemeClr val="accent1"/>
-          </a:effectRef>
-          <a:fontRef idx="minor">
-            <a:schemeClr val="lt1"/>
-          </a:fontRef>
-        </p:style>
-        <p:txBody>
-          <a:bodyPr wrap="square" lIns="108000" tIns="72000" rIns="72000" bIns="36000" rtlCol="0" anchor="t"/>
-          <a:lstStyle/>
-          <a:p>
-            <a:pPr algn="l">
-              <a:lnSpc>
-                <a:spcPct val="130000"/>
-              </a:lnSpc>
-              <a:spcAft>
-                <a:spcPts val="400"/>
-              </a:spcAft>
-            </a:pPr>
-            <a:r>
-              <a:rPr sz="1300" b="0" dirty="0" err="1">
-                <a:solidFill>
-                  <a:srgbClr val="333333"/>
-                </a:solidFill>
-                <a:latin typeface="メイリオ"/>
-                <a:ea typeface="メイリオ"/>
-                <a:cs typeface="メイリオ"/>
-              </a:rPr>
-              <a:t>次回予約客数</a:t>
-            </a:r>
-            <a:endParaRPr sz="1250" b="1" dirty="0">
-              <a:solidFill>
-                <a:srgbClr val="1F285A"/>
-              </a:solidFill>
-              <a:latin typeface="メイリオ"/>
-              <a:ea typeface="メイリオ"/>
-              <a:cs typeface="メイリオ"/>
-            </a:endParaRPr>
-          </a:p>
-          <a:p>
-            <a:pPr algn="l">
-              <a:lnSpc>
-                <a:spcPct val="130000"/>
-              </a:lnSpc>
-              <a:spcAft>
-                <a:spcPts val="200"/>
-              </a:spcAft>
-            </a:pPr>
-            <a:r>
-              <a:rPr sz="2200" b="1" dirty="0" err="1">
-                <a:solidFill>
-                  <a:srgbClr val="1F285A"/>
-                </a:solidFill>
-                <a:latin typeface="メイリオ"/>
-                <a:ea typeface="メイリオ"/>
-                <a:cs typeface="メイリオ"/>
-              </a:rPr>
-              <a:t>20%増</a:t>
-            </a:r>
-            <a:endParaRPr sz="1250" b="1" dirty="0">
-              <a:solidFill>
-                <a:srgbClr val="1F285A"/>
-              </a:solidFill>
-              <a:latin typeface="メイリオ"/>
-              <a:ea typeface="メイリオ"/>
-              <a:cs typeface="メイリオ"/>
-            </a:endParaRPr>
-          </a:p>
-          <a:p>
-            <a:pPr algn="l">
-              <a:lnSpc>
-                <a:spcPct val="130000"/>
-              </a:lnSpc>
-              <a:spcAft>
-                <a:spcPts val="200"/>
-              </a:spcAft>
-            </a:pPr>
-            <a:r>
-              <a:rPr sz="1050" b="0" dirty="0" err="1">
-                <a:solidFill>
-                  <a:srgbClr val="7F7F7F"/>
-                </a:solidFill>
-                <a:latin typeface="メイリオ"/>
-                <a:ea typeface="メイリオ"/>
-                <a:cs typeface="メイリオ"/>
-              </a:rPr>
-              <a:t>約200名 → 約240名</a:t>
-            </a:r>
-            <a:endParaRPr sz="1250" b="1" dirty="0">
-              <a:solidFill>
-                <a:srgbClr val="1F285A"/>
-              </a:solidFill>
-              <a:latin typeface="メイリオ"/>
-              <a:ea typeface="メイリオ"/>
-              <a:cs typeface="メイリオ"/>
-            </a:endParaRPr>
-          </a:p>
-        </p:txBody>
-      </p:sp>
-      <p:sp>
-        <p:nvSpPr>
-          <p:cNvPr id="15" name="Rounded Rectangle 12"/>
-          <p:cNvSpPr/>
-          <p:nvPr/>
-        </p:nvSpPr>
-        <p:spPr>
-          <a:xfrm>
-            <a:off x="2988000" y="2628000"/>
-            <a:ext cx="1763999" cy="1044000"/>
-          </a:xfrm>
-          <a:prstGeom prst="roundRect">
-            <a:avLst>
-              <a:gd name="adj" fmla="val 6000"/>
-            </a:avLst>
-          </a:prstGeom>
-          <a:noFill/>
-          <a:ln w="19050">
-            <a:noFill/>
-          </a:ln>
-          <a:effectLst/>
-        </p:spPr>
-        <p:style>
-          <a:lnRef idx="1">
-            <a:schemeClr val="accent1"/>
-          </a:lnRef>
-          <a:fillRef idx="3">
-            <a:schemeClr val="accent1"/>
-          </a:fillRef>
-          <a:effectRef idx="0">
-            <a:schemeClr val="accent1"/>
-          </a:effectRef>
-          <a:fontRef idx="minor">
-            <a:schemeClr val="lt1"/>
-          </a:fontRef>
-        </p:style>
-        <p:txBody>
-          <a:bodyPr wrap="square" lIns="108000" tIns="72000" rIns="72000" bIns="36000" rtlCol="0" anchor="t"/>
-          <a:lstStyle/>
-          <a:p>
-            <a:pPr algn="l">
-              <a:lnSpc>
-                <a:spcPct val="130000"/>
-              </a:lnSpc>
-              <a:spcAft>
-                <a:spcPts val="600"/>
-              </a:spcAft>
-            </a:pPr>
-            <a:r>
-              <a:rPr sz="1300" b="1" dirty="0" err="1">
-                <a:solidFill>
-                  <a:srgbClr val="333333"/>
-                </a:solidFill>
-                <a:latin typeface="メイリオ"/>
-                <a:ea typeface="メイリオ"/>
-                <a:cs typeface="メイリオ"/>
-              </a:rPr>
-              <a:t>皮膚科クリニック</a:t>
-            </a:r>
-            <a:endParaRPr sz="1250" b="1" dirty="0">
-              <a:solidFill>
-                <a:srgbClr val="1F285A"/>
-              </a:solidFill>
-              <a:latin typeface="メイリオ"/>
-              <a:ea typeface="メイリオ"/>
-              <a:cs typeface="メイリオ"/>
-            </a:endParaRPr>
-          </a:p>
-          <a:p>
-            <a:pPr algn="l">
-              <a:lnSpc>
-                <a:spcPct val="130000"/>
-              </a:lnSpc>
-              <a:spcAft>
-                <a:spcPts val="0"/>
-              </a:spcAft>
-            </a:pPr>
-            <a:r>
-              <a:rPr sz="1150" b="0" dirty="0" err="1">
-                <a:solidFill>
-                  <a:srgbClr val="333333"/>
-                </a:solidFill>
-                <a:latin typeface="メイリオ"/>
-                <a:ea typeface="メイリオ"/>
-                <a:cs typeface="メイリオ"/>
-              </a:rPr>
-              <a:t>友だち追加後のステップ配信</a:t>
-            </a:r>
-            <a:endParaRPr sz="1250" b="1" dirty="0">
-              <a:solidFill>
-                <a:srgbClr val="1F285A"/>
-              </a:solidFill>
-              <a:latin typeface="メイリオ"/>
-              <a:ea typeface="メイリオ"/>
-              <a:cs typeface="メイリオ"/>
-            </a:endParaRPr>
-          </a:p>
-        </p:txBody>
-      </p:sp>
-      <p:sp>
-        <p:nvSpPr>
-          <p:cNvPr id="16" name="Rounded Rectangle 12"/>
-          <p:cNvSpPr/>
-          <p:nvPr/>
-        </p:nvSpPr>
-        <p:spPr>
-          <a:xfrm>
-            <a:off x="2988000" y="3707999"/>
-            <a:ext cx="1763999" cy="1800000"/>
-          </a:xfrm>
-          <a:prstGeom prst="roundRect">
-            <a:avLst>
-              <a:gd name="adj" fmla="val 6000"/>
-            </a:avLst>
-          </a:prstGeom>
-          <a:noFill/>
-          <a:ln w="19050">
-            <a:noFill/>
-          </a:ln>
-          <a:effectLst/>
-        </p:spPr>
-        <p:style>
-          <a:lnRef idx="1">
-            <a:schemeClr val="accent1"/>
-          </a:lnRef>
-          <a:fillRef idx="3">
-            <a:schemeClr val="accent1"/>
-          </a:fillRef>
-          <a:effectRef idx="0">
-            <a:schemeClr val="accent1"/>
-          </a:effectRef>
-          <a:fontRef idx="minor">
-            <a:schemeClr val="lt1"/>
-          </a:fontRef>
-        </p:style>
-        <p:txBody>
-          <a:bodyPr wrap="square" lIns="108000" tIns="72000" rIns="72000" bIns="36000" rtlCol="0" anchor="t"/>
-          <a:lstStyle/>
-          <a:p>
-            <a:pPr algn="l">
-              <a:lnSpc>
-                <a:spcPct val="130000"/>
-              </a:lnSpc>
-              <a:spcAft>
-                <a:spcPts val="400"/>
-              </a:spcAft>
-            </a:pPr>
-            <a:r>
-              <a:rPr sz="1300" b="0" dirty="0" err="1">
-                <a:solidFill>
-                  <a:srgbClr val="333333"/>
-                </a:solidFill>
-                <a:latin typeface="メイリオ"/>
-                <a:ea typeface="メイリオ"/>
-                <a:cs typeface="メイリオ"/>
-              </a:rPr>
-              <a:t>LINE経由の予約数</a:t>
-            </a:r>
-            <a:endParaRPr sz="1250" b="1" dirty="0">
-              <a:solidFill>
-                <a:srgbClr val="1F285A"/>
-              </a:solidFill>
-              <a:latin typeface="メイリオ"/>
-              <a:ea typeface="メイリオ"/>
-              <a:cs typeface="メイリオ"/>
-            </a:endParaRPr>
-          </a:p>
-          <a:p>
-            <a:pPr algn="l">
-              <a:lnSpc>
-                <a:spcPct val="130000"/>
-              </a:lnSpc>
-              <a:spcAft>
-                <a:spcPts val="200"/>
-              </a:spcAft>
-            </a:pPr>
-            <a:r>
-              <a:rPr sz="2200" b="1" dirty="0" err="1">
-                <a:solidFill>
-                  <a:srgbClr val="1F285A"/>
-                </a:solidFill>
-                <a:latin typeface="メイリオ"/>
-                <a:ea typeface="メイリオ"/>
-                <a:cs typeface="メイリオ"/>
-              </a:rPr>
-              <a:t>約20%増</a:t>
-            </a:r>
-            <a:endParaRPr sz="1250" b="1" dirty="0">
-              <a:solidFill>
-                <a:srgbClr val="1F285A"/>
-              </a:solidFill>
-              <a:latin typeface="メイリオ"/>
-              <a:ea typeface="メイリオ"/>
-              <a:cs typeface="メイリオ"/>
-            </a:endParaRPr>
-          </a:p>
-          <a:p>
-            <a:pPr algn="l">
-              <a:lnSpc>
-                <a:spcPct val="130000"/>
-              </a:lnSpc>
-              <a:spcAft>
-                <a:spcPts val="200"/>
-              </a:spcAft>
-            </a:pPr>
-            <a:r>
-              <a:rPr sz="1050" b="0" dirty="0" err="1">
-                <a:solidFill>
-                  <a:srgbClr val="7F7F7F"/>
-                </a:solidFill>
-                <a:latin typeface="メイリオ"/>
-                <a:ea typeface="メイリオ"/>
-                <a:cs typeface="メイリオ"/>
-              </a:rPr>
-              <a:t>ステップ配信実施前との比較</a:t>
-            </a:r>
-            <a:endParaRPr sz="1250" b="1" dirty="0">
-              <a:solidFill>
-                <a:srgbClr val="1F285A"/>
-              </a:solidFill>
-              <a:latin typeface="メイリオ"/>
-              <a:ea typeface="メイリオ"/>
-              <a:cs typeface="メイリオ"/>
-            </a:endParaRPr>
-          </a:p>
-        </p:txBody>
-      </p:sp>
-      <p:sp>
-        <p:nvSpPr>
-          <p:cNvPr id="17" name="Rounded Rectangle 12"/>
-          <p:cNvSpPr/>
-          <p:nvPr/>
-        </p:nvSpPr>
-        <p:spPr>
-          <a:xfrm>
-            <a:off x="4896000" y="2628000"/>
-            <a:ext cx="1763999" cy="1044000"/>
-          </a:xfrm>
-          <a:prstGeom prst="roundRect">
-            <a:avLst>
-              <a:gd name="adj" fmla="val 6000"/>
-            </a:avLst>
-          </a:prstGeom>
-          <a:noFill/>
-          <a:ln w="19050">
-            <a:noFill/>
-          </a:ln>
-          <a:effectLst/>
-        </p:spPr>
-        <p:style>
-          <a:lnRef idx="1">
-            <a:schemeClr val="accent1"/>
-          </a:lnRef>
-          <a:fillRef idx="3">
-            <a:schemeClr val="accent1"/>
-          </a:fillRef>
-          <a:effectRef idx="0">
-            <a:schemeClr val="accent1"/>
-          </a:effectRef>
-          <a:fontRef idx="minor">
-            <a:schemeClr val="lt1"/>
-          </a:fontRef>
-        </p:style>
-        <p:txBody>
-          <a:bodyPr wrap="square" lIns="108000" tIns="72000" rIns="72000" bIns="36000" rtlCol="0" anchor="t"/>
-          <a:lstStyle/>
-          <a:p>
-            <a:pPr algn="l">
-              <a:lnSpc>
-                <a:spcPct val="130000"/>
-              </a:lnSpc>
-              <a:spcAft>
-                <a:spcPts val="600"/>
-              </a:spcAft>
-            </a:pPr>
-            <a:r>
-              <a:rPr sz="1300" b="1" dirty="0" err="1">
-                <a:solidFill>
-                  <a:srgbClr val="333333"/>
-                </a:solidFill>
-                <a:latin typeface="メイリオ"/>
-                <a:ea typeface="メイリオ"/>
-                <a:cs typeface="メイリオ"/>
-              </a:rPr>
-              <a:t>就職支援</a:t>
-            </a:r>
-            <a:endParaRPr sz="1250" b="1" dirty="0">
-              <a:solidFill>
-                <a:srgbClr val="1F285A"/>
-              </a:solidFill>
-              <a:latin typeface="メイリオ"/>
-              <a:ea typeface="メイリオ"/>
-              <a:cs typeface="メイリオ"/>
-            </a:endParaRPr>
-          </a:p>
-          <a:p>
-            <a:pPr algn="l">
-              <a:lnSpc>
-                <a:spcPct val="130000"/>
-              </a:lnSpc>
-              <a:spcAft>
-                <a:spcPts val="0"/>
-              </a:spcAft>
-            </a:pPr>
-            <a:r>
-              <a:rPr sz="1150" b="0" dirty="0" err="1">
-                <a:solidFill>
-                  <a:srgbClr val="333333"/>
-                </a:solidFill>
-                <a:latin typeface="メイリオ"/>
-                <a:ea typeface="メイリオ"/>
-                <a:cs typeface="メイリオ"/>
-              </a:rPr>
-              <a:t>LINEチャットで面談へ誘導</a:t>
-            </a:r>
-            <a:endParaRPr sz="1250" b="1" dirty="0">
-              <a:solidFill>
-                <a:srgbClr val="1F285A"/>
-              </a:solidFill>
-              <a:latin typeface="メイリオ"/>
-              <a:ea typeface="メイリオ"/>
-              <a:cs typeface="メイリオ"/>
-            </a:endParaRPr>
-          </a:p>
-        </p:txBody>
-      </p:sp>
-      <p:sp>
-        <p:nvSpPr>
-          <p:cNvPr id="18" name="Rounded Rectangle 12"/>
-          <p:cNvSpPr/>
-          <p:nvPr/>
-        </p:nvSpPr>
-        <p:spPr>
-          <a:xfrm>
-            <a:off x="4896000" y="3707999"/>
-            <a:ext cx="1763999" cy="1800000"/>
-          </a:xfrm>
-          <a:prstGeom prst="roundRect">
-            <a:avLst>
-              <a:gd name="adj" fmla="val 6000"/>
-            </a:avLst>
-          </a:prstGeom>
-          <a:noFill/>
-          <a:ln w="19050">
-            <a:noFill/>
-          </a:ln>
-          <a:effectLst/>
-        </p:spPr>
-        <p:style>
-          <a:lnRef idx="1">
-            <a:schemeClr val="accent1"/>
-          </a:lnRef>
-          <a:fillRef idx="3">
-            <a:schemeClr val="accent1"/>
-          </a:fillRef>
-          <a:effectRef idx="0">
-            <a:schemeClr val="accent1"/>
-          </a:effectRef>
-          <a:fontRef idx="minor">
-            <a:schemeClr val="lt1"/>
-          </a:fontRef>
-        </p:style>
-        <p:txBody>
-          <a:bodyPr wrap="square" lIns="108000" tIns="72000" rIns="72000" bIns="36000" rtlCol="0" anchor="t"/>
-          <a:lstStyle/>
-          <a:p>
-            <a:pPr algn="l">
-              <a:lnSpc>
-                <a:spcPct val="130000"/>
-              </a:lnSpc>
-              <a:spcAft>
-                <a:spcPts val="400"/>
-              </a:spcAft>
-            </a:pPr>
-            <a:r>
-              <a:rPr sz="1300" b="0" dirty="0" err="1">
-                <a:solidFill>
-                  <a:srgbClr val="333333"/>
-                </a:solidFill>
-                <a:latin typeface="メイリオ"/>
-                <a:ea typeface="メイリオ"/>
-                <a:cs typeface="メイリオ"/>
-              </a:rPr>
-              <a:t>問い合わせた方の</a:t>
-            </a:r>
-            <a:endParaRPr sz="1250" b="1" dirty="0">
-              <a:solidFill>
-                <a:srgbClr val="1F285A"/>
-              </a:solidFill>
-              <a:latin typeface="メイリオ"/>
-              <a:ea typeface="メイリオ"/>
-              <a:cs typeface="メイリオ"/>
-            </a:endParaRPr>
-          </a:p>
-          <a:p>
-            <a:pPr algn="l">
-              <a:lnSpc>
-                <a:spcPct val="130000"/>
-              </a:lnSpc>
-              <a:spcAft>
-                <a:spcPts val="200"/>
-              </a:spcAft>
-            </a:pPr>
-            <a:r>
-              <a:rPr sz="2200" b="1" dirty="0" err="1">
-                <a:solidFill>
-                  <a:srgbClr val="1F285A"/>
-                </a:solidFill>
-                <a:latin typeface="メイリオ"/>
-                <a:ea typeface="メイリオ"/>
-                <a:cs typeface="メイリオ"/>
-              </a:rPr>
-              <a:t>55%</a:t>
-            </a:r>
-            <a:endParaRPr sz="1250" b="1" dirty="0">
-              <a:solidFill>
-                <a:srgbClr val="1F285A"/>
-              </a:solidFill>
-              <a:latin typeface="メイリオ"/>
-              <a:ea typeface="メイリオ"/>
-              <a:cs typeface="メイリオ"/>
-            </a:endParaRPr>
-          </a:p>
-          <a:p>
-            <a:pPr algn="l">
-              <a:lnSpc>
-                <a:spcPct val="130000"/>
-              </a:lnSpc>
-              <a:spcAft>
-                <a:spcPts val="200"/>
-              </a:spcAft>
-            </a:pPr>
-            <a:r>
-              <a:rPr sz="1050" b="0" dirty="0" err="1">
-                <a:solidFill>
-                  <a:srgbClr val="7F7F7F"/>
-                </a:solidFill>
-                <a:latin typeface="メイリオ"/>
-                <a:ea typeface="メイリオ"/>
-                <a:cs typeface="メイリオ"/>
-              </a:rPr>
-              <a:t>が面談予約（他チャネルより高い）</a:t>
-            </a:r>
-            <a:endParaRPr sz="1250" b="1" dirty="0">
-              <a:solidFill>
-                <a:srgbClr val="1F285A"/>
-              </a:solidFill>
-              <a:latin typeface="メイリオ"/>
-              <a:ea typeface="メイリオ"/>
-              <a:cs typeface="メイリオ"/>
-            </a:endParaRPr>
-          </a:p>
-        </p:txBody>
-      </p:sp>
-      <p:pic>
-        <p:nvPicPr>
-          <p:cNvPr id="19" name="Picture 13" descr="thanks_msg_s3.png"/>
-          <p:cNvPicPr>
-            <a:picLocks noChangeAspect="1"/>
-          </p:cNvPicPr>
-          <p:nvPr/>
-        </p:nvPicPr>
-        <p:blipFill>
-          <a:blip r:embed="rId3"/>
-          <a:stretch>
-            <a:fillRect/>
-          </a:stretch>
-        </p:blipFill>
-        <p:spPr>
-          <a:xfrm>
-            <a:off x="6876000" y="2628000"/>
-            <a:ext cx="1944000" cy="1621851"/>
-          </a:xfrm>
-          <a:prstGeom prst="rect">
-            <a:avLst/>
-          </a:prstGeom>
-          <a:ln w="12700">
-            <a:solidFill>
-              <a:srgbClr val="D9D9D9"/>
-            </a:solidFill>
-          </a:ln>
-        </p:spPr>
-      </p:pic>
-      <p:sp>
-        <p:nvSpPr>
-          <p:cNvPr id="20" name="Rounded Rectangle 4"/>
-          <p:cNvSpPr/>
-          <p:nvPr/>
-        </p:nvSpPr>
-        <p:spPr>
-          <a:xfrm>
-            <a:off x="1080000" y="5652000"/>
-            <a:ext cx="7740000" cy="432000"/>
-          </a:xfrm>
-          <a:prstGeom prst="roundRect">
-            <a:avLst>
-              <a:gd name="adj" fmla="val 10000"/>
-            </a:avLst>
-          </a:prstGeom>
-          <a:solidFill>
-            <a:srgbClr val="333333"/>
-          </a:solidFill>
-          <a:ln>
-            <a:noFill/>
-          </a:ln>
-          <a:effectLst/>
-        </p:spPr>
-        <p:style>
-          <a:lnRef idx="1">
-            <a:schemeClr val="accent1"/>
-          </a:lnRef>
-          <a:fillRef idx="3">
-            <a:schemeClr val="accent1"/>
-          </a:fillRef>
-          <a:effectRef idx="2">
-            <a:schemeClr val="accent1"/>
-          </a:effectRef>
-          <a:fontRef idx="minor">
-            <a:schemeClr val="lt1"/>
-          </a:fontRef>
-        </p:style>
-        <p:txBody>
-          <a:bodyPr wrap="square" lIns="54000" tIns="18000" rIns="54000" bIns="18000" rtlCol="0" anchor="ctr"/>
-          <a:lstStyle/>
-          <a:p>
-            <a:pPr algn="ctr">
-              <a:lnSpc>
-                <a:spcPct val="120000"/>
-              </a:lnSpc>
-            </a:pPr>
-            <a:r>
-              <a:rPr sz="1500" b="1">
-                <a:solidFill>
-                  <a:srgbClr val="FFFFFF"/>
-                </a:solidFill>
-                <a:latin typeface="メイリオ"/>
-                <a:ea typeface="メイリオ"/>
-                <a:cs typeface="メイリオ"/>
-              </a:rPr>
-              <a:t>申込み後の離脱を防ぎ、来店・面談・商談につなげる</a:t>
-            </a:r>
-          </a:p>
-        </p:txBody>
-      </p:sp>
-      <p:sp>
-        <p:nvSpPr>
-          <p:cNvPr id="21" name="TextBox 19"/>
-          <p:cNvSpPr txBox="1"/>
-          <p:nvPr/>
-        </p:nvSpPr>
-        <p:spPr>
-          <a:xfrm>
-            <a:off x="1080000" y="6156000"/>
-            <a:ext cx="7740000" cy="251999"/>
-          </a:xfrm>
-          <a:prstGeom prst="rect">
-            <a:avLst/>
-          </a:prstGeom>
-          <a:noFill/>
-        </p:spPr>
-        <p:txBody>
-          <a:bodyPr wrap="square" lIns="0" tIns="21600" rIns="0" bIns="21600" anchor="t">
-            <a:spAutoFit/>
-          </a:bodyPr>
-          <a:lstStyle/>
-          <a:p>
-            <a:pPr algn="l">
-              <a:lnSpc>
-                <a:spcPct val="115000"/>
-              </a:lnSpc>
-            </a:pPr>
-            <a:r>
-              <a:rPr sz="1000" b="0">
-                <a:solidFill>
-                  <a:srgbClr val="7F7F7F"/>
-                </a:solidFill>
-                <a:latin typeface="メイリオ"/>
-                <a:ea typeface="メイリオ"/>
-                <a:cs typeface="メイリオ"/>
-              </a:rPr>
-              <a:t>※美容室：リピート率も88% → 91%（導入前後の半年比較。LINEミニアプリを併用）</a:t>
-            </a:r>
-          </a:p>
-        </p:txBody>
-      </p:sp>
-    </p:spTree>
-    <p:extLst>
-      <p:ext uri="{BB962C8B-B14F-4D97-AF65-F5344CB8AC3E}">
-        <p14:creationId xmlns:p14="http://schemas.microsoft.com/office/powerpoint/2010/main" val="1715909323"/>
-      </p:ext>
-    </p:extLst>
-  </p:cSld>
-  <p:clrMapOvr>
-    <a:masterClrMapping/>
-  </p:clrMapOvr>
-</p:sld>
-</file>
-
-<file path=ppt/slides/slide4.xml><?xml version="1.0" encoding="utf-8"?>
-<p:sld xmlns:a="http://schemas.openxmlformats.org/drawingml/2006/main" xmlns:r="http://schemas.openxmlformats.org/officeDocument/2006/relationships" xmlns:p="http://schemas.openxmlformats.org/presentationml/2006/main">
-  <p:cSld>
-    <p:spTree>
-      <p:nvGrpSpPr>
-        <p:cNvPr id="2" name=""/>
-        <p:cNvGrpSpPr/>
-        <p:nvPr/>
-      </p:nvGrpSpPr>
-      <p:grpSpPr>
-        <a:xfrm>
-          <a:off x="0" y="0"/>
-          <a:ext cx="0" cy="0"/>
-          <a:chOff x="0" y="0"/>
-          <a:chExt cx="0" cy="0"/>
-        </a:xfrm>
-      </p:grpSpPr>
-      <p:sp>
-        <p:nvSpPr>
-          <p:cNvPr id="3" name="TextBox 1"/>
-          <p:cNvSpPr txBox="1"/>
-          <p:nvPr/>
-        </p:nvSpPr>
-        <p:spPr>
-          <a:xfrm>
-            <a:off x="547200" y="136800"/>
-            <a:ext cx="8784000" cy="338400"/>
-          </a:xfrm>
-          <a:prstGeom prst="rect">
-            <a:avLst/>
-          </a:prstGeom>
-          <a:noFill/>
-        </p:spPr>
-        <p:txBody>
-          <a:bodyPr wrap="square" lIns="0" tIns="21600" rIns="0" bIns="21600" anchor="ctr">
-            <a:spAutoFit/>
-          </a:bodyPr>
-          <a:lstStyle/>
-          <a:p>
-            <a:pPr algn="l"/>
-            <a:r>
-              <a:rPr sz="1600" b="1">
-                <a:solidFill>
-                  <a:srgbClr val="002060"/>
-                </a:solidFill>
-                <a:latin typeface="メイリオ"/>
-                <a:ea typeface="メイリオ"/>
-                <a:cs typeface="メイリオ"/>
-              </a:rPr>
-              <a:t>実例｜購入・来店の後</a:t>
-            </a:r>
-          </a:p>
-        </p:txBody>
-      </p:sp>
-      <p:sp>
-        <p:nvSpPr>
-          <p:cNvPr id="4" name="TextBox 2"/>
-          <p:cNvSpPr txBox="1"/>
-          <p:nvPr/>
-        </p:nvSpPr>
-        <p:spPr>
-          <a:xfrm>
-            <a:off x="432000" y="684000"/>
-            <a:ext cx="9036000" cy="432000"/>
-          </a:xfrm>
-          <a:prstGeom prst="rect">
-            <a:avLst/>
-          </a:prstGeom>
-          <a:noFill/>
-        </p:spPr>
-        <p:txBody>
-          <a:bodyPr wrap="square" lIns="0" tIns="21600" rIns="0" bIns="21600" anchor="ctr">
-            <a:spAutoFit/>
-          </a:bodyPr>
-          <a:lstStyle/>
-          <a:p>
-            <a:pPr algn="l">
-              <a:lnSpc>
-                <a:spcPct val="130000"/>
-              </a:lnSpc>
-            </a:pPr>
-            <a:r>
-              <a:rPr sz="1800" dirty="0" err="1" b="0">
-                <a:solidFill>
-                  <a:srgbClr val="333333"/>
-                </a:solidFill>
-                <a:latin typeface="メイリオ"/>
-                <a:ea typeface="メイリオ"/>
-                <a:cs typeface="メイリオ"/>
-              </a:rPr>
-              <a:t>来店・購入後のLINEフォローで、リピートを伸ばす</a:t>
-            </a:r>
-            <a:endParaRPr sz="1600" dirty="0">
-              <a:solidFill>
-                <a:srgbClr val="333333"/>
-              </a:solidFill>
-              <a:latin typeface="メイリオ"/>
-              <a:ea typeface="メイリオ"/>
-              <a:cs typeface="メイリオ"/>
-            </a:endParaRPr>
-          </a:p>
-          <a:p>
-            <a:pPr algn="l">
-              <a:lnSpc>
-                <a:spcPct val="130000"/>
-              </a:lnSpc>
-            </a:pPr>
-            <a:r>
-              <a:rPr sz="1800" dirty="0" err="1" b="0">
-                <a:solidFill>
-                  <a:srgbClr val="333333"/>
-                </a:solidFill>
-                <a:latin typeface="メイリオ"/>
-                <a:ea typeface="メイリオ"/>
-                <a:cs typeface="メイリオ"/>
-              </a:rPr>
-              <a:t>アンケート・クーポン・次回来店タイミングの配信で、再来店を後押し</a:t>
-            </a:r>
-            <a:endParaRPr sz="1600" dirty="0">
-              <a:solidFill>
-                <a:srgbClr val="333333"/>
-              </a:solidFill>
-              <a:latin typeface="メイリオ"/>
-              <a:ea typeface="メイリオ"/>
-              <a:cs typeface="メイリオ"/>
-            </a:endParaRPr>
-          </a:p>
-        </p:txBody>
-      </p:sp>
-      <p:cxnSp>
-        <p:nvCxnSpPr>
-          <p:cNvPr id="5" name="Connector 3"/>
-          <p:cNvCxnSpPr/>
-          <p:nvPr/>
-        </p:nvCxnSpPr>
-        <p:spPr>
-          <a:xfrm>
-            <a:off x="0" y="1389600"/>
-            <a:ext cx="9907200" cy="0"/>
-          </a:xfrm>
-          <a:prstGeom prst="line">
-            <a:avLst/>
-          </a:prstGeom>
-          <a:ln w="12700">
-            <a:solidFill>
-              <a:srgbClr val="D9D9D9"/>
-            </a:solidFill>
-          </a:ln>
-        </p:spPr>
-        <p:style>
-          <a:lnRef idx="2">
-            <a:schemeClr val="accent1"/>
-          </a:lnRef>
-          <a:fillRef idx="0">
-            <a:schemeClr val="accent1"/>
-          </a:fillRef>
-          <a:effectRef idx="1">
-            <a:schemeClr val="accent1"/>
-          </a:effectRef>
-          <a:fontRef idx="minor">
-            <a:schemeClr val="tx1"/>
-          </a:fontRef>
-        </p:style>
-      </p:cxnSp>
-      <p:sp>
-        <p:nvSpPr>
-          <p:cNvPr id="6" name="Rounded Rectangle 12"/>
-          <p:cNvSpPr/>
-          <p:nvPr/>
-        </p:nvSpPr>
-        <p:spPr>
-          <a:xfrm>
-            <a:off x="1080000" y="1728000"/>
-            <a:ext cx="1655999" cy="612000"/>
-          </a:xfrm>
-          <a:prstGeom prst="roundRect">
-            <a:avLst>
-              <a:gd name="adj" fmla="val 6000"/>
-            </a:avLst>
-          </a:prstGeom>
-          <a:solidFill>
-            <a:srgbClr val="FFFFFF"/>
-          </a:solidFill>
-          <a:ln w="19050">
-            <a:solidFill>
-              <a:srgbClr val="1F285A"/>
-            </a:solidFill>
-          </a:ln>
-          <a:effectLst/>
-        </p:spPr>
-        <p:style>
-          <a:lnRef idx="1">
-            <a:schemeClr val="accent1"/>
-          </a:lnRef>
-          <a:fillRef idx="3">
-            <a:schemeClr val="accent1"/>
-          </a:fillRef>
-          <a:effectRef idx="2">
-            <a:schemeClr val="accent1"/>
-          </a:effectRef>
-          <a:fontRef idx="minor">
-            <a:schemeClr val="lt1"/>
-          </a:fontRef>
-        </p:style>
-        <p:txBody>
-          <a:bodyPr wrap="square" lIns="125999" tIns="90000" rIns="108000" bIns="54000" rtlCol="0" anchor="ctr"/>
-          <a:lstStyle/>
-          <a:p>
-            <a:pPr algn="ctr">
-              <a:lnSpc>
-                <a:spcPct val="130000"/>
-              </a:lnSpc>
-              <a:spcAft>
-                <a:spcPts val="500"/>
-              </a:spcAft>
-            </a:pPr>
-            <a:r>
-              <a:rPr sz="1300" b="1" dirty="0" err="1">
-                <a:solidFill>
-                  <a:srgbClr val="1F285A"/>
-                </a:solidFill>
-                <a:latin typeface="メイリオ"/>
-                <a:ea typeface="メイリオ"/>
-                <a:cs typeface="メイリオ"/>
-              </a:rPr>
-              <a:t>購入・来店</a:t>
-            </a:r>
-            <a:endParaRPr sz="1250" b="1" dirty="0">
-              <a:solidFill>
-                <a:srgbClr val="1F285A"/>
-              </a:solidFill>
-              <a:latin typeface="メイリオ"/>
-              <a:ea typeface="メイリオ"/>
-              <a:cs typeface="メイリオ"/>
-            </a:endParaRPr>
-          </a:p>
-        </p:txBody>
-      </p:sp>
-      <p:sp>
-        <p:nvSpPr>
-          <p:cNvPr id="7" name="Right Arrow 5"/>
-          <p:cNvSpPr/>
-          <p:nvPr/>
-        </p:nvSpPr>
-        <p:spPr>
-          <a:xfrm>
-            <a:off x="2754000" y="1889999"/>
-            <a:ext cx="324000" cy="288000"/>
-          </a:xfrm>
-          <a:prstGeom prst="rightArrow">
-            <a:avLst/>
-          </a:prstGeom>
-          <a:solidFill>
-            <a:srgbClr val="1F285A"/>
-          </a:solidFill>
-          <a:ln>
-            <a:noFill/>
-          </a:ln>
-          <a:effectLst/>
-        </p:spPr>
-        <p:style>
-          <a:lnRef idx="1">
-            <a:schemeClr val="accent1"/>
-          </a:lnRef>
-          <a:fillRef idx="3">
-            <a:schemeClr val="accent1"/>
-          </a:fillRef>
-          <a:effectRef idx="2">
-            <a:schemeClr val="accent1"/>
-          </a:effectRef>
-          <a:fontRef idx="minor">
-            <a:schemeClr val="lt1"/>
-          </a:fontRef>
-        </p:style>
-        <p:txBody>
-          <a:bodyPr rtlCol="0" anchor="ctr"/>
-          <a:lstStyle/>
-          <a:p>
-            <a:pPr algn="ctr"/>
-            <a:endParaRPr>
-              <a:latin typeface="メイリオ"/>
-              <a:ea typeface="メイリオ"/>
-              <a:cs typeface="メイリオ"/>
-            </a:endParaRPr>
-          </a:p>
-        </p:txBody>
-      </p:sp>
-      <p:sp>
-        <p:nvSpPr>
-          <p:cNvPr id="8" name="Rounded Rectangle 4"/>
-          <p:cNvSpPr/>
-          <p:nvPr/>
-        </p:nvSpPr>
-        <p:spPr>
-          <a:xfrm>
-            <a:off x="3096000" y="1728000"/>
-            <a:ext cx="1655999" cy="612000"/>
-          </a:xfrm>
-          <a:prstGeom prst="roundRect">
-            <a:avLst>
-              <a:gd name="adj" fmla="val 10000"/>
-            </a:avLst>
-          </a:prstGeom>
-          <a:solidFill>
-            <a:srgbClr val="1F285A"/>
-          </a:solidFill>
-          <a:ln>
-            <a:noFill/>
-          </a:ln>
-          <a:effectLst/>
-        </p:spPr>
-        <p:style>
-          <a:lnRef idx="1">
-            <a:schemeClr val="accent1"/>
-          </a:lnRef>
-          <a:fillRef idx="3">
-            <a:schemeClr val="accent1"/>
-          </a:fillRef>
-          <a:effectRef idx="2">
-            <a:schemeClr val="accent1"/>
-          </a:effectRef>
-          <a:fontRef idx="minor">
-            <a:schemeClr val="lt1"/>
-          </a:fontRef>
-        </p:style>
-        <p:txBody>
-          <a:bodyPr wrap="square" lIns="54000" tIns="18000" rIns="54000" bIns="18000" rtlCol="0" anchor="ctr"/>
-          <a:lstStyle/>
-          <a:p>
-            <a:pPr algn="ctr">
-              <a:lnSpc>
-                <a:spcPct val="120000"/>
-              </a:lnSpc>
-            </a:pPr>
-            <a:r>
-              <a:rPr sz="1300" b="1">
-                <a:solidFill>
-                  <a:srgbClr val="FFFFFF"/>
-                </a:solidFill>
-                <a:latin typeface="メイリオ"/>
-                <a:ea typeface="メイリオ"/>
-                <a:cs typeface="メイリオ"/>
-              </a:rPr>
-              <a:t>翌日に</a:t>
-            </a:r>
-          </a:p>
-          <a:p>
-            <a:pPr algn="ctr">
-              <a:lnSpc>
-                <a:spcPct val="120000"/>
-              </a:lnSpc>
-            </a:pPr>
-            <a:r>
-              <a:rPr sz="1300" b="1">
-                <a:solidFill>
-                  <a:srgbClr val="FFFFFF"/>
-                </a:solidFill>
-                <a:latin typeface="メイリオ"/>
-                <a:ea typeface="メイリオ"/>
-                <a:cs typeface="メイリオ"/>
-              </a:rPr>
-              <a:t>アンケート</a:t>
-            </a:r>
-          </a:p>
-        </p:txBody>
-      </p:sp>
-      <p:sp>
-        <p:nvSpPr>
-          <p:cNvPr id="9" name="Right Arrow 5"/>
-          <p:cNvSpPr/>
-          <p:nvPr/>
-        </p:nvSpPr>
-        <p:spPr>
-          <a:xfrm>
-            <a:off x="4770000" y="1889999"/>
-            <a:ext cx="324000" cy="288000"/>
-          </a:xfrm>
-          <a:prstGeom prst="rightArrow">
-            <a:avLst/>
-          </a:prstGeom>
-          <a:solidFill>
-            <a:srgbClr val="1F285A"/>
-          </a:solidFill>
-          <a:ln>
-            <a:noFill/>
-          </a:ln>
-          <a:effectLst/>
-        </p:spPr>
-        <p:style>
-          <a:lnRef idx="1">
-            <a:schemeClr val="accent1"/>
-          </a:lnRef>
-          <a:fillRef idx="3">
-            <a:schemeClr val="accent1"/>
-          </a:fillRef>
-          <a:effectRef idx="2">
-            <a:schemeClr val="accent1"/>
-          </a:effectRef>
-          <a:fontRef idx="minor">
-            <a:schemeClr val="lt1"/>
-          </a:fontRef>
-        </p:style>
-        <p:txBody>
-          <a:bodyPr rtlCol="0" anchor="ctr"/>
-          <a:lstStyle/>
-          <a:p>
-            <a:pPr algn="ctr"/>
-            <a:endParaRPr>
-              <a:latin typeface="メイリオ"/>
-              <a:ea typeface="メイリオ"/>
-              <a:cs typeface="メイリオ"/>
-            </a:endParaRPr>
-          </a:p>
-        </p:txBody>
-      </p:sp>
-      <p:sp>
-        <p:nvSpPr>
-          <p:cNvPr id="10" name="Rounded Rectangle 4"/>
-          <p:cNvSpPr/>
-          <p:nvPr/>
-        </p:nvSpPr>
-        <p:spPr>
-          <a:xfrm>
-            <a:off x="5112000" y="1728000"/>
-            <a:ext cx="1655999" cy="612000"/>
-          </a:xfrm>
-          <a:prstGeom prst="roundRect">
-            <a:avLst>
-              <a:gd name="adj" fmla="val 10000"/>
-            </a:avLst>
-          </a:prstGeom>
-          <a:solidFill>
-            <a:srgbClr val="1F285A"/>
-          </a:solidFill>
-          <a:ln>
-            <a:noFill/>
-          </a:ln>
-          <a:effectLst/>
-        </p:spPr>
-        <p:style>
-          <a:lnRef idx="1">
-            <a:schemeClr val="accent1"/>
-          </a:lnRef>
-          <a:fillRef idx="3">
-            <a:schemeClr val="accent1"/>
-          </a:fillRef>
-          <a:effectRef idx="2">
-            <a:schemeClr val="accent1"/>
-          </a:effectRef>
-          <a:fontRef idx="minor">
-            <a:schemeClr val="lt1"/>
-          </a:fontRef>
-        </p:style>
-        <p:txBody>
-          <a:bodyPr wrap="square" lIns="54000" tIns="18000" rIns="54000" bIns="18000" rtlCol="0" anchor="ctr"/>
-          <a:lstStyle/>
-          <a:p>
-            <a:pPr algn="ctr">
-              <a:lnSpc>
-                <a:spcPct val="120000"/>
-              </a:lnSpc>
-            </a:pPr>
-            <a:r>
-              <a:rPr sz="1300" b="1">
-                <a:solidFill>
-                  <a:srgbClr val="FFFFFF"/>
-                </a:solidFill>
-                <a:latin typeface="メイリオ"/>
-                <a:ea typeface="メイリオ"/>
-                <a:cs typeface="メイリオ"/>
-              </a:rPr>
-              <a:t>適切なタイミングで</a:t>
-            </a:r>
-          </a:p>
-          <a:p>
-            <a:pPr algn="ctr">
-              <a:lnSpc>
-                <a:spcPct val="120000"/>
-              </a:lnSpc>
-            </a:pPr>
-            <a:r>
-              <a:rPr sz="1300" b="1">
-                <a:solidFill>
-                  <a:srgbClr val="FFFFFF"/>
-                </a:solidFill>
-                <a:latin typeface="メイリオ"/>
-                <a:ea typeface="メイリオ"/>
-                <a:cs typeface="メイリオ"/>
-              </a:rPr>
-              <a:t>クーポン・案内</a:t>
-            </a:r>
-          </a:p>
-        </p:txBody>
-      </p:sp>
-      <p:sp>
-        <p:nvSpPr>
-          <p:cNvPr id="11" name="Right Arrow 5"/>
-          <p:cNvSpPr/>
-          <p:nvPr/>
-        </p:nvSpPr>
-        <p:spPr>
-          <a:xfrm>
-            <a:off x="6785999" y="1889999"/>
-            <a:ext cx="324000" cy="288000"/>
-          </a:xfrm>
-          <a:prstGeom prst="rightArrow">
-            <a:avLst/>
-          </a:prstGeom>
-          <a:solidFill>
-            <a:srgbClr val="1F285A"/>
-          </a:solidFill>
-          <a:ln>
-            <a:noFill/>
-          </a:ln>
-          <a:effectLst/>
-        </p:spPr>
-        <p:style>
-          <a:lnRef idx="1">
-            <a:schemeClr val="accent1"/>
-          </a:lnRef>
-          <a:fillRef idx="3">
-            <a:schemeClr val="accent1"/>
-          </a:fillRef>
-          <a:effectRef idx="2">
-            <a:schemeClr val="accent1"/>
-          </a:effectRef>
-          <a:fontRef idx="minor">
-            <a:schemeClr val="lt1"/>
-          </a:fontRef>
-        </p:style>
-        <p:txBody>
-          <a:bodyPr rtlCol="0" anchor="ctr"/>
-          <a:lstStyle/>
-          <a:p>
-            <a:pPr algn="ctr"/>
-            <a:endParaRPr>
-              <a:latin typeface="メイリオ"/>
-              <a:ea typeface="メイリオ"/>
-              <a:cs typeface="メイリオ"/>
-            </a:endParaRPr>
-          </a:p>
-        </p:txBody>
-      </p:sp>
-      <p:sp>
-        <p:nvSpPr>
-          <p:cNvPr id="12" name="Rounded Rectangle 12"/>
-          <p:cNvSpPr/>
-          <p:nvPr/>
-        </p:nvSpPr>
-        <p:spPr>
-          <a:xfrm>
-            <a:off x="7127999" y="1728000"/>
-            <a:ext cx="1655999" cy="612000"/>
-          </a:xfrm>
-          <a:prstGeom prst="roundRect">
-            <a:avLst>
-              <a:gd name="adj" fmla="val 6000"/>
-            </a:avLst>
-          </a:prstGeom>
-          <a:solidFill>
-            <a:srgbClr val="FFFFFF"/>
-          </a:solidFill>
-          <a:ln w="19050">
-            <a:solidFill>
-              <a:srgbClr val="1F285A"/>
-            </a:solidFill>
-          </a:ln>
-          <a:effectLst/>
-        </p:spPr>
-        <p:style>
-          <a:lnRef idx="1">
-            <a:schemeClr val="accent1"/>
-          </a:lnRef>
-          <a:fillRef idx="3">
-            <a:schemeClr val="accent1"/>
-          </a:fillRef>
-          <a:effectRef idx="2">
-            <a:schemeClr val="accent1"/>
-          </a:effectRef>
-          <a:fontRef idx="minor">
-            <a:schemeClr val="lt1"/>
-          </a:fontRef>
-        </p:style>
-        <p:txBody>
-          <a:bodyPr wrap="square" lIns="125999" tIns="90000" rIns="108000" bIns="54000" rtlCol="0" anchor="ctr"/>
-          <a:lstStyle/>
-          <a:p>
-            <a:pPr algn="ctr">
-              <a:lnSpc>
-                <a:spcPct val="130000"/>
-              </a:lnSpc>
-              <a:spcAft>
-                <a:spcPts val="500"/>
-              </a:spcAft>
-            </a:pPr>
-            <a:r>
-              <a:rPr sz="1300" b="1" dirty="0" err="1">
-                <a:solidFill>
-                  <a:srgbClr val="1F285A"/>
-                </a:solidFill>
-                <a:latin typeface="メイリオ"/>
-                <a:ea typeface="メイリオ"/>
-                <a:cs typeface="メイリオ"/>
-              </a:rPr>
-              <a:t>再来店・</a:t>
-            </a:r>
-            <a:endParaRPr sz="1250" b="1" dirty="0">
-              <a:solidFill>
-                <a:srgbClr val="1F285A"/>
-              </a:solidFill>
-              <a:latin typeface="メイリオ"/>
-              <a:ea typeface="メイリオ"/>
-              <a:cs typeface="メイリオ"/>
-            </a:endParaRPr>
-          </a:p>
-          <a:p>
-            <a:pPr algn="ctr">
-              <a:lnSpc>
-                <a:spcPct val="130000"/>
-              </a:lnSpc>
-              <a:spcAft>
-                <a:spcPts val="500"/>
-              </a:spcAft>
-            </a:pPr>
-            <a:r>
-              <a:rPr sz="1300" b="1" dirty="0" err="1">
-                <a:solidFill>
-                  <a:srgbClr val="1F285A"/>
-                </a:solidFill>
-                <a:latin typeface="メイリオ"/>
-                <a:ea typeface="メイリオ"/>
-                <a:cs typeface="メイリオ"/>
-              </a:rPr>
-              <a:t>リピート</a:t>
-            </a:r>
-            <a:endParaRPr sz="1250" b="1" dirty="0">
-              <a:solidFill>
-                <a:srgbClr val="1F285A"/>
-              </a:solidFill>
-              <a:latin typeface="メイリオ"/>
-              <a:ea typeface="メイリオ"/>
-              <a:cs typeface="メイリオ"/>
-            </a:endParaRPr>
-          </a:p>
-        </p:txBody>
-      </p:sp>
-      <p:sp>
-        <p:nvSpPr>
-          <p:cNvPr id="13" name="Rounded Rectangle 12"/>
-          <p:cNvSpPr/>
-          <p:nvPr/>
-        </p:nvSpPr>
-        <p:spPr>
-          <a:xfrm>
-            <a:off x="1080000" y="2628000"/>
-            <a:ext cx="2718000" cy="1044000"/>
-          </a:xfrm>
-          <a:prstGeom prst="roundRect">
-            <a:avLst>
-              <a:gd name="adj" fmla="val 6000"/>
-            </a:avLst>
-          </a:prstGeom>
-          <a:noFill/>
-          <a:ln w="19050">
-            <a:noFill/>
-          </a:ln>
-          <a:effectLst/>
-        </p:spPr>
-        <p:style>
-          <a:lnRef idx="1">
-            <a:schemeClr val="accent1"/>
-          </a:lnRef>
-          <a:fillRef idx="3">
-            <a:schemeClr val="accent1"/>
-          </a:fillRef>
-          <a:effectRef idx="0">
-            <a:schemeClr val="accent1"/>
-          </a:effectRef>
-          <a:fontRef idx="minor">
-            <a:schemeClr val="lt1"/>
-          </a:fontRef>
-        </p:style>
-        <p:txBody>
-          <a:bodyPr wrap="square" lIns="180000" tIns="72000" rIns="180000" bIns="36000" rtlCol="0" anchor="t"/>
-          <a:lstStyle/>
-          <a:p>
-            <a:pPr algn="l">
-              <a:lnSpc>
-                <a:spcPct val="130000"/>
-              </a:lnSpc>
-              <a:spcAft>
-                <a:spcPts val="600"/>
-              </a:spcAft>
-            </a:pPr>
-            <a:r>
-              <a:rPr sz="1500" b="1" dirty="0" err="1">
-                <a:solidFill>
-                  <a:srgbClr val="333333"/>
-                </a:solidFill>
-                <a:latin typeface="メイリオ"/>
-                <a:ea typeface="メイリオ"/>
-                <a:cs typeface="メイリオ"/>
-              </a:rPr>
-              <a:t>居酒屋</a:t>
-            </a:r>
-            <a:endParaRPr sz="1250" b="1" dirty="0">
-              <a:solidFill>
-                <a:srgbClr val="1F285A"/>
-              </a:solidFill>
-              <a:latin typeface="メイリオ"/>
-              <a:ea typeface="メイリオ"/>
-              <a:cs typeface="メイリオ"/>
-            </a:endParaRPr>
-          </a:p>
-          <a:p>
-            <a:pPr algn="l">
-              <a:lnSpc>
-                <a:spcPct val="130000"/>
-              </a:lnSpc>
-              <a:spcAft>
-                <a:spcPts val="0"/>
-              </a:spcAft>
-            </a:pPr>
-            <a:r>
-              <a:rPr sz="1300" b="0" dirty="0" err="1">
-                <a:solidFill>
-                  <a:srgbClr val="333333"/>
-                </a:solidFill>
-                <a:latin typeface="メイリオ"/>
-                <a:ea typeface="メイリオ"/>
-                <a:cs typeface="メイリオ"/>
-              </a:rPr>
-              <a:t>来店翌日のアンケートと、再来店前のクーポンを配信</a:t>
-            </a:r>
-            <a:endParaRPr sz="1250" b="1" dirty="0">
-              <a:solidFill>
-                <a:srgbClr val="1F285A"/>
-              </a:solidFill>
-              <a:latin typeface="メイリオ"/>
-              <a:ea typeface="メイリオ"/>
-              <a:cs typeface="メイリオ"/>
-            </a:endParaRPr>
-          </a:p>
-        </p:txBody>
-      </p:sp>
-      <p:sp>
-        <p:nvSpPr>
-          <p:cNvPr id="14" name="Rounded Rectangle 12"/>
-          <p:cNvSpPr/>
-          <p:nvPr/>
-        </p:nvSpPr>
-        <p:spPr>
-          <a:xfrm>
-            <a:off x="1080000" y="3707999"/>
-            <a:ext cx="2718000" cy="1800000"/>
-          </a:xfrm>
-          <a:prstGeom prst="roundRect">
-            <a:avLst>
-              <a:gd name="adj" fmla="val 6000"/>
-            </a:avLst>
-          </a:prstGeom>
-          <a:noFill/>
-          <a:ln w="19050">
-            <a:noFill/>
-          </a:ln>
-          <a:effectLst/>
-        </p:spPr>
-        <p:style>
-          <a:lnRef idx="1">
-            <a:schemeClr val="accent1"/>
-          </a:lnRef>
-          <a:fillRef idx="3">
-            <a:schemeClr val="accent1"/>
-          </a:fillRef>
-          <a:effectRef idx="0">
-            <a:schemeClr val="accent1"/>
-          </a:effectRef>
-          <a:fontRef idx="minor">
-            <a:schemeClr val="lt1"/>
-          </a:fontRef>
-        </p:style>
-        <p:txBody>
-          <a:bodyPr wrap="square" lIns="180000" tIns="72000" rIns="180000" bIns="36000" rtlCol="0" anchor="t"/>
-          <a:lstStyle/>
-          <a:p>
-            <a:pPr algn="l">
-              <a:lnSpc>
-                <a:spcPct val="130000"/>
-              </a:lnSpc>
-              <a:spcAft>
-                <a:spcPts val="400"/>
-              </a:spcAft>
-            </a:pPr>
-            <a:r>
-              <a:rPr sz="1300" b="0" dirty="0" err="1">
-                <a:solidFill>
-                  <a:srgbClr val="333333"/>
-                </a:solidFill>
-                <a:latin typeface="メイリオ"/>
-                <a:ea typeface="メイリオ"/>
-                <a:cs typeface="メイリオ"/>
-              </a:rPr>
-              <a:t>リピーターの売上割合</a:t>
-            </a:r>
-            <a:endParaRPr sz="1250" b="1" dirty="0">
-              <a:solidFill>
-                <a:srgbClr val="1F285A"/>
-              </a:solidFill>
-              <a:latin typeface="メイリオ"/>
-              <a:ea typeface="メイリオ"/>
-              <a:cs typeface="メイリオ"/>
-            </a:endParaRPr>
-          </a:p>
-          <a:p>
-            <a:pPr algn="l">
-              <a:lnSpc>
-                <a:spcPct val="130000"/>
-              </a:lnSpc>
-              <a:spcAft>
-                <a:spcPts val="200"/>
-              </a:spcAft>
-            </a:pPr>
-            <a:r>
-              <a:rPr sz="2000" b="1" dirty="0" err="1">
-                <a:solidFill>
-                  <a:srgbClr val="1F285A"/>
-                </a:solidFill>
-                <a:latin typeface="メイリオ"/>
-                <a:ea typeface="メイリオ"/>
-                <a:cs typeface="メイリオ"/>
-              </a:rPr>
-              <a:t>7.6% → 12.9%</a:t>
-            </a:r>
-            <a:endParaRPr sz="1250" b="1" dirty="0">
-              <a:solidFill>
-                <a:srgbClr val="1F285A"/>
-              </a:solidFill>
-              <a:latin typeface="メイリオ"/>
-              <a:ea typeface="メイリオ"/>
-              <a:cs typeface="メイリオ"/>
-            </a:endParaRPr>
-          </a:p>
-          <a:p>
-            <a:pPr algn="l">
-              <a:lnSpc>
-                <a:spcPct val="130000"/>
-              </a:lnSpc>
-              <a:spcAft>
-                <a:spcPts val="200"/>
-              </a:spcAft>
-            </a:pPr>
-            <a:r>
-              <a:rPr sz="1050" b="0" dirty="0" err="1">
-                <a:solidFill>
-                  <a:srgbClr val="7F7F7F"/>
-                </a:solidFill>
-                <a:latin typeface="メイリオ"/>
-                <a:ea typeface="メイリオ"/>
-                <a:cs typeface="メイリオ"/>
-              </a:rPr>
-              <a:t>2025年1月と3月の比較</a:t>
-            </a:r>
-            <a:endParaRPr sz="1250" b="1" dirty="0">
-              <a:solidFill>
-                <a:srgbClr val="1F285A"/>
-              </a:solidFill>
-              <a:latin typeface="メイリオ"/>
-              <a:ea typeface="メイリオ"/>
-              <a:cs typeface="メイリオ"/>
-            </a:endParaRPr>
-          </a:p>
-        </p:txBody>
-      </p:sp>
-      <p:sp>
-        <p:nvSpPr>
-          <p:cNvPr id="15" name="Rounded Rectangle 12"/>
-          <p:cNvSpPr/>
-          <p:nvPr/>
-        </p:nvSpPr>
-        <p:spPr>
-          <a:xfrm>
-            <a:off x="3941999" y="2628000"/>
-            <a:ext cx="2718000" cy="1044000"/>
-          </a:xfrm>
-          <a:prstGeom prst="roundRect">
-            <a:avLst>
-              <a:gd name="adj" fmla="val 6000"/>
-            </a:avLst>
-          </a:prstGeom>
-          <a:noFill/>
-          <a:ln w="19050">
-            <a:noFill/>
-          </a:ln>
-          <a:effectLst/>
-        </p:spPr>
-        <p:style>
-          <a:lnRef idx="1">
-            <a:schemeClr val="accent1"/>
-          </a:lnRef>
-          <a:fillRef idx="3">
-            <a:schemeClr val="accent1"/>
-          </a:fillRef>
-          <a:effectRef idx="0">
-            <a:schemeClr val="accent1"/>
-          </a:effectRef>
-          <a:fontRef idx="minor">
-            <a:schemeClr val="lt1"/>
-          </a:fontRef>
-        </p:style>
-        <p:txBody>
-          <a:bodyPr wrap="square" lIns="180000" tIns="72000" rIns="180000" bIns="36000" rtlCol="0" anchor="t"/>
-          <a:lstStyle/>
-          <a:p>
-            <a:pPr algn="l">
-              <a:lnSpc>
-                <a:spcPct val="130000"/>
-              </a:lnSpc>
-              <a:spcAft>
-                <a:spcPts val="600"/>
-              </a:spcAft>
-            </a:pPr>
-            <a:r>
-              <a:rPr sz="1500" b="1" dirty="0" err="1">
-                <a:solidFill>
-                  <a:srgbClr val="333333"/>
-                </a:solidFill>
-                <a:latin typeface="メイリオ"/>
-                <a:ea typeface="メイリオ"/>
-                <a:cs typeface="メイリオ"/>
-              </a:rPr>
-              <a:t>焼肉店</a:t>
-            </a:r>
-            <a:endParaRPr sz="1250" b="1" dirty="0">
-              <a:solidFill>
-                <a:srgbClr val="1F285A"/>
-              </a:solidFill>
-              <a:latin typeface="メイリオ"/>
-              <a:ea typeface="メイリオ"/>
-              <a:cs typeface="メイリオ"/>
-            </a:endParaRPr>
-          </a:p>
-          <a:p>
-            <a:pPr algn="l">
-              <a:lnSpc>
-                <a:spcPct val="130000"/>
-              </a:lnSpc>
-              <a:spcAft>
-                <a:spcPts val="0"/>
-              </a:spcAft>
-            </a:pPr>
-            <a:r>
-              <a:rPr sz="1300" b="0" dirty="0" err="1">
-                <a:solidFill>
-                  <a:srgbClr val="333333"/>
-                </a:solidFill>
-                <a:latin typeface="メイリオ"/>
-                <a:ea typeface="メイリオ"/>
-                <a:cs typeface="メイリオ"/>
-              </a:rPr>
-              <a:t>来店翌日11時に、アンケートとクーポンを自動配信</a:t>
-            </a:r>
-            <a:endParaRPr sz="1250" b="1" dirty="0">
-              <a:solidFill>
-                <a:srgbClr val="1F285A"/>
-              </a:solidFill>
-              <a:latin typeface="メイリオ"/>
-              <a:ea typeface="メイリオ"/>
-              <a:cs typeface="メイリオ"/>
-            </a:endParaRPr>
-          </a:p>
-        </p:txBody>
-      </p:sp>
-      <p:sp>
-        <p:nvSpPr>
-          <p:cNvPr id="16" name="Rounded Rectangle 12"/>
-          <p:cNvSpPr/>
-          <p:nvPr/>
-        </p:nvSpPr>
-        <p:spPr>
-          <a:xfrm>
-            <a:off x="3941999" y="3707999"/>
-            <a:ext cx="2718000" cy="1800000"/>
-          </a:xfrm>
-          <a:prstGeom prst="roundRect">
-            <a:avLst>
-              <a:gd name="adj" fmla="val 6000"/>
-            </a:avLst>
-          </a:prstGeom>
-          <a:noFill/>
-          <a:ln w="19050">
-            <a:noFill/>
-          </a:ln>
-          <a:effectLst/>
-        </p:spPr>
-        <p:style>
-          <a:lnRef idx="1">
-            <a:schemeClr val="accent1"/>
-          </a:lnRef>
-          <a:fillRef idx="3">
-            <a:schemeClr val="accent1"/>
-          </a:fillRef>
-          <a:effectRef idx="0">
-            <a:schemeClr val="accent1"/>
-          </a:effectRef>
-          <a:fontRef idx="minor">
-            <a:schemeClr val="lt1"/>
-          </a:fontRef>
-        </p:style>
-        <p:txBody>
-          <a:bodyPr wrap="square" lIns="180000" tIns="72000" rIns="180000" bIns="36000" rtlCol="0" anchor="t"/>
-          <a:lstStyle/>
-          <a:p>
-            <a:pPr algn="l">
-              <a:lnSpc>
-                <a:spcPct val="130000"/>
-              </a:lnSpc>
-              <a:spcAft>
-                <a:spcPts val="400"/>
-              </a:spcAft>
-            </a:pPr>
-            <a:r>
-              <a:rPr sz="1300" b="0" dirty="0" err="1">
-                <a:solidFill>
-                  <a:srgbClr val="333333"/>
-                </a:solidFill>
-                <a:latin typeface="メイリオ"/>
-                <a:ea typeface="メイリオ"/>
-                <a:cs typeface="メイリオ"/>
-              </a:rPr>
-              <a:t>リピーター率</a:t>
-            </a:r>
-            <a:endParaRPr sz="1250" b="1" dirty="0">
-              <a:solidFill>
-                <a:srgbClr val="1F285A"/>
-              </a:solidFill>
-              <a:latin typeface="メイリオ"/>
-              <a:ea typeface="メイリオ"/>
-              <a:cs typeface="メイリオ"/>
-            </a:endParaRPr>
-          </a:p>
-          <a:p>
-            <a:pPr algn="l">
-              <a:lnSpc>
-                <a:spcPct val="130000"/>
-              </a:lnSpc>
-              <a:spcAft>
-                <a:spcPts val="200"/>
-              </a:spcAft>
-            </a:pPr>
-            <a:r>
-              <a:rPr sz="2000" b="1" dirty="0" err="1">
-                <a:solidFill>
-                  <a:srgbClr val="1F285A"/>
-                </a:solidFill>
-                <a:latin typeface="メイリオ"/>
-                <a:ea typeface="メイリオ"/>
-                <a:cs typeface="メイリオ"/>
-              </a:rPr>
-              <a:t>19.4% → 40%超</a:t>
-            </a:r>
-            <a:endParaRPr sz="1250" b="1" dirty="0">
-              <a:solidFill>
-                <a:srgbClr val="1F285A"/>
-              </a:solidFill>
-              <a:latin typeface="メイリオ"/>
-              <a:ea typeface="メイリオ"/>
-              <a:cs typeface="メイリオ"/>
-            </a:endParaRPr>
-          </a:p>
-          <a:p>
-            <a:pPr algn="l">
-              <a:lnSpc>
-                <a:spcPct val="130000"/>
-              </a:lnSpc>
-              <a:spcAft>
-                <a:spcPts val="200"/>
-              </a:spcAft>
-            </a:pPr>
-            <a:r>
-              <a:rPr sz="1050" b="0" dirty="0" err="1">
-                <a:solidFill>
-                  <a:srgbClr val="7F7F7F"/>
-                </a:solidFill>
-                <a:latin typeface="メイリオ"/>
-                <a:ea typeface="メイリオ"/>
-                <a:cs typeface="メイリオ"/>
-              </a:rPr>
-              <a:t>2024年1月と2025年1月の比較</a:t>
-            </a:r>
-            <a:endParaRPr sz="1250" b="1" dirty="0">
-              <a:solidFill>
-                <a:srgbClr val="1F285A"/>
-              </a:solidFill>
-              <a:latin typeface="メイリオ"/>
-              <a:ea typeface="メイリオ"/>
-              <a:cs typeface="メイリオ"/>
-            </a:endParaRPr>
-          </a:p>
-        </p:txBody>
-      </p:sp>
-      <p:pic>
-        <p:nvPicPr>
-          <p:cNvPr id="17" name="Picture 13" descr="thanks_msg_s4.png"/>
-          <p:cNvPicPr>
-            <a:picLocks noChangeAspect="1"/>
-          </p:cNvPicPr>
-          <p:nvPr/>
-        </p:nvPicPr>
-        <p:blipFill>
-          <a:blip r:embed="rId2"/>
-          <a:stretch>
-            <a:fillRect/>
-          </a:stretch>
-        </p:blipFill>
-        <p:spPr>
-          <a:xfrm>
-            <a:off x="6876000" y="2628000"/>
-            <a:ext cx="1944000" cy="2151940"/>
-          </a:xfrm>
-          <a:prstGeom prst="rect">
-            <a:avLst/>
-          </a:prstGeom>
-          <a:ln w="12700">
-            <a:solidFill>
-              <a:srgbClr val="D9D9D9"/>
-            </a:solidFill>
-          </a:ln>
-        </p:spPr>
-      </p:pic>
-      <p:sp>
-        <p:nvSpPr>
-          <p:cNvPr id="18" name="Rounded Rectangle 4"/>
-          <p:cNvSpPr/>
-          <p:nvPr/>
-        </p:nvSpPr>
-        <p:spPr>
-          <a:xfrm>
-            <a:off x="1080000" y="5652000"/>
-            <a:ext cx="7740000" cy="432000"/>
-          </a:xfrm>
-          <a:prstGeom prst="roundRect">
-            <a:avLst>
-              <a:gd name="adj" fmla="val 10000"/>
-            </a:avLst>
-          </a:prstGeom>
-          <a:solidFill>
-            <a:srgbClr val="333333"/>
-          </a:solidFill>
-          <a:ln>
-            <a:noFill/>
-          </a:ln>
-          <a:effectLst/>
-        </p:spPr>
-        <p:style>
-          <a:lnRef idx="1">
-            <a:schemeClr val="accent1"/>
-          </a:lnRef>
-          <a:fillRef idx="3">
-            <a:schemeClr val="accent1"/>
-          </a:fillRef>
-          <a:effectRef idx="2">
-            <a:schemeClr val="accent1"/>
-          </a:effectRef>
-          <a:fontRef idx="minor">
-            <a:schemeClr val="lt1"/>
-          </a:fontRef>
-        </p:style>
-        <p:txBody>
-          <a:bodyPr wrap="square" lIns="54000" tIns="18000" rIns="54000" bIns="18000" rtlCol="0" anchor="ctr"/>
-          <a:lstStyle/>
-          <a:p>
-            <a:pPr algn="ctr">
-              <a:lnSpc>
-                <a:spcPct val="120000"/>
-              </a:lnSpc>
-            </a:pPr>
-            <a:r>
-              <a:rPr sz="1500" b="1">
-                <a:solidFill>
-                  <a:srgbClr val="FFFFFF"/>
-                </a:solidFill>
-                <a:latin typeface="メイリオ"/>
-                <a:ea typeface="メイリオ"/>
-                <a:cs typeface="メイリオ"/>
-              </a:rPr>
-              <a:t>購入・来店の後も、LINEで次の来店につなげる</a:t>
-            </a:r>
-          </a:p>
-        </p:txBody>
-      </p:sp>
-      <p:sp>
-        <p:nvSpPr>
-          <p:cNvPr id="19" name="TextBox 19"/>
-          <p:cNvSpPr txBox="1"/>
-          <p:nvPr/>
-        </p:nvSpPr>
-        <p:spPr>
-          <a:xfrm>
-            <a:off x="1080000" y="6156000"/>
-            <a:ext cx="7740000" cy="251999"/>
-          </a:xfrm>
-          <a:prstGeom prst="rect">
-            <a:avLst/>
-          </a:prstGeom>
-          <a:noFill/>
-        </p:spPr>
-        <p:txBody>
-          <a:bodyPr wrap="square" lIns="0" tIns="21600" rIns="0" bIns="21600" anchor="t">
-            <a:spAutoFit/>
-          </a:bodyPr>
-          <a:lstStyle/>
-          <a:p>
-            <a:pPr algn="l">
-              <a:lnSpc>
-                <a:spcPct val="115000"/>
-              </a:lnSpc>
-            </a:pPr>
-            <a:r>
-              <a:rPr sz="1000" b="0">
-                <a:solidFill>
-                  <a:srgbClr val="7F7F7F"/>
-                </a:solidFill>
-                <a:latin typeface="メイリオ"/>
-                <a:ea typeface="メイリオ"/>
-                <a:cs typeface="メイリオ"/>
-              </a:rPr>
-              <a:t>※サンクスLINE単体の効果ではなく、LINEでつながった後の施策の例（居酒屋・焼肉店はLINEミニアプリを併用）</a:t>
-            </a:r>
-          </a:p>
-        </p:txBody>
-      </p:sp>
-    </p:spTree>
-  </p:cSld>
-  <p:clrMapOvr>
-    <a:masterClrMapping/>
-  </p:clrMapOvr>
-</p:sld>
-</file>
-
-<file path=ppt/slides/slide6.xml><?xml version="1.0" encoding="utf-8"?>
-<p:sld xmlns:a="http://schemas.openxmlformats.org/drawingml/2006/main" xmlns:p="http://schemas.openxmlformats.org/presentationml/2006/main" xmlns:r="http://schemas.openxmlformats.org/officeDocument/2006/relationships">
-  <p:cSld>
-    <p:spTree>
-      <p:nvGrpSpPr>
-        <p:cNvPr id="1" name=""/>
-        <p:cNvGrpSpPr/>
-        <p:nvPr/>
-      </p:nvGrpSpPr>
-      <p:grpSpPr/>
       <p:sp>
         <p:nvSpPr>
           <p:cNvPr id="22" name="Google Shape;752;p28">
@@ -11097,6 +7208,3880 @@
               <a:ea typeface="メイリオ" panose="020B0604030504040204" pitchFamily="50" charset="-128"/>
               <a:cs typeface="メイリオ"/>
             </a:endParaRPr>
+          </a:p>
+        </p:txBody>
+      </p:sp>
+    </p:spTree>
+  </p:cSld>
+  <p:clrMapOvr>
+    <a:masterClrMapping/>
+  </p:clrMapOvr>
+</p:sld>
+</file>
+
+<file path=ppt/slides/slide2.xml><?xml version="1.0" encoding="utf-8"?>
+<p:sld xmlns:a="http://schemas.openxmlformats.org/drawingml/2006/main" xmlns:r="http://schemas.openxmlformats.org/officeDocument/2006/relationships" xmlns:p="http://schemas.openxmlformats.org/presentationml/2006/main">
+  <p:cSld>
+    <p:spTree>
+      <p:nvGrpSpPr>
+        <p:cNvPr id="1" name="">
+          <a:extLst>
+            <a:ext uri="{FF2B5EF4-FFF2-40B4-BE49-F238E27FC236}">
+              <a16:creationId xmlns:a16="http://schemas.microsoft.com/office/drawing/2014/main" id="{AD6A8E8E-25CB-4B86-C4F6-E5A7023586F7}"/>
+            </a:ext>
+          </a:extLst>
+        </p:cNvPr>
+        <p:cNvGrpSpPr/>
+        <p:nvPr/>
+      </p:nvGrpSpPr>
+      <p:grpSpPr>
+        <a:xfrm>
+          <a:off x="0" y="0"/>
+          <a:ext cx="0" cy="0"/>
+          <a:chOff x="0" y="0"/>
+          <a:chExt cx="0" cy="0"/>
+        </a:xfrm>
+      </p:grpSpPr>
+      <p:sp>
+        <p:nvSpPr>
+          <p:cNvPr id="3" name="TextBox 1"/>
+          <p:cNvSpPr txBox="1"/>
+          <p:nvPr/>
+        </p:nvSpPr>
+        <p:spPr>
+          <a:xfrm>
+            <a:off x="547200" y="136800"/>
+            <a:ext cx="8784000" cy="338400"/>
+          </a:xfrm>
+          <a:prstGeom prst="rect">
+            <a:avLst/>
+          </a:prstGeom>
+          <a:noFill/>
+        </p:spPr>
+        <p:txBody>
+          <a:bodyPr wrap="square" lIns="0" tIns="21600" rIns="0" bIns="21600" anchor="ctr">
+            <a:spAutoFit/>
+          </a:bodyPr>
+          <a:lstStyle/>
+          <a:p>
+            <a:pPr algn="l"/>
+            <a:r>
+              <a:rPr sz="1600" b="1" dirty="0">
+                <a:solidFill>
+                  <a:srgbClr val="002060"/>
+                </a:solidFill>
+                <a:latin typeface="メイリオ"/>
+                <a:ea typeface="メイリオ"/>
+                <a:cs typeface="メイリオ"/>
+              </a:rPr>
+              <a:t>サンクスLINE｜重要性</a:t>
+            </a:r>
+          </a:p>
+        </p:txBody>
+      </p:sp>
+      <p:sp>
+        <p:nvSpPr>
+          <p:cNvPr id="4" name="TextBox 2"/>
+          <p:cNvSpPr txBox="1"/>
+          <p:nvPr/>
+        </p:nvSpPr>
+        <p:spPr>
+          <a:xfrm>
+            <a:off x="432000" y="684000"/>
+            <a:ext cx="9036000" cy="432000"/>
+          </a:xfrm>
+          <a:prstGeom prst="rect">
+            <a:avLst/>
+          </a:prstGeom>
+          <a:noFill/>
+        </p:spPr>
+        <p:txBody>
+          <a:bodyPr wrap="square" lIns="0" tIns="21600" rIns="0" bIns="21600" anchor="ctr">
+            <a:spAutoFit/>
+          </a:bodyPr>
+          <a:lstStyle/>
+          <a:p>
+            <a:pPr algn="l">
+              <a:lnSpc>
+                <a:spcPct val="130000"/>
+              </a:lnSpc>
+            </a:pPr>
+            <a:r>
+              <a:rPr lang="en-US" altLang="ja-JP" sz="1800" b="0" dirty="0">
+                <a:solidFill>
+                  <a:srgbClr val="333333"/>
+                </a:solidFill>
+                <a:latin typeface="メイリオ"/>
+                <a:ea typeface="メイリオ"/>
+                <a:cs typeface="メイリオ"/>
+              </a:rPr>
+              <a:t>申込み直後の“熱量が高い瞬間”に、LINEでつながる</a:t>
+            </a:r>
+            <a:endParaRPr sz="1600" dirty="0">
+              <a:solidFill>
+                <a:srgbClr val="333333"/>
+              </a:solidFill>
+              <a:latin typeface="メイリオ"/>
+              <a:ea typeface="メイリオ"/>
+              <a:cs typeface="メイリオ"/>
+            </a:endParaRPr>
+          </a:p>
+          <a:p>
+            <a:pPr algn="l">
+              <a:lnSpc>
+                <a:spcPct val="130000"/>
+              </a:lnSpc>
+            </a:pPr>
+            <a:r>
+              <a:rPr lang="en-US" altLang="ja-JP" sz="1800" b="0" dirty="0">
+                <a:solidFill>
+                  <a:srgbClr val="333333"/>
+                </a:solidFill>
+                <a:latin typeface="メイリオ"/>
+                <a:ea typeface="メイリオ"/>
+                <a:cs typeface="メイリオ"/>
+              </a:rPr>
+              <a:t>申込み直後からLINEで接点を持ち、来店・商談までの離脱を防止。</a:t>
+            </a:r>
+            <a:endParaRPr sz="1600" dirty="0">
+              <a:solidFill>
+                <a:srgbClr val="333333"/>
+              </a:solidFill>
+              <a:latin typeface="メイリオ"/>
+              <a:ea typeface="メイリオ"/>
+              <a:cs typeface="メイリオ"/>
+            </a:endParaRPr>
+          </a:p>
+        </p:txBody>
+      </p:sp>
+      <p:cxnSp>
+        <p:nvCxnSpPr>
+          <p:cNvPr id="5" name="Connector 3"/>
+          <p:cNvCxnSpPr/>
+          <p:nvPr/>
+        </p:nvCxnSpPr>
+        <p:spPr>
+          <a:xfrm>
+            <a:off x="0" y="1389600"/>
+            <a:ext cx="9907200" cy="0"/>
+          </a:xfrm>
+          <a:prstGeom prst="line">
+            <a:avLst/>
+          </a:prstGeom>
+          <a:ln w="12700">
+            <a:solidFill>
+              <a:srgbClr val="D9D9D9"/>
+            </a:solidFill>
+          </a:ln>
+        </p:spPr>
+        <p:style>
+          <a:lnRef idx="2">
+            <a:schemeClr val="accent1"/>
+          </a:lnRef>
+          <a:fillRef idx="0">
+            <a:schemeClr val="accent1"/>
+          </a:fillRef>
+          <a:effectRef idx="1">
+            <a:schemeClr val="accent1"/>
+          </a:effectRef>
+          <a:fontRef idx="minor">
+            <a:schemeClr val="tx1"/>
+          </a:fontRef>
+        </p:style>
+      </p:cxnSp>
+      <p:sp>
+        <p:nvSpPr>
+          <p:cNvPr id="6" name="Rounded Rectangle 12"/>
+          <p:cNvSpPr/>
+          <p:nvPr/>
+        </p:nvSpPr>
+        <p:spPr>
+          <a:xfrm>
+            <a:off x="1080000" y="1728000"/>
+            <a:ext cx="1655999" cy="612000"/>
+          </a:xfrm>
+          <a:prstGeom prst="roundRect">
+            <a:avLst>
+              <a:gd name="adj" fmla="val 6000"/>
+            </a:avLst>
+          </a:prstGeom>
+          <a:solidFill>
+            <a:srgbClr val="FFFFFF"/>
+          </a:solidFill>
+          <a:ln w="19050">
+            <a:solidFill>
+              <a:srgbClr val="1F285A"/>
+            </a:solidFill>
+          </a:ln>
+          <a:effectLst/>
+        </p:spPr>
+        <p:style>
+          <a:lnRef idx="1">
+            <a:schemeClr val="accent1"/>
+          </a:lnRef>
+          <a:fillRef idx="3">
+            <a:schemeClr val="accent1"/>
+          </a:fillRef>
+          <a:effectRef idx="2">
+            <a:schemeClr val="accent1"/>
+          </a:effectRef>
+          <a:fontRef idx="minor">
+            <a:schemeClr val="lt1"/>
+          </a:fontRef>
+        </p:style>
+        <p:txBody>
+          <a:bodyPr wrap="square" lIns="125999" tIns="90000" rIns="108000" bIns="54000" rtlCol="0" anchor="ctr"/>
+          <a:lstStyle/>
+          <a:p>
+            <a:pPr algn="ctr">
+              <a:lnSpc>
+                <a:spcPct val="130000"/>
+              </a:lnSpc>
+              <a:spcAft>
+                <a:spcPts val="500"/>
+              </a:spcAft>
+            </a:pPr>
+            <a:r>
+              <a:rPr sz="1300" b="1" dirty="0" err="1">
+                <a:solidFill>
+                  <a:srgbClr val="1F285A"/>
+                </a:solidFill>
+                <a:latin typeface="メイリオ"/>
+                <a:ea typeface="メイリオ"/>
+                <a:cs typeface="メイリオ"/>
+              </a:rPr>
+              <a:t>申込み完了</a:t>
+            </a:r>
+            <a:endParaRPr sz="1250" b="1" dirty="0">
+              <a:solidFill>
+                <a:srgbClr val="1F285A"/>
+              </a:solidFill>
+              <a:latin typeface="メイリオ"/>
+              <a:ea typeface="メイリオ"/>
+              <a:cs typeface="メイリオ"/>
+            </a:endParaRPr>
+          </a:p>
+        </p:txBody>
+      </p:sp>
+      <p:sp>
+        <p:nvSpPr>
+          <p:cNvPr id="7" name="Right Arrow 5"/>
+          <p:cNvSpPr/>
+          <p:nvPr/>
+        </p:nvSpPr>
+        <p:spPr>
+          <a:xfrm>
+            <a:off x="2754000" y="1889999"/>
+            <a:ext cx="324000" cy="288000"/>
+          </a:xfrm>
+          <a:prstGeom prst="rightArrow">
+            <a:avLst/>
+          </a:prstGeom>
+          <a:solidFill>
+            <a:srgbClr val="1F285A"/>
+          </a:solidFill>
+          <a:ln>
+            <a:noFill/>
+          </a:ln>
+          <a:effectLst/>
+        </p:spPr>
+        <p:style>
+          <a:lnRef idx="1">
+            <a:schemeClr val="accent1"/>
+          </a:lnRef>
+          <a:fillRef idx="3">
+            <a:schemeClr val="accent1"/>
+          </a:fillRef>
+          <a:effectRef idx="2">
+            <a:schemeClr val="accent1"/>
+          </a:effectRef>
+          <a:fontRef idx="minor">
+            <a:schemeClr val="lt1"/>
+          </a:fontRef>
+        </p:style>
+        <p:txBody>
+          <a:bodyPr rtlCol="0" anchor="ctr"/>
+          <a:lstStyle/>
+          <a:p>
+            <a:pPr algn="ctr"/>
+            <a:endParaRPr>
+              <a:latin typeface="メイリオ"/>
+              <a:ea typeface="メイリオ"/>
+              <a:cs typeface="メイリオ"/>
+            </a:endParaRPr>
+          </a:p>
+        </p:txBody>
+      </p:sp>
+      <p:sp>
+        <p:nvSpPr>
+          <p:cNvPr id="8" name="Rounded Rectangle 4"/>
+          <p:cNvSpPr/>
+          <p:nvPr/>
+        </p:nvSpPr>
+        <p:spPr>
+          <a:xfrm>
+            <a:off x="3096000" y="1728000"/>
+            <a:ext cx="1655999" cy="612000"/>
+          </a:xfrm>
+          <a:prstGeom prst="roundRect">
+            <a:avLst>
+              <a:gd name="adj" fmla="val 10000"/>
+            </a:avLst>
+          </a:prstGeom>
+          <a:solidFill>
+            <a:srgbClr val="1F285A"/>
+          </a:solidFill>
+          <a:ln>
+            <a:noFill/>
+          </a:ln>
+          <a:effectLst/>
+        </p:spPr>
+        <p:style>
+          <a:lnRef idx="1">
+            <a:schemeClr val="accent1"/>
+          </a:lnRef>
+          <a:fillRef idx="3">
+            <a:schemeClr val="accent1"/>
+          </a:fillRef>
+          <a:effectRef idx="2">
+            <a:schemeClr val="accent1"/>
+          </a:effectRef>
+          <a:fontRef idx="minor">
+            <a:schemeClr val="lt1"/>
+          </a:fontRef>
+        </p:style>
+        <p:txBody>
+          <a:bodyPr wrap="square" lIns="54000" tIns="18000" rIns="54000" bIns="18000" rtlCol="0" anchor="ctr"/>
+          <a:lstStyle/>
+          <a:p>
+            <a:pPr algn="ctr">
+              <a:lnSpc>
+                <a:spcPct val="120000"/>
+              </a:lnSpc>
+            </a:pPr>
+            <a:r>
+              <a:rPr sz="1300" b="1">
+                <a:solidFill>
+                  <a:srgbClr val="FFFFFF"/>
+                </a:solidFill>
+                <a:latin typeface="メイリオ"/>
+                <a:ea typeface="メイリオ"/>
+                <a:cs typeface="メイリオ"/>
+              </a:rPr>
+              <a:t>LINEで</a:t>
+            </a:r>
+          </a:p>
+          <a:p>
+            <a:pPr algn="ctr">
+              <a:lnSpc>
+                <a:spcPct val="120000"/>
+              </a:lnSpc>
+            </a:pPr>
+            <a:r>
+              <a:rPr sz="1300" b="1">
+                <a:solidFill>
+                  <a:srgbClr val="FFFFFF"/>
+                </a:solidFill>
+                <a:latin typeface="メイリオ"/>
+                <a:ea typeface="メイリオ"/>
+                <a:cs typeface="メイリオ"/>
+              </a:rPr>
+              <a:t>つながる</a:t>
+            </a:r>
+          </a:p>
+        </p:txBody>
+      </p:sp>
+      <p:sp>
+        <p:nvSpPr>
+          <p:cNvPr id="9" name="Right Arrow 5"/>
+          <p:cNvSpPr/>
+          <p:nvPr/>
+        </p:nvSpPr>
+        <p:spPr>
+          <a:xfrm>
+            <a:off x="4770000" y="1889999"/>
+            <a:ext cx="324000" cy="288000"/>
+          </a:xfrm>
+          <a:prstGeom prst="rightArrow">
+            <a:avLst/>
+          </a:prstGeom>
+          <a:solidFill>
+            <a:srgbClr val="1F285A"/>
+          </a:solidFill>
+          <a:ln>
+            <a:noFill/>
+          </a:ln>
+          <a:effectLst/>
+        </p:spPr>
+        <p:style>
+          <a:lnRef idx="1">
+            <a:schemeClr val="accent1"/>
+          </a:lnRef>
+          <a:fillRef idx="3">
+            <a:schemeClr val="accent1"/>
+          </a:fillRef>
+          <a:effectRef idx="2">
+            <a:schemeClr val="accent1"/>
+          </a:effectRef>
+          <a:fontRef idx="minor">
+            <a:schemeClr val="lt1"/>
+          </a:fontRef>
+        </p:style>
+        <p:txBody>
+          <a:bodyPr rtlCol="0" anchor="ctr"/>
+          <a:lstStyle/>
+          <a:p>
+            <a:pPr algn="ctr"/>
+            <a:endParaRPr>
+              <a:latin typeface="メイリオ"/>
+              <a:ea typeface="メイリオ"/>
+              <a:cs typeface="メイリオ"/>
+            </a:endParaRPr>
+          </a:p>
+        </p:txBody>
+      </p:sp>
+      <p:sp>
+        <p:nvSpPr>
+          <p:cNvPr id="10" name="Rounded Rectangle 4"/>
+          <p:cNvSpPr/>
+          <p:nvPr/>
+        </p:nvSpPr>
+        <p:spPr>
+          <a:xfrm>
+            <a:off x="5112000" y="1728000"/>
+            <a:ext cx="1655999" cy="612000"/>
+          </a:xfrm>
+          <a:prstGeom prst="roundRect">
+            <a:avLst>
+              <a:gd name="adj" fmla="val 10000"/>
+            </a:avLst>
+          </a:prstGeom>
+          <a:solidFill>
+            <a:srgbClr val="1F285A"/>
+          </a:solidFill>
+          <a:ln>
+            <a:noFill/>
+          </a:ln>
+          <a:effectLst/>
+        </p:spPr>
+        <p:style>
+          <a:lnRef idx="1">
+            <a:schemeClr val="accent1"/>
+          </a:lnRef>
+          <a:fillRef idx="3">
+            <a:schemeClr val="accent1"/>
+          </a:fillRef>
+          <a:effectRef idx="2">
+            <a:schemeClr val="accent1"/>
+          </a:effectRef>
+          <a:fontRef idx="minor">
+            <a:schemeClr val="lt1"/>
+          </a:fontRef>
+        </p:style>
+        <p:txBody>
+          <a:bodyPr wrap="square" lIns="54000" tIns="18000" rIns="54000" bIns="18000" rtlCol="0" anchor="ctr"/>
+          <a:lstStyle/>
+          <a:p>
+            <a:pPr algn="ctr">
+              <a:lnSpc>
+                <a:spcPct val="120000"/>
+              </a:lnSpc>
+            </a:pPr>
+            <a:r>
+              <a:rPr sz="1300" b="1">
+                <a:solidFill>
+                  <a:srgbClr val="FFFFFF"/>
+                </a:solidFill>
+                <a:latin typeface="メイリオ"/>
+                <a:ea typeface="メイリオ"/>
+                <a:cs typeface="メイリオ"/>
+              </a:rPr>
+              <a:t>離脱を</a:t>
+            </a:r>
+          </a:p>
+          <a:p>
+            <a:pPr algn="ctr">
+              <a:lnSpc>
+                <a:spcPct val="120000"/>
+              </a:lnSpc>
+            </a:pPr>
+            <a:r>
+              <a:rPr sz="1300" b="1">
+                <a:solidFill>
+                  <a:srgbClr val="FFFFFF"/>
+                </a:solidFill>
+                <a:latin typeface="メイリオ"/>
+                <a:ea typeface="メイリオ"/>
+                <a:cs typeface="メイリオ"/>
+              </a:rPr>
+              <a:t>防ぐ</a:t>
+            </a:r>
+          </a:p>
+        </p:txBody>
+      </p:sp>
+      <p:sp>
+        <p:nvSpPr>
+          <p:cNvPr id="11" name="Right Arrow 5"/>
+          <p:cNvSpPr/>
+          <p:nvPr/>
+        </p:nvSpPr>
+        <p:spPr>
+          <a:xfrm>
+            <a:off x="6785999" y="1889999"/>
+            <a:ext cx="324000" cy="288000"/>
+          </a:xfrm>
+          <a:prstGeom prst="rightArrow">
+            <a:avLst/>
+          </a:prstGeom>
+          <a:solidFill>
+            <a:srgbClr val="1F285A"/>
+          </a:solidFill>
+          <a:ln>
+            <a:noFill/>
+          </a:ln>
+          <a:effectLst/>
+        </p:spPr>
+        <p:style>
+          <a:lnRef idx="1">
+            <a:schemeClr val="accent1"/>
+          </a:lnRef>
+          <a:fillRef idx="3">
+            <a:schemeClr val="accent1"/>
+          </a:fillRef>
+          <a:effectRef idx="2">
+            <a:schemeClr val="accent1"/>
+          </a:effectRef>
+          <a:fontRef idx="minor">
+            <a:schemeClr val="lt1"/>
+          </a:fontRef>
+        </p:style>
+        <p:txBody>
+          <a:bodyPr rtlCol="0" anchor="ctr"/>
+          <a:lstStyle/>
+          <a:p>
+            <a:pPr algn="ctr"/>
+            <a:endParaRPr>
+              <a:latin typeface="メイリオ"/>
+              <a:ea typeface="メイリオ"/>
+              <a:cs typeface="メイリオ"/>
+            </a:endParaRPr>
+          </a:p>
+        </p:txBody>
+      </p:sp>
+      <p:sp>
+        <p:nvSpPr>
+          <p:cNvPr id="12" name="Rounded Rectangle 12"/>
+          <p:cNvSpPr/>
+          <p:nvPr/>
+        </p:nvSpPr>
+        <p:spPr>
+          <a:xfrm>
+            <a:off x="7127999" y="1728000"/>
+            <a:ext cx="1655999" cy="612000"/>
+          </a:xfrm>
+          <a:prstGeom prst="roundRect">
+            <a:avLst>
+              <a:gd name="adj" fmla="val 6000"/>
+            </a:avLst>
+          </a:prstGeom>
+          <a:solidFill>
+            <a:srgbClr val="FFFFFF"/>
+          </a:solidFill>
+          <a:ln w="19050">
+            <a:solidFill>
+              <a:srgbClr val="1F285A"/>
+            </a:solidFill>
+          </a:ln>
+          <a:effectLst/>
+        </p:spPr>
+        <p:style>
+          <a:lnRef idx="1">
+            <a:schemeClr val="accent1"/>
+          </a:lnRef>
+          <a:fillRef idx="3">
+            <a:schemeClr val="accent1"/>
+          </a:fillRef>
+          <a:effectRef idx="2">
+            <a:schemeClr val="accent1"/>
+          </a:effectRef>
+          <a:fontRef idx="minor">
+            <a:schemeClr val="lt1"/>
+          </a:fontRef>
+        </p:style>
+        <p:txBody>
+          <a:bodyPr wrap="square" lIns="125999" tIns="90000" rIns="108000" bIns="54000" rtlCol="0" anchor="ctr"/>
+          <a:lstStyle/>
+          <a:p>
+            <a:pPr algn="ctr">
+              <a:lnSpc>
+                <a:spcPct val="130000"/>
+              </a:lnSpc>
+              <a:spcAft>
+                <a:spcPts val="500"/>
+              </a:spcAft>
+            </a:pPr>
+            <a:r>
+              <a:rPr sz="1300" b="1" dirty="0" err="1">
+                <a:solidFill>
+                  <a:srgbClr val="1F285A"/>
+                </a:solidFill>
+                <a:latin typeface="メイリオ"/>
+                <a:ea typeface="メイリオ"/>
+                <a:cs typeface="メイリオ"/>
+              </a:rPr>
+              <a:t>来店・商談</a:t>
+            </a:r>
+            <a:endParaRPr sz="1250" b="1" dirty="0">
+              <a:solidFill>
+                <a:srgbClr val="1F285A"/>
+              </a:solidFill>
+              <a:latin typeface="メイリオ"/>
+              <a:ea typeface="メイリオ"/>
+              <a:cs typeface="メイリオ"/>
+            </a:endParaRPr>
+          </a:p>
+        </p:txBody>
+      </p:sp>
+      <p:sp>
+        <p:nvSpPr>
+          <p:cNvPr id="13" name="Rounded Rectangle 12"/>
+          <p:cNvSpPr/>
+          <p:nvPr/>
+        </p:nvSpPr>
+        <p:spPr>
+          <a:xfrm>
+            <a:off x="1080000" y="2628000"/>
+            <a:ext cx="2718000" cy="1044000"/>
+          </a:xfrm>
+          <a:prstGeom prst="roundRect">
+            <a:avLst>
+              <a:gd name="adj" fmla="val 6000"/>
+            </a:avLst>
+          </a:prstGeom>
+          <a:noFill/>
+          <a:ln w="19050">
+            <a:noFill/>
+          </a:ln>
+          <a:effectLst/>
+        </p:spPr>
+        <p:style>
+          <a:lnRef idx="1">
+            <a:schemeClr val="accent1"/>
+          </a:lnRef>
+          <a:fillRef idx="3">
+            <a:schemeClr val="accent1"/>
+          </a:fillRef>
+          <a:effectRef idx="0">
+            <a:schemeClr val="accent1"/>
+          </a:effectRef>
+          <a:fontRef idx="minor">
+            <a:schemeClr val="lt1"/>
+          </a:fontRef>
+        </p:style>
+        <p:txBody>
+          <a:bodyPr wrap="square" lIns="180000" tIns="72000" rIns="180000" bIns="36000" rtlCol="0" anchor="t"/>
+          <a:lstStyle/>
+          <a:p>
+            <a:pPr algn="l">
+              <a:lnSpc>
+                <a:spcPct val="130000"/>
+              </a:lnSpc>
+              <a:spcAft>
+                <a:spcPts val="600"/>
+              </a:spcAft>
+            </a:pPr>
+            <a:r>
+              <a:rPr sz="1500" b="1" dirty="0" err="1">
+                <a:solidFill>
+                  <a:srgbClr val="333333"/>
+                </a:solidFill>
+                <a:latin typeface="メイリオ"/>
+                <a:ea typeface="メイリオ"/>
+                <a:cs typeface="メイリオ"/>
+              </a:rPr>
+              <a:t>離脱</a:t>
+            </a:r>
+            <a:endParaRPr sz="1250" b="1" dirty="0">
+              <a:solidFill>
+                <a:srgbClr val="1F285A"/>
+              </a:solidFill>
+              <a:latin typeface="メイリオ"/>
+              <a:ea typeface="メイリオ"/>
+              <a:cs typeface="メイリオ"/>
+            </a:endParaRPr>
+          </a:p>
+          <a:p>
+            <a:pPr algn="l">
+              <a:lnSpc>
+                <a:spcPct val="130000"/>
+              </a:lnSpc>
+              <a:spcAft>
+                <a:spcPts val="0"/>
+              </a:spcAft>
+            </a:pPr>
+            <a:r>
+              <a:rPr sz="1300" b="0" dirty="0" err="1">
+                <a:solidFill>
+                  <a:srgbClr val="333333"/>
+                </a:solidFill>
+                <a:latin typeface="メイリオ"/>
+                <a:ea typeface="メイリオ"/>
+                <a:cs typeface="メイリオ"/>
+              </a:rPr>
+              <a:t>広告費を増やしても、この離脱層は減らない</a:t>
+            </a:r>
+            <a:endParaRPr sz="1250" b="1" dirty="0">
+              <a:solidFill>
+                <a:srgbClr val="1F285A"/>
+              </a:solidFill>
+              <a:latin typeface="メイリオ"/>
+              <a:ea typeface="メイリオ"/>
+              <a:cs typeface="メイリオ"/>
+            </a:endParaRPr>
+          </a:p>
+        </p:txBody>
+      </p:sp>
+      <p:sp>
+        <p:nvSpPr>
+          <p:cNvPr id="14" name="Rounded Rectangle 12"/>
+          <p:cNvSpPr/>
+          <p:nvPr/>
+        </p:nvSpPr>
+        <p:spPr>
+          <a:xfrm>
+            <a:off x="1080000" y="3707999"/>
+            <a:ext cx="2718000" cy="1800000"/>
+          </a:xfrm>
+          <a:prstGeom prst="roundRect">
+            <a:avLst>
+              <a:gd name="adj" fmla="val 6000"/>
+            </a:avLst>
+          </a:prstGeom>
+          <a:noFill/>
+          <a:ln w="19050">
+            <a:noFill/>
+          </a:ln>
+          <a:effectLst/>
+        </p:spPr>
+        <p:style>
+          <a:lnRef idx="1">
+            <a:schemeClr val="accent1"/>
+          </a:lnRef>
+          <a:fillRef idx="3">
+            <a:schemeClr val="accent1"/>
+          </a:fillRef>
+          <a:effectRef idx="0">
+            <a:schemeClr val="accent1"/>
+          </a:effectRef>
+          <a:fontRef idx="minor">
+            <a:schemeClr val="lt1"/>
+          </a:fontRef>
+        </p:style>
+        <p:txBody>
+          <a:bodyPr wrap="square" lIns="180000" tIns="72000" rIns="180000" bIns="36000" rtlCol="0" anchor="t"/>
+          <a:lstStyle/>
+          <a:p>
+            <a:pPr algn="l">
+              <a:lnSpc>
+                <a:spcPct val="130000"/>
+              </a:lnSpc>
+              <a:spcAft>
+                <a:spcPts val="400"/>
+              </a:spcAft>
+            </a:pPr>
+            <a:r>
+              <a:rPr sz="1300" b="0" dirty="0" err="1">
+                <a:solidFill>
+                  <a:srgbClr val="333333"/>
+                </a:solidFill>
+                <a:latin typeface="メイリオ"/>
+                <a:ea typeface="メイリオ"/>
+                <a:cs typeface="メイリオ"/>
+              </a:rPr>
+              <a:t>申込み⇒来店までに</a:t>
+            </a:r>
+            <a:endParaRPr sz="1250" b="1" dirty="0">
+              <a:solidFill>
+                <a:srgbClr val="1F285A"/>
+              </a:solidFill>
+              <a:latin typeface="メイリオ"/>
+              <a:ea typeface="メイリオ"/>
+              <a:cs typeface="メイリオ"/>
+            </a:endParaRPr>
+          </a:p>
+          <a:p>
+            <a:pPr algn="l">
+              <a:lnSpc>
+                <a:spcPct val="130000"/>
+              </a:lnSpc>
+              <a:spcAft>
+                <a:spcPts val="200"/>
+              </a:spcAft>
+            </a:pPr>
+            <a:r>
+              <a:rPr sz="2200" b="1" dirty="0" err="1">
+                <a:solidFill>
+                  <a:srgbClr val="1F285A"/>
+                </a:solidFill>
+                <a:latin typeface="メイリオ"/>
+                <a:ea typeface="メイリオ"/>
+                <a:cs typeface="メイリオ"/>
+              </a:rPr>
+              <a:t>一定数が離脱</a:t>
+            </a:r>
+            <a:endParaRPr sz="1250" b="1" dirty="0">
+              <a:solidFill>
+                <a:srgbClr val="1F285A"/>
+              </a:solidFill>
+              <a:latin typeface="メイリオ"/>
+              <a:ea typeface="メイリオ"/>
+              <a:cs typeface="メイリオ"/>
+            </a:endParaRPr>
+          </a:p>
+          <a:p>
+            <a:pPr algn="l">
+              <a:lnSpc>
+                <a:spcPct val="130000"/>
+              </a:lnSpc>
+              <a:spcAft>
+                <a:spcPts val="200"/>
+              </a:spcAft>
+            </a:pPr>
+            <a:endParaRPr sz="1250" b="1" dirty="0">
+              <a:solidFill>
+                <a:srgbClr val="1F285A"/>
+              </a:solidFill>
+              <a:latin typeface="メイリオ"/>
+              <a:ea typeface="メイリオ"/>
+              <a:cs typeface="メイリオ"/>
+            </a:endParaRPr>
+          </a:p>
+        </p:txBody>
+      </p:sp>
+      <p:sp>
+        <p:nvSpPr>
+          <p:cNvPr id="15" name="Rounded Rectangle 12"/>
+          <p:cNvSpPr/>
+          <p:nvPr/>
+        </p:nvSpPr>
+        <p:spPr>
+          <a:xfrm>
+            <a:off x="3941999" y="2628000"/>
+            <a:ext cx="2718000" cy="1044000"/>
+          </a:xfrm>
+          <a:prstGeom prst="roundRect">
+            <a:avLst>
+              <a:gd name="adj" fmla="val 6000"/>
+            </a:avLst>
+          </a:prstGeom>
+          <a:noFill/>
+          <a:ln w="19050">
+            <a:noFill/>
+          </a:ln>
+          <a:effectLst/>
+        </p:spPr>
+        <p:style>
+          <a:lnRef idx="1">
+            <a:schemeClr val="accent1"/>
+          </a:lnRef>
+          <a:fillRef idx="3">
+            <a:schemeClr val="accent1"/>
+          </a:fillRef>
+          <a:effectRef idx="0">
+            <a:schemeClr val="accent1"/>
+          </a:effectRef>
+          <a:fontRef idx="minor">
+            <a:schemeClr val="lt1"/>
+          </a:fontRef>
+        </p:style>
+        <p:txBody>
+          <a:bodyPr wrap="square" lIns="180000" tIns="72000" rIns="180000" bIns="36000" rtlCol="0" anchor="t"/>
+          <a:lstStyle/>
+          <a:p>
+            <a:pPr algn="l">
+              <a:lnSpc>
+                <a:spcPct val="130000"/>
+              </a:lnSpc>
+              <a:spcAft>
+                <a:spcPts val="600"/>
+              </a:spcAft>
+            </a:pPr>
+            <a:r>
+              <a:rPr lang="ja-JP" altLang="en-US" sz="1500" b="1" dirty="0">
+                <a:solidFill>
+                  <a:srgbClr val="333333"/>
+                </a:solidFill>
+                <a:latin typeface="メイリオ"/>
+                <a:ea typeface="メイリオ"/>
+                <a:cs typeface="メイリオ"/>
+              </a:rPr>
+              <a:t>来店につながる</a:t>
+            </a:r>
+            <a:endParaRPr sz="1250" b="1" dirty="0">
+              <a:solidFill>
+                <a:srgbClr val="1F285A"/>
+              </a:solidFill>
+              <a:latin typeface="メイリオ"/>
+              <a:ea typeface="メイリオ"/>
+              <a:cs typeface="メイリオ"/>
+            </a:endParaRPr>
+          </a:p>
+          <a:p>
+            <a:pPr algn="l">
+              <a:lnSpc>
+                <a:spcPct val="130000"/>
+              </a:lnSpc>
+              <a:spcAft>
+                <a:spcPts val="0"/>
+              </a:spcAft>
+            </a:pPr>
+            <a:r>
+              <a:rPr sz="1300" b="0" dirty="0" err="1">
+                <a:solidFill>
+                  <a:srgbClr val="333333"/>
+                </a:solidFill>
+                <a:latin typeface="メイリオ"/>
+                <a:ea typeface="メイリオ"/>
+                <a:cs typeface="メイリオ"/>
+              </a:rPr>
+              <a:t>美容クリニック：予約確認・前日のお知らせをLINEで配信</a:t>
+            </a:r>
+            <a:endParaRPr sz="1250" b="1" dirty="0">
+              <a:solidFill>
+                <a:srgbClr val="1F285A"/>
+              </a:solidFill>
+              <a:latin typeface="メイリオ"/>
+              <a:ea typeface="メイリオ"/>
+              <a:cs typeface="メイリオ"/>
+            </a:endParaRPr>
+          </a:p>
+        </p:txBody>
+      </p:sp>
+      <p:sp>
+        <p:nvSpPr>
+          <p:cNvPr id="16" name="Rounded Rectangle 12"/>
+          <p:cNvSpPr/>
+          <p:nvPr/>
+        </p:nvSpPr>
+        <p:spPr>
+          <a:xfrm>
+            <a:off x="3941999" y="3707999"/>
+            <a:ext cx="2718000" cy="1800000"/>
+          </a:xfrm>
+          <a:prstGeom prst="roundRect">
+            <a:avLst>
+              <a:gd name="adj" fmla="val 6000"/>
+            </a:avLst>
+          </a:prstGeom>
+          <a:noFill/>
+          <a:ln w="19050">
+            <a:noFill/>
+          </a:ln>
+          <a:effectLst/>
+        </p:spPr>
+        <p:style>
+          <a:lnRef idx="1">
+            <a:schemeClr val="accent1"/>
+          </a:lnRef>
+          <a:fillRef idx="3">
+            <a:schemeClr val="accent1"/>
+          </a:fillRef>
+          <a:effectRef idx="0">
+            <a:schemeClr val="accent1"/>
+          </a:effectRef>
+          <a:fontRef idx="minor">
+            <a:schemeClr val="lt1"/>
+          </a:fontRef>
+        </p:style>
+        <p:txBody>
+          <a:bodyPr wrap="square" lIns="180000" tIns="72000" rIns="180000" bIns="36000" rtlCol="0" anchor="t"/>
+          <a:lstStyle/>
+          <a:p>
+            <a:pPr algn="l">
+              <a:lnSpc>
+                <a:spcPct val="130000"/>
+              </a:lnSpc>
+              <a:spcAft>
+                <a:spcPts val="400"/>
+              </a:spcAft>
+            </a:pPr>
+            <a:r>
+              <a:rPr sz="1300" b="0" dirty="0" err="1">
+                <a:solidFill>
+                  <a:srgbClr val="333333"/>
+                </a:solidFill>
+                <a:latin typeface="メイリオ"/>
+                <a:ea typeface="メイリオ"/>
+                <a:cs typeface="メイリオ"/>
+              </a:rPr>
+              <a:t>予約後の来院率</a:t>
+            </a:r>
+            <a:endParaRPr sz="1250" b="1" dirty="0">
+              <a:solidFill>
+                <a:srgbClr val="1F285A"/>
+              </a:solidFill>
+              <a:latin typeface="メイリオ"/>
+              <a:ea typeface="メイリオ"/>
+              <a:cs typeface="メイリオ"/>
+            </a:endParaRPr>
+          </a:p>
+          <a:p>
+            <a:pPr algn="l">
+              <a:lnSpc>
+                <a:spcPct val="130000"/>
+              </a:lnSpc>
+              <a:spcAft>
+                <a:spcPts val="200"/>
+              </a:spcAft>
+            </a:pPr>
+            <a:r>
+              <a:rPr sz="2200" b="1" dirty="0" err="1">
+                <a:solidFill>
+                  <a:srgbClr val="1F285A"/>
+                </a:solidFill>
+                <a:latin typeface="メイリオ"/>
+                <a:ea typeface="メイリオ"/>
+                <a:cs typeface="メイリオ"/>
+              </a:rPr>
+              <a:t>40〜50%改善</a:t>
+            </a:r>
+            <a:endParaRPr sz="1250" b="1" dirty="0">
+              <a:solidFill>
+                <a:srgbClr val="1F285A"/>
+              </a:solidFill>
+              <a:latin typeface="メイリオ"/>
+              <a:ea typeface="メイリオ"/>
+              <a:cs typeface="メイリオ"/>
+            </a:endParaRPr>
+          </a:p>
+          <a:p>
+            <a:pPr algn="l">
+              <a:lnSpc>
+                <a:spcPct val="130000"/>
+              </a:lnSpc>
+              <a:spcAft>
+                <a:spcPts val="200"/>
+              </a:spcAft>
+            </a:pPr>
+            <a:endParaRPr sz="1250" b="1" dirty="0">
+              <a:solidFill>
+                <a:srgbClr val="1F285A"/>
+              </a:solidFill>
+              <a:latin typeface="メイリオ"/>
+              <a:ea typeface="メイリオ"/>
+              <a:cs typeface="メイリオ"/>
+            </a:endParaRPr>
+          </a:p>
+        </p:txBody>
+      </p:sp>
+      <p:pic>
+        <p:nvPicPr>
+          <p:cNvPr id="17" name="Picture 13" descr="thanks_msg_s2.png"/>
+          <p:cNvPicPr>
+            <a:picLocks noChangeAspect="1"/>
+          </p:cNvPicPr>
+          <p:nvPr/>
+        </p:nvPicPr>
+        <p:blipFill>
+          <a:blip r:embed="rId3"/>
+          <a:stretch>
+            <a:fillRect/>
+          </a:stretch>
+        </p:blipFill>
+        <p:spPr>
+          <a:xfrm>
+            <a:off x="6876000" y="2628000"/>
+            <a:ext cx="1944000" cy="1743391"/>
+          </a:xfrm>
+          <a:prstGeom prst="rect">
+            <a:avLst/>
+          </a:prstGeom>
+          <a:ln w="12700">
+            <a:solidFill>
+              <a:srgbClr val="D9D9D9"/>
+            </a:solidFill>
+          </a:ln>
+        </p:spPr>
+      </p:pic>
+      <p:sp>
+        <p:nvSpPr>
+          <p:cNvPr id="18" name="Rounded Rectangle 4"/>
+          <p:cNvSpPr/>
+          <p:nvPr/>
+        </p:nvSpPr>
+        <p:spPr>
+          <a:xfrm>
+            <a:off x="1080000" y="5652000"/>
+            <a:ext cx="7740000" cy="432000"/>
+          </a:xfrm>
+          <a:prstGeom prst="roundRect">
+            <a:avLst>
+              <a:gd name="adj" fmla="val 10000"/>
+            </a:avLst>
+          </a:prstGeom>
+          <a:solidFill>
+            <a:srgbClr val="333333"/>
+          </a:solidFill>
+          <a:ln>
+            <a:noFill/>
+          </a:ln>
+          <a:effectLst/>
+        </p:spPr>
+        <p:style>
+          <a:lnRef idx="1">
+            <a:schemeClr val="accent1"/>
+          </a:lnRef>
+          <a:fillRef idx="3">
+            <a:schemeClr val="accent1"/>
+          </a:fillRef>
+          <a:effectRef idx="2">
+            <a:schemeClr val="accent1"/>
+          </a:effectRef>
+          <a:fontRef idx="minor">
+            <a:schemeClr val="lt1"/>
+          </a:fontRef>
+        </p:style>
+        <p:txBody>
+          <a:bodyPr wrap="square" lIns="54000" tIns="18000" rIns="54000" bIns="18000" rtlCol="0" anchor="ctr"/>
+          <a:lstStyle/>
+          <a:p>
+            <a:pPr algn="ctr">
+              <a:lnSpc>
+                <a:spcPct val="120000"/>
+              </a:lnSpc>
+            </a:pPr>
+            <a:r>
+              <a:rPr sz="1500" b="1">
+                <a:solidFill>
+                  <a:srgbClr val="FFFFFF"/>
+                </a:solidFill>
+                <a:latin typeface="メイリオ"/>
+                <a:ea typeface="メイリオ"/>
+                <a:cs typeface="メイリオ"/>
+              </a:rPr>
+              <a:t>関心が一番高い申込み直後に、LINEでつながるのが最適</a:t>
+            </a:r>
+          </a:p>
+        </p:txBody>
+      </p:sp>
+    </p:spTree>
+    <p:extLst>
+      <p:ext uri="{BB962C8B-B14F-4D97-AF65-F5344CB8AC3E}">
+        <p14:creationId xmlns:p14="http://schemas.microsoft.com/office/powerpoint/2010/main" val="2378484531"/>
+      </p:ext>
+    </p:extLst>
+  </p:cSld>
+  <p:clrMapOvr>
+    <a:masterClrMapping/>
+  </p:clrMapOvr>
+</p:sld>
+</file>
+
+<file path=ppt/slides/slide3.xml><?xml version="1.0" encoding="utf-8"?>
+<p:sld xmlns:a="http://schemas.openxmlformats.org/drawingml/2006/main" xmlns:r="http://schemas.openxmlformats.org/officeDocument/2006/relationships" xmlns:p="http://schemas.openxmlformats.org/presentationml/2006/main">
+  <p:cSld>
+    <p:spTree>
+      <p:nvGrpSpPr>
+        <p:cNvPr id="1" name="">
+          <a:extLst>
+            <a:ext uri="{FF2B5EF4-FFF2-40B4-BE49-F238E27FC236}">
+              <a16:creationId xmlns:a16="http://schemas.microsoft.com/office/drawing/2014/main" id="{E70E5221-666F-DE20-B9E8-FDFC607CC22D}"/>
+            </a:ext>
+          </a:extLst>
+        </p:cNvPr>
+        <p:cNvGrpSpPr/>
+        <p:nvPr/>
+      </p:nvGrpSpPr>
+      <p:grpSpPr>
+        <a:xfrm>
+          <a:off x="0" y="0"/>
+          <a:ext cx="0" cy="0"/>
+          <a:chOff x="0" y="0"/>
+          <a:chExt cx="0" cy="0"/>
+        </a:xfrm>
+      </p:grpSpPr>
+      <p:sp>
+        <p:nvSpPr>
+          <p:cNvPr id="3" name="TextBox 1"/>
+          <p:cNvSpPr txBox="1"/>
+          <p:nvPr/>
+        </p:nvSpPr>
+        <p:spPr>
+          <a:xfrm>
+            <a:off x="547200" y="136800"/>
+            <a:ext cx="8784000" cy="338400"/>
+          </a:xfrm>
+          <a:prstGeom prst="rect">
+            <a:avLst/>
+          </a:prstGeom>
+          <a:noFill/>
+        </p:spPr>
+        <p:txBody>
+          <a:bodyPr wrap="square" lIns="0" tIns="21600" rIns="0" bIns="21600" anchor="ctr">
+            <a:spAutoFit/>
+          </a:bodyPr>
+          <a:lstStyle/>
+          <a:p>
+            <a:pPr algn="l"/>
+            <a:r>
+              <a:rPr sz="1600" b="1">
+                <a:solidFill>
+                  <a:srgbClr val="002060"/>
+                </a:solidFill>
+                <a:latin typeface="メイリオ"/>
+                <a:ea typeface="メイリオ"/>
+                <a:cs typeface="メイリオ"/>
+              </a:rPr>
+              <a:t>実例｜来店・来院の予約／資料請求</a:t>
+            </a:r>
+          </a:p>
+        </p:txBody>
+      </p:sp>
+      <p:sp>
+        <p:nvSpPr>
+          <p:cNvPr id="4" name="TextBox 2"/>
+          <p:cNvSpPr txBox="1"/>
+          <p:nvPr/>
+        </p:nvSpPr>
+        <p:spPr>
+          <a:xfrm>
+            <a:off x="432000" y="684000"/>
+            <a:ext cx="9036000" cy="432000"/>
+          </a:xfrm>
+          <a:prstGeom prst="rect">
+            <a:avLst/>
+          </a:prstGeom>
+          <a:noFill/>
+        </p:spPr>
+        <p:txBody>
+          <a:bodyPr wrap="square" lIns="0" tIns="21600" rIns="0" bIns="21600" anchor="ctr">
+            <a:spAutoFit/>
+          </a:bodyPr>
+          <a:lstStyle/>
+          <a:p>
+            <a:pPr algn="l">
+              <a:lnSpc>
+                <a:spcPct val="130000"/>
+              </a:lnSpc>
+            </a:pPr>
+            <a:r>
+              <a:rPr sz="1800" b="0" dirty="0" err="1">
+                <a:solidFill>
+                  <a:srgbClr val="333333"/>
+                </a:solidFill>
+                <a:latin typeface="メイリオ"/>
+                <a:ea typeface="メイリオ"/>
+                <a:cs typeface="メイリオ"/>
+              </a:rPr>
+              <a:t>申込み後のLINEフォローで、来店・面談までつなげる</a:t>
+            </a:r>
+            <a:endParaRPr lang="en-US" sz="1600" dirty="0">
+              <a:solidFill>
+                <a:srgbClr val="333333"/>
+              </a:solidFill>
+              <a:latin typeface="メイリオ"/>
+              <a:ea typeface="メイリオ"/>
+              <a:cs typeface="メイリオ"/>
+            </a:endParaRPr>
+          </a:p>
+          <a:p>
+            <a:pPr algn="l">
+              <a:lnSpc>
+                <a:spcPct val="130000"/>
+              </a:lnSpc>
+            </a:pPr>
+            <a:r>
+              <a:rPr sz="1800" b="0" dirty="0" err="1">
+                <a:solidFill>
+                  <a:srgbClr val="333333"/>
+                </a:solidFill>
+                <a:latin typeface="メイリオ"/>
+                <a:ea typeface="メイリオ"/>
+                <a:cs typeface="メイリオ"/>
+              </a:rPr>
+              <a:t>予約確認・リマインド・ステップ配信で、申込み後の離脱を防止</a:t>
+            </a:r>
+            <a:endParaRPr lang="en-US" sz="1600" dirty="0">
+              <a:solidFill>
+                <a:srgbClr val="333333"/>
+              </a:solidFill>
+              <a:latin typeface="メイリオ"/>
+              <a:ea typeface="メイリオ"/>
+              <a:cs typeface="メイリオ"/>
+            </a:endParaRPr>
+          </a:p>
+        </p:txBody>
+      </p:sp>
+      <p:cxnSp>
+        <p:nvCxnSpPr>
+          <p:cNvPr id="5" name="Connector 3"/>
+          <p:cNvCxnSpPr/>
+          <p:nvPr/>
+        </p:nvCxnSpPr>
+        <p:spPr>
+          <a:xfrm>
+            <a:off x="0" y="1389600"/>
+            <a:ext cx="9907200" cy="0"/>
+          </a:xfrm>
+          <a:prstGeom prst="line">
+            <a:avLst/>
+          </a:prstGeom>
+          <a:ln w="12700">
+            <a:solidFill>
+              <a:srgbClr val="D9D9D9"/>
+            </a:solidFill>
+          </a:ln>
+        </p:spPr>
+        <p:style>
+          <a:lnRef idx="2">
+            <a:schemeClr val="accent1"/>
+          </a:lnRef>
+          <a:fillRef idx="0">
+            <a:schemeClr val="accent1"/>
+          </a:fillRef>
+          <a:effectRef idx="1">
+            <a:schemeClr val="accent1"/>
+          </a:effectRef>
+          <a:fontRef idx="minor">
+            <a:schemeClr val="tx1"/>
+          </a:fontRef>
+        </p:style>
+      </p:cxnSp>
+      <p:sp>
+        <p:nvSpPr>
+          <p:cNvPr id="6" name="Rounded Rectangle 12"/>
+          <p:cNvSpPr/>
+          <p:nvPr/>
+        </p:nvSpPr>
+        <p:spPr>
+          <a:xfrm>
+            <a:off x="1080000" y="1728000"/>
+            <a:ext cx="1655999" cy="612000"/>
+          </a:xfrm>
+          <a:prstGeom prst="roundRect">
+            <a:avLst>
+              <a:gd name="adj" fmla="val 6000"/>
+            </a:avLst>
+          </a:prstGeom>
+          <a:solidFill>
+            <a:srgbClr val="FFFFFF"/>
+          </a:solidFill>
+          <a:ln w="19050">
+            <a:solidFill>
+              <a:srgbClr val="1F285A"/>
+            </a:solidFill>
+          </a:ln>
+          <a:effectLst/>
+        </p:spPr>
+        <p:style>
+          <a:lnRef idx="1">
+            <a:schemeClr val="accent1"/>
+          </a:lnRef>
+          <a:fillRef idx="3">
+            <a:schemeClr val="accent1"/>
+          </a:fillRef>
+          <a:effectRef idx="2">
+            <a:schemeClr val="accent1"/>
+          </a:effectRef>
+          <a:fontRef idx="minor">
+            <a:schemeClr val="lt1"/>
+          </a:fontRef>
+        </p:style>
+        <p:txBody>
+          <a:bodyPr wrap="square" lIns="125999" tIns="90000" rIns="108000" bIns="54000" rtlCol="0" anchor="ctr"/>
+          <a:lstStyle/>
+          <a:p>
+            <a:pPr algn="ctr">
+              <a:lnSpc>
+                <a:spcPct val="130000"/>
+              </a:lnSpc>
+              <a:spcAft>
+                <a:spcPts val="500"/>
+              </a:spcAft>
+            </a:pPr>
+            <a:r>
+              <a:rPr sz="1300" b="1" dirty="0" err="1">
+                <a:solidFill>
+                  <a:srgbClr val="1F285A"/>
+                </a:solidFill>
+                <a:latin typeface="メイリオ"/>
+                <a:ea typeface="メイリオ"/>
+                <a:cs typeface="メイリオ"/>
+              </a:rPr>
+              <a:t>申込み完了</a:t>
+            </a:r>
+            <a:endParaRPr sz="1250" b="1" dirty="0">
+              <a:solidFill>
+                <a:srgbClr val="1F285A"/>
+              </a:solidFill>
+              <a:latin typeface="メイリオ"/>
+              <a:ea typeface="メイリオ"/>
+              <a:cs typeface="メイリオ"/>
+            </a:endParaRPr>
+          </a:p>
+        </p:txBody>
+      </p:sp>
+      <p:sp>
+        <p:nvSpPr>
+          <p:cNvPr id="7" name="Right Arrow 5"/>
+          <p:cNvSpPr/>
+          <p:nvPr/>
+        </p:nvSpPr>
+        <p:spPr>
+          <a:xfrm>
+            <a:off x="2754000" y="1889999"/>
+            <a:ext cx="324000" cy="288000"/>
+          </a:xfrm>
+          <a:prstGeom prst="rightArrow">
+            <a:avLst/>
+          </a:prstGeom>
+          <a:solidFill>
+            <a:srgbClr val="1F285A"/>
+          </a:solidFill>
+          <a:ln>
+            <a:noFill/>
+          </a:ln>
+          <a:effectLst/>
+        </p:spPr>
+        <p:style>
+          <a:lnRef idx="1">
+            <a:schemeClr val="accent1"/>
+          </a:lnRef>
+          <a:fillRef idx="3">
+            <a:schemeClr val="accent1"/>
+          </a:fillRef>
+          <a:effectRef idx="2">
+            <a:schemeClr val="accent1"/>
+          </a:effectRef>
+          <a:fontRef idx="minor">
+            <a:schemeClr val="lt1"/>
+          </a:fontRef>
+        </p:style>
+        <p:txBody>
+          <a:bodyPr rtlCol="0" anchor="ctr"/>
+          <a:lstStyle/>
+          <a:p>
+            <a:pPr algn="ctr"/>
+            <a:endParaRPr>
+              <a:latin typeface="メイリオ"/>
+              <a:ea typeface="メイリオ"/>
+              <a:cs typeface="メイリオ"/>
+            </a:endParaRPr>
+          </a:p>
+        </p:txBody>
+      </p:sp>
+      <p:sp>
+        <p:nvSpPr>
+          <p:cNvPr id="8" name="Rounded Rectangle 4"/>
+          <p:cNvSpPr/>
+          <p:nvPr/>
+        </p:nvSpPr>
+        <p:spPr>
+          <a:xfrm>
+            <a:off x="3096000" y="1728000"/>
+            <a:ext cx="1655999" cy="612000"/>
+          </a:xfrm>
+          <a:prstGeom prst="roundRect">
+            <a:avLst>
+              <a:gd name="adj" fmla="val 10000"/>
+            </a:avLst>
+          </a:prstGeom>
+          <a:solidFill>
+            <a:srgbClr val="1F285A"/>
+          </a:solidFill>
+          <a:ln>
+            <a:noFill/>
+          </a:ln>
+          <a:effectLst/>
+        </p:spPr>
+        <p:style>
+          <a:lnRef idx="1">
+            <a:schemeClr val="accent1"/>
+          </a:lnRef>
+          <a:fillRef idx="3">
+            <a:schemeClr val="accent1"/>
+          </a:fillRef>
+          <a:effectRef idx="2">
+            <a:schemeClr val="accent1"/>
+          </a:effectRef>
+          <a:fontRef idx="minor">
+            <a:schemeClr val="lt1"/>
+          </a:fontRef>
+        </p:style>
+        <p:txBody>
+          <a:bodyPr wrap="square" lIns="54000" tIns="18000" rIns="54000" bIns="18000" rtlCol="0" anchor="ctr"/>
+          <a:lstStyle/>
+          <a:p>
+            <a:pPr algn="ctr">
+              <a:lnSpc>
+                <a:spcPct val="120000"/>
+              </a:lnSpc>
+            </a:pPr>
+            <a:r>
+              <a:rPr sz="1300" b="1">
+                <a:solidFill>
+                  <a:srgbClr val="FFFFFF"/>
+                </a:solidFill>
+                <a:latin typeface="メイリオ"/>
+                <a:ea typeface="メイリオ"/>
+                <a:cs typeface="メイリオ"/>
+              </a:rPr>
+              <a:t>LINEで</a:t>
+            </a:r>
+          </a:p>
+          <a:p>
+            <a:pPr algn="ctr">
+              <a:lnSpc>
+                <a:spcPct val="120000"/>
+              </a:lnSpc>
+            </a:pPr>
+            <a:r>
+              <a:rPr sz="1300" b="1">
+                <a:solidFill>
+                  <a:srgbClr val="FFFFFF"/>
+                </a:solidFill>
+                <a:latin typeface="メイリオ"/>
+                <a:ea typeface="メイリオ"/>
+                <a:cs typeface="メイリオ"/>
+              </a:rPr>
+              <a:t>つながる</a:t>
+            </a:r>
+          </a:p>
+        </p:txBody>
+      </p:sp>
+      <p:sp>
+        <p:nvSpPr>
+          <p:cNvPr id="9" name="Right Arrow 5"/>
+          <p:cNvSpPr/>
+          <p:nvPr/>
+        </p:nvSpPr>
+        <p:spPr>
+          <a:xfrm>
+            <a:off x="4770000" y="1889999"/>
+            <a:ext cx="324000" cy="288000"/>
+          </a:xfrm>
+          <a:prstGeom prst="rightArrow">
+            <a:avLst/>
+          </a:prstGeom>
+          <a:solidFill>
+            <a:srgbClr val="1F285A"/>
+          </a:solidFill>
+          <a:ln>
+            <a:noFill/>
+          </a:ln>
+          <a:effectLst/>
+        </p:spPr>
+        <p:style>
+          <a:lnRef idx="1">
+            <a:schemeClr val="accent1"/>
+          </a:lnRef>
+          <a:fillRef idx="3">
+            <a:schemeClr val="accent1"/>
+          </a:fillRef>
+          <a:effectRef idx="2">
+            <a:schemeClr val="accent1"/>
+          </a:effectRef>
+          <a:fontRef idx="minor">
+            <a:schemeClr val="lt1"/>
+          </a:fontRef>
+        </p:style>
+        <p:txBody>
+          <a:bodyPr rtlCol="0" anchor="ctr"/>
+          <a:lstStyle/>
+          <a:p>
+            <a:pPr algn="ctr"/>
+            <a:endParaRPr>
+              <a:latin typeface="メイリオ"/>
+              <a:ea typeface="メイリオ"/>
+              <a:cs typeface="メイリオ"/>
+            </a:endParaRPr>
+          </a:p>
+        </p:txBody>
+      </p:sp>
+      <p:sp>
+        <p:nvSpPr>
+          <p:cNvPr id="10" name="Rounded Rectangle 4"/>
+          <p:cNvSpPr/>
+          <p:nvPr/>
+        </p:nvSpPr>
+        <p:spPr>
+          <a:xfrm>
+            <a:off x="5112000" y="1728000"/>
+            <a:ext cx="1655999" cy="612000"/>
+          </a:xfrm>
+          <a:prstGeom prst="roundRect">
+            <a:avLst>
+              <a:gd name="adj" fmla="val 10000"/>
+            </a:avLst>
+          </a:prstGeom>
+          <a:solidFill>
+            <a:srgbClr val="1F285A"/>
+          </a:solidFill>
+          <a:ln>
+            <a:noFill/>
+          </a:ln>
+          <a:effectLst/>
+        </p:spPr>
+        <p:style>
+          <a:lnRef idx="1">
+            <a:schemeClr val="accent1"/>
+          </a:lnRef>
+          <a:fillRef idx="3">
+            <a:schemeClr val="accent1"/>
+          </a:fillRef>
+          <a:effectRef idx="2">
+            <a:schemeClr val="accent1"/>
+          </a:effectRef>
+          <a:fontRef idx="minor">
+            <a:schemeClr val="lt1"/>
+          </a:fontRef>
+        </p:style>
+        <p:txBody>
+          <a:bodyPr wrap="square" lIns="54000" tIns="18000" rIns="54000" bIns="18000" rtlCol="0" anchor="ctr"/>
+          <a:lstStyle/>
+          <a:p>
+            <a:pPr algn="ctr">
+              <a:lnSpc>
+                <a:spcPct val="120000"/>
+              </a:lnSpc>
+            </a:pPr>
+            <a:r>
+              <a:rPr sz="1300" b="1">
+                <a:solidFill>
+                  <a:srgbClr val="FFFFFF"/>
+                </a:solidFill>
+                <a:latin typeface="メイリオ"/>
+                <a:ea typeface="メイリオ"/>
+                <a:cs typeface="メイリオ"/>
+              </a:rPr>
+              <a:t>確認・リマインド・</a:t>
+            </a:r>
+          </a:p>
+          <a:p>
+            <a:pPr algn="ctr">
+              <a:lnSpc>
+                <a:spcPct val="120000"/>
+              </a:lnSpc>
+            </a:pPr>
+            <a:r>
+              <a:rPr sz="1300" b="1">
+                <a:solidFill>
+                  <a:srgbClr val="FFFFFF"/>
+                </a:solidFill>
+                <a:latin typeface="メイリオ"/>
+                <a:ea typeface="メイリオ"/>
+                <a:cs typeface="メイリオ"/>
+              </a:rPr>
+              <a:t>情報配信</a:t>
+            </a:r>
+          </a:p>
+        </p:txBody>
+      </p:sp>
+      <p:sp>
+        <p:nvSpPr>
+          <p:cNvPr id="11" name="Right Arrow 5"/>
+          <p:cNvSpPr/>
+          <p:nvPr/>
+        </p:nvSpPr>
+        <p:spPr>
+          <a:xfrm>
+            <a:off x="6785999" y="1889999"/>
+            <a:ext cx="324000" cy="288000"/>
+          </a:xfrm>
+          <a:prstGeom prst="rightArrow">
+            <a:avLst/>
+          </a:prstGeom>
+          <a:solidFill>
+            <a:srgbClr val="1F285A"/>
+          </a:solidFill>
+          <a:ln>
+            <a:noFill/>
+          </a:ln>
+          <a:effectLst/>
+        </p:spPr>
+        <p:style>
+          <a:lnRef idx="1">
+            <a:schemeClr val="accent1"/>
+          </a:lnRef>
+          <a:fillRef idx="3">
+            <a:schemeClr val="accent1"/>
+          </a:fillRef>
+          <a:effectRef idx="2">
+            <a:schemeClr val="accent1"/>
+          </a:effectRef>
+          <a:fontRef idx="minor">
+            <a:schemeClr val="lt1"/>
+          </a:fontRef>
+        </p:style>
+        <p:txBody>
+          <a:bodyPr rtlCol="0" anchor="ctr"/>
+          <a:lstStyle/>
+          <a:p>
+            <a:pPr algn="ctr"/>
+            <a:endParaRPr>
+              <a:latin typeface="メイリオ"/>
+              <a:ea typeface="メイリオ"/>
+              <a:cs typeface="メイリオ"/>
+            </a:endParaRPr>
+          </a:p>
+        </p:txBody>
+      </p:sp>
+      <p:sp>
+        <p:nvSpPr>
+          <p:cNvPr id="12" name="Rounded Rectangle 12"/>
+          <p:cNvSpPr/>
+          <p:nvPr/>
+        </p:nvSpPr>
+        <p:spPr>
+          <a:xfrm>
+            <a:off x="7127999" y="1728000"/>
+            <a:ext cx="1655999" cy="612000"/>
+          </a:xfrm>
+          <a:prstGeom prst="roundRect">
+            <a:avLst>
+              <a:gd name="adj" fmla="val 6000"/>
+            </a:avLst>
+          </a:prstGeom>
+          <a:solidFill>
+            <a:srgbClr val="FFFFFF"/>
+          </a:solidFill>
+          <a:ln w="19050">
+            <a:solidFill>
+              <a:srgbClr val="1F285A"/>
+            </a:solidFill>
+          </a:ln>
+          <a:effectLst/>
+        </p:spPr>
+        <p:style>
+          <a:lnRef idx="1">
+            <a:schemeClr val="accent1"/>
+          </a:lnRef>
+          <a:fillRef idx="3">
+            <a:schemeClr val="accent1"/>
+          </a:fillRef>
+          <a:effectRef idx="2">
+            <a:schemeClr val="accent1"/>
+          </a:effectRef>
+          <a:fontRef idx="minor">
+            <a:schemeClr val="lt1"/>
+          </a:fontRef>
+        </p:style>
+        <p:txBody>
+          <a:bodyPr wrap="square" lIns="125999" tIns="90000" rIns="108000" bIns="54000" rtlCol="0" anchor="ctr"/>
+          <a:lstStyle/>
+          <a:p>
+            <a:pPr algn="ctr">
+              <a:lnSpc>
+                <a:spcPct val="130000"/>
+              </a:lnSpc>
+              <a:spcAft>
+                <a:spcPts val="500"/>
+              </a:spcAft>
+            </a:pPr>
+            <a:r>
+              <a:rPr sz="1300" b="1" dirty="0" err="1">
+                <a:solidFill>
+                  <a:srgbClr val="1F285A"/>
+                </a:solidFill>
+                <a:latin typeface="メイリオ"/>
+                <a:ea typeface="メイリオ"/>
+                <a:cs typeface="メイリオ"/>
+              </a:rPr>
+              <a:t>来店・面談・</a:t>
+            </a:r>
+            <a:endParaRPr sz="1250" b="1" dirty="0">
+              <a:solidFill>
+                <a:srgbClr val="1F285A"/>
+              </a:solidFill>
+              <a:latin typeface="メイリオ"/>
+              <a:ea typeface="メイリオ"/>
+              <a:cs typeface="メイリオ"/>
+            </a:endParaRPr>
+          </a:p>
+          <a:p>
+            <a:pPr algn="ctr">
+              <a:lnSpc>
+                <a:spcPct val="130000"/>
+              </a:lnSpc>
+              <a:spcAft>
+                <a:spcPts val="500"/>
+              </a:spcAft>
+            </a:pPr>
+            <a:r>
+              <a:rPr sz="1300" b="1" dirty="0" err="1">
+                <a:solidFill>
+                  <a:srgbClr val="1F285A"/>
+                </a:solidFill>
+                <a:latin typeface="メイリオ"/>
+                <a:ea typeface="メイリオ"/>
+                <a:cs typeface="メイリオ"/>
+              </a:rPr>
+              <a:t>商談</a:t>
+            </a:r>
+            <a:endParaRPr sz="1250" b="1" dirty="0">
+              <a:solidFill>
+                <a:srgbClr val="1F285A"/>
+              </a:solidFill>
+              <a:latin typeface="メイリオ"/>
+              <a:ea typeface="メイリオ"/>
+              <a:cs typeface="メイリオ"/>
+            </a:endParaRPr>
+          </a:p>
+        </p:txBody>
+      </p:sp>
+      <p:sp>
+        <p:nvSpPr>
+          <p:cNvPr id="13" name="Rounded Rectangle 12"/>
+          <p:cNvSpPr/>
+          <p:nvPr/>
+        </p:nvSpPr>
+        <p:spPr>
+          <a:xfrm>
+            <a:off x="1080000" y="2628000"/>
+            <a:ext cx="1763999" cy="1044000"/>
+          </a:xfrm>
+          <a:prstGeom prst="roundRect">
+            <a:avLst>
+              <a:gd name="adj" fmla="val 6000"/>
+            </a:avLst>
+          </a:prstGeom>
+          <a:noFill/>
+          <a:ln w="19050">
+            <a:noFill/>
+          </a:ln>
+          <a:effectLst/>
+        </p:spPr>
+        <p:style>
+          <a:lnRef idx="1">
+            <a:schemeClr val="accent1"/>
+          </a:lnRef>
+          <a:fillRef idx="3">
+            <a:schemeClr val="accent1"/>
+          </a:fillRef>
+          <a:effectRef idx="0">
+            <a:schemeClr val="accent1"/>
+          </a:effectRef>
+          <a:fontRef idx="minor">
+            <a:schemeClr val="lt1"/>
+          </a:fontRef>
+        </p:style>
+        <p:txBody>
+          <a:bodyPr wrap="square" lIns="108000" tIns="72000" rIns="72000" bIns="36000" rtlCol="0" anchor="t"/>
+          <a:lstStyle/>
+          <a:p>
+            <a:pPr algn="l">
+              <a:lnSpc>
+                <a:spcPct val="130000"/>
+              </a:lnSpc>
+              <a:spcAft>
+                <a:spcPts val="600"/>
+              </a:spcAft>
+            </a:pPr>
+            <a:r>
+              <a:rPr sz="1300" b="1" dirty="0" err="1">
+                <a:solidFill>
+                  <a:srgbClr val="333333"/>
+                </a:solidFill>
+                <a:latin typeface="メイリオ"/>
+                <a:ea typeface="メイリオ"/>
+                <a:cs typeface="メイリオ"/>
+              </a:rPr>
+              <a:t>美容室</a:t>
+            </a:r>
+            <a:endParaRPr sz="1250" b="1" dirty="0">
+              <a:solidFill>
+                <a:srgbClr val="1F285A"/>
+              </a:solidFill>
+              <a:latin typeface="メイリオ"/>
+              <a:ea typeface="メイリオ"/>
+              <a:cs typeface="メイリオ"/>
+            </a:endParaRPr>
+          </a:p>
+          <a:p>
+            <a:pPr algn="l">
+              <a:lnSpc>
+                <a:spcPct val="130000"/>
+              </a:lnSpc>
+              <a:spcAft>
+                <a:spcPts val="0"/>
+              </a:spcAft>
+            </a:pPr>
+            <a:r>
+              <a:rPr sz="1150" b="0" dirty="0" err="1">
+                <a:solidFill>
+                  <a:srgbClr val="333333"/>
+                </a:solidFill>
+                <a:latin typeface="メイリオ"/>
+                <a:ea typeface="メイリオ"/>
+                <a:cs typeface="メイリオ"/>
+              </a:rPr>
+              <a:t>予約後のフォロー</a:t>
+            </a:r>
+            <a:endParaRPr sz="1250" b="1" dirty="0">
+              <a:solidFill>
+                <a:srgbClr val="1F285A"/>
+              </a:solidFill>
+              <a:latin typeface="メイリオ"/>
+              <a:ea typeface="メイリオ"/>
+              <a:cs typeface="メイリオ"/>
+            </a:endParaRPr>
+          </a:p>
+        </p:txBody>
+      </p:sp>
+      <p:sp>
+        <p:nvSpPr>
+          <p:cNvPr id="14" name="Rounded Rectangle 12"/>
+          <p:cNvSpPr/>
+          <p:nvPr/>
+        </p:nvSpPr>
+        <p:spPr>
+          <a:xfrm>
+            <a:off x="1080000" y="3707999"/>
+            <a:ext cx="1763999" cy="1800000"/>
+          </a:xfrm>
+          <a:prstGeom prst="roundRect">
+            <a:avLst>
+              <a:gd name="adj" fmla="val 6000"/>
+            </a:avLst>
+          </a:prstGeom>
+          <a:noFill/>
+          <a:ln w="19050">
+            <a:noFill/>
+          </a:ln>
+          <a:effectLst/>
+        </p:spPr>
+        <p:style>
+          <a:lnRef idx="1">
+            <a:schemeClr val="accent1"/>
+          </a:lnRef>
+          <a:fillRef idx="3">
+            <a:schemeClr val="accent1"/>
+          </a:fillRef>
+          <a:effectRef idx="0">
+            <a:schemeClr val="accent1"/>
+          </a:effectRef>
+          <a:fontRef idx="minor">
+            <a:schemeClr val="lt1"/>
+          </a:fontRef>
+        </p:style>
+        <p:txBody>
+          <a:bodyPr wrap="square" lIns="108000" tIns="72000" rIns="72000" bIns="36000" rtlCol="0" anchor="t"/>
+          <a:lstStyle/>
+          <a:p>
+            <a:pPr algn="l">
+              <a:lnSpc>
+                <a:spcPct val="130000"/>
+              </a:lnSpc>
+              <a:spcAft>
+                <a:spcPts val="400"/>
+              </a:spcAft>
+            </a:pPr>
+            <a:r>
+              <a:rPr sz="1300" b="0" dirty="0" err="1">
+                <a:solidFill>
+                  <a:srgbClr val="333333"/>
+                </a:solidFill>
+                <a:latin typeface="メイリオ"/>
+                <a:ea typeface="メイリオ"/>
+                <a:cs typeface="メイリオ"/>
+              </a:rPr>
+              <a:t>次回予約客数</a:t>
+            </a:r>
+            <a:endParaRPr sz="1250" b="1" dirty="0">
+              <a:solidFill>
+                <a:srgbClr val="1F285A"/>
+              </a:solidFill>
+              <a:latin typeface="メイリオ"/>
+              <a:ea typeface="メイリオ"/>
+              <a:cs typeface="メイリオ"/>
+            </a:endParaRPr>
+          </a:p>
+          <a:p>
+            <a:pPr algn="l">
+              <a:lnSpc>
+                <a:spcPct val="130000"/>
+              </a:lnSpc>
+              <a:spcAft>
+                <a:spcPts val="200"/>
+              </a:spcAft>
+            </a:pPr>
+            <a:r>
+              <a:rPr sz="2200" b="1" dirty="0" err="1">
+                <a:solidFill>
+                  <a:srgbClr val="1F285A"/>
+                </a:solidFill>
+                <a:latin typeface="メイリオ"/>
+                <a:ea typeface="メイリオ"/>
+                <a:cs typeface="メイリオ"/>
+              </a:rPr>
+              <a:t>20%増</a:t>
+            </a:r>
+            <a:endParaRPr sz="1250" b="1" dirty="0">
+              <a:solidFill>
+                <a:srgbClr val="1F285A"/>
+              </a:solidFill>
+              <a:latin typeface="メイリオ"/>
+              <a:ea typeface="メイリオ"/>
+              <a:cs typeface="メイリオ"/>
+            </a:endParaRPr>
+          </a:p>
+          <a:p>
+            <a:pPr algn="l">
+              <a:lnSpc>
+                <a:spcPct val="130000"/>
+              </a:lnSpc>
+              <a:spcAft>
+                <a:spcPts val="200"/>
+              </a:spcAft>
+            </a:pPr>
+            <a:r>
+              <a:rPr sz="1050" b="0" dirty="0" err="1">
+                <a:solidFill>
+                  <a:srgbClr val="7F7F7F"/>
+                </a:solidFill>
+                <a:latin typeface="メイリオ"/>
+                <a:ea typeface="メイリオ"/>
+                <a:cs typeface="メイリオ"/>
+              </a:rPr>
+              <a:t>約200名 → 約240名</a:t>
+            </a:r>
+            <a:endParaRPr sz="1250" b="1" dirty="0">
+              <a:solidFill>
+                <a:srgbClr val="1F285A"/>
+              </a:solidFill>
+              <a:latin typeface="メイリオ"/>
+              <a:ea typeface="メイリオ"/>
+              <a:cs typeface="メイリオ"/>
+            </a:endParaRPr>
+          </a:p>
+        </p:txBody>
+      </p:sp>
+      <p:sp>
+        <p:nvSpPr>
+          <p:cNvPr id="15" name="Rounded Rectangle 12"/>
+          <p:cNvSpPr/>
+          <p:nvPr/>
+        </p:nvSpPr>
+        <p:spPr>
+          <a:xfrm>
+            <a:off x="2988000" y="2628000"/>
+            <a:ext cx="1763999" cy="1044000"/>
+          </a:xfrm>
+          <a:prstGeom prst="roundRect">
+            <a:avLst>
+              <a:gd name="adj" fmla="val 6000"/>
+            </a:avLst>
+          </a:prstGeom>
+          <a:noFill/>
+          <a:ln w="19050">
+            <a:noFill/>
+          </a:ln>
+          <a:effectLst/>
+        </p:spPr>
+        <p:style>
+          <a:lnRef idx="1">
+            <a:schemeClr val="accent1"/>
+          </a:lnRef>
+          <a:fillRef idx="3">
+            <a:schemeClr val="accent1"/>
+          </a:fillRef>
+          <a:effectRef idx="0">
+            <a:schemeClr val="accent1"/>
+          </a:effectRef>
+          <a:fontRef idx="minor">
+            <a:schemeClr val="lt1"/>
+          </a:fontRef>
+        </p:style>
+        <p:txBody>
+          <a:bodyPr wrap="square" lIns="108000" tIns="72000" rIns="72000" bIns="36000" rtlCol="0" anchor="t"/>
+          <a:lstStyle/>
+          <a:p>
+            <a:pPr algn="l">
+              <a:lnSpc>
+                <a:spcPct val="130000"/>
+              </a:lnSpc>
+              <a:spcAft>
+                <a:spcPts val="600"/>
+              </a:spcAft>
+            </a:pPr>
+            <a:r>
+              <a:rPr sz="1300" b="1" dirty="0" err="1">
+                <a:solidFill>
+                  <a:srgbClr val="333333"/>
+                </a:solidFill>
+                <a:latin typeface="メイリオ"/>
+                <a:ea typeface="メイリオ"/>
+                <a:cs typeface="メイリオ"/>
+              </a:rPr>
+              <a:t>皮膚科クリニック</a:t>
+            </a:r>
+            <a:endParaRPr sz="1250" b="1" dirty="0">
+              <a:solidFill>
+                <a:srgbClr val="1F285A"/>
+              </a:solidFill>
+              <a:latin typeface="メイリオ"/>
+              <a:ea typeface="メイリオ"/>
+              <a:cs typeface="メイリオ"/>
+            </a:endParaRPr>
+          </a:p>
+          <a:p>
+            <a:pPr algn="l">
+              <a:lnSpc>
+                <a:spcPct val="130000"/>
+              </a:lnSpc>
+              <a:spcAft>
+                <a:spcPts val="0"/>
+              </a:spcAft>
+            </a:pPr>
+            <a:r>
+              <a:rPr sz="1150" b="0" dirty="0" err="1">
+                <a:solidFill>
+                  <a:srgbClr val="333333"/>
+                </a:solidFill>
+                <a:latin typeface="メイリオ"/>
+                <a:ea typeface="メイリオ"/>
+                <a:cs typeface="メイリオ"/>
+              </a:rPr>
+              <a:t>友だち追加後のステップ配信</a:t>
+            </a:r>
+            <a:endParaRPr sz="1250" b="1" dirty="0">
+              <a:solidFill>
+                <a:srgbClr val="1F285A"/>
+              </a:solidFill>
+              <a:latin typeface="メイリオ"/>
+              <a:ea typeface="メイリオ"/>
+              <a:cs typeface="メイリオ"/>
+            </a:endParaRPr>
+          </a:p>
+        </p:txBody>
+      </p:sp>
+      <p:sp>
+        <p:nvSpPr>
+          <p:cNvPr id="16" name="Rounded Rectangle 12"/>
+          <p:cNvSpPr/>
+          <p:nvPr/>
+        </p:nvSpPr>
+        <p:spPr>
+          <a:xfrm>
+            <a:off x="2988000" y="3707999"/>
+            <a:ext cx="1763999" cy="1800000"/>
+          </a:xfrm>
+          <a:prstGeom prst="roundRect">
+            <a:avLst>
+              <a:gd name="adj" fmla="val 6000"/>
+            </a:avLst>
+          </a:prstGeom>
+          <a:noFill/>
+          <a:ln w="19050">
+            <a:noFill/>
+          </a:ln>
+          <a:effectLst/>
+        </p:spPr>
+        <p:style>
+          <a:lnRef idx="1">
+            <a:schemeClr val="accent1"/>
+          </a:lnRef>
+          <a:fillRef idx="3">
+            <a:schemeClr val="accent1"/>
+          </a:fillRef>
+          <a:effectRef idx="0">
+            <a:schemeClr val="accent1"/>
+          </a:effectRef>
+          <a:fontRef idx="minor">
+            <a:schemeClr val="lt1"/>
+          </a:fontRef>
+        </p:style>
+        <p:txBody>
+          <a:bodyPr wrap="square" lIns="108000" tIns="72000" rIns="72000" bIns="36000" rtlCol="0" anchor="t"/>
+          <a:lstStyle/>
+          <a:p>
+            <a:pPr algn="l">
+              <a:lnSpc>
+                <a:spcPct val="130000"/>
+              </a:lnSpc>
+              <a:spcAft>
+                <a:spcPts val="400"/>
+              </a:spcAft>
+            </a:pPr>
+            <a:r>
+              <a:rPr sz="1300" b="0" dirty="0" err="1">
+                <a:solidFill>
+                  <a:srgbClr val="333333"/>
+                </a:solidFill>
+                <a:latin typeface="メイリオ"/>
+                <a:ea typeface="メイリオ"/>
+                <a:cs typeface="メイリオ"/>
+              </a:rPr>
+              <a:t>LINE経由の予約数</a:t>
+            </a:r>
+            <a:endParaRPr sz="1250" b="1" dirty="0">
+              <a:solidFill>
+                <a:srgbClr val="1F285A"/>
+              </a:solidFill>
+              <a:latin typeface="メイリオ"/>
+              <a:ea typeface="メイリオ"/>
+              <a:cs typeface="メイリオ"/>
+            </a:endParaRPr>
+          </a:p>
+          <a:p>
+            <a:pPr algn="l">
+              <a:lnSpc>
+                <a:spcPct val="130000"/>
+              </a:lnSpc>
+              <a:spcAft>
+                <a:spcPts val="200"/>
+              </a:spcAft>
+            </a:pPr>
+            <a:r>
+              <a:rPr sz="2200" b="1" dirty="0" err="1">
+                <a:solidFill>
+                  <a:srgbClr val="1F285A"/>
+                </a:solidFill>
+                <a:latin typeface="メイリオ"/>
+                <a:ea typeface="メイリオ"/>
+                <a:cs typeface="メイリオ"/>
+              </a:rPr>
+              <a:t>約20%増</a:t>
+            </a:r>
+            <a:endParaRPr sz="1250" b="1" dirty="0">
+              <a:solidFill>
+                <a:srgbClr val="1F285A"/>
+              </a:solidFill>
+              <a:latin typeface="メイリオ"/>
+              <a:ea typeface="メイリオ"/>
+              <a:cs typeface="メイリオ"/>
+            </a:endParaRPr>
+          </a:p>
+          <a:p>
+            <a:pPr algn="l">
+              <a:lnSpc>
+                <a:spcPct val="130000"/>
+              </a:lnSpc>
+              <a:spcAft>
+                <a:spcPts val="200"/>
+              </a:spcAft>
+            </a:pPr>
+            <a:r>
+              <a:rPr sz="1050" b="0" dirty="0" err="1">
+                <a:solidFill>
+                  <a:srgbClr val="7F7F7F"/>
+                </a:solidFill>
+                <a:latin typeface="メイリオ"/>
+                <a:ea typeface="メイリオ"/>
+                <a:cs typeface="メイリオ"/>
+              </a:rPr>
+              <a:t>ステップ配信実施前との比較</a:t>
+            </a:r>
+            <a:endParaRPr sz="1250" b="1" dirty="0">
+              <a:solidFill>
+                <a:srgbClr val="1F285A"/>
+              </a:solidFill>
+              <a:latin typeface="メイリオ"/>
+              <a:ea typeface="メイリオ"/>
+              <a:cs typeface="メイリオ"/>
+            </a:endParaRPr>
+          </a:p>
+        </p:txBody>
+      </p:sp>
+      <p:sp>
+        <p:nvSpPr>
+          <p:cNvPr id="17" name="Rounded Rectangle 12"/>
+          <p:cNvSpPr/>
+          <p:nvPr/>
+        </p:nvSpPr>
+        <p:spPr>
+          <a:xfrm>
+            <a:off x="4896000" y="2628000"/>
+            <a:ext cx="1763999" cy="1044000"/>
+          </a:xfrm>
+          <a:prstGeom prst="roundRect">
+            <a:avLst>
+              <a:gd name="adj" fmla="val 6000"/>
+            </a:avLst>
+          </a:prstGeom>
+          <a:noFill/>
+          <a:ln w="19050">
+            <a:noFill/>
+          </a:ln>
+          <a:effectLst/>
+        </p:spPr>
+        <p:style>
+          <a:lnRef idx="1">
+            <a:schemeClr val="accent1"/>
+          </a:lnRef>
+          <a:fillRef idx="3">
+            <a:schemeClr val="accent1"/>
+          </a:fillRef>
+          <a:effectRef idx="0">
+            <a:schemeClr val="accent1"/>
+          </a:effectRef>
+          <a:fontRef idx="minor">
+            <a:schemeClr val="lt1"/>
+          </a:fontRef>
+        </p:style>
+        <p:txBody>
+          <a:bodyPr wrap="square" lIns="108000" tIns="72000" rIns="72000" bIns="36000" rtlCol="0" anchor="t"/>
+          <a:lstStyle/>
+          <a:p>
+            <a:pPr algn="l">
+              <a:lnSpc>
+                <a:spcPct val="130000"/>
+              </a:lnSpc>
+              <a:spcAft>
+                <a:spcPts val="600"/>
+              </a:spcAft>
+            </a:pPr>
+            <a:r>
+              <a:rPr sz="1300" b="1" dirty="0" err="1">
+                <a:solidFill>
+                  <a:srgbClr val="333333"/>
+                </a:solidFill>
+                <a:latin typeface="メイリオ"/>
+                <a:ea typeface="メイリオ"/>
+                <a:cs typeface="メイリオ"/>
+              </a:rPr>
+              <a:t>就職支援</a:t>
+            </a:r>
+            <a:endParaRPr sz="1250" b="1" dirty="0">
+              <a:solidFill>
+                <a:srgbClr val="1F285A"/>
+              </a:solidFill>
+              <a:latin typeface="メイリオ"/>
+              <a:ea typeface="メイリオ"/>
+              <a:cs typeface="メイリオ"/>
+            </a:endParaRPr>
+          </a:p>
+          <a:p>
+            <a:pPr algn="l">
+              <a:lnSpc>
+                <a:spcPct val="130000"/>
+              </a:lnSpc>
+              <a:spcAft>
+                <a:spcPts val="0"/>
+              </a:spcAft>
+            </a:pPr>
+            <a:r>
+              <a:rPr sz="1150" b="0" dirty="0" err="1">
+                <a:solidFill>
+                  <a:srgbClr val="333333"/>
+                </a:solidFill>
+                <a:latin typeface="メイリオ"/>
+                <a:ea typeface="メイリオ"/>
+                <a:cs typeface="メイリオ"/>
+              </a:rPr>
+              <a:t>LINEチャットで面談へ誘導</a:t>
+            </a:r>
+            <a:endParaRPr sz="1250" b="1" dirty="0">
+              <a:solidFill>
+                <a:srgbClr val="1F285A"/>
+              </a:solidFill>
+              <a:latin typeface="メイリオ"/>
+              <a:ea typeface="メイリオ"/>
+              <a:cs typeface="メイリオ"/>
+            </a:endParaRPr>
+          </a:p>
+        </p:txBody>
+      </p:sp>
+      <p:sp>
+        <p:nvSpPr>
+          <p:cNvPr id="18" name="Rounded Rectangle 12"/>
+          <p:cNvSpPr/>
+          <p:nvPr/>
+        </p:nvSpPr>
+        <p:spPr>
+          <a:xfrm>
+            <a:off x="4896000" y="3707999"/>
+            <a:ext cx="1763999" cy="1800000"/>
+          </a:xfrm>
+          <a:prstGeom prst="roundRect">
+            <a:avLst>
+              <a:gd name="adj" fmla="val 6000"/>
+            </a:avLst>
+          </a:prstGeom>
+          <a:noFill/>
+          <a:ln w="19050">
+            <a:noFill/>
+          </a:ln>
+          <a:effectLst/>
+        </p:spPr>
+        <p:style>
+          <a:lnRef idx="1">
+            <a:schemeClr val="accent1"/>
+          </a:lnRef>
+          <a:fillRef idx="3">
+            <a:schemeClr val="accent1"/>
+          </a:fillRef>
+          <a:effectRef idx="0">
+            <a:schemeClr val="accent1"/>
+          </a:effectRef>
+          <a:fontRef idx="minor">
+            <a:schemeClr val="lt1"/>
+          </a:fontRef>
+        </p:style>
+        <p:txBody>
+          <a:bodyPr wrap="square" lIns="108000" tIns="72000" rIns="72000" bIns="36000" rtlCol="0" anchor="t"/>
+          <a:lstStyle/>
+          <a:p>
+            <a:pPr algn="l">
+              <a:lnSpc>
+                <a:spcPct val="130000"/>
+              </a:lnSpc>
+              <a:spcAft>
+                <a:spcPts val="400"/>
+              </a:spcAft>
+            </a:pPr>
+            <a:r>
+              <a:rPr sz="1300" b="0" dirty="0" err="1">
+                <a:solidFill>
+                  <a:srgbClr val="333333"/>
+                </a:solidFill>
+                <a:latin typeface="メイリオ"/>
+                <a:ea typeface="メイリオ"/>
+                <a:cs typeface="メイリオ"/>
+              </a:rPr>
+              <a:t>問い合わせた方の</a:t>
+            </a:r>
+            <a:endParaRPr sz="1250" b="1" dirty="0">
+              <a:solidFill>
+                <a:srgbClr val="1F285A"/>
+              </a:solidFill>
+              <a:latin typeface="メイリオ"/>
+              <a:ea typeface="メイリオ"/>
+              <a:cs typeface="メイリオ"/>
+            </a:endParaRPr>
+          </a:p>
+          <a:p>
+            <a:pPr algn="l">
+              <a:lnSpc>
+                <a:spcPct val="130000"/>
+              </a:lnSpc>
+              <a:spcAft>
+                <a:spcPts val="200"/>
+              </a:spcAft>
+            </a:pPr>
+            <a:r>
+              <a:rPr sz="2200" b="1" dirty="0" err="1">
+                <a:solidFill>
+                  <a:srgbClr val="1F285A"/>
+                </a:solidFill>
+                <a:latin typeface="メイリオ"/>
+                <a:ea typeface="メイリオ"/>
+                <a:cs typeface="メイリオ"/>
+              </a:rPr>
+              <a:t>55%</a:t>
+            </a:r>
+            <a:endParaRPr sz="1250" b="1" dirty="0">
+              <a:solidFill>
+                <a:srgbClr val="1F285A"/>
+              </a:solidFill>
+              <a:latin typeface="メイリオ"/>
+              <a:ea typeface="メイリオ"/>
+              <a:cs typeface="メイリオ"/>
+            </a:endParaRPr>
+          </a:p>
+          <a:p>
+            <a:pPr algn="l">
+              <a:lnSpc>
+                <a:spcPct val="130000"/>
+              </a:lnSpc>
+              <a:spcAft>
+                <a:spcPts val="200"/>
+              </a:spcAft>
+            </a:pPr>
+            <a:r>
+              <a:rPr sz="1050" b="0" dirty="0" err="1">
+                <a:solidFill>
+                  <a:srgbClr val="7F7F7F"/>
+                </a:solidFill>
+                <a:latin typeface="メイリオ"/>
+                <a:ea typeface="メイリオ"/>
+                <a:cs typeface="メイリオ"/>
+              </a:rPr>
+              <a:t>が面談予約（他チャネルより高い）</a:t>
+            </a:r>
+            <a:endParaRPr sz="1250" b="1" dirty="0">
+              <a:solidFill>
+                <a:srgbClr val="1F285A"/>
+              </a:solidFill>
+              <a:latin typeface="メイリオ"/>
+              <a:ea typeface="メイリオ"/>
+              <a:cs typeface="メイリオ"/>
+            </a:endParaRPr>
+          </a:p>
+        </p:txBody>
+      </p:sp>
+      <p:pic>
+        <p:nvPicPr>
+          <p:cNvPr id="19" name="Picture 13" descr="thanks_msg_s3.png"/>
+          <p:cNvPicPr>
+            <a:picLocks noChangeAspect="1"/>
+          </p:cNvPicPr>
+          <p:nvPr/>
+        </p:nvPicPr>
+        <p:blipFill>
+          <a:blip r:embed="rId3"/>
+          <a:stretch>
+            <a:fillRect/>
+          </a:stretch>
+        </p:blipFill>
+        <p:spPr>
+          <a:xfrm>
+            <a:off x="6876000" y="2628000"/>
+            <a:ext cx="1944000" cy="1621851"/>
+          </a:xfrm>
+          <a:prstGeom prst="rect">
+            <a:avLst/>
+          </a:prstGeom>
+          <a:ln w="12700">
+            <a:solidFill>
+              <a:srgbClr val="D9D9D9"/>
+            </a:solidFill>
+          </a:ln>
+        </p:spPr>
+      </p:pic>
+      <p:sp>
+        <p:nvSpPr>
+          <p:cNvPr id="20" name="Rounded Rectangle 4"/>
+          <p:cNvSpPr/>
+          <p:nvPr/>
+        </p:nvSpPr>
+        <p:spPr>
+          <a:xfrm>
+            <a:off x="1080000" y="5652000"/>
+            <a:ext cx="7740000" cy="432000"/>
+          </a:xfrm>
+          <a:prstGeom prst="roundRect">
+            <a:avLst>
+              <a:gd name="adj" fmla="val 10000"/>
+            </a:avLst>
+          </a:prstGeom>
+          <a:solidFill>
+            <a:srgbClr val="333333"/>
+          </a:solidFill>
+          <a:ln>
+            <a:noFill/>
+          </a:ln>
+          <a:effectLst/>
+        </p:spPr>
+        <p:style>
+          <a:lnRef idx="1">
+            <a:schemeClr val="accent1"/>
+          </a:lnRef>
+          <a:fillRef idx="3">
+            <a:schemeClr val="accent1"/>
+          </a:fillRef>
+          <a:effectRef idx="2">
+            <a:schemeClr val="accent1"/>
+          </a:effectRef>
+          <a:fontRef idx="minor">
+            <a:schemeClr val="lt1"/>
+          </a:fontRef>
+        </p:style>
+        <p:txBody>
+          <a:bodyPr wrap="square" lIns="54000" tIns="18000" rIns="54000" bIns="18000" rtlCol="0" anchor="ctr"/>
+          <a:lstStyle/>
+          <a:p>
+            <a:pPr algn="ctr">
+              <a:lnSpc>
+                <a:spcPct val="120000"/>
+              </a:lnSpc>
+            </a:pPr>
+            <a:r>
+              <a:rPr sz="1500" b="1">
+                <a:solidFill>
+                  <a:srgbClr val="FFFFFF"/>
+                </a:solidFill>
+                <a:latin typeface="メイリオ"/>
+                <a:ea typeface="メイリオ"/>
+                <a:cs typeface="メイリオ"/>
+              </a:rPr>
+              <a:t>申込み後の離脱を防ぎ、来店・面談・商談につなげる</a:t>
+            </a:r>
+          </a:p>
+        </p:txBody>
+      </p:sp>
+      <p:sp>
+        <p:nvSpPr>
+          <p:cNvPr id="21" name="TextBox 19"/>
+          <p:cNvSpPr txBox="1"/>
+          <p:nvPr/>
+        </p:nvSpPr>
+        <p:spPr>
+          <a:xfrm>
+            <a:off x="1080000" y="6156000"/>
+            <a:ext cx="7740000" cy="251999"/>
+          </a:xfrm>
+          <a:prstGeom prst="rect">
+            <a:avLst/>
+          </a:prstGeom>
+          <a:noFill/>
+        </p:spPr>
+        <p:txBody>
+          <a:bodyPr wrap="square" lIns="0" tIns="21600" rIns="0" bIns="21600" anchor="t">
+            <a:spAutoFit/>
+          </a:bodyPr>
+          <a:lstStyle/>
+          <a:p>
+            <a:pPr algn="l">
+              <a:lnSpc>
+                <a:spcPct val="115000"/>
+              </a:lnSpc>
+            </a:pPr>
+            <a:r>
+              <a:rPr sz="1000" b="0">
+                <a:solidFill>
+                  <a:srgbClr val="7F7F7F"/>
+                </a:solidFill>
+                <a:latin typeface="メイリオ"/>
+                <a:ea typeface="メイリオ"/>
+                <a:cs typeface="メイリオ"/>
+              </a:rPr>
+              <a:t>※美容室：リピート率も88% → 91%（導入前後の半年比較。LINEミニアプリを併用）</a:t>
+            </a:r>
+          </a:p>
+        </p:txBody>
+      </p:sp>
+    </p:spTree>
+    <p:extLst>
+      <p:ext uri="{BB962C8B-B14F-4D97-AF65-F5344CB8AC3E}">
+        <p14:creationId xmlns:p14="http://schemas.microsoft.com/office/powerpoint/2010/main" val="1715909323"/>
+      </p:ext>
+    </p:extLst>
+  </p:cSld>
+  <p:clrMapOvr>
+    <a:masterClrMapping/>
+  </p:clrMapOvr>
+</p:sld>
+</file>
+
+<file path=ppt/slides/slide4.xml><?xml version="1.0" encoding="utf-8"?>
+<p:sld xmlns:a="http://schemas.openxmlformats.org/drawingml/2006/main" xmlns:r="http://schemas.openxmlformats.org/officeDocument/2006/relationships" xmlns:p="http://schemas.openxmlformats.org/presentationml/2006/main">
+  <p:cSld>
+    <p:spTree>
+      <p:nvGrpSpPr>
+        <p:cNvPr id="1" name=""/>
+        <p:cNvGrpSpPr/>
+        <p:nvPr/>
+      </p:nvGrpSpPr>
+      <p:grpSpPr>
+        <a:xfrm>
+          <a:off x="0" y="0"/>
+          <a:ext cx="0" cy="0"/>
+          <a:chOff x="0" y="0"/>
+          <a:chExt cx="0" cy="0"/>
+        </a:xfrm>
+      </p:grpSpPr>
+      <p:sp>
+        <p:nvSpPr>
+          <p:cNvPr id="3" name="TextBox 1"/>
+          <p:cNvSpPr txBox="1"/>
+          <p:nvPr/>
+        </p:nvSpPr>
+        <p:spPr>
+          <a:xfrm>
+            <a:off x="547200" y="136800"/>
+            <a:ext cx="8784000" cy="338400"/>
+          </a:xfrm>
+          <a:prstGeom prst="rect">
+            <a:avLst/>
+          </a:prstGeom>
+          <a:noFill/>
+        </p:spPr>
+        <p:txBody>
+          <a:bodyPr wrap="square" lIns="0" tIns="21600" rIns="0" bIns="21600" anchor="ctr">
+            <a:spAutoFit/>
+          </a:bodyPr>
+          <a:lstStyle/>
+          <a:p>
+            <a:pPr algn="l"/>
+            <a:r>
+              <a:rPr sz="1600" b="1">
+                <a:solidFill>
+                  <a:srgbClr val="002060"/>
+                </a:solidFill>
+                <a:latin typeface="メイリオ"/>
+                <a:ea typeface="メイリオ"/>
+                <a:cs typeface="メイリオ"/>
+              </a:rPr>
+              <a:t>実例｜購入・来店の後</a:t>
+            </a:r>
+          </a:p>
+        </p:txBody>
+      </p:sp>
+      <p:sp>
+        <p:nvSpPr>
+          <p:cNvPr id="4" name="TextBox 2"/>
+          <p:cNvSpPr txBox="1"/>
+          <p:nvPr/>
+        </p:nvSpPr>
+        <p:spPr>
+          <a:xfrm>
+            <a:off x="432000" y="684000"/>
+            <a:ext cx="9036000" cy="432000"/>
+          </a:xfrm>
+          <a:prstGeom prst="rect">
+            <a:avLst/>
+          </a:prstGeom>
+          <a:noFill/>
+        </p:spPr>
+        <p:txBody>
+          <a:bodyPr wrap="square" lIns="0" tIns="21600" rIns="0" bIns="21600" anchor="ctr">
+            <a:spAutoFit/>
+          </a:bodyPr>
+          <a:lstStyle/>
+          <a:p>
+            <a:pPr algn="l">
+              <a:lnSpc>
+                <a:spcPct val="130000"/>
+              </a:lnSpc>
+            </a:pPr>
+            <a:r>
+              <a:rPr sz="1800" b="0" dirty="0" err="1">
+                <a:solidFill>
+                  <a:srgbClr val="333333"/>
+                </a:solidFill>
+                <a:latin typeface="メイリオ"/>
+                <a:ea typeface="メイリオ"/>
+                <a:cs typeface="メイリオ"/>
+              </a:rPr>
+              <a:t>来店・購入後のLINEフォローで、リピートを伸ばす</a:t>
+            </a:r>
+            <a:endParaRPr sz="1600" dirty="0">
+              <a:solidFill>
+                <a:srgbClr val="333333"/>
+              </a:solidFill>
+              <a:latin typeface="メイリオ"/>
+              <a:ea typeface="メイリオ"/>
+              <a:cs typeface="メイリオ"/>
+            </a:endParaRPr>
+          </a:p>
+          <a:p>
+            <a:pPr algn="l">
+              <a:lnSpc>
+                <a:spcPct val="130000"/>
+              </a:lnSpc>
+            </a:pPr>
+            <a:r>
+              <a:rPr sz="1800" b="0" dirty="0" err="1">
+                <a:solidFill>
+                  <a:srgbClr val="333333"/>
+                </a:solidFill>
+                <a:latin typeface="メイリオ"/>
+                <a:ea typeface="メイリオ"/>
+                <a:cs typeface="メイリオ"/>
+              </a:rPr>
+              <a:t>アンケート・クーポン・次回来店タイミングの配信で、再来店を後押し</a:t>
+            </a:r>
+            <a:endParaRPr sz="1600" dirty="0">
+              <a:solidFill>
+                <a:srgbClr val="333333"/>
+              </a:solidFill>
+              <a:latin typeface="メイリオ"/>
+              <a:ea typeface="メイリオ"/>
+              <a:cs typeface="メイリオ"/>
+            </a:endParaRPr>
+          </a:p>
+        </p:txBody>
+      </p:sp>
+      <p:cxnSp>
+        <p:nvCxnSpPr>
+          <p:cNvPr id="5" name="Connector 3"/>
+          <p:cNvCxnSpPr/>
+          <p:nvPr/>
+        </p:nvCxnSpPr>
+        <p:spPr>
+          <a:xfrm>
+            <a:off x="0" y="1389600"/>
+            <a:ext cx="9907200" cy="0"/>
+          </a:xfrm>
+          <a:prstGeom prst="line">
+            <a:avLst/>
+          </a:prstGeom>
+          <a:ln w="12700">
+            <a:solidFill>
+              <a:srgbClr val="D9D9D9"/>
+            </a:solidFill>
+          </a:ln>
+        </p:spPr>
+        <p:style>
+          <a:lnRef idx="2">
+            <a:schemeClr val="accent1"/>
+          </a:lnRef>
+          <a:fillRef idx="0">
+            <a:schemeClr val="accent1"/>
+          </a:fillRef>
+          <a:effectRef idx="1">
+            <a:schemeClr val="accent1"/>
+          </a:effectRef>
+          <a:fontRef idx="minor">
+            <a:schemeClr val="tx1"/>
+          </a:fontRef>
+        </p:style>
+      </p:cxnSp>
+      <p:sp>
+        <p:nvSpPr>
+          <p:cNvPr id="6" name="Rounded Rectangle 12"/>
+          <p:cNvSpPr/>
+          <p:nvPr/>
+        </p:nvSpPr>
+        <p:spPr>
+          <a:xfrm>
+            <a:off x="1080000" y="1728000"/>
+            <a:ext cx="1655999" cy="612000"/>
+          </a:xfrm>
+          <a:prstGeom prst="roundRect">
+            <a:avLst>
+              <a:gd name="adj" fmla="val 6000"/>
+            </a:avLst>
+          </a:prstGeom>
+          <a:solidFill>
+            <a:srgbClr val="FFFFFF"/>
+          </a:solidFill>
+          <a:ln w="19050">
+            <a:solidFill>
+              <a:srgbClr val="1F285A"/>
+            </a:solidFill>
+          </a:ln>
+          <a:effectLst/>
+        </p:spPr>
+        <p:style>
+          <a:lnRef idx="1">
+            <a:schemeClr val="accent1"/>
+          </a:lnRef>
+          <a:fillRef idx="3">
+            <a:schemeClr val="accent1"/>
+          </a:fillRef>
+          <a:effectRef idx="2">
+            <a:schemeClr val="accent1"/>
+          </a:effectRef>
+          <a:fontRef idx="minor">
+            <a:schemeClr val="lt1"/>
+          </a:fontRef>
+        </p:style>
+        <p:txBody>
+          <a:bodyPr wrap="square" lIns="125999" tIns="90000" rIns="108000" bIns="54000" rtlCol="0" anchor="ctr"/>
+          <a:lstStyle/>
+          <a:p>
+            <a:pPr algn="ctr">
+              <a:lnSpc>
+                <a:spcPct val="130000"/>
+              </a:lnSpc>
+              <a:spcAft>
+                <a:spcPts val="500"/>
+              </a:spcAft>
+            </a:pPr>
+            <a:r>
+              <a:rPr sz="1300" b="1" dirty="0" err="1">
+                <a:solidFill>
+                  <a:srgbClr val="1F285A"/>
+                </a:solidFill>
+                <a:latin typeface="メイリオ"/>
+                <a:ea typeface="メイリオ"/>
+                <a:cs typeface="メイリオ"/>
+              </a:rPr>
+              <a:t>購入・来店</a:t>
+            </a:r>
+            <a:endParaRPr sz="1250" b="1" dirty="0">
+              <a:solidFill>
+                <a:srgbClr val="1F285A"/>
+              </a:solidFill>
+              <a:latin typeface="メイリオ"/>
+              <a:ea typeface="メイリオ"/>
+              <a:cs typeface="メイリオ"/>
+            </a:endParaRPr>
+          </a:p>
+        </p:txBody>
+      </p:sp>
+      <p:sp>
+        <p:nvSpPr>
+          <p:cNvPr id="7" name="Right Arrow 5"/>
+          <p:cNvSpPr/>
+          <p:nvPr/>
+        </p:nvSpPr>
+        <p:spPr>
+          <a:xfrm>
+            <a:off x="2754000" y="1889999"/>
+            <a:ext cx="324000" cy="288000"/>
+          </a:xfrm>
+          <a:prstGeom prst="rightArrow">
+            <a:avLst/>
+          </a:prstGeom>
+          <a:solidFill>
+            <a:srgbClr val="1F285A"/>
+          </a:solidFill>
+          <a:ln>
+            <a:noFill/>
+          </a:ln>
+          <a:effectLst/>
+        </p:spPr>
+        <p:style>
+          <a:lnRef idx="1">
+            <a:schemeClr val="accent1"/>
+          </a:lnRef>
+          <a:fillRef idx="3">
+            <a:schemeClr val="accent1"/>
+          </a:fillRef>
+          <a:effectRef idx="2">
+            <a:schemeClr val="accent1"/>
+          </a:effectRef>
+          <a:fontRef idx="minor">
+            <a:schemeClr val="lt1"/>
+          </a:fontRef>
+        </p:style>
+        <p:txBody>
+          <a:bodyPr rtlCol="0" anchor="ctr"/>
+          <a:lstStyle/>
+          <a:p>
+            <a:pPr algn="ctr"/>
+            <a:endParaRPr>
+              <a:latin typeface="メイリオ"/>
+              <a:ea typeface="メイリオ"/>
+              <a:cs typeface="メイリオ"/>
+            </a:endParaRPr>
+          </a:p>
+        </p:txBody>
+      </p:sp>
+      <p:sp>
+        <p:nvSpPr>
+          <p:cNvPr id="8" name="Rounded Rectangle 4"/>
+          <p:cNvSpPr/>
+          <p:nvPr/>
+        </p:nvSpPr>
+        <p:spPr>
+          <a:xfrm>
+            <a:off x="3096000" y="1728000"/>
+            <a:ext cx="1655999" cy="612000"/>
+          </a:xfrm>
+          <a:prstGeom prst="roundRect">
+            <a:avLst>
+              <a:gd name="adj" fmla="val 10000"/>
+            </a:avLst>
+          </a:prstGeom>
+          <a:solidFill>
+            <a:srgbClr val="1F285A"/>
+          </a:solidFill>
+          <a:ln>
+            <a:noFill/>
+          </a:ln>
+          <a:effectLst/>
+        </p:spPr>
+        <p:style>
+          <a:lnRef idx="1">
+            <a:schemeClr val="accent1"/>
+          </a:lnRef>
+          <a:fillRef idx="3">
+            <a:schemeClr val="accent1"/>
+          </a:fillRef>
+          <a:effectRef idx="2">
+            <a:schemeClr val="accent1"/>
+          </a:effectRef>
+          <a:fontRef idx="minor">
+            <a:schemeClr val="lt1"/>
+          </a:fontRef>
+        </p:style>
+        <p:txBody>
+          <a:bodyPr wrap="square" lIns="54000" tIns="18000" rIns="54000" bIns="18000" rtlCol="0" anchor="ctr"/>
+          <a:lstStyle/>
+          <a:p>
+            <a:pPr algn="ctr">
+              <a:lnSpc>
+                <a:spcPct val="120000"/>
+              </a:lnSpc>
+            </a:pPr>
+            <a:r>
+              <a:rPr sz="1300" b="1">
+                <a:solidFill>
+                  <a:srgbClr val="FFFFFF"/>
+                </a:solidFill>
+                <a:latin typeface="メイリオ"/>
+                <a:ea typeface="メイリオ"/>
+                <a:cs typeface="メイリオ"/>
+              </a:rPr>
+              <a:t>翌日に</a:t>
+            </a:r>
+          </a:p>
+          <a:p>
+            <a:pPr algn="ctr">
+              <a:lnSpc>
+                <a:spcPct val="120000"/>
+              </a:lnSpc>
+            </a:pPr>
+            <a:r>
+              <a:rPr sz="1300" b="1">
+                <a:solidFill>
+                  <a:srgbClr val="FFFFFF"/>
+                </a:solidFill>
+                <a:latin typeface="メイリオ"/>
+                <a:ea typeface="メイリオ"/>
+                <a:cs typeface="メイリオ"/>
+              </a:rPr>
+              <a:t>アンケート</a:t>
+            </a:r>
+          </a:p>
+        </p:txBody>
+      </p:sp>
+      <p:sp>
+        <p:nvSpPr>
+          <p:cNvPr id="9" name="Right Arrow 5"/>
+          <p:cNvSpPr/>
+          <p:nvPr/>
+        </p:nvSpPr>
+        <p:spPr>
+          <a:xfrm>
+            <a:off x="4770000" y="1889999"/>
+            <a:ext cx="324000" cy="288000"/>
+          </a:xfrm>
+          <a:prstGeom prst="rightArrow">
+            <a:avLst/>
+          </a:prstGeom>
+          <a:solidFill>
+            <a:srgbClr val="1F285A"/>
+          </a:solidFill>
+          <a:ln>
+            <a:noFill/>
+          </a:ln>
+          <a:effectLst/>
+        </p:spPr>
+        <p:style>
+          <a:lnRef idx="1">
+            <a:schemeClr val="accent1"/>
+          </a:lnRef>
+          <a:fillRef idx="3">
+            <a:schemeClr val="accent1"/>
+          </a:fillRef>
+          <a:effectRef idx="2">
+            <a:schemeClr val="accent1"/>
+          </a:effectRef>
+          <a:fontRef idx="minor">
+            <a:schemeClr val="lt1"/>
+          </a:fontRef>
+        </p:style>
+        <p:txBody>
+          <a:bodyPr rtlCol="0" anchor="ctr"/>
+          <a:lstStyle/>
+          <a:p>
+            <a:pPr algn="ctr"/>
+            <a:endParaRPr>
+              <a:latin typeface="メイリオ"/>
+              <a:ea typeface="メイリオ"/>
+              <a:cs typeface="メイリオ"/>
+            </a:endParaRPr>
+          </a:p>
+        </p:txBody>
+      </p:sp>
+      <p:sp>
+        <p:nvSpPr>
+          <p:cNvPr id="10" name="Rounded Rectangle 4"/>
+          <p:cNvSpPr/>
+          <p:nvPr/>
+        </p:nvSpPr>
+        <p:spPr>
+          <a:xfrm>
+            <a:off x="5112000" y="1728000"/>
+            <a:ext cx="1655999" cy="612000"/>
+          </a:xfrm>
+          <a:prstGeom prst="roundRect">
+            <a:avLst>
+              <a:gd name="adj" fmla="val 10000"/>
+            </a:avLst>
+          </a:prstGeom>
+          <a:solidFill>
+            <a:srgbClr val="1F285A"/>
+          </a:solidFill>
+          <a:ln>
+            <a:noFill/>
+          </a:ln>
+          <a:effectLst/>
+        </p:spPr>
+        <p:style>
+          <a:lnRef idx="1">
+            <a:schemeClr val="accent1"/>
+          </a:lnRef>
+          <a:fillRef idx="3">
+            <a:schemeClr val="accent1"/>
+          </a:fillRef>
+          <a:effectRef idx="2">
+            <a:schemeClr val="accent1"/>
+          </a:effectRef>
+          <a:fontRef idx="minor">
+            <a:schemeClr val="lt1"/>
+          </a:fontRef>
+        </p:style>
+        <p:txBody>
+          <a:bodyPr wrap="square" lIns="54000" tIns="18000" rIns="54000" bIns="18000" rtlCol="0" anchor="ctr"/>
+          <a:lstStyle/>
+          <a:p>
+            <a:pPr algn="ctr">
+              <a:lnSpc>
+                <a:spcPct val="120000"/>
+              </a:lnSpc>
+            </a:pPr>
+            <a:r>
+              <a:rPr sz="1300" b="1">
+                <a:solidFill>
+                  <a:srgbClr val="FFFFFF"/>
+                </a:solidFill>
+                <a:latin typeface="メイリオ"/>
+                <a:ea typeface="メイリオ"/>
+                <a:cs typeface="メイリオ"/>
+              </a:rPr>
+              <a:t>適切なタイミングで</a:t>
+            </a:r>
+          </a:p>
+          <a:p>
+            <a:pPr algn="ctr">
+              <a:lnSpc>
+                <a:spcPct val="120000"/>
+              </a:lnSpc>
+            </a:pPr>
+            <a:r>
+              <a:rPr sz="1300" b="1">
+                <a:solidFill>
+                  <a:srgbClr val="FFFFFF"/>
+                </a:solidFill>
+                <a:latin typeface="メイリオ"/>
+                <a:ea typeface="メイリオ"/>
+                <a:cs typeface="メイリオ"/>
+              </a:rPr>
+              <a:t>クーポン・案内</a:t>
+            </a:r>
+          </a:p>
+        </p:txBody>
+      </p:sp>
+      <p:sp>
+        <p:nvSpPr>
+          <p:cNvPr id="11" name="Right Arrow 5"/>
+          <p:cNvSpPr/>
+          <p:nvPr/>
+        </p:nvSpPr>
+        <p:spPr>
+          <a:xfrm>
+            <a:off x="6785999" y="1889999"/>
+            <a:ext cx="324000" cy="288000"/>
+          </a:xfrm>
+          <a:prstGeom prst="rightArrow">
+            <a:avLst/>
+          </a:prstGeom>
+          <a:solidFill>
+            <a:srgbClr val="1F285A"/>
+          </a:solidFill>
+          <a:ln>
+            <a:noFill/>
+          </a:ln>
+          <a:effectLst/>
+        </p:spPr>
+        <p:style>
+          <a:lnRef idx="1">
+            <a:schemeClr val="accent1"/>
+          </a:lnRef>
+          <a:fillRef idx="3">
+            <a:schemeClr val="accent1"/>
+          </a:fillRef>
+          <a:effectRef idx="2">
+            <a:schemeClr val="accent1"/>
+          </a:effectRef>
+          <a:fontRef idx="minor">
+            <a:schemeClr val="lt1"/>
+          </a:fontRef>
+        </p:style>
+        <p:txBody>
+          <a:bodyPr rtlCol="0" anchor="ctr"/>
+          <a:lstStyle/>
+          <a:p>
+            <a:pPr algn="ctr"/>
+            <a:endParaRPr>
+              <a:latin typeface="メイリオ"/>
+              <a:ea typeface="メイリオ"/>
+              <a:cs typeface="メイリオ"/>
+            </a:endParaRPr>
+          </a:p>
+        </p:txBody>
+      </p:sp>
+      <p:sp>
+        <p:nvSpPr>
+          <p:cNvPr id="12" name="Rounded Rectangle 12"/>
+          <p:cNvSpPr/>
+          <p:nvPr/>
+        </p:nvSpPr>
+        <p:spPr>
+          <a:xfrm>
+            <a:off x="7127999" y="1728000"/>
+            <a:ext cx="1655999" cy="612000"/>
+          </a:xfrm>
+          <a:prstGeom prst="roundRect">
+            <a:avLst>
+              <a:gd name="adj" fmla="val 6000"/>
+            </a:avLst>
+          </a:prstGeom>
+          <a:solidFill>
+            <a:srgbClr val="FFFFFF"/>
+          </a:solidFill>
+          <a:ln w="19050">
+            <a:solidFill>
+              <a:srgbClr val="1F285A"/>
+            </a:solidFill>
+          </a:ln>
+          <a:effectLst/>
+        </p:spPr>
+        <p:style>
+          <a:lnRef idx="1">
+            <a:schemeClr val="accent1"/>
+          </a:lnRef>
+          <a:fillRef idx="3">
+            <a:schemeClr val="accent1"/>
+          </a:fillRef>
+          <a:effectRef idx="2">
+            <a:schemeClr val="accent1"/>
+          </a:effectRef>
+          <a:fontRef idx="minor">
+            <a:schemeClr val="lt1"/>
+          </a:fontRef>
+        </p:style>
+        <p:txBody>
+          <a:bodyPr wrap="square" lIns="125999" tIns="90000" rIns="108000" bIns="54000" rtlCol="0" anchor="ctr"/>
+          <a:lstStyle/>
+          <a:p>
+            <a:pPr algn="ctr">
+              <a:lnSpc>
+                <a:spcPct val="130000"/>
+              </a:lnSpc>
+              <a:spcAft>
+                <a:spcPts val="500"/>
+              </a:spcAft>
+            </a:pPr>
+            <a:r>
+              <a:rPr sz="1300" b="1" dirty="0" err="1">
+                <a:solidFill>
+                  <a:srgbClr val="1F285A"/>
+                </a:solidFill>
+                <a:latin typeface="メイリオ"/>
+                <a:ea typeface="メイリオ"/>
+                <a:cs typeface="メイリオ"/>
+              </a:rPr>
+              <a:t>再来店・</a:t>
+            </a:r>
+            <a:endParaRPr sz="1250" b="1" dirty="0">
+              <a:solidFill>
+                <a:srgbClr val="1F285A"/>
+              </a:solidFill>
+              <a:latin typeface="メイリオ"/>
+              <a:ea typeface="メイリオ"/>
+              <a:cs typeface="メイリオ"/>
+            </a:endParaRPr>
+          </a:p>
+          <a:p>
+            <a:pPr algn="ctr">
+              <a:lnSpc>
+                <a:spcPct val="130000"/>
+              </a:lnSpc>
+              <a:spcAft>
+                <a:spcPts val="500"/>
+              </a:spcAft>
+            </a:pPr>
+            <a:r>
+              <a:rPr sz="1300" b="1" dirty="0" err="1">
+                <a:solidFill>
+                  <a:srgbClr val="1F285A"/>
+                </a:solidFill>
+                <a:latin typeface="メイリオ"/>
+                <a:ea typeface="メイリオ"/>
+                <a:cs typeface="メイリオ"/>
+              </a:rPr>
+              <a:t>リピート</a:t>
+            </a:r>
+            <a:endParaRPr sz="1250" b="1" dirty="0">
+              <a:solidFill>
+                <a:srgbClr val="1F285A"/>
+              </a:solidFill>
+              <a:latin typeface="メイリオ"/>
+              <a:ea typeface="メイリオ"/>
+              <a:cs typeface="メイリオ"/>
+            </a:endParaRPr>
+          </a:p>
+        </p:txBody>
+      </p:sp>
+      <p:sp>
+        <p:nvSpPr>
+          <p:cNvPr id="13" name="Rounded Rectangle 12"/>
+          <p:cNvSpPr/>
+          <p:nvPr/>
+        </p:nvSpPr>
+        <p:spPr>
+          <a:xfrm>
+            <a:off x="1080000" y="2628000"/>
+            <a:ext cx="2718000" cy="1044000"/>
+          </a:xfrm>
+          <a:prstGeom prst="roundRect">
+            <a:avLst>
+              <a:gd name="adj" fmla="val 6000"/>
+            </a:avLst>
+          </a:prstGeom>
+          <a:noFill/>
+          <a:ln w="19050">
+            <a:noFill/>
+          </a:ln>
+          <a:effectLst/>
+        </p:spPr>
+        <p:style>
+          <a:lnRef idx="1">
+            <a:schemeClr val="accent1"/>
+          </a:lnRef>
+          <a:fillRef idx="3">
+            <a:schemeClr val="accent1"/>
+          </a:fillRef>
+          <a:effectRef idx="0">
+            <a:schemeClr val="accent1"/>
+          </a:effectRef>
+          <a:fontRef idx="minor">
+            <a:schemeClr val="lt1"/>
+          </a:fontRef>
+        </p:style>
+        <p:txBody>
+          <a:bodyPr wrap="square" lIns="180000" tIns="72000" rIns="180000" bIns="36000" rtlCol="0" anchor="t"/>
+          <a:lstStyle/>
+          <a:p>
+            <a:pPr algn="l">
+              <a:lnSpc>
+                <a:spcPct val="130000"/>
+              </a:lnSpc>
+              <a:spcAft>
+                <a:spcPts val="600"/>
+              </a:spcAft>
+            </a:pPr>
+            <a:r>
+              <a:rPr sz="1500" b="1" dirty="0" err="1">
+                <a:solidFill>
+                  <a:srgbClr val="333333"/>
+                </a:solidFill>
+                <a:latin typeface="メイリオ"/>
+                <a:ea typeface="メイリオ"/>
+                <a:cs typeface="メイリオ"/>
+              </a:rPr>
+              <a:t>居酒屋</a:t>
+            </a:r>
+            <a:endParaRPr sz="1250" b="1" dirty="0">
+              <a:solidFill>
+                <a:srgbClr val="1F285A"/>
+              </a:solidFill>
+              <a:latin typeface="メイリオ"/>
+              <a:ea typeface="メイリオ"/>
+              <a:cs typeface="メイリオ"/>
+            </a:endParaRPr>
+          </a:p>
+          <a:p>
+            <a:pPr algn="l">
+              <a:lnSpc>
+                <a:spcPct val="130000"/>
+              </a:lnSpc>
+              <a:spcAft>
+                <a:spcPts val="0"/>
+              </a:spcAft>
+            </a:pPr>
+            <a:r>
+              <a:rPr sz="1300" b="0" dirty="0" err="1">
+                <a:solidFill>
+                  <a:srgbClr val="333333"/>
+                </a:solidFill>
+                <a:latin typeface="メイリオ"/>
+                <a:ea typeface="メイリオ"/>
+                <a:cs typeface="メイリオ"/>
+              </a:rPr>
+              <a:t>来店翌日のアンケートと、再来店前のクーポンを配信</a:t>
+            </a:r>
+            <a:endParaRPr sz="1250" b="1" dirty="0">
+              <a:solidFill>
+                <a:srgbClr val="1F285A"/>
+              </a:solidFill>
+              <a:latin typeface="メイリオ"/>
+              <a:ea typeface="メイリオ"/>
+              <a:cs typeface="メイリオ"/>
+            </a:endParaRPr>
+          </a:p>
+        </p:txBody>
+      </p:sp>
+      <p:sp>
+        <p:nvSpPr>
+          <p:cNvPr id="14" name="Rounded Rectangle 12"/>
+          <p:cNvSpPr/>
+          <p:nvPr/>
+        </p:nvSpPr>
+        <p:spPr>
+          <a:xfrm>
+            <a:off x="1080000" y="3707999"/>
+            <a:ext cx="2718000" cy="1800000"/>
+          </a:xfrm>
+          <a:prstGeom prst="roundRect">
+            <a:avLst>
+              <a:gd name="adj" fmla="val 6000"/>
+            </a:avLst>
+          </a:prstGeom>
+          <a:noFill/>
+          <a:ln w="19050">
+            <a:noFill/>
+          </a:ln>
+          <a:effectLst/>
+        </p:spPr>
+        <p:style>
+          <a:lnRef idx="1">
+            <a:schemeClr val="accent1"/>
+          </a:lnRef>
+          <a:fillRef idx="3">
+            <a:schemeClr val="accent1"/>
+          </a:fillRef>
+          <a:effectRef idx="0">
+            <a:schemeClr val="accent1"/>
+          </a:effectRef>
+          <a:fontRef idx="minor">
+            <a:schemeClr val="lt1"/>
+          </a:fontRef>
+        </p:style>
+        <p:txBody>
+          <a:bodyPr wrap="square" lIns="180000" tIns="72000" rIns="180000" bIns="36000" rtlCol="0" anchor="t"/>
+          <a:lstStyle/>
+          <a:p>
+            <a:pPr algn="l">
+              <a:lnSpc>
+                <a:spcPct val="130000"/>
+              </a:lnSpc>
+              <a:spcAft>
+                <a:spcPts val="400"/>
+              </a:spcAft>
+            </a:pPr>
+            <a:r>
+              <a:rPr sz="1300" b="0" dirty="0" err="1">
+                <a:solidFill>
+                  <a:srgbClr val="333333"/>
+                </a:solidFill>
+                <a:latin typeface="メイリオ"/>
+                <a:ea typeface="メイリオ"/>
+                <a:cs typeface="メイリオ"/>
+              </a:rPr>
+              <a:t>リピーターの売上割合</a:t>
+            </a:r>
+            <a:endParaRPr sz="1250" b="1" dirty="0">
+              <a:solidFill>
+                <a:srgbClr val="1F285A"/>
+              </a:solidFill>
+              <a:latin typeface="メイリオ"/>
+              <a:ea typeface="メイリオ"/>
+              <a:cs typeface="メイリオ"/>
+            </a:endParaRPr>
+          </a:p>
+          <a:p>
+            <a:pPr algn="l">
+              <a:lnSpc>
+                <a:spcPct val="130000"/>
+              </a:lnSpc>
+              <a:spcAft>
+                <a:spcPts val="200"/>
+              </a:spcAft>
+            </a:pPr>
+            <a:r>
+              <a:rPr sz="2000" b="1" dirty="0" err="1">
+                <a:solidFill>
+                  <a:srgbClr val="1F285A"/>
+                </a:solidFill>
+                <a:latin typeface="メイリオ"/>
+                <a:ea typeface="メイリオ"/>
+                <a:cs typeface="メイリオ"/>
+              </a:rPr>
+              <a:t>7.6% → 12.9%</a:t>
+            </a:r>
+            <a:endParaRPr sz="1250" b="1" dirty="0">
+              <a:solidFill>
+                <a:srgbClr val="1F285A"/>
+              </a:solidFill>
+              <a:latin typeface="メイリオ"/>
+              <a:ea typeface="メイリオ"/>
+              <a:cs typeface="メイリオ"/>
+            </a:endParaRPr>
+          </a:p>
+          <a:p>
+            <a:pPr algn="l">
+              <a:lnSpc>
+                <a:spcPct val="130000"/>
+              </a:lnSpc>
+              <a:spcAft>
+                <a:spcPts val="200"/>
+              </a:spcAft>
+            </a:pPr>
+            <a:r>
+              <a:rPr sz="1050" b="0" dirty="0" err="1">
+                <a:solidFill>
+                  <a:srgbClr val="7F7F7F"/>
+                </a:solidFill>
+                <a:latin typeface="メイリオ"/>
+                <a:ea typeface="メイリオ"/>
+                <a:cs typeface="メイリオ"/>
+              </a:rPr>
+              <a:t>2025年1月と3月の比較</a:t>
+            </a:r>
+            <a:endParaRPr sz="1250" b="1" dirty="0">
+              <a:solidFill>
+                <a:srgbClr val="1F285A"/>
+              </a:solidFill>
+              <a:latin typeface="メイリオ"/>
+              <a:ea typeface="メイリオ"/>
+              <a:cs typeface="メイリオ"/>
+            </a:endParaRPr>
+          </a:p>
+        </p:txBody>
+      </p:sp>
+      <p:sp>
+        <p:nvSpPr>
+          <p:cNvPr id="15" name="Rounded Rectangle 12"/>
+          <p:cNvSpPr/>
+          <p:nvPr/>
+        </p:nvSpPr>
+        <p:spPr>
+          <a:xfrm>
+            <a:off x="3941999" y="2628000"/>
+            <a:ext cx="2718000" cy="1044000"/>
+          </a:xfrm>
+          <a:prstGeom prst="roundRect">
+            <a:avLst>
+              <a:gd name="adj" fmla="val 6000"/>
+            </a:avLst>
+          </a:prstGeom>
+          <a:noFill/>
+          <a:ln w="19050">
+            <a:noFill/>
+          </a:ln>
+          <a:effectLst/>
+        </p:spPr>
+        <p:style>
+          <a:lnRef idx="1">
+            <a:schemeClr val="accent1"/>
+          </a:lnRef>
+          <a:fillRef idx="3">
+            <a:schemeClr val="accent1"/>
+          </a:fillRef>
+          <a:effectRef idx="0">
+            <a:schemeClr val="accent1"/>
+          </a:effectRef>
+          <a:fontRef idx="minor">
+            <a:schemeClr val="lt1"/>
+          </a:fontRef>
+        </p:style>
+        <p:txBody>
+          <a:bodyPr wrap="square" lIns="180000" tIns="72000" rIns="180000" bIns="36000" rtlCol="0" anchor="t"/>
+          <a:lstStyle/>
+          <a:p>
+            <a:pPr algn="l">
+              <a:lnSpc>
+                <a:spcPct val="130000"/>
+              </a:lnSpc>
+              <a:spcAft>
+                <a:spcPts val="600"/>
+              </a:spcAft>
+            </a:pPr>
+            <a:r>
+              <a:rPr sz="1500" b="1" dirty="0" err="1">
+                <a:solidFill>
+                  <a:srgbClr val="333333"/>
+                </a:solidFill>
+                <a:latin typeface="メイリオ"/>
+                <a:ea typeface="メイリオ"/>
+                <a:cs typeface="メイリオ"/>
+              </a:rPr>
+              <a:t>焼肉店</a:t>
+            </a:r>
+            <a:endParaRPr sz="1250" b="1" dirty="0">
+              <a:solidFill>
+                <a:srgbClr val="1F285A"/>
+              </a:solidFill>
+              <a:latin typeface="メイリオ"/>
+              <a:ea typeface="メイリオ"/>
+              <a:cs typeface="メイリオ"/>
+            </a:endParaRPr>
+          </a:p>
+          <a:p>
+            <a:pPr algn="l">
+              <a:lnSpc>
+                <a:spcPct val="130000"/>
+              </a:lnSpc>
+              <a:spcAft>
+                <a:spcPts val="0"/>
+              </a:spcAft>
+            </a:pPr>
+            <a:r>
+              <a:rPr sz="1300" b="0" dirty="0" err="1">
+                <a:solidFill>
+                  <a:srgbClr val="333333"/>
+                </a:solidFill>
+                <a:latin typeface="メイリオ"/>
+                <a:ea typeface="メイリオ"/>
+                <a:cs typeface="メイリオ"/>
+              </a:rPr>
+              <a:t>来店翌日11時に、アンケートとクーポンを自動配信</a:t>
+            </a:r>
+            <a:endParaRPr sz="1250" b="1" dirty="0">
+              <a:solidFill>
+                <a:srgbClr val="1F285A"/>
+              </a:solidFill>
+              <a:latin typeface="メイリオ"/>
+              <a:ea typeface="メイリオ"/>
+              <a:cs typeface="メイリオ"/>
+            </a:endParaRPr>
+          </a:p>
+        </p:txBody>
+      </p:sp>
+      <p:sp>
+        <p:nvSpPr>
+          <p:cNvPr id="16" name="Rounded Rectangle 12"/>
+          <p:cNvSpPr/>
+          <p:nvPr/>
+        </p:nvSpPr>
+        <p:spPr>
+          <a:xfrm>
+            <a:off x="3941999" y="3707999"/>
+            <a:ext cx="2718000" cy="1800000"/>
+          </a:xfrm>
+          <a:prstGeom prst="roundRect">
+            <a:avLst>
+              <a:gd name="adj" fmla="val 6000"/>
+            </a:avLst>
+          </a:prstGeom>
+          <a:noFill/>
+          <a:ln w="19050">
+            <a:noFill/>
+          </a:ln>
+          <a:effectLst/>
+        </p:spPr>
+        <p:style>
+          <a:lnRef idx="1">
+            <a:schemeClr val="accent1"/>
+          </a:lnRef>
+          <a:fillRef idx="3">
+            <a:schemeClr val="accent1"/>
+          </a:fillRef>
+          <a:effectRef idx="0">
+            <a:schemeClr val="accent1"/>
+          </a:effectRef>
+          <a:fontRef idx="minor">
+            <a:schemeClr val="lt1"/>
+          </a:fontRef>
+        </p:style>
+        <p:txBody>
+          <a:bodyPr wrap="square" lIns="180000" tIns="72000" rIns="180000" bIns="36000" rtlCol="0" anchor="t"/>
+          <a:lstStyle/>
+          <a:p>
+            <a:pPr algn="l">
+              <a:lnSpc>
+                <a:spcPct val="130000"/>
+              </a:lnSpc>
+              <a:spcAft>
+                <a:spcPts val="400"/>
+              </a:spcAft>
+            </a:pPr>
+            <a:r>
+              <a:rPr sz="1300" b="0" dirty="0" err="1">
+                <a:solidFill>
+                  <a:srgbClr val="333333"/>
+                </a:solidFill>
+                <a:latin typeface="メイリオ"/>
+                <a:ea typeface="メイリオ"/>
+                <a:cs typeface="メイリオ"/>
+              </a:rPr>
+              <a:t>リピーター率</a:t>
+            </a:r>
+            <a:endParaRPr sz="1250" b="1" dirty="0">
+              <a:solidFill>
+                <a:srgbClr val="1F285A"/>
+              </a:solidFill>
+              <a:latin typeface="メイリオ"/>
+              <a:ea typeface="メイリオ"/>
+              <a:cs typeface="メイリオ"/>
+            </a:endParaRPr>
+          </a:p>
+          <a:p>
+            <a:pPr algn="l">
+              <a:lnSpc>
+                <a:spcPct val="130000"/>
+              </a:lnSpc>
+              <a:spcAft>
+                <a:spcPts val="200"/>
+              </a:spcAft>
+            </a:pPr>
+            <a:r>
+              <a:rPr sz="2000" b="1" dirty="0" err="1">
+                <a:solidFill>
+                  <a:srgbClr val="1F285A"/>
+                </a:solidFill>
+                <a:latin typeface="メイリオ"/>
+                <a:ea typeface="メイリオ"/>
+                <a:cs typeface="メイリオ"/>
+              </a:rPr>
+              <a:t>19.4% → 40%超</a:t>
+            </a:r>
+            <a:endParaRPr sz="1250" b="1" dirty="0">
+              <a:solidFill>
+                <a:srgbClr val="1F285A"/>
+              </a:solidFill>
+              <a:latin typeface="メイリオ"/>
+              <a:ea typeface="メイリオ"/>
+              <a:cs typeface="メイリオ"/>
+            </a:endParaRPr>
+          </a:p>
+          <a:p>
+            <a:pPr algn="l">
+              <a:lnSpc>
+                <a:spcPct val="130000"/>
+              </a:lnSpc>
+              <a:spcAft>
+                <a:spcPts val="200"/>
+              </a:spcAft>
+            </a:pPr>
+            <a:r>
+              <a:rPr sz="1050" b="0" dirty="0" err="1">
+                <a:solidFill>
+                  <a:srgbClr val="7F7F7F"/>
+                </a:solidFill>
+                <a:latin typeface="メイリオ"/>
+                <a:ea typeface="メイリオ"/>
+                <a:cs typeface="メイリオ"/>
+              </a:rPr>
+              <a:t>2024年1月と2025年1月の比較</a:t>
+            </a:r>
+            <a:endParaRPr sz="1250" b="1" dirty="0">
+              <a:solidFill>
+                <a:srgbClr val="1F285A"/>
+              </a:solidFill>
+              <a:latin typeface="メイリオ"/>
+              <a:ea typeface="メイリオ"/>
+              <a:cs typeface="メイリオ"/>
+            </a:endParaRPr>
+          </a:p>
+        </p:txBody>
+      </p:sp>
+      <p:pic>
+        <p:nvPicPr>
+          <p:cNvPr id="17" name="Picture 13" descr="thanks_msg_s4.png"/>
+          <p:cNvPicPr>
+            <a:picLocks noChangeAspect="1"/>
+          </p:cNvPicPr>
+          <p:nvPr/>
+        </p:nvPicPr>
+        <p:blipFill>
+          <a:blip r:embed="rId2"/>
+          <a:stretch>
+            <a:fillRect/>
+          </a:stretch>
+        </p:blipFill>
+        <p:spPr>
+          <a:xfrm>
+            <a:off x="6876000" y="2628000"/>
+            <a:ext cx="1944000" cy="2151940"/>
+          </a:xfrm>
+          <a:prstGeom prst="rect">
+            <a:avLst/>
+          </a:prstGeom>
+          <a:ln w="12700">
+            <a:solidFill>
+              <a:srgbClr val="D9D9D9"/>
+            </a:solidFill>
+          </a:ln>
+        </p:spPr>
+      </p:pic>
+      <p:sp>
+        <p:nvSpPr>
+          <p:cNvPr id="18" name="Rounded Rectangle 4"/>
+          <p:cNvSpPr/>
+          <p:nvPr/>
+        </p:nvSpPr>
+        <p:spPr>
+          <a:xfrm>
+            <a:off x="1080000" y="5652000"/>
+            <a:ext cx="7740000" cy="432000"/>
+          </a:xfrm>
+          <a:prstGeom prst="roundRect">
+            <a:avLst>
+              <a:gd name="adj" fmla="val 10000"/>
+            </a:avLst>
+          </a:prstGeom>
+          <a:solidFill>
+            <a:srgbClr val="333333"/>
+          </a:solidFill>
+          <a:ln>
+            <a:noFill/>
+          </a:ln>
+          <a:effectLst/>
+        </p:spPr>
+        <p:style>
+          <a:lnRef idx="1">
+            <a:schemeClr val="accent1"/>
+          </a:lnRef>
+          <a:fillRef idx="3">
+            <a:schemeClr val="accent1"/>
+          </a:fillRef>
+          <a:effectRef idx="2">
+            <a:schemeClr val="accent1"/>
+          </a:effectRef>
+          <a:fontRef idx="minor">
+            <a:schemeClr val="lt1"/>
+          </a:fontRef>
+        </p:style>
+        <p:txBody>
+          <a:bodyPr wrap="square" lIns="54000" tIns="18000" rIns="54000" bIns="18000" rtlCol="0" anchor="ctr"/>
+          <a:lstStyle/>
+          <a:p>
+            <a:pPr algn="ctr">
+              <a:lnSpc>
+                <a:spcPct val="120000"/>
+              </a:lnSpc>
+            </a:pPr>
+            <a:r>
+              <a:rPr sz="1500" b="1">
+                <a:solidFill>
+                  <a:srgbClr val="FFFFFF"/>
+                </a:solidFill>
+                <a:latin typeface="メイリオ"/>
+                <a:ea typeface="メイリオ"/>
+                <a:cs typeface="メイリオ"/>
+              </a:rPr>
+              <a:t>購入・来店の後も、LINEで次の来店につなげる</a:t>
+            </a:r>
+          </a:p>
+        </p:txBody>
+      </p:sp>
+      <p:sp>
+        <p:nvSpPr>
+          <p:cNvPr id="19" name="TextBox 19"/>
+          <p:cNvSpPr txBox="1"/>
+          <p:nvPr/>
+        </p:nvSpPr>
+        <p:spPr>
+          <a:xfrm>
+            <a:off x="1080000" y="6156000"/>
+            <a:ext cx="7740000" cy="251999"/>
+          </a:xfrm>
+          <a:prstGeom prst="rect">
+            <a:avLst/>
+          </a:prstGeom>
+          <a:noFill/>
+        </p:spPr>
+        <p:txBody>
+          <a:bodyPr wrap="square" lIns="0" tIns="21600" rIns="0" bIns="21600" anchor="t">
+            <a:spAutoFit/>
+          </a:bodyPr>
+          <a:lstStyle/>
+          <a:p>
+            <a:pPr algn="l">
+              <a:lnSpc>
+                <a:spcPct val="115000"/>
+              </a:lnSpc>
+            </a:pPr>
+            <a:r>
+              <a:rPr sz="1000" b="0">
+                <a:solidFill>
+                  <a:srgbClr val="7F7F7F"/>
+                </a:solidFill>
+                <a:latin typeface="メイリオ"/>
+                <a:ea typeface="メイリオ"/>
+                <a:cs typeface="メイリオ"/>
+              </a:rPr>
+              <a:t>※サンクスLINE単体の効果ではなく、LINEでつながった後の施策の例（居酒屋・焼肉店はLINEミニアプリを併用）</a:t>
+            </a:r>
           </a:p>
         </p:txBody>
       </p:sp>
